--- a/documents/명함제작/[2026 우리가치(WeValue) QI 활동 프로젝트 명함2(앞).pptx
+++ b/documents/명함제작/[2026 우리가치(WeValue) QI 활동 프로젝트 명함2(앞).pptx
@@ -2,7 +2,7 @@
 <file path=ppt/presentation.xml><?xml version="1.0" encoding="utf-8"?>
 <p:presentation xmlns:a="http://schemas.openxmlformats.org/drawingml/2006/main" xmlns:r="http://schemas.openxmlformats.org/officeDocument/2006/relationships" xmlns:p="http://schemas.openxmlformats.org/presentationml/2006/main" saveSubsetFonts="1">
   <p:sldMasterIdLst>
-    <p:sldMasterId id="2147483870" r:id="rId1"/>
+    <p:sldMasterId id="2147483883" r:id="rId1"/>
   </p:sldMasterIdLst>
   <p:notesMasterIdLst>
     <p:notesMasterId r:id="rId8"/>
@@ -15,8 +15,8 @@
     <p:sldId id="266" r:id="rId6"/>
     <p:sldId id="267" r:id="rId7"/>
   </p:sldIdLst>
-  <p:sldSz cx="3240088" cy="1800225"/>
-  <p:notesSz cx="9945688" cy="6858000"/>
+  <p:sldSz cx="3200400" cy="1800225"/>
+  <p:notesSz cx="6858000" cy="9945688"/>
   <p:defaultTextStyle>
     <a:defPPr>
       <a:defRPr lang="en-US"/>
@@ -130,17 +130,17 @@
             <a:srgbClr val="A4A3A4"/>
           </p15:clr>
         </p15:guide>
-        <p15:guide id="8" pos="1021" userDrawn="1">
+        <p15:guide id="8" pos="1008" userDrawn="1">
           <p15:clr>
             <a:srgbClr val="A4A3A4"/>
           </p15:clr>
         </p15:guide>
-        <p15:guide id="9" pos="132" userDrawn="1">
+        <p15:guide id="9" pos="131" userDrawn="1">
           <p15:clr>
             <a:srgbClr val="A4A3A4"/>
           </p15:clr>
         </p15:guide>
-        <p15:guide id="10" pos="1909" userDrawn="1">
+        <p15:guide id="10" pos="1887" userDrawn="1">
           <p15:clr>
             <a:srgbClr val="A4A3A4"/>
           </p15:clr>
@@ -185,8 +185,8 @@
         </p:nvSpPr>
         <p:spPr>
           <a:xfrm>
-            <a:off x="4" y="1"/>
-            <a:ext cx="4309798" cy="343722"/>
+            <a:off x="3" y="2"/>
+            <a:ext cx="2971800" cy="498476"/>
           </a:xfrm>
           <a:prstGeom prst="rect">
             <a:avLst/>
@@ -216,8 +216,8 @@
         </p:nvSpPr>
         <p:spPr>
           <a:xfrm>
-            <a:off x="5633596" y="1"/>
-            <a:ext cx="4309798" cy="343722"/>
+            <a:off x="3884618" y="2"/>
+            <a:ext cx="2971800" cy="498476"/>
           </a:xfrm>
           <a:prstGeom prst="rect">
             <a:avLst/>
@@ -233,7 +233,7 @@
           <a:p>
             <a:fld id="{F929F65E-AEE7-45C5-814B-4468CAF1E537}" type="datetimeFigureOut">
               <a:rPr lang="ko-KR" altLang="en-US" smtClean="0"/>
-              <a:t>2026-03-08</a:t>
+              <a:t>2026-03-15</a:t>
             </a:fld>
             <a:endParaRPr lang="ko-KR" altLang="en-US"/>
           </a:p>
@@ -251,8 +251,8 @@
         </p:nvSpPr>
         <p:spPr>
           <a:xfrm>
-            <a:off x="2889250" y="855663"/>
-            <a:ext cx="4167188" cy="2316162"/>
+            <a:off x="444500" y="1241425"/>
+            <a:ext cx="5969000" cy="3359150"/>
           </a:xfrm>
           <a:prstGeom prst="rect">
             <a:avLst/>
@@ -284,8 +284,8 @@
         </p:nvSpPr>
         <p:spPr>
           <a:xfrm>
-            <a:off x="994569" y="3300377"/>
-            <a:ext cx="7956550" cy="2700509"/>
+            <a:off x="685800" y="4786312"/>
+            <a:ext cx="5486400" cy="3916363"/>
           </a:xfrm>
           <a:prstGeom prst="rect">
             <a:avLst/>
@@ -343,8 +343,8 @@
         </p:nvSpPr>
         <p:spPr>
           <a:xfrm>
-            <a:off x="4" y="6514280"/>
-            <a:ext cx="4309798" cy="343722"/>
+            <a:off x="3" y="9447215"/>
+            <a:ext cx="2971800" cy="498476"/>
           </a:xfrm>
           <a:prstGeom prst="rect">
             <a:avLst/>
@@ -374,8 +374,8 @@
         </p:nvSpPr>
         <p:spPr>
           <a:xfrm>
-            <a:off x="5633596" y="6514280"/>
-            <a:ext cx="4309798" cy="343722"/>
+            <a:off x="3884618" y="9447215"/>
+            <a:ext cx="2971800" cy="498476"/>
           </a:xfrm>
           <a:prstGeom prst="rect">
             <a:avLst/>
@@ -529,8 +529,8 @@
         </p:nvSpPr>
         <p:spPr>
           <a:xfrm>
-            <a:off x="405011" y="294620"/>
-            <a:ext cx="2430066" cy="626745"/>
+            <a:off x="400051" y="294622"/>
+            <a:ext cx="2400300" cy="626745"/>
           </a:xfrm>
         </p:spPr>
         <p:txBody>
@@ -561,8 +561,8 @@
         </p:nvSpPr>
         <p:spPr>
           <a:xfrm>
-            <a:off x="405011" y="945535"/>
-            <a:ext cx="2430066" cy="434638"/>
+            <a:off x="400051" y="945535"/>
+            <a:ext cx="2400300" cy="434638"/>
           </a:xfrm>
         </p:spPr>
         <p:txBody>
@@ -570,37 +570,37 @@
           <a:lstStyle>
             <a:lvl1pPr marL="0" indent="0" algn="ctr">
               <a:buNone/>
-              <a:defRPr sz="630"/>
+              <a:defRPr sz="629"/>
             </a:lvl1pPr>
-            <a:lvl2pPr marL="120015" indent="0" algn="ctr">
+            <a:lvl2pPr marL="120012" indent="0" algn="ctr">
               <a:buNone/>
               <a:defRPr sz="525"/>
             </a:lvl2pPr>
-            <a:lvl3pPr marL="240030" indent="0" algn="ctr">
+            <a:lvl3pPr marL="240025" indent="0" algn="ctr">
               <a:buNone/>
               <a:defRPr sz="472"/>
             </a:lvl3pPr>
-            <a:lvl4pPr marL="360045" indent="0" algn="ctr">
+            <a:lvl4pPr marL="360036" indent="0" algn="ctr">
               <a:buNone/>
               <a:defRPr sz="420"/>
             </a:lvl4pPr>
-            <a:lvl5pPr marL="480060" indent="0" algn="ctr">
+            <a:lvl5pPr marL="480048" indent="0" algn="ctr">
               <a:buNone/>
               <a:defRPr sz="420"/>
             </a:lvl5pPr>
-            <a:lvl6pPr marL="600075" indent="0" algn="ctr">
+            <a:lvl6pPr marL="600060" indent="0" algn="ctr">
               <a:buNone/>
               <a:defRPr sz="420"/>
             </a:lvl6pPr>
-            <a:lvl7pPr marL="720090" indent="0" algn="ctr">
+            <a:lvl7pPr marL="720073" indent="0" algn="ctr">
               <a:buNone/>
               <a:defRPr sz="420"/>
             </a:lvl7pPr>
-            <a:lvl8pPr marL="840105" indent="0" algn="ctr">
+            <a:lvl8pPr marL="840084" indent="0" algn="ctr">
               <a:buNone/>
               <a:defRPr sz="420"/>
             </a:lvl8pPr>
-            <a:lvl9pPr marL="960120" indent="0" algn="ctr">
+            <a:lvl9pPr marL="960096" indent="0" algn="ctr">
               <a:buNone/>
               <a:defRPr sz="420"/>
             </a:lvl9pPr>
@@ -631,7 +631,7 @@
           <a:p>
             <a:fld id="{149F34B4-7175-41BD-B98B-2E7021201D7D}" type="datetimeFigureOut">
               <a:rPr lang="ko-KR" altLang="en-US" smtClean="0"/>
-              <a:t>2026-03-08</a:t>
+              <a:t>2026-03-15</a:t>
             </a:fld>
             <a:endParaRPr lang="ko-KR" altLang="en-US"/>
           </a:p>
@@ -682,7 +682,7 @@
     </p:spTree>
     <p:extLst>
       <p:ext uri="{BB962C8B-B14F-4D97-AF65-F5344CB8AC3E}">
-        <p14:creationId xmlns:p14="http://schemas.microsoft.com/office/powerpoint/2010/main" val="3453375835"/>
+        <p14:creationId xmlns:p14="http://schemas.microsoft.com/office/powerpoint/2010/main" val="2109556029"/>
       </p:ext>
     </p:extLst>
   </p:cSld>
@@ -750,35 +750,35 @@
             <a:pPr lvl="0"/>
             <a:r>
               <a:rPr lang="ko-KR" altLang="en-US"/>
-              <a:t>마스터 텍스트 스타일을 편집하려면 클릭</a:t>
+              <a:t>마스터 텍스트 스타일 편집</a:t>
             </a:r>
           </a:p>
           <a:p>
             <a:pPr lvl="1"/>
             <a:r>
               <a:rPr lang="ko-KR" altLang="en-US"/>
-              <a:t>두 번째 수준</a:t>
+              <a:t>둘째 수준</a:t>
             </a:r>
           </a:p>
           <a:p>
             <a:pPr lvl="2"/>
             <a:r>
               <a:rPr lang="ko-KR" altLang="en-US"/>
-              <a:t>세 번째 수준</a:t>
+              <a:t>셋째 수준</a:t>
             </a:r>
           </a:p>
           <a:p>
             <a:pPr lvl="3"/>
             <a:r>
               <a:rPr lang="ko-KR" altLang="en-US"/>
-              <a:t>네 번째 수준</a:t>
+              <a:t>넷째 수준</a:t>
             </a:r>
           </a:p>
           <a:p>
             <a:pPr lvl="4"/>
             <a:r>
               <a:rPr lang="ko-KR" altLang="en-US"/>
-              <a:t>다섯 번째 수준</a:t>
+              <a:t>다섯째 수준</a:t>
             </a:r>
             <a:endParaRPr lang="en-US" dirty="0"/>
           </a:p>
@@ -801,7 +801,7 @@
           <a:p>
             <a:fld id="{149F34B4-7175-41BD-B98B-2E7021201D7D}" type="datetimeFigureOut">
               <a:rPr lang="ko-KR" altLang="en-US" smtClean="0"/>
-              <a:t>2026-03-08</a:t>
+              <a:t>2026-03-15</a:t>
             </a:fld>
             <a:endParaRPr lang="ko-KR" altLang="en-US"/>
           </a:p>
@@ -852,7 +852,7 @@
     </p:spTree>
     <p:extLst>
       <p:ext uri="{BB962C8B-B14F-4D97-AF65-F5344CB8AC3E}">
-        <p14:creationId xmlns:p14="http://schemas.microsoft.com/office/powerpoint/2010/main" val="3250027929"/>
+        <p14:creationId xmlns:p14="http://schemas.microsoft.com/office/powerpoint/2010/main" val="3539607565"/>
       </p:ext>
     </p:extLst>
   </p:cSld>
@@ -891,8 +891,8 @@
         </p:nvSpPr>
         <p:spPr>
           <a:xfrm>
-            <a:off x="2318688" y="95846"/>
-            <a:ext cx="698644" cy="1525607"/>
+            <a:off x="2290286" y="95848"/>
+            <a:ext cx="690087" cy="1525607"/>
           </a:xfrm>
         </p:spPr>
         <p:txBody>
@@ -919,8 +919,8 @@
         </p:nvSpPr>
         <p:spPr>
           <a:xfrm>
-            <a:off x="222756" y="95846"/>
-            <a:ext cx="2055431" cy="1525607"/>
+            <a:off x="220027" y="95848"/>
+            <a:ext cx="2030255" cy="1525607"/>
           </a:xfrm>
         </p:spPr>
         <p:txBody>
@@ -930,35 +930,35 @@
             <a:pPr lvl="0"/>
             <a:r>
               <a:rPr lang="ko-KR" altLang="en-US"/>
-              <a:t>마스터 텍스트 스타일을 편집하려면 클릭</a:t>
+              <a:t>마스터 텍스트 스타일 편집</a:t>
             </a:r>
           </a:p>
           <a:p>
             <a:pPr lvl="1"/>
             <a:r>
               <a:rPr lang="ko-KR" altLang="en-US"/>
-              <a:t>두 번째 수준</a:t>
+              <a:t>둘째 수준</a:t>
             </a:r>
           </a:p>
           <a:p>
             <a:pPr lvl="2"/>
             <a:r>
               <a:rPr lang="ko-KR" altLang="en-US"/>
-              <a:t>세 번째 수준</a:t>
+              <a:t>셋째 수준</a:t>
             </a:r>
           </a:p>
           <a:p>
             <a:pPr lvl="3"/>
             <a:r>
               <a:rPr lang="ko-KR" altLang="en-US"/>
-              <a:t>네 번째 수준</a:t>
+              <a:t>넷째 수준</a:t>
             </a:r>
           </a:p>
           <a:p>
             <a:pPr lvl="4"/>
             <a:r>
               <a:rPr lang="ko-KR" altLang="en-US"/>
-              <a:t>다섯 번째 수준</a:t>
+              <a:t>다섯째 수준</a:t>
             </a:r>
             <a:endParaRPr lang="en-US" dirty="0"/>
           </a:p>
@@ -981,7 +981,7 @@
           <a:p>
             <a:fld id="{149F34B4-7175-41BD-B98B-2E7021201D7D}" type="datetimeFigureOut">
               <a:rPr lang="ko-KR" altLang="en-US" smtClean="0"/>
-              <a:t>2026-03-08</a:t>
+              <a:t>2026-03-15</a:t>
             </a:fld>
             <a:endParaRPr lang="ko-KR" altLang="en-US"/>
           </a:p>
@@ -1032,7 +1032,7 @@
     </p:spTree>
     <p:extLst>
       <p:ext uri="{BB962C8B-B14F-4D97-AF65-F5344CB8AC3E}">
-        <p14:creationId xmlns:p14="http://schemas.microsoft.com/office/powerpoint/2010/main" val="3315396022"/>
+        <p14:creationId xmlns:p14="http://schemas.microsoft.com/office/powerpoint/2010/main" val="3065570235"/>
       </p:ext>
     </p:extLst>
   </p:cSld>
@@ -1073,8 +1073,8 @@
         </p:nvSpPr>
         <p:spPr>
           <a:xfrm>
-            <a:off x="1" y="0"/>
-            <a:ext cx="3246839" cy="1800225"/>
+            <a:off x="3" y="1"/>
+            <a:ext cx="3207068" cy="1800225"/>
           </a:xfrm>
           <a:prstGeom prst="rect">
             <a:avLst/>
@@ -1109,7 +1109,7 @@
           <a:lstStyle/>
           <a:p>
             <a:pPr algn="ctr"/>
-            <a:endParaRPr lang="ko-KR" altLang="en-US" sz="119" dirty="0"/>
+            <a:endParaRPr lang="ko-KR" altLang="en-US" sz="133" dirty="0"/>
           </a:p>
         </p:txBody>
       </p:sp>
@@ -1127,8 +1127,8 @@
         </p:nvSpPr>
         <p:spPr>
           <a:xfrm>
-            <a:off x="29909" y="30482"/>
-            <a:ext cx="3182265" cy="1728467"/>
+            <a:off x="29544" y="30485"/>
+            <a:ext cx="3143285" cy="1728467"/>
           </a:xfrm>
           <a:prstGeom prst="rect">
             <a:avLst/>
@@ -1161,7 +1161,7 @@
           <a:lstStyle/>
           <a:p>
             <a:pPr algn="ctr"/>
-            <a:endParaRPr lang="ko-KR" altLang="en-US" sz="119"/>
+            <a:endParaRPr lang="ko-KR" altLang="en-US" sz="133"/>
           </a:p>
         </p:txBody>
       </p:sp>
@@ -1187,8 +1187,8 @@
         </p:blipFill>
         <p:spPr>
           <a:xfrm>
-            <a:off x="2790825" y="81588"/>
-            <a:ext cx="363162" cy="203042"/>
+            <a:off x="2756640" y="81588"/>
+            <a:ext cx="358715" cy="203042"/>
           </a:xfrm>
           <a:prstGeom prst="rect">
             <a:avLst/>
@@ -1214,8 +1214,8 @@
         </p:nvSpPr>
         <p:spPr>
           <a:xfrm>
-            <a:off x="2098273" y="1569905"/>
-            <a:ext cx="1141815" cy="169277"/>
+            <a:off x="2072572" y="1569908"/>
+            <a:ext cx="1127829" cy="169277"/>
           </a:xfrm>
           <a:prstGeom prst="rect">
             <a:avLst/>
@@ -1252,22 +1252,22 @@
     </p:spTree>
     <p:extLst>
       <p:ext uri="{BB962C8B-B14F-4D97-AF65-F5344CB8AC3E}">
-        <p14:creationId xmlns:p14="http://schemas.microsoft.com/office/powerpoint/2010/main" val="2744513500"/>
+        <p14:creationId xmlns:p14="http://schemas.microsoft.com/office/powerpoint/2010/main" val="1244911523"/>
       </p:ext>
     </p:extLst>
   </p:cSld>
   <p:clrMapOvr>
     <a:masterClrMapping/>
   </p:clrMapOvr>
-  <p:extLst>
+  <p:extLst mod="1">
     <p:ext uri="{DCECCB84-F9BA-43D5-87BE-67443E8EF086}">
       <p15:sldGuideLst xmlns:p15="http://schemas.microsoft.com/office/powerpoint/2012/main">
-        <p15:guide id="1" orient="horz" pos="567">
+        <p15:guide id="1" orient="horz" pos="567" userDrawn="1">
           <p15:clr>
             <a:srgbClr val="FBAE40"/>
           </p15:clr>
         </p15:guide>
-        <p15:guide id="2" pos="1021">
+        <p15:guide id="2" pos="1008" userDrawn="1">
           <p15:clr>
             <a:srgbClr val="FBAE40"/>
           </p15:clr>
@@ -1309,8 +1309,8 @@
         </p:nvSpPr>
         <p:spPr>
           <a:xfrm>
-            <a:off x="1" y="0"/>
-            <a:ext cx="3246839" cy="1800225"/>
+            <a:off x="3" y="1"/>
+            <a:ext cx="3207068" cy="1800225"/>
           </a:xfrm>
           <a:prstGeom prst="rect">
             <a:avLst/>
@@ -1345,7 +1345,7 @@
           <a:lstStyle/>
           <a:p>
             <a:pPr algn="ctr"/>
-            <a:endParaRPr lang="ko-KR" altLang="en-US" sz="119" dirty="0"/>
+            <a:endParaRPr lang="ko-KR" altLang="en-US" sz="133" dirty="0"/>
           </a:p>
         </p:txBody>
       </p:sp>
@@ -1363,8 +1363,8 @@
         </p:nvSpPr>
         <p:spPr>
           <a:xfrm>
-            <a:off x="45477" y="17494"/>
-            <a:ext cx="3154111" cy="1764512"/>
+            <a:off x="44923" y="17494"/>
+            <a:ext cx="3115476" cy="1764512"/>
           </a:xfrm>
           <a:prstGeom prst="rect">
             <a:avLst/>
@@ -1397,7 +1397,7 @@
           <a:lstStyle/>
           <a:p>
             <a:pPr algn="ctr"/>
-            <a:endParaRPr lang="ko-KR" altLang="en-US" sz="119"/>
+            <a:endParaRPr lang="ko-KR" altLang="en-US" sz="133"/>
           </a:p>
         </p:txBody>
       </p:sp>
@@ -1423,8 +1423,8 @@
         </p:blipFill>
         <p:spPr>
           <a:xfrm>
-            <a:off x="2829499" y="29235"/>
-            <a:ext cx="324488" cy="75610"/>
+            <a:off x="2794842" y="29235"/>
+            <a:ext cx="320513" cy="75610"/>
           </a:xfrm>
           <a:prstGeom prst="rect">
             <a:avLst/>
@@ -1450,8 +1450,8 @@
         </p:nvSpPr>
         <p:spPr>
           <a:xfrm>
-            <a:off x="2890773" y="1686920"/>
-            <a:ext cx="263214" cy="123111"/>
+            <a:off x="2829701" y="1686924"/>
+            <a:ext cx="285655" cy="133242"/>
           </a:xfrm>
           <a:prstGeom prst="rect">
             <a:avLst/>
@@ -1466,7 +1466,7 @@
           <a:p>
             <a:pPr algn="r"/>
             <a:r>
-              <a:rPr lang="ko-KR" altLang="en-US" sz="100" b="1" dirty="0">
+              <a:rPr lang="ko-KR" altLang="en-US" sz="133" b="1" dirty="0">
                 <a:solidFill>
                   <a:srgbClr val="4472C4"/>
                 </a:solidFill>
@@ -1475,7 +1475,7 @@
               </a:rPr>
               <a:t>진료지원간호팀</a:t>
             </a:r>
-            <a:endParaRPr lang="en-US" altLang="ko-KR" sz="100" b="1" dirty="0">
+            <a:endParaRPr lang="en-US" altLang="ko-KR" sz="133" b="1" dirty="0">
               <a:solidFill>
                 <a:srgbClr val="4472C4"/>
               </a:solidFill>
@@ -1486,7 +1486,7 @@
           <a:p>
             <a:pPr algn="r"/>
             <a:r>
-              <a:rPr lang="ko-KR" altLang="en-US" sz="100" b="1" dirty="0">
+              <a:rPr lang="ko-KR" altLang="en-US" sz="133" b="1" dirty="0">
                 <a:solidFill>
                   <a:srgbClr val="4472C4"/>
                 </a:solidFill>
@@ -1508,7 +1508,7 @@
   <p:clrMapOvr>
     <a:masterClrMapping/>
   </p:clrMapOvr>
-  <p:extLst>
+  <p:extLst mod="1">
     <p:ext uri="{DCECCB84-F9BA-43D5-87BE-67443E8EF086}">
       <p15:sldGuideLst xmlns:p15="http://schemas.microsoft.com/office/powerpoint/2012/main">
         <p15:guide id="1" orient="horz" pos="567" userDrawn="1">
@@ -1516,7 +1516,7 @@
             <a:srgbClr val="FBAE40"/>
           </p15:clr>
         </p15:guide>
-        <p15:guide id="2" pos="1021" userDrawn="1">
+        <p15:guide id="2" pos="1008" userDrawn="1">
           <p15:clr>
             <a:srgbClr val="FBAE40"/>
           </p15:clr>
@@ -1558,8 +1558,8 @@
         </p:nvSpPr>
         <p:spPr>
           <a:xfrm>
-            <a:off x="1" y="0"/>
-            <a:ext cx="3246839" cy="1800225"/>
+            <a:off x="3" y="1"/>
+            <a:ext cx="3207068" cy="1800225"/>
           </a:xfrm>
           <a:prstGeom prst="rect">
             <a:avLst/>
@@ -1594,7 +1594,7 @@
           <a:lstStyle/>
           <a:p>
             <a:pPr algn="ctr"/>
-            <a:endParaRPr lang="ko-KR" altLang="en-US" sz="119" dirty="0"/>
+            <a:endParaRPr lang="ko-KR" altLang="en-US" sz="133" dirty="0"/>
           </a:p>
         </p:txBody>
       </p:sp>
@@ -1612,8 +1612,8 @@
         </p:nvSpPr>
         <p:spPr>
           <a:xfrm>
-            <a:off x="45477" y="17494"/>
-            <a:ext cx="3154111" cy="1764512"/>
+            <a:off x="44923" y="17494"/>
+            <a:ext cx="3115476" cy="1764512"/>
           </a:xfrm>
           <a:prstGeom prst="rect">
             <a:avLst/>
@@ -1646,7 +1646,7 @@
           <a:lstStyle/>
           <a:p>
             <a:pPr algn="ctr"/>
-            <a:endParaRPr lang="ko-KR" altLang="en-US" sz="119" dirty="0"/>
+            <a:endParaRPr lang="ko-KR" altLang="en-US" sz="133" dirty="0"/>
           </a:p>
         </p:txBody>
       </p:sp>
@@ -1672,8 +1672,8 @@
         </p:blipFill>
         <p:spPr>
           <a:xfrm>
-            <a:off x="2827923" y="29235"/>
-            <a:ext cx="324488" cy="75610"/>
+            <a:off x="2793286" y="29235"/>
+            <a:ext cx="320513" cy="75610"/>
           </a:xfrm>
           <a:prstGeom prst="rect">
             <a:avLst/>
@@ -1699,8 +1699,8 @@
         </p:nvSpPr>
         <p:spPr>
           <a:xfrm>
-            <a:off x="2863523" y="1707219"/>
-            <a:ext cx="290464" cy="107722"/>
+            <a:off x="2796038" y="1707219"/>
+            <a:ext cx="319318" cy="112788"/>
           </a:xfrm>
           <a:prstGeom prst="rect">
             <a:avLst/>
@@ -1715,7 +1715,7 @@
           <a:p>
             <a:pPr algn="r"/>
             <a:r>
-              <a:rPr lang="ko-KR" altLang="en-US" sz="100" b="1" dirty="0">
+              <a:rPr lang="ko-KR" altLang="en-US" sz="133" b="1" dirty="0">
                 <a:solidFill>
                   <a:srgbClr val="4472C4"/>
                 </a:solidFill>
@@ -1725,7 +1725,7 @@
               <a:t>이비인후과 </a:t>
             </a:r>
             <a:r>
-              <a:rPr lang="en-US" altLang="ko-KR" sz="100" b="1" dirty="0">
+              <a:rPr lang="en-US" altLang="ko-KR" sz="133" b="1" dirty="0">
                 <a:solidFill>
                   <a:srgbClr val="4472C4"/>
                 </a:solidFill>
@@ -1735,7 +1735,7 @@
               <a:t>131</a:t>
             </a:r>
             <a:r>
-              <a:rPr lang="ko-KR" altLang="en-US" sz="100" b="1" dirty="0">
+              <a:rPr lang="ko-KR" altLang="en-US" sz="133" b="1" dirty="0">
                 <a:solidFill>
                   <a:srgbClr val="4472C4"/>
                 </a:solidFill>
@@ -1757,7 +1757,7 @@
   <p:clrMapOvr>
     <a:masterClrMapping/>
   </p:clrMapOvr>
-  <p:extLst>
+  <p:extLst mod="1">
     <p:ext uri="{DCECCB84-F9BA-43D5-87BE-67443E8EF086}">
       <p15:sldGuideLst xmlns:p15="http://schemas.microsoft.com/office/powerpoint/2012/main">
         <p15:guide id="1" orient="horz" pos="567" userDrawn="1">
@@ -1765,7 +1765,7 @@
             <a:srgbClr val="FBAE40"/>
           </p15:clr>
         </p15:guide>
-        <p15:guide id="2" pos="1021" userDrawn="1">
+        <p15:guide id="2" pos="1008" userDrawn="1">
           <p15:clr>
             <a:srgbClr val="FBAE40"/>
           </p15:clr>
@@ -1839,35 +1839,35 @@
             <a:pPr lvl="0"/>
             <a:r>
               <a:rPr lang="ko-KR" altLang="en-US"/>
-              <a:t>마스터 텍스트 스타일을 편집하려면 클릭</a:t>
+              <a:t>마스터 텍스트 스타일 편집</a:t>
             </a:r>
           </a:p>
           <a:p>
             <a:pPr lvl="1"/>
             <a:r>
               <a:rPr lang="ko-KR" altLang="en-US"/>
-              <a:t>두 번째 수준</a:t>
+              <a:t>둘째 수준</a:t>
             </a:r>
           </a:p>
           <a:p>
             <a:pPr lvl="2"/>
             <a:r>
               <a:rPr lang="ko-KR" altLang="en-US"/>
-              <a:t>세 번째 수준</a:t>
+              <a:t>셋째 수준</a:t>
             </a:r>
           </a:p>
           <a:p>
             <a:pPr lvl="3"/>
             <a:r>
               <a:rPr lang="ko-KR" altLang="en-US"/>
-              <a:t>네 번째 수준</a:t>
+              <a:t>넷째 수준</a:t>
             </a:r>
           </a:p>
           <a:p>
             <a:pPr lvl="4"/>
             <a:r>
               <a:rPr lang="ko-KR" altLang="en-US"/>
-              <a:t>다섯 번째 수준</a:t>
+              <a:t>다섯째 수준</a:t>
             </a:r>
             <a:endParaRPr lang="en-US" dirty="0"/>
           </a:p>
@@ -1890,7 +1890,7 @@
           <a:p>
             <a:fld id="{149F34B4-7175-41BD-B98B-2E7021201D7D}" type="datetimeFigureOut">
               <a:rPr lang="ko-KR" altLang="en-US" smtClean="0"/>
-              <a:t>2026-03-08</a:t>
+              <a:t>2026-03-15</a:t>
             </a:fld>
             <a:endParaRPr lang="ko-KR" altLang="en-US"/>
           </a:p>
@@ -1941,7 +1941,7 @@
     </p:spTree>
     <p:extLst>
       <p:ext uri="{BB962C8B-B14F-4D97-AF65-F5344CB8AC3E}">
-        <p14:creationId xmlns:p14="http://schemas.microsoft.com/office/powerpoint/2010/main" val="1634003482"/>
+        <p14:creationId xmlns:p14="http://schemas.microsoft.com/office/powerpoint/2010/main" val="2456798218"/>
       </p:ext>
     </p:extLst>
   </p:cSld>
@@ -1980,8 +1980,8 @@
         </p:nvSpPr>
         <p:spPr>
           <a:xfrm>
-            <a:off x="221068" y="448807"/>
-            <a:ext cx="2794576" cy="748843"/>
+            <a:off x="218362" y="448809"/>
+            <a:ext cx="2760345" cy="748843"/>
           </a:xfrm>
         </p:spPr>
         <p:txBody>
@@ -2012,8 +2012,8 @@
         </p:nvSpPr>
         <p:spPr>
           <a:xfrm>
-            <a:off x="221068" y="1204734"/>
-            <a:ext cx="2794576" cy="393799"/>
+            <a:off x="218362" y="1204736"/>
+            <a:ext cx="2760345" cy="393799"/>
           </a:xfrm>
         </p:spPr>
         <p:txBody>
@@ -2021,7 +2021,7 @@
           <a:lstStyle>
             <a:lvl1pPr marL="0" indent="0">
               <a:buNone/>
-              <a:defRPr sz="630">
+              <a:defRPr sz="629">
                 <a:solidFill>
                   <a:schemeClr val="tx1">
                     <a:tint val="75000"/>
@@ -2029,7 +2029,7 @@
                 </a:solidFill>
               </a:defRPr>
             </a:lvl1pPr>
-            <a:lvl2pPr marL="120015" indent="0">
+            <a:lvl2pPr marL="120012" indent="0">
               <a:buNone/>
               <a:defRPr sz="525">
                 <a:solidFill>
@@ -2039,7 +2039,7 @@
                 </a:solidFill>
               </a:defRPr>
             </a:lvl2pPr>
-            <a:lvl3pPr marL="240030" indent="0">
+            <a:lvl3pPr marL="240025" indent="0">
               <a:buNone/>
               <a:defRPr sz="472">
                 <a:solidFill>
@@ -2049,7 +2049,7 @@
                 </a:solidFill>
               </a:defRPr>
             </a:lvl3pPr>
-            <a:lvl4pPr marL="360045" indent="0">
+            <a:lvl4pPr marL="360036" indent="0">
               <a:buNone/>
               <a:defRPr sz="420">
                 <a:solidFill>
@@ -2059,7 +2059,7 @@
                 </a:solidFill>
               </a:defRPr>
             </a:lvl4pPr>
-            <a:lvl5pPr marL="480060" indent="0">
+            <a:lvl5pPr marL="480048" indent="0">
               <a:buNone/>
               <a:defRPr sz="420">
                 <a:solidFill>
@@ -2069,7 +2069,7 @@
                 </a:solidFill>
               </a:defRPr>
             </a:lvl5pPr>
-            <a:lvl6pPr marL="600075" indent="0">
+            <a:lvl6pPr marL="600060" indent="0">
               <a:buNone/>
               <a:defRPr sz="420">
                 <a:solidFill>
@@ -2079,7 +2079,7 @@
                 </a:solidFill>
               </a:defRPr>
             </a:lvl6pPr>
-            <a:lvl7pPr marL="720090" indent="0">
+            <a:lvl7pPr marL="720073" indent="0">
               <a:buNone/>
               <a:defRPr sz="420">
                 <a:solidFill>
@@ -2089,7 +2089,7 @@
                 </a:solidFill>
               </a:defRPr>
             </a:lvl7pPr>
-            <a:lvl8pPr marL="840105" indent="0">
+            <a:lvl8pPr marL="840084" indent="0">
               <a:buNone/>
               <a:defRPr sz="420">
                 <a:solidFill>
@@ -2099,7 +2099,7 @@
                 </a:solidFill>
               </a:defRPr>
             </a:lvl8pPr>
-            <a:lvl9pPr marL="960120" indent="0">
+            <a:lvl9pPr marL="960096" indent="0">
               <a:buNone/>
               <a:defRPr sz="420">
                 <a:solidFill>
@@ -2114,7 +2114,7 @@
             <a:pPr lvl="0"/>
             <a:r>
               <a:rPr lang="ko-KR" altLang="en-US"/>
-              <a:t>마스터 텍스트 스타일을 편집하려면 클릭</a:t>
+              <a:t>마스터 텍스트 스타일 편집</a:t>
             </a:r>
           </a:p>
         </p:txBody>
@@ -2136,7 +2136,7 @@
           <a:p>
             <a:fld id="{149F34B4-7175-41BD-B98B-2E7021201D7D}" type="datetimeFigureOut">
               <a:rPr lang="ko-KR" altLang="en-US" smtClean="0"/>
-              <a:t>2026-03-08</a:t>
+              <a:t>2026-03-15</a:t>
             </a:fld>
             <a:endParaRPr lang="ko-KR" altLang="en-US"/>
           </a:p>
@@ -2187,7 +2187,7 @@
     </p:spTree>
     <p:extLst>
       <p:ext uri="{BB962C8B-B14F-4D97-AF65-F5344CB8AC3E}">
-        <p14:creationId xmlns:p14="http://schemas.microsoft.com/office/powerpoint/2010/main" val="3434871378"/>
+        <p14:creationId xmlns:p14="http://schemas.microsoft.com/office/powerpoint/2010/main" val="1474384663"/>
       </p:ext>
     </p:extLst>
   </p:cSld>
@@ -2249,8 +2249,8 @@
         </p:nvSpPr>
         <p:spPr>
           <a:xfrm>
-            <a:off x="222756" y="479227"/>
-            <a:ext cx="1377037" cy="1142226"/>
+            <a:off x="220028" y="479227"/>
+            <a:ext cx="1360171" cy="1142226"/>
           </a:xfrm>
         </p:spPr>
         <p:txBody>
@@ -2260,35 +2260,35 @@
             <a:pPr lvl="0"/>
             <a:r>
               <a:rPr lang="ko-KR" altLang="en-US"/>
-              <a:t>마스터 텍스트 스타일을 편집하려면 클릭</a:t>
+              <a:t>마스터 텍스트 스타일 편집</a:t>
             </a:r>
           </a:p>
           <a:p>
             <a:pPr lvl="1"/>
             <a:r>
               <a:rPr lang="ko-KR" altLang="en-US"/>
-              <a:t>두 번째 수준</a:t>
+              <a:t>둘째 수준</a:t>
             </a:r>
           </a:p>
           <a:p>
             <a:pPr lvl="2"/>
             <a:r>
               <a:rPr lang="ko-KR" altLang="en-US"/>
-              <a:t>세 번째 수준</a:t>
+              <a:t>셋째 수준</a:t>
             </a:r>
           </a:p>
           <a:p>
             <a:pPr lvl="3"/>
             <a:r>
               <a:rPr lang="ko-KR" altLang="en-US"/>
-              <a:t>네 번째 수준</a:t>
+              <a:t>넷째 수준</a:t>
             </a:r>
           </a:p>
           <a:p>
             <a:pPr lvl="4"/>
             <a:r>
               <a:rPr lang="ko-KR" altLang="en-US"/>
-              <a:t>다섯 번째 수준</a:t>
+              <a:t>다섯째 수준</a:t>
             </a:r>
             <a:endParaRPr lang="en-US" dirty="0"/>
           </a:p>
@@ -2306,8 +2306,8 @@
         </p:nvSpPr>
         <p:spPr>
           <a:xfrm>
-            <a:off x="1640295" y="479227"/>
-            <a:ext cx="1377037" cy="1142226"/>
+            <a:off x="1620203" y="479227"/>
+            <a:ext cx="1360171" cy="1142226"/>
           </a:xfrm>
         </p:spPr>
         <p:txBody>
@@ -2317,35 +2317,35 @@
             <a:pPr lvl="0"/>
             <a:r>
               <a:rPr lang="ko-KR" altLang="en-US"/>
-              <a:t>마스터 텍스트 스타일을 편집하려면 클릭</a:t>
+              <a:t>마스터 텍스트 스타일 편집</a:t>
             </a:r>
           </a:p>
           <a:p>
             <a:pPr lvl="1"/>
             <a:r>
               <a:rPr lang="ko-KR" altLang="en-US"/>
-              <a:t>두 번째 수준</a:t>
+              <a:t>둘째 수준</a:t>
             </a:r>
           </a:p>
           <a:p>
             <a:pPr lvl="2"/>
             <a:r>
               <a:rPr lang="ko-KR" altLang="en-US"/>
-              <a:t>세 번째 수준</a:t>
+              <a:t>셋째 수준</a:t>
             </a:r>
           </a:p>
           <a:p>
             <a:pPr lvl="3"/>
             <a:r>
               <a:rPr lang="ko-KR" altLang="en-US"/>
-              <a:t>네 번째 수준</a:t>
+              <a:t>넷째 수준</a:t>
             </a:r>
           </a:p>
           <a:p>
             <a:pPr lvl="4"/>
             <a:r>
               <a:rPr lang="ko-KR" altLang="en-US"/>
-              <a:t>다섯 번째 수준</a:t>
+              <a:t>다섯째 수준</a:t>
             </a:r>
             <a:endParaRPr lang="en-US" dirty="0"/>
           </a:p>
@@ -2368,7 +2368,7 @@
           <a:p>
             <a:fld id="{149F34B4-7175-41BD-B98B-2E7021201D7D}" type="datetimeFigureOut">
               <a:rPr lang="ko-KR" altLang="en-US" smtClean="0"/>
-              <a:t>2026-03-08</a:t>
+              <a:t>2026-03-15</a:t>
             </a:fld>
             <a:endParaRPr lang="ko-KR" altLang="en-US"/>
           </a:p>
@@ -2419,7 +2419,7 @@
     </p:spTree>
     <p:extLst>
       <p:ext uri="{BB962C8B-B14F-4D97-AF65-F5344CB8AC3E}">
-        <p14:creationId xmlns:p14="http://schemas.microsoft.com/office/powerpoint/2010/main" val="3465910369"/>
+        <p14:creationId xmlns:p14="http://schemas.microsoft.com/office/powerpoint/2010/main" val="49352313"/>
       </p:ext>
     </p:extLst>
   </p:cSld>
@@ -2458,8 +2458,8 @@
         </p:nvSpPr>
         <p:spPr>
           <a:xfrm>
-            <a:off x="223178" y="95846"/>
-            <a:ext cx="2794576" cy="347960"/>
+            <a:off x="220445" y="95846"/>
+            <a:ext cx="2760345" cy="347960"/>
           </a:xfrm>
         </p:spPr>
         <p:txBody>
@@ -2486,8 +2486,8 @@
         </p:nvSpPr>
         <p:spPr>
           <a:xfrm>
-            <a:off x="223178" y="441305"/>
-            <a:ext cx="1370709" cy="216277"/>
+            <a:off x="220446" y="441307"/>
+            <a:ext cx="1353919" cy="216277"/>
           </a:xfrm>
         </p:spPr>
         <p:txBody>
@@ -2495,37 +2495,37 @@
           <a:lstStyle>
             <a:lvl1pPr marL="0" indent="0">
               <a:buNone/>
-              <a:defRPr sz="630" b="1"/>
+              <a:defRPr sz="629" b="1"/>
             </a:lvl1pPr>
-            <a:lvl2pPr marL="120015" indent="0">
+            <a:lvl2pPr marL="120012" indent="0">
               <a:buNone/>
               <a:defRPr sz="525" b="1"/>
             </a:lvl2pPr>
-            <a:lvl3pPr marL="240030" indent="0">
+            <a:lvl3pPr marL="240025" indent="0">
               <a:buNone/>
               <a:defRPr sz="472" b="1"/>
             </a:lvl3pPr>
-            <a:lvl4pPr marL="360045" indent="0">
+            <a:lvl4pPr marL="360036" indent="0">
               <a:buNone/>
               <a:defRPr sz="420" b="1"/>
             </a:lvl4pPr>
-            <a:lvl5pPr marL="480060" indent="0">
+            <a:lvl5pPr marL="480048" indent="0">
               <a:buNone/>
               <a:defRPr sz="420" b="1"/>
             </a:lvl5pPr>
-            <a:lvl6pPr marL="600075" indent="0">
+            <a:lvl6pPr marL="600060" indent="0">
               <a:buNone/>
               <a:defRPr sz="420" b="1"/>
             </a:lvl6pPr>
-            <a:lvl7pPr marL="720090" indent="0">
+            <a:lvl7pPr marL="720073" indent="0">
               <a:buNone/>
               <a:defRPr sz="420" b="1"/>
             </a:lvl7pPr>
-            <a:lvl8pPr marL="840105" indent="0">
+            <a:lvl8pPr marL="840084" indent="0">
               <a:buNone/>
               <a:defRPr sz="420" b="1"/>
             </a:lvl8pPr>
-            <a:lvl9pPr marL="960120" indent="0">
+            <a:lvl9pPr marL="960096" indent="0">
               <a:buNone/>
               <a:defRPr sz="420" b="1"/>
             </a:lvl9pPr>
@@ -2534,7 +2534,7 @@
             <a:pPr lvl="0"/>
             <a:r>
               <a:rPr lang="ko-KR" altLang="en-US"/>
-              <a:t>마스터 텍스트 스타일을 편집하려면 클릭</a:t>
+              <a:t>마스터 텍스트 스타일 편집</a:t>
             </a:r>
           </a:p>
         </p:txBody>
@@ -2551,8 +2551,8 @@
         </p:nvSpPr>
         <p:spPr>
           <a:xfrm>
-            <a:off x="223178" y="657582"/>
-            <a:ext cx="1370709" cy="967204"/>
+            <a:off x="220446" y="657582"/>
+            <a:ext cx="1353919" cy="967204"/>
           </a:xfrm>
         </p:spPr>
         <p:txBody>
@@ -2562,35 +2562,35 @@
             <a:pPr lvl="0"/>
             <a:r>
               <a:rPr lang="ko-KR" altLang="en-US"/>
-              <a:t>마스터 텍스트 스타일을 편집하려면 클릭</a:t>
+              <a:t>마스터 텍스트 스타일 편집</a:t>
             </a:r>
           </a:p>
           <a:p>
             <a:pPr lvl="1"/>
             <a:r>
               <a:rPr lang="ko-KR" altLang="en-US"/>
-              <a:t>두 번째 수준</a:t>
+              <a:t>둘째 수준</a:t>
             </a:r>
           </a:p>
           <a:p>
             <a:pPr lvl="2"/>
             <a:r>
               <a:rPr lang="ko-KR" altLang="en-US"/>
-              <a:t>세 번째 수준</a:t>
+              <a:t>셋째 수준</a:t>
             </a:r>
           </a:p>
           <a:p>
             <a:pPr lvl="3"/>
             <a:r>
               <a:rPr lang="ko-KR" altLang="en-US"/>
-              <a:t>네 번째 수준</a:t>
+              <a:t>넷째 수준</a:t>
             </a:r>
           </a:p>
           <a:p>
             <a:pPr lvl="4"/>
             <a:r>
               <a:rPr lang="ko-KR" altLang="en-US"/>
-              <a:t>다섯 번째 수준</a:t>
+              <a:t>다섯째 수준</a:t>
             </a:r>
             <a:endParaRPr lang="en-US" dirty="0"/>
           </a:p>
@@ -2608,8 +2608,8 @@
         </p:nvSpPr>
         <p:spPr>
           <a:xfrm>
-            <a:off x="1640295" y="441305"/>
-            <a:ext cx="1377459" cy="216277"/>
+            <a:off x="1620203" y="441307"/>
+            <a:ext cx="1360587" cy="216277"/>
           </a:xfrm>
         </p:spPr>
         <p:txBody>
@@ -2617,37 +2617,37 @@
           <a:lstStyle>
             <a:lvl1pPr marL="0" indent="0">
               <a:buNone/>
-              <a:defRPr sz="630" b="1"/>
+              <a:defRPr sz="629" b="1"/>
             </a:lvl1pPr>
-            <a:lvl2pPr marL="120015" indent="0">
+            <a:lvl2pPr marL="120012" indent="0">
               <a:buNone/>
               <a:defRPr sz="525" b="1"/>
             </a:lvl2pPr>
-            <a:lvl3pPr marL="240030" indent="0">
+            <a:lvl3pPr marL="240025" indent="0">
               <a:buNone/>
               <a:defRPr sz="472" b="1"/>
             </a:lvl3pPr>
-            <a:lvl4pPr marL="360045" indent="0">
+            <a:lvl4pPr marL="360036" indent="0">
               <a:buNone/>
               <a:defRPr sz="420" b="1"/>
             </a:lvl4pPr>
-            <a:lvl5pPr marL="480060" indent="0">
+            <a:lvl5pPr marL="480048" indent="0">
               <a:buNone/>
               <a:defRPr sz="420" b="1"/>
             </a:lvl5pPr>
-            <a:lvl6pPr marL="600075" indent="0">
+            <a:lvl6pPr marL="600060" indent="0">
               <a:buNone/>
               <a:defRPr sz="420" b="1"/>
             </a:lvl6pPr>
-            <a:lvl7pPr marL="720090" indent="0">
+            <a:lvl7pPr marL="720073" indent="0">
               <a:buNone/>
               <a:defRPr sz="420" b="1"/>
             </a:lvl7pPr>
-            <a:lvl8pPr marL="840105" indent="0">
+            <a:lvl8pPr marL="840084" indent="0">
               <a:buNone/>
               <a:defRPr sz="420" b="1"/>
             </a:lvl8pPr>
-            <a:lvl9pPr marL="960120" indent="0">
+            <a:lvl9pPr marL="960096" indent="0">
               <a:buNone/>
               <a:defRPr sz="420" b="1"/>
             </a:lvl9pPr>
@@ -2656,7 +2656,7 @@
             <a:pPr lvl="0"/>
             <a:r>
               <a:rPr lang="ko-KR" altLang="en-US"/>
-              <a:t>마스터 텍스트 스타일을 편집하려면 클릭</a:t>
+              <a:t>마스터 텍스트 스타일 편집</a:t>
             </a:r>
           </a:p>
         </p:txBody>
@@ -2673,8 +2673,8 @@
         </p:nvSpPr>
         <p:spPr>
           <a:xfrm>
-            <a:off x="1640295" y="657582"/>
-            <a:ext cx="1377459" cy="967204"/>
+            <a:off x="1620203" y="657582"/>
+            <a:ext cx="1360587" cy="967204"/>
           </a:xfrm>
         </p:spPr>
         <p:txBody>
@@ -2684,35 +2684,35 @@
             <a:pPr lvl="0"/>
             <a:r>
               <a:rPr lang="ko-KR" altLang="en-US"/>
-              <a:t>마스터 텍스트 스타일을 편집하려면 클릭</a:t>
+              <a:t>마스터 텍스트 스타일 편집</a:t>
             </a:r>
           </a:p>
           <a:p>
             <a:pPr lvl="1"/>
             <a:r>
               <a:rPr lang="ko-KR" altLang="en-US"/>
-              <a:t>두 번째 수준</a:t>
+              <a:t>둘째 수준</a:t>
             </a:r>
           </a:p>
           <a:p>
             <a:pPr lvl="2"/>
             <a:r>
               <a:rPr lang="ko-KR" altLang="en-US"/>
-              <a:t>세 번째 수준</a:t>
+              <a:t>셋째 수준</a:t>
             </a:r>
           </a:p>
           <a:p>
             <a:pPr lvl="3"/>
             <a:r>
               <a:rPr lang="ko-KR" altLang="en-US"/>
-              <a:t>네 번째 수준</a:t>
+              <a:t>넷째 수준</a:t>
             </a:r>
           </a:p>
           <a:p>
             <a:pPr lvl="4"/>
             <a:r>
               <a:rPr lang="ko-KR" altLang="en-US"/>
-              <a:t>다섯 번째 수준</a:t>
+              <a:t>다섯째 수준</a:t>
             </a:r>
             <a:endParaRPr lang="en-US" dirty="0"/>
           </a:p>
@@ -2735,7 +2735,7 @@
           <a:p>
             <a:fld id="{149F34B4-7175-41BD-B98B-2E7021201D7D}" type="datetimeFigureOut">
               <a:rPr lang="ko-KR" altLang="en-US" smtClean="0"/>
-              <a:t>2026-03-08</a:t>
+              <a:t>2026-03-15</a:t>
             </a:fld>
             <a:endParaRPr lang="ko-KR" altLang="en-US"/>
           </a:p>
@@ -2786,7 +2786,7 @@
     </p:spTree>
     <p:extLst>
       <p:ext uri="{BB962C8B-B14F-4D97-AF65-F5344CB8AC3E}">
-        <p14:creationId xmlns:p14="http://schemas.microsoft.com/office/powerpoint/2010/main" val="4164050254"/>
+        <p14:creationId xmlns:p14="http://schemas.microsoft.com/office/powerpoint/2010/main" val="2534278424"/>
       </p:ext>
     </p:extLst>
   </p:cSld>
@@ -2853,7 +2853,7 @@
           <a:p>
             <a:fld id="{149F34B4-7175-41BD-B98B-2E7021201D7D}" type="datetimeFigureOut">
               <a:rPr lang="ko-KR" altLang="en-US" smtClean="0"/>
-              <a:t>2026-03-08</a:t>
+              <a:t>2026-03-15</a:t>
             </a:fld>
             <a:endParaRPr lang="ko-KR" altLang="en-US"/>
           </a:p>
@@ -2904,7 +2904,7 @@
     </p:spTree>
     <p:extLst>
       <p:ext uri="{BB962C8B-B14F-4D97-AF65-F5344CB8AC3E}">
-        <p14:creationId xmlns:p14="http://schemas.microsoft.com/office/powerpoint/2010/main" val="2126343418"/>
+        <p14:creationId xmlns:p14="http://schemas.microsoft.com/office/powerpoint/2010/main" val="930363317"/>
       </p:ext>
     </p:extLst>
   </p:cSld>
@@ -2948,7 +2948,7 @@
           <a:p>
             <a:fld id="{149F34B4-7175-41BD-B98B-2E7021201D7D}" type="datetimeFigureOut">
               <a:rPr lang="ko-KR" altLang="en-US" smtClean="0"/>
-              <a:t>2026-03-08</a:t>
+              <a:t>2026-03-15</a:t>
             </a:fld>
             <a:endParaRPr lang="ko-KR" altLang="en-US"/>
           </a:p>
@@ -2999,7 +2999,7 @@
     </p:spTree>
     <p:extLst>
       <p:ext uri="{BB962C8B-B14F-4D97-AF65-F5344CB8AC3E}">
-        <p14:creationId xmlns:p14="http://schemas.microsoft.com/office/powerpoint/2010/main" val="2295738396"/>
+        <p14:creationId xmlns:p14="http://schemas.microsoft.com/office/powerpoint/2010/main" val="1697096734"/>
       </p:ext>
     </p:extLst>
   </p:cSld>
@@ -3038,8 +3038,8 @@
         </p:nvSpPr>
         <p:spPr>
           <a:xfrm>
-            <a:off x="223178" y="120015"/>
-            <a:ext cx="1045013" cy="420053"/>
+            <a:off x="220446" y="120017"/>
+            <a:ext cx="1032212" cy="420053"/>
           </a:xfrm>
         </p:spPr>
         <p:txBody>
@@ -3070,8 +3070,8 @@
         </p:nvSpPr>
         <p:spPr>
           <a:xfrm>
-            <a:off x="1377459" y="259199"/>
-            <a:ext cx="1640295" cy="1279327"/>
+            <a:off x="1360588" y="259201"/>
+            <a:ext cx="1620203" cy="1279327"/>
           </a:xfrm>
         </p:spPr>
         <p:txBody>
@@ -3084,7 +3084,7 @@
               <a:defRPr sz="735"/>
             </a:lvl2pPr>
             <a:lvl3pPr>
-              <a:defRPr sz="630"/>
+              <a:defRPr sz="629"/>
             </a:lvl3pPr>
             <a:lvl4pPr>
               <a:defRPr sz="525"/>
@@ -3109,35 +3109,35 @@
             <a:pPr lvl="0"/>
             <a:r>
               <a:rPr lang="ko-KR" altLang="en-US"/>
-              <a:t>마스터 텍스트 스타일을 편집하려면 클릭</a:t>
+              <a:t>마스터 텍스트 스타일 편집</a:t>
             </a:r>
           </a:p>
           <a:p>
             <a:pPr lvl="1"/>
             <a:r>
               <a:rPr lang="ko-KR" altLang="en-US"/>
-              <a:t>두 번째 수준</a:t>
+              <a:t>둘째 수준</a:t>
             </a:r>
           </a:p>
           <a:p>
             <a:pPr lvl="2"/>
             <a:r>
               <a:rPr lang="ko-KR" altLang="en-US"/>
-              <a:t>세 번째 수준</a:t>
+              <a:t>셋째 수준</a:t>
             </a:r>
           </a:p>
           <a:p>
             <a:pPr lvl="3"/>
             <a:r>
               <a:rPr lang="ko-KR" altLang="en-US"/>
-              <a:t>네 번째 수준</a:t>
+              <a:t>넷째 수준</a:t>
             </a:r>
           </a:p>
           <a:p>
             <a:pPr lvl="4"/>
             <a:r>
               <a:rPr lang="ko-KR" altLang="en-US"/>
-              <a:t>다섯 번째 수준</a:t>
+              <a:t>다섯째 수준</a:t>
             </a:r>
             <a:endParaRPr lang="en-US" dirty="0"/>
           </a:p>
@@ -3155,8 +3155,8 @@
         </p:nvSpPr>
         <p:spPr>
           <a:xfrm>
-            <a:off x="223178" y="540067"/>
-            <a:ext cx="1045013" cy="1000542"/>
+            <a:off x="220446" y="540067"/>
+            <a:ext cx="1032212" cy="1000542"/>
           </a:xfrm>
         </p:spPr>
         <p:txBody>
@@ -3166,35 +3166,35 @@
               <a:buNone/>
               <a:defRPr sz="420"/>
             </a:lvl1pPr>
-            <a:lvl2pPr marL="120015" indent="0">
+            <a:lvl2pPr marL="120012" indent="0">
               <a:buNone/>
               <a:defRPr sz="368"/>
             </a:lvl2pPr>
-            <a:lvl3pPr marL="240030" indent="0">
+            <a:lvl3pPr marL="240025" indent="0">
               <a:buNone/>
               <a:defRPr sz="315"/>
             </a:lvl3pPr>
-            <a:lvl4pPr marL="360045" indent="0">
+            <a:lvl4pPr marL="360036" indent="0">
               <a:buNone/>
               <a:defRPr sz="263"/>
             </a:lvl4pPr>
-            <a:lvl5pPr marL="480060" indent="0">
+            <a:lvl5pPr marL="480048" indent="0">
               <a:buNone/>
               <a:defRPr sz="263"/>
             </a:lvl5pPr>
-            <a:lvl6pPr marL="600075" indent="0">
+            <a:lvl6pPr marL="600060" indent="0">
               <a:buNone/>
               <a:defRPr sz="263"/>
             </a:lvl6pPr>
-            <a:lvl7pPr marL="720090" indent="0">
+            <a:lvl7pPr marL="720073" indent="0">
               <a:buNone/>
               <a:defRPr sz="263"/>
             </a:lvl7pPr>
-            <a:lvl8pPr marL="840105" indent="0">
+            <a:lvl8pPr marL="840084" indent="0">
               <a:buNone/>
               <a:defRPr sz="263"/>
             </a:lvl8pPr>
-            <a:lvl9pPr marL="960120" indent="0">
+            <a:lvl9pPr marL="960096" indent="0">
               <a:buNone/>
               <a:defRPr sz="263"/>
             </a:lvl9pPr>
@@ -3203,7 +3203,7 @@
             <a:pPr lvl="0"/>
             <a:r>
               <a:rPr lang="ko-KR" altLang="en-US"/>
-              <a:t>마스터 텍스트 스타일을 편집하려면 클릭</a:t>
+              <a:t>마스터 텍스트 스타일 편집</a:t>
             </a:r>
           </a:p>
         </p:txBody>
@@ -3225,7 +3225,7 @@
           <a:p>
             <a:fld id="{149F34B4-7175-41BD-B98B-2E7021201D7D}" type="datetimeFigureOut">
               <a:rPr lang="ko-KR" altLang="en-US" smtClean="0"/>
-              <a:t>2026-03-08</a:t>
+              <a:t>2026-03-15</a:t>
             </a:fld>
             <a:endParaRPr lang="ko-KR" altLang="en-US"/>
           </a:p>
@@ -3276,7 +3276,7 @@
     </p:spTree>
     <p:extLst>
       <p:ext uri="{BB962C8B-B14F-4D97-AF65-F5344CB8AC3E}">
-        <p14:creationId xmlns:p14="http://schemas.microsoft.com/office/powerpoint/2010/main" val="2035658595"/>
+        <p14:creationId xmlns:p14="http://schemas.microsoft.com/office/powerpoint/2010/main" val="971393235"/>
       </p:ext>
     </p:extLst>
   </p:cSld>
@@ -3315,8 +3315,8 @@
         </p:nvSpPr>
         <p:spPr>
           <a:xfrm>
-            <a:off x="223178" y="120015"/>
-            <a:ext cx="1045013" cy="420053"/>
+            <a:off x="220446" y="120017"/>
+            <a:ext cx="1032212" cy="420053"/>
           </a:xfrm>
         </p:spPr>
         <p:txBody>
@@ -3347,8 +3347,8 @@
         </p:nvSpPr>
         <p:spPr>
           <a:xfrm>
-            <a:off x="1377459" y="259199"/>
-            <a:ext cx="1640295" cy="1279327"/>
+            <a:off x="1360588" y="259201"/>
+            <a:ext cx="1620203" cy="1279327"/>
           </a:xfrm>
         </p:spPr>
         <p:txBody>
@@ -3358,35 +3358,35 @@
               <a:buNone/>
               <a:defRPr sz="840"/>
             </a:lvl1pPr>
-            <a:lvl2pPr marL="120015" indent="0">
+            <a:lvl2pPr marL="120012" indent="0">
               <a:buNone/>
               <a:defRPr sz="735"/>
             </a:lvl2pPr>
-            <a:lvl3pPr marL="240030" indent="0">
+            <a:lvl3pPr marL="240025" indent="0">
               <a:buNone/>
-              <a:defRPr sz="630"/>
+              <a:defRPr sz="629"/>
             </a:lvl3pPr>
-            <a:lvl4pPr marL="360045" indent="0">
+            <a:lvl4pPr marL="360036" indent="0">
               <a:buNone/>
               <a:defRPr sz="525"/>
             </a:lvl4pPr>
-            <a:lvl5pPr marL="480060" indent="0">
+            <a:lvl5pPr marL="480048" indent="0">
               <a:buNone/>
               <a:defRPr sz="525"/>
             </a:lvl5pPr>
-            <a:lvl6pPr marL="600075" indent="0">
+            <a:lvl6pPr marL="600060" indent="0">
               <a:buNone/>
               <a:defRPr sz="525"/>
             </a:lvl6pPr>
-            <a:lvl7pPr marL="720090" indent="0">
+            <a:lvl7pPr marL="720073" indent="0">
               <a:buNone/>
               <a:defRPr sz="525"/>
             </a:lvl7pPr>
-            <a:lvl8pPr marL="840105" indent="0">
+            <a:lvl8pPr marL="840084" indent="0">
               <a:buNone/>
               <a:defRPr sz="525"/>
             </a:lvl8pPr>
-            <a:lvl9pPr marL="960120" indent="0">
+            <a:lvl9pPr marL="960096" indent="0">
               <a:buNone/>
               <a:defRPr sz="525"/>
             </a:lvl9pPr>
@@ -3412,8 +3412,8 @@
         </p:nvSpPr>
         <p:spPr>
           <a:xfrm>
-            <a:off x="223178" y="540067"/>
-            <a:ext cx="1045013" cy="1000542"/>
+            <a:off x="220446" y="540067"/>
+            <a:ext cx="1032212" cy="1000542"/>
           </a:xfrm>
         </p:spPr>
         <p:txBody>
@@ -3423,35 +3423,35 @@
               <a:buNone/>
               <a:defRPr sz="420"/>
             </a:lvl1pPr>
-            <a:lvl2pPr marL="120015" indent="0">
+            <a:lvl2pPr marL="120012" indent="0">
               <a:buNone/>
               <a:defRPr sz="368"/>
             </a:lvl2pPr>
-            <a:lvl3pPr marL="240030" indent="0">
+            <a:lvl3pPr marL="240025" indent="0">
               <a:buNone/>
               <a:defRPr sz="315"/>
             </a:lvl3pPr>
-            <a:lvl4pPr marL="360045" indent="0">
+            <a:lvl4pPr marL="360036" indent="0">
               <a:buNone/>
               <a:defRPr sz="263"/>
             </a:lvl4pPr>
-            <a:lvl5pPr marL="480060" indent="0">
+            <a:lvl5pPr marL="480048" indent="0">
               <a:buNone/>
               <a:defRPr sz="263"/>
             </a:lvl5pPr>
-            <a:lvl6pPr marL="600075" indent="0">
+            <a:lvl6pPr marL="600060" indent="0">
               <a:buNone/>
               <a:defRPr sz="263"/>
             </a:lvl6pPr>
-            <a:lvl7pPr marL="720090" indent="0">
+            <a:lvl7pPr marL="720073" indent="0">
               <a:buNone/>
               <a:defRPr sz="263"/>
             </a:lvl7pPr>
-            <a:lvl8pPr marL="840105" indent="0">
+            <a:lvl8pPr marL="840084" indent="0">
               <a:buNone/>
               <a:defRPr sz="263"/>
             </a:lvl8pPr>
-            <a:lvl9pPr marL="960120" indent="0">
+            <a:lvl9pPr marL="960096" indent="0">
               <a:buNone/>
               <a:defRPr sz="263"/>
             </a:lvl9pPr>
@@ -3460,7 +3460,7 @@
             <a:pPr lvl="0"/>
             <a:r>
               <a:rPr lang="ko-KR" altLang="en-US"/>
-              <a:t>마스터 텍스트 스타일을 편집하려면 클릭</a:t>
+              <a:t>마스터 텍스트 스타일 편집</a:t>
             </a:r>
           </a:p>
         </p:txBody>
@@ -3482,7 +3482,7 @@
           <a:p>
             <a:fld id="{149F34B4-7175-41BD-B98B-2E7021201D7D}" type="datetimeFigureOut">
               <a:rPr lang="ko-KR" altLang="en-US" smtClean="0"/>
-              <a:t>2026-03-08</a:t>
+              <a:t>2026-03-15</a:t>
             </a:fld>
             <a:endParaRPr lang="ko-KR" altLang="en-US"/>
           </a:p>
@@ -3533,7 +3533,7 @@
     </p:spTree>
     <p:extLst>
       <p:ext uri="{BB962C8B-B14F-4D97-AF65-F5344CB8AC3E}">
-        <p14:creationId xmlns:p14="http://schemas.microsoft.com/office/powerpoint/2010/main" val="1745249668"/>
+        <p14:creationId xmlns:p14="http://schemas.microsoft.com/office/powerpoint/2010/main" val="3271137851"/>
       </p:ext>
     </p:extLst>
   </p:cSld>
@@ -3577,8 +3577,8 @@
         </p:nvSpPr>
         <p:spPr>
           <a:xfrm>
-            <a:off x="222756" y="95846"/>
-            <a:ext cx="2794576" cy="347960"/>
+            <a:off x="220029" y="95846"/>
+            <a:ext cx="2760345" cy="347960"/>
           </a:xfrm>
           <a:prstGeom prst="rect">
             <a:avLst/>
@@ -3610,8 +3610,8 @@
         </p:nvSpPr>
         <p:spPr>
           <a:xfrm>
-            <a:off x="222756" y="479227"/>
-            <a:ext cx="2794576" cy="1142226"/>
+            <a:off x="220029" y="479227"/>
+            <a:ext cx="2760345" cy="1142226"/>
           </a:xfrm>
           <a:prstGeom prst="rect">
             <a:avLst/>
@@ -3626,35 +3626,35 @@
             <a:pPr lvl="0"/>
             <a:r>
               <a:rPr lang="ko-KR" altLang="en-US"/>
-              <a:t>마스터 텍스트 스타일을 편집하려면 클릭</a:t>
+              <a:t>마스터 텍스트 스타일 편집</a:t>
             </a:r>
           </a:p>
           <a:p>
             <a:pPr lvl="1"/>
             <a:r>
               <a:rPr lang="ko-KR" altLang="en-US"/>
-              <a:t>두 번째 수준</a:t>
+              <a:t>둘째 수준</a:t>
             </a:r>
           </a:p>
           <a:p>
             <a:pPr lvl="2"/>
             <a:r>
               <a:rPr lang="ko-KR" altLang="en-US"/>
-              <a:t>세 번째 수준</a:t>
+              <a:t>셋째 수준</a:t>
             </a:r>
           </a:p>
           <a:p>
             <a:pPr lvl="3"/>
             <a:r>
               <a:rPr lang="ko-KR" altLang="en-US"/>
-              <a:t>네 번째 수준</a:t>
+              <a:t>넷째 수준</a:t>
             </a:r>
           </a:p>
           <a:p>
             <a:pPr lvl="4"/>
             <a:r>
               <a:rPr lang="ko-KR" altLang="en-US"/>
-              <a:t>다섯 번째 수준</a:t>
+              <a:t>다섯째 수준</a:t>
             </a:r>
             <a:endParaRPr lang="en-US" dirty="0"/>
           </a:p>
@@ -3672,8 +3672,8 @@
         </p:nvSpPr>
         <p:spPr>
           <a:xfrm>
-            <a:off x="222756" y="1668542"/>
-            <a:ext cx="729020" cy="95845"/>
+            <a:off x="220028" y="1668544"/>
+            <a:ext cx="720091" cy="95845"/>
           </a:xfrm>
           <a:prstGeom prst="rect">
             <a:avLst/>
@@ -3695,7 +3695,7 @@
           <a:p>
             <a:fld id="{149F34B4-7175-41BD-B98B-2E7021201D7D}" type="datetimeFigureOut">
               <a:rPr lang="ko-KR" altLang="en-US" smtClean="0"/>
-              <a:t>2026-03-08</a:t>
+              <a:t>2026-03-15</a:t>
             </a:fld>
             <a:endParaRPr lang="ko-KR" altLang="en-US"/>
           </a:p>
@@ -3713,8 +3713,8 @@
         </p:nvSpPr>
         <p:spPr>
           <a:xfrm>
-            <a:off x="1073279" y="1668542"/>
-            <a:ext cx="1093530" cy="95845"/>
+            <a:off x="1060134" y="1668544"/>
+            <a:ext cx="1080135" cy="95845"/>
           </a:xfrm>
           <a:prstGeom prst="rect">
             <a:avLst/>
@@ -3750,8 +3750,8 @@
         </p:nvSpPr>
         <p:spPr>
           <a:xfrm>
-            <a:off x="2288312" y="1668542"/>
-            <a:ext cx="729020" cy="95845"/>
+            <a:off x="2260283" y="1668544"/>
+            <a:ext cx="720091" cy="95845"/>
           </a:xfrm>
           <a:prstGeom prst="rect">
             <a:avLst/>
@@ -3782,30 +3782,30 @@
     </p:spTree>
     <p:extLst>
       <p:ext uri="{BB962C8B-B14F-4D97-AF65-F5344CB8AC3E}">
-        <p14:creationId xmlns:p14="http://schemas.microsoft.com/office/powerpoint/2010/main" val="4252659477"/>
+        <p14:creationId xmlns:p14="http://schemas.microsoft.com/office/powerpoint/2010/main" val="2770691194"/>
       </p:ext>
     </p:extLst>
   </p:cSld>
   <p:clrMap bg1="lt1" tx1="dk1" bg2="lt2" tx2="dk2" accent1="accent1" accent2="accent2" accent3="accent3" accent4="accent4" accent5="accent5" accent6="accent6" hlink="hlink" folHlink="folHlink"/>
   <p:sldLayoutIdLst>
-    <p:sldLayoutId id="2147483871" r:id="rId1"/>
-    <p:sldLayoutId id="2147483872" r:id="rId2"/>
-    <p:sldLayoutId id="2147483873" r:id="rId3"/>
-    <p:sldLayoutId id="2147483874" r:id="rId4"/>
-    <p:sldLayoutId id="2147483875" r:id="rId5"/>
-    <p:sldLayoutId id="2147483876" r:id="rId6"/>
-    <p:sldLayoutId id="2147483877" r:id="rId7"/>
-    <p:sldLayoutId id="2147483878" r:id="rId8"/>
-    <p:sldLayoutId id="2147483879" r:id="rId9"/>
-    <p:sldLayoutId id="2147483880" r:id="rId10"/>
-    <p:sldLayoutId id="2147483881" r:id="rId11"/>
-    <p:sldLayoutId id="2147483882" r:id="rId12"/>
+    <p:sldLayoutId id="2147483884" r:id="rId1"/>
+    <p:sldLayoutId id="2147483885" r:id="rId2"/>
+    <p:sldLayoutId id="2147483886" r:id="rId3"/>
+    <p:sldLayoutId id="2147483887" r:id="rId4"/>
+    <p:sldLayoutId id="2147483888" r:id="rId5"/>
+    <p:sldLayoutId id="2147483889" r:id="rId6"/>
+    <p:sldLayoutId id="2147483890" r:id="rId7"/>
+    <p:sldLayoutId id="2147483891" r:id="rId8"/>
+    <p:sldLayoutId id="2147483892" r:id="rId9"/>
+    <p:sldLayoutId id="2147483893" r:id="rId10"/>
+    <p:sldLayoutId id="2147483894" r:id="rId11"/>
+    <p:sldLayoutId id="2147483895" r:id="rId12"/>
     <p:sldLayoutId id="2147483790" r:id="rId13"/>
     <p:sldLayoutId id="2147483789" r:id="rId14"/>
   </p:sldLayoutIdLst>
   <p:txStyles>
     <p:titleStyle>
-      <a:lvl1pPr algn="l" defTabSz="240030" rtl="0" eaLnBrk="1" latinLnBrk="1" hangingPunct="1">
+      <a:lvl1pPr algn="l" defTabSz="240025" rtl="0" eaLnBrk="1" latinLnBrk="1" hangingPunct="1">
         <a:lnSpc>
           <a:spcPct val="90000"/>
         </a:lnSpc>
@@ -3824,7 +3824,7 @@
       </a:lvl1pPr>
     </p:titleStyle>
     <p:bodyStyle>
-      <a:lvl1pPr marL="60008" indent="-60008" algn="l" defTabSz="240030" rtl="0" eaLnBrk="1" latinLnBrk="1" hangingPunct="1">
+      <a:lvl1pPr marL="60006" indent="-60006" algn="l" defTabSz="240025" rtl="0" eaLnBrk="1" latinLnBrk="1" hangingPunct="1">
         <a:lnSpc>
           <a:spcPct val="90000"/>
         </a:lnSpc>
@@ -3842,7 +3842,7 @@
           <a:cs typeface="+mn-cs"/>
         </a:defRPr>
       </a:lvl1pPr>
-      <a:lvl2pPr marL="180023" indent="-60008" algn="l" defTabSz="240030" rtl="0" eaLnBrk="1" latinLnBrk="1" hangingPunct="1">
+      <a:lvl2pPr marL="180018" indent="-60006" algn="l" defTabSz="240025" rtl="0" eaLnBrk="1" latinLnBrk="1" hangingPunct="1">
         <a:lnSpc>
           <a:spcPct val="90000"/>
         </a:lnSpc>
@@ -3851,7 +3851,7 @@
         </a:spcBef>
         <a:buFont typeface="Arial" panose="020B0604020202020204" pitchFamily="34" charset="0"/>
         <a:buChar char="•"/>
-        <a:defRPr sz="630" kern="1200">
+        <a:defRPr sz="629" kern="1200">
           <a:solidFill>
             <a:schemeClr val="tx1"/>
           </a:solidFill>
@@ -3860,7 +3860,7 @@
           <a:cs typeface="+mn-cs"/>
         </a:defRPr>
       </a:lvl2pPr>
-      <a:lvl3pPr marL="300038" indent="-60008" algn="l" defTabSz="240030" rtl="0" eaLnBrk="1" latinLnBrk="1" hangingPunct="1">
+      <a:lvl3pPr marL="300031" indent="-60006" algn="l" defTabSz="240025" rtl="0" eaLnBrk="1" latinLnBrk="1" hangingPunct="1">
         <a:lnSpc>
           <a:spcPct val="90000"/>
         </a:lnSpc>
@@ -3878,7 +3878,7 @@
           <a:cs typeface="+mn-cs"/>
         </a:defRPr>
       </a:lvl3pPr>
-      <a:lvl4pPr marL="420053" indent="-60008" algn="l" defTabSz="240030" rtl="0" eaLnBrk="1" latinLnBrk="1" hangingPunct="1">
+      <a:lvl4pPr marL="420043" indent="-60006" algn="l" defTabSz="240025" rtl="0" eaLnBrk="1" latinLnBrk="1" hangingPunct="1">
         <a:lnSpc>
           <a:spcPct val="90000"/>
         </a:lnSpc>
@@ -3896,7 +3896,7 @@
           <a:cs typeface="+mn-cs"/>
         </a:defRPr>
       </a:lvl4pPr>
-      <a:lvl5pPr marL="540068" indent="-60008" algn="l" defTabSz="240030" rtl="0" eaLnBrk="1" latinLnBrk="1" hangingPunct="1">
+      <a:lvl5pPr marL="540054" indent="-60006" algn="l" defTabSz="240025" rtl="0" eaLnBrk="1" latinLnBrk="1" hangingPunct="1">
         <a:lnSpc>
           <a:spcPct val="90000"/>
         </a:lnSpc>
@@ -3914,7 +3914,7 @@
           <a:cs typeface="+mn-cs"/>
         </a:defRPr>
       </a:lvl5pPr>
-      <a:lvl6pPr marL="660083" indent="-60008" algn="l" defTabSz="240030" rtl="0" eaLnBrk="1" latinLnBrk="1" hangingPunct="1">
+      <a:lvl6pPr marL="660066" indent="-60006" algn="l" defTabSz="240025" rtl="0" eaLnBrk="1" latinLnBrk="1" hangingPunct="1">
         <a:lnSpc>
           <a:spcPct val="90000"/>
         </a:lnSpc>
@@ -3932,7 +3932,7 @@
           <a:cs typeface="+mn-cs"/>
         </a:defRPr>
       </a:lvl6pPr>
-      <a:lvl7pPr marL="780098" indent="-60008" algn="l" defTabSz="240030" rtl="0" eaLnBrk="1" latinLnBrk="1" hangingPunct="1">
+      <a:lvl7pPr marL="780079" indent="-60006" algn="l" defTabSz="240025" rtl="0" eaLnBrk="1" latinLnBrk="1" hangingPunct="1">
         <a:lnSpc>
           <a:spcPct val="90000"/>
         </a:lnSpc>
@@ -3950,7 +3950,7 @@
           <a:cs typeface="+mn-cs"/>
         </a:defRPr>
       </a:lvl7pPr>
-      <a:lvl8pPr marL="900113" indent="-60008" algn="l" defTabSz="240030" rtl="0" eaLnBrk="1" latinLnBrk="1" hangingPunct="1">
+      <a:lvl8pPr marL="900091" indent="-60006" algn="l" defTabSz="240025" rtl="0" eaLnBrk="1" latinLnBrk="1" hangingPunct="1">
         <a:lnSpc>
           <a:spcPct val="90000"/>
         </a:lnSpc>
@@ -3968,7 +3968,7 @@
           <a:cs typeface="+mn-cs"/>
         </a:defRPr>
       </a:lvl8pPr>
-      <a:lvl9pPr marL="1020128" indent="-60008" algn="l" defTabSz="240030" rtl="0" eaLnBrk="1" latinLnBrk="1" hangingPunct="1">
+      <a:lvl9pPr marL="1020102" indent="-60006" algn="l" defTabSz="240025" rtl="0" eaLnBrk="1" latinLnBrk="1" hangingPunct="1">
         <a:lnSpc>
           <a:spcPct val="90000"/>
         </a:lnSpc>
@@ -3991,7 +3991,7 @@
       <a:defPPr>
         <a:defRPr lang="en-US"/>
       </a:defPPr>
-      <a:lvl1pPr marL="0" algn="l" defTabSz="240030" rtl="0" eaLnBrk="1" latinLnBrk="1" hangingPunct="1">
+      <a:lvl1pPr marL="0" algn="l" defTabSz="240025" rtl="0" eaLnBrk="1" latinLnBrk="1" hangingPunct="1">
         <a:defRPr sz="472" kern="1200">
           <a:solidFill>
             <a:schemeClr val="tx1"/>
@@ -4001,7 +4001,7 @@
           <a:cs typeface="+mn-cs"/>
         </a:defRPr>
       </a:lvl1pPr>
-      <a:lvl2pPr marL="120015" algn="l" defTabSz="240030" rtl="0" eaLnBrk="1" latinLnBrk="1" hangingPunct="1">
+      <a:lvl2pPr marL="120012" algn="l" defTabSz="240025" rtl="0" eaLnBrk="1" latinLnBrk="1" hangingPunct="1">
         <a:defRPr sz="472" kern="1200">
           <a:solidFill>
             <a:schemeClr val="tx1"/>
@@ -4011,7 +4011,7 @@
           <a:cs typeface="+mn-cs"/>
         </a:defRPr>
       </a:lvl2pPr>
-      <a:lvl3pPr marL="240030" algn="l" defTabSz="240030" rtl="0" eaLnBrk="1" latinLnBrk="1" hangingPunct="1">
+      <a:lvl3pPr marL="240025" algn="l" defTabSz="240025" rtl="0" eaLnBrk="1" latinLnBrk="1" hangingPunct="1">
         <a:defRPr sz="472" kern="1200">
           <a:solidFill>
             <a:schemeClr val="tx1"/>
@@ -4021,7 +4021,7 @@
           <a:cs typeface="+mn-cs"/>
         </a:defRPr>
       </a:lvl3pPr>
-      <a:lvl4pPr marL="360045" algn="l" defTabSz="240030" rtl="0" eaLnBrk="1" latinLnBrk="1" hangingPunct="1">
+      <a:lvl4pPr marL="360036" algn="l" defTabSz="240025" rtl="0" eaLnBrk="1" latinLnBrk="1" hangingPunct="1">
         <a:defRPr sz="472" kern="1200">
           <a:solidFill>
             <a:schemeClr val="tx1"/>
@@ -4031,7 +4031,7 @@
           <a:cs typeface="+mn-cs"/>
         </a:defRPr>
       </a:lvl4pPr>
-      <a:lvl5pPr marL="480060" algn="l" defTabSz="240030" rtl="0" eaLnBrk="1" latinLnBrk="1" hangingPunct="1">
+      <a:lvl5pPr marL="480048" algn="l" defTabSz="240025" rtl="0" eaLnBrk="1" latinLnBrk="1" hangingPunct="1">
         <a:defRPr sz="472" kern="1200">
           <a:solidFill>
             <a:schemeClr val="tx1"/>
@@ -4041,7 +4041,7 @@
           <a:cs typeface="+mn-cs"/>
         </a:defRPr>
       </a:lvl5pPr>
-      <a:lvl6pPr marL="600075" algn="l" defTabSz="240030" rtl="0" eaLnBrk="1" latinLnBrk="1" hangingPunct="1">
+      <a:lvl6pPr marL="600060" algn="l" defTabSz="240025" rtl="0" eaLnBrk="1" latinLnBrk="1" hangingPunct="1">
         <a:defRPr sz="472" kern="1200">
           <a:solidFill>
             <a:schemeClr val="tx1"/>
@@ -4051,7 +4051,7 @@
           <a:cs typeface="+mn-cs"/>
         </a:defRPr>
       </a:lvl6pPr>
-      <a:lvl7pPr marL="720090" algn="l" defTabSz="240030" rtl="0" eaLnBrk="1" latinLnBrk="1" hangingPunct="1">
+      <a:lvl7pPr marL="720073" algn="l" defTabSz="240025" rtl="0" eaLnBrk="1" latinLnBrk="1" hangingPunct="1">
         <a:defRPr sz="472" kern="1200">
           <a:solidFill>
             <a:schemeClr val="tx1"/>
@@ -4061,7 +4061,7 @@
           <a:cs typeface="+mn-cs"/>
         </a:defRPr>
       </a:lvl7pPr>
-      <a:lvl8pPr marL="840105" algn="l" defTabSz="240030" rtl="0" eaLnBrk="1" latinLnBrk="1" hangingPunct="1">
+      <a:lvl8pPr marL="840084" algn="l" defTabSz="240025" rtl="0" eaLnBrk="1" latinLnBrk="1" hangingPunct="1">
         <a:defRPr sz="472" kern="1200">
           <a:solidFill>
             <a:schemeClr val="tx1"/>
@@ -4071,7 +4071,7 @@
           <a:cs typeface="+mn-cs"/>
         </a:defRPr>
       </a:lvl8pPr>
-      <a:lvl9pPr marL="960120" algn="l" defTabSz="240030" rtl="0" eaLnBrk="1" latinLnBrk="1" hangingPunct="1">
+      <a:lvl9pPr marL="960096" algn="l" defTabSz="240025" rtl="0" eaLnBrk="1" latinLnBrk="1" hangingPunct="1">
         <a:defRPr sz="472" kern="1200">
           <a:solidFill>
             <a:schemeClr val="tx1"/>
@@ -4091,7 +4091,7 @@
             <a:srgbClr val="F26B43"/>
           </p15:clr>
         </p15:guide>
-        <p15:guide id="2" pos="1021" userDrawn="1">
+        <p15:guide id="2" pos="1008" userDrawn="1">
           <p15:clr>
             <a:srgbClr val="F26B43"/>
           </p15:clr>
@@ -4139,8 +4139,8 @@
         </p:nvSpPr>
         <p:spPr>
           <a:xfrm>
-            <a:off x="807085" y="324614"/>
-            <a:ext cx="2321877" cy="382344"/>
+            <a:off x="818197" y="324615"/>
+            <a:ext cx="2291713" cy="382344"/>
           </a:xfrm>
           <a:prstGeom prst="roundRect">
             <a:avLst>
@@ -4198,8 +4198,8 @@
         </p:nvSpPr>
         <p:spPr>
           <a:xfrm>
-            <a:off x="807085" y="745556"/>
-            <a:ext cx="2321877" cy="592988"/>
+            <a:off x="818197" y="745559"/>
+            <a:ext cx="2291713" cy="592988"/>
           </a:xfrm>
           <a:prstGeom prst="roundRect">
             <a:avLst>
@@ -4257,7 +4257,7 @@
         </p:nvSpPr>
         <p:spPr>
           <a:xfrm>
-            <a:off x="73819" y="324614"/>
+            <a:off x="84929" y="324615"/>
             <a:ext cx="721520" cy="382344"/>
           </a:xfrm>
           <a:prstGeom prst="roundRect">
@@ -4314,7 +4314,7 @@
         </p:nvSpPr>
         <p:spPr>
           <a:xfrm>
-            <a:off x="61773" y="54245"/>
+            <a:off x="41931" y="54250"/>
             <a:ext cx="1180381" cy="169277"/>
           </a:xfrm>
           <a:prstGeom prst="rect">
@@ -4367,8 +4367,8 @@
         </p:nvSpPr>
         <p:spPr>
           <a:xfrm>
-            <a:off x="755416" y="415758"/>
-            <a:ext cx="2627430" cy="215444"/>
+            <a:off x="735575" y="415757"/>
+            <a:ext cx="2627431" cy="215444"/>
           </a:xfrm>
           <a:prstGeom prst="rect">
             <a:avLst/>
@@ -4551,7 +4551,7 @@
         </p:nvSpPr>
         <p:spPr>
           <a:xfrm>
-            <a:off x="73819" y="745555"/>
+            <a:off x="84929" y="745557"/>
             <a:ext cx="721520" cy="592987"/>
           </a:xfrm>
           <a:prstGeom prst="roundRect">
@@ -4608,8 +4608,8 @@
         </p:nvSpPr>
         <p:spPr>
           <a:xfrm>
-            <a:off x="796061" y="718077"/>
-            <a:ext cx="2321878" cy="628121"/>
+            <a:off x="807175" y="718078"/>
+            <a:ext cx="2321879" cy="628121"/>
           </a:xfrm>
           <a:prstGeom prst="rect">
             <a:avLst/>
@@ -5006,7 +5006,7 @@
         </p:nvSpPr>
         <p:spPr>
           <a:xfrm>
-            <a:off x="254362" y="1408811"/>
+            <a:off x="265477" y="1408813"/>
             <a:ext cx="2709863" cy="200055"/>
           </a:xfrm>
           <a:prstGeom prst="rect">
@@ -5116,131 +5116,6 @@
               <a:latin typeface="KoPub돋움체 Medium" panose="02020603020101020101" pitchFamily="18" charset="-127"/>
               <a:ea typeface="KoPub돋움체 Medium" panose="02020603020101020101" pitchFamily="18" charset="-127"/>
             </a:endParaRPr>
-          </a:p>
-        </p:txBody>
-      </p:sp>
-      <p:sp>
-        <p:nvSpPr>
-          <p:cNvPr id="10" name="TextBox 9">
-            <a:extLst>
-              <a:ext uri="{FF2B5EF4-FFF2-40B4-BE49-F238E27FC236}">
-                <a16:creationId xmlns:a16="http://schemas.microsoft.com/office/drawing/2014/main" id="{1C28A249-57BD-B8C5-F243-8E09603FB635}"/>
-              </a:ext>
-            </a:extLst>
-          </p:cNvPr>
-          <p:cNvSpPr txBox="1"/>
-          <p:nvPr/>
-        </p:nvSpPr>
-        <p:spPr>
-          <a:xfrm>
-            <a:off x="487241" y="1408811"/>
-            <a:ext cx="308098" cy="200055"/>
-          </a:xfrm>
-          <a:prstGeom prst="rect">
-            <a:avLst/>
-          </a:prstGeom>
-          <a:noFill/>
-        </p:spPr>
-        <p:txBody>
-          <a:bodyPr wrap="none">
-            <a:spAutoFit/>
-          </a:bodyPr>
-          <a:lstStyle/>
-          <a:p>
-            <a:r>
-              <a:rPr lang="ko-KR" altLang="en-US" sz="700" dirty="0">
-                <a:solidFill>
-                  <a:srgbClr val="000000"/>
-                </a:solidFill>
-                <a:latin typeface="맑은 고딕" panose="020B0503020000020004" pitchFamily="50" charset="-127"/>
-                <a:ea typeface="맑은 고딕" panose="020B0503020000020004" pitchFamily="50" charset="-127"/>
-              </a:rPr>
-              <a:t>🔴</a:t>
-            </a:r>
-          </a:p>
-        </p:txBody>
-      </p:sp>
-      <p:sp>
-        <p:nvSpPr>
-          <p:cNvPr id="14" name="TextBox 13">
-            <a:extLst>
-              <a:ext uri="{FF2B5EF4-FFF2-40B4-BE49-F238E27FC236}">
-                <a16:creationId xmlns:a16="http://schemas.microsoft.com/office/drawing/2014/main" id="{55A14600-6A4E-68DE-AE93-F9D76C812333}"/>
-              </a:ext>
-            </a:extLst>
-          </p:cNvPr>
-          <p:cNvSpPr txBox="1"/>
-          <p:nvPr/>
-        </p:nvSpPr>
-        <p:spPr>
-          <a:xfrm>
-            <a:off x="1188617" y="1408811"/>
-            <a:ext cx="308098" cy="200055"/>
-          </a:xfrm>
-          <a:prstGeom prst="rect">
-            <a:avLst/>
-          </a:prstGeom>
-          <a:noFill/>
-        </p:spPr>
-        <p:txBody>
-          <a:bodyPr wrap="none">
-            <a:spAutoFit/>
-          </a:bodyPr>
-          <a:lstStyle/>
-          <a:p>
-            <a:r>
-              <a:rPr lang="ko-KR" altLang="en-US" sz="700" dirty="0"/>
-              <a:t>🟢</a:t>
-            </a:r>
-            <a:endParaRPr lang="ko-KR" altLang="en-US" sz="700" dirty="0">
-              <a:solidFill>
-                <a:srgbClr val="000000"/>
-              </a:solidFill>
-              <a:latin typeface="맑은 고딕" panose="020B0503020000020004" pitchFamily="50" charset="-127"/>
-              <a:ea typeface="맑은 고딕" panose="020B0503020000020004" pitchFamily="50" charset="-127"/>
-            </a:endParaRPr>
-          </a:p>
-        </p:txBody>
-      </p:sp>
-      <p:sp>
-        <p:nvSpPr>
-          <p:cNvPr id="16" name="TextBox 15">
-            <a:extLst>
-              <a:ext uri="{FF2B5EF4-FFF2-40B4-BE49-F238E27FC236}">
-                <a16:creationId xmlns:a16="http://schemas.microsoft.com/office/drawing/2014/main" id="{0A547C35-0538-3980-F43F-51DCC8C2C5B7}"/>
-              </a:ext>
-            </a:extLst>
-          </p:cNvPr>
-          <p:cNvSpPr txBox="1"/>
-          <p:nvPr/>
-        </p:nvSpPr>
-        <p:spPr>
-          <a:xfrm>
-            <a:off x="1843546" y="1408811"/>
-            <a:ext cx="308098" cy="200055"/>
-          </a:xfrm>
-          <a:prstGeom prst="rect">
-            <a:avLst/>
-          </a:prstGeom>
-          <a:noFill/>
-        </p:spPr>
-        <p:txBody>
-          <a:bodyPr wrap="none">
-            <a:spAutoFit/>
-          </a:bodyPr>
-          <a:lstStyle/>
-          <a:p>
-            <a:r>
-              <a:rPr lang="ko-KR" altLang="en-US" sz="700" dirty="0">
-                <a:solidFill>
-                  <a:srgbClr val="000000"/>
-                </a:solidFill>
-                <a:latin typeface="맑은 고딕" panose="020B0503020000020004" pitchFamily="50" charset="-127"/>
-                <a:ea typeface="맑은 고딕" panose="020B0503020000020004" pitchFamily="50" charset="-127"/>
-              </a:rPr>
-              <a:t>🟡</a:t>
-            </a:r>
-            <a:endParaRPr lang="ko-KR" altLang="en-US" sz="700" dirty="0"/>
           </a:p>
         </p:txBody>
       </p:sp>
@@ -5258,7 +5133,7 @@
         </p:nvSpPr>
         <p:spPr>
           <a:xfrm>
-            <a:off x="157821" y="366661"/>
+            <a:off x="127333" y="366664"/>
             <a:ext cx="636713" cy="338554"/>
           </a:xfrm>
           <a:prstGeom prst="rect">
@@ -5330,7 +5205,7 @@
         </p:nvSpPr>
         <p:spPr>
           <a:xfrm>
-            <a:off x="128847" y="932596"/>
+            <a:off x="104891" y="932596"/>
             <a:ext cx="681597" cy="215444"/>
           </a:xfrm>
           <a:prstGeom prst="rect">
@@ -5389,7 +5264,7 @@
         </p:nvCxnSpPr>
         <p:spPr>
           <a:xfrm flipH="1">
-            <a:off x="154781" y="1373677"/>
+            <a:off x="165891" y="1373677"/>
             <a:ext cx="2909888" cy="0"/>
           </a:xfrm>
           <a:prstGeom prst="line">
@@ -5420,91 +5295,172 @@
       </p:cxnSp>
       <p:sp>
         <p:nvSpPr>
-          <p:cNvPr id="4" name="TextBox 3">
+          <p:cNvPr id="6" name="타원 5">
             <a:extLst>
               <a:ext uri="{FF2B5EF4-FFF2-40B4-BE49-F238E27FC236}">
-                <a16:creationId xmlns:a16="http://schemas.microsoft.com/office/drawing/2014/main" id="{1CC02FF7-A679-B89A-005B-137BDE8C1901}"/>
+                <a16:creationId xmlns:a16="http://schemas.microsoft.com/office/drawing/2014/main" id="{CEA2B6CD-6F59-45DE-B26A-1E44DF2411D7}"/>
               </a:ext>
             </a:extLst>
           </p:cNvPr>
-          <p:cNvSpPr txBox="1"/>
+          <p:cNvSpPr/>
           <p:nvPr/>
         </p:nvSpPr>
         <p:spPr>
           <a:xfrm>
-            <a:off x="0" y="408064"/>
-            <a:ext cx="325730" cy="215444"/>
+            <a:off x="582615" y="1454947"/>
+            <a:ext cx="104775" cy="104775"/>
           </a:xfrm>
-          <a:prstGeom prst="rect">
+          <a:prstGeom prst="ellipse">
             <a:avLst/>
           </a:prstGeom>
-          <a:noFill/>
+          <a:solidFill>
+            <a:srgbClr val="FF0000"/>
+          </a:solidFill>
+          <a:ln>
+            <a:noFill/>
+          </a:ln>
         </p:spPr>
-        <p:txBody>
-          <a:bodyPr wrap="none">
-            <a:spAutoFit/>
+        <p:style>
+          <a:lnRef idx="2">
+            <a:schemeClr val="accent1">
+              <a:shade val="50000"/>
+            </a:schemeClr>
+          </a:lnRef>
+          <a:fillRef idx="1">
+            <a:schemeClr val="accent1"/>
+          </a:fillRef>
+          <a:effectRef idx="0">
+            <a:schemeClr val="accent1"/>
+          </a:effectRef>
+          <a:fontRef idx="minor">
+            <a:schemeClr val="lt1"/>
+          </a:fontRef>
+        </p:style>
+        <p:txBody>
+          <a:bodyPr rot="0" spcFirstLastPara="0" vertOverflow="overflow" horzOverflow="overflow" vert="horz" wrap="square" lIns="91440" tIns="45720" rIns="91440" bIns="45720" numCol="1" spcCol="0" rtlCol="0" fromWordArt="0" anchor="ctr" anchorCtr="0" forceAA="0" compatLnSpc="1">
+            <a:prstTxWarp prst="textNoShape">
+              <a:avLst/>
+            </a:prstTxWarp>
+            <a:noAutofit/>
           </a:bodyPr>
           <a:lstStyle/>
           <a:p>
-            <a:r>
-              <a:rPr lang="ko-KR" altLang="en-US" sz="800" dirty="0"/>
-              <a:t>📌</a:t>
-            </a:r>
-            <a:endParaRPr lang="ko-KR" altLang="en-US" sz="800" b="1" dirty="0">
-              <a:solidFill>
-                <a:srgbClr val="000000"/>
-              </a:solidFill>
-              <a:latin typeface="KoPub돋움체 Medium" panose="02020603020101020101" pitchFamily="18" charset="-127"/>
-              <a:ea typeface="KoPub돋움체 Medium" panose="02020603020101020101" pitchFamily="18" charset="-127"/>
-            </a:endParaRPr>
-          </a:p>
-        </p:txBody>
-      </p:sp>
-      <p:sp>
-        <p:nvSpPr>
-          <p:cNvPr id="5" name="TextBox 4">
+            <a:pPr algn="ctr"/>
+            <a:endParaRPr lang="ko-KR" altLang="en-US"/>
+          </a:p>
+        </p:txBody>
+      </p:sp>
+      <p:sp>
+        <p:nvSpPr>
+          <p:cNvPr id="20" name="타원 19">
             <a:extLst>
               <a:ext uri="{FF2B5EF4-FFF2-40B4-BE49-F238E27FC236}">
-                <a16:creationId xmlns:a16="http://schemas.microsoft.com/office/drawing/2014/main" id="{28BF33BF-AF8E-EFE0-9534-14A99E5444ED}"/>
+                <a16:creationId xmlns:a16="http://schemas.microsoft.com/office/drawing/2014/main" id="{5475DBC3-BF9A-42B4-81E3-C8A239B20A22}"/>
               </a:ext>
             </a:extLst>
           </p:cNvPr>
-          <p:cNvSpPr txBox="1"/>
+          <p:cNvSpPr/>
           <p:nvPr/>
         </p:nvSpPr>
         <p:spPr>
           <a:xfrm>
-            <a:off x="3206" y="932595"/>
-            <a:ext cx="322524" cy="215444"/>
+            <a:off x="1273177" y="1454947"/>
+            <a:ext cx="104775" cy="104775"/>
           </a:xfrm>
-          <a:prstGeom prst="rect">
+          <a:prstGeom prst="ellipse">
             <a:avLst/>
           </a:prstGeom>
-          <a:noFill/>
+          <a:solidFill>
+            <a:srgbClr val="F58400"/>
+          </a:solidFill>
+          <a:ln>
+            <a:noFill/>
+          </a:ln>
         </p:spPr>
-        <p:txBody>
-          <a:bodyPr wrap="none">
-            <a:spAutoFit/>
+        <p:style>
+          <a:lnRef idx="2">
+            <a:schemeClr val="accent1">
+              <a:shade val="50000"/>
+            </a:schemeClr>
+          </a:lnRef>
+          <a:fillRef idx="1">
+            <a:schemeClr val="accent1"/>
+          </a:fillRef>
+          <a:effectRef idx="0">
+            <a:schemeClr val="accent1"/>
+          </a:effectRef>
+          <a:fontRef idx="minor">
+            <a:schemeClr val="lt1"/>
+          </a:fontRef>
+        </p:style>
+        <p:txBody>
+          <a:bodyPr rot="0" spcFirstLastPara="0" vertOverflow="overflow" horzOverflow="overflow" vert="horz" wrap="square" lIns="91440" tIns="45720" rIns="91440" bIns="45720" numCol="1" spcCol="0" rtlCol="0" fromWordArt="0" anchor="ctr" anchorCtr="0" forceAA="0" compatLnSpc="1">
+            <a:prstTxWarp prst="textNoShape">
+              <a:avLst/>
+            </a:prstTxWarp>
+            <a:noAutofit/>
           </a:bodyPr>
           <a:lstStyle/>
           <a:p>
-            <a:r>
-              <a:rPr lang="ko-KR" altLang="en-US" sz="800" b="1" dirty="0">
-                <a:solidFill>
-                  <a:srgbClr val="000000"/>
-                </a:solidFill>
-                <a:latin typeface="맑은 고딕" panose="020B0503020000020004" pitchFamily="50" charset="-127"/>
-                <a:ea typeface="맑은 고딕" panose="020B0503020000020004" pitchFamily="50" charset="-127"/>
-              </a:rPr>
-              <a:t>🔄</a:t>
-            </a:r>
-            <a:endParaRPr lang="ko-KR" altLang="en-US" sz="2000" b="1" dirty="0">
-              <a:solidFill>
-                <a:srgbClr val="000000"/>
-              </a:solidFill>
-              <a:latin typeface="KoPub돋움체 Light" panose="02020603020101020101" pitchFamily="18" charset="-127"/>
-              <a:ea typeface="KoPub돋움체 Light" panose="02020603020101020101" pitchFamily="18" charset="-127"/>
-            </a:endParaRPr>
+            <a:pPr algn="ctr"/>
+            <a:endParaRPr lang="ko-KR" altLang="en-US"/>
+          </a:p>
+        </p:txBody>
+      </p:sp>
+      <p:sp>
+        <p:nvSpPr>
+          <p:cNvPr id="22" name="타원 21">
+            <a:extLst>
+              <a:ext uri="{FF2B5EF4-FFF2-40B4-BE49-F238E27FC236}">
+                <a16:creationId xmlns:a16="http://schemas.microsoft.com/office/drawing/2014/main" id="{AFF6DEC5-5BD9-4B7E-BF5B-F8104B5E3033}"/>
+              </a:ext>
+            </a:extLst>
+          </p:cNvPr>
+          <p:cNvSpPr/>
+          <p:nvPr/>
+        </p:nvSpPr>
+        <p:spPr>
+          <a:xfrm>
+            <a:off x="1963740" y="1454947"/>
+            <a:ext cx="104775" cy="104775"/>
+          </a:xfrm>
+          <a:prstGeom prst="ellipse">
+            <a:avLst/>
+          </a:prstGeom>
+          <a:solidFill>
+            <a:srgbClr val="00CC00"/>
+          </a:solidFill>
+          <a:ln>
+            <a:noFill/>
+          </a:ln>
+        </p:spPr>
+        <p:style>
+          <a:lnRef idx="2">
+            <a:schemeClr val="accent1">
+              <a:shade val="50000"/>
+            </a:schemeClr>
+          </a:lnRef>
+          <a:fillRef idx="1">
+            <a:schemeClr val="accent1"/>
+          </a:fillRef>
+          <a:effectRef idx="0">
+            <a:schemeClr val="accent1"/>
+          </a:effectRef>
+          <a:fontRef idx="minor">
+            <a:schemeClr val="lt1"/>
+          </a:fontRef>
+        </p:style>
+        <p:txBody>
+          <a:bodyPr rot="0" spcFirstLastPara="0" vertOverflow="overflow" horzOverflow="overflow" vert="horz" wrap="square" lIns="91440" tIns="45720" rIns="91440" bIns="45720" numCol="1" spcCol="0" rtlCol="0" fromWordArt="0" anchor="ctr" anchorCtr="0" forceAA="0" compatLnSpc="1">
+            <a:prstTxWarp prst="textNoShape">
+              <a:avLst/>
+            </a:prstTxWarp>
+            <a:noAutofit/>
+          </a:bodyPr>
+          <a:lstStyle/>
+          <a:p>
+            <a:pPr algn="ctr"/>
+            <a:endParaRPr lang="ko-KR" altLang="en-US"/>
           </a:p>
         </p:txBody>
       </p:sp>
@@ -5529,7 +5485,7 @@
         <p:cNvPr id="1" name="">
           <a:extLst>
             <a:ext uri="{FF2B5EF4-FFF2-40B4-BE49-F238E27FC236}">
-              <a16:creationId xmlns:a16="http://schemas.microsoft.com/office/drawing/2014/main" id="{41940CDB-3E91-ABCE-1BD5-4D9FDAE6AC90}"/>
+              <a16:creationId xmlns:a16="http://schemas.microsoft.com/office/drawing/2014/main" id="{DFA44891-DB0B-9038-5B25-629A4C227FFF}"/>
             </a:ext>
           </a:extLst>
         </p:cNvPr>
@@ -5549,7 +5505,7 @@
           <p:cNvPr id="25" name="사각형: 둥근 모서리 24">
             <a:extLst>
               <a:ext uri="{FF2B5EF4-FFF2-40B4-BE49-F238E27FC236}">
-                <a16:creationId xmlns:a16="http://schemas.microsoft.com/office/drawing/2014/main" id="{0A8D77AA-F78F-8F77-56BF-C23636DA8DA8}"/>
+                <a16:creationId xmlns:a16="http://schemas.microsoft.com/office/drawing/2014/main" id="{4D2AB74B-0885-7248-82A8-738CC227DF1C}"/>
               </a:ext>
             </a:extLst>
           </p:cNvPr>
@@ -5558,8 +5514,8 @@
         </p:nvSpPr>
         <p:spPr>
           <a:xfrm>
-            <a:off x="807085" y="324614"/>
-            <a:ext cx="2321877" cy="382344"/>
+            <a:off x="818197" y="324615"/>
+            <a:ext cx="2291713" cy="382344"/>
           </a:xfrm>
           <a:prstGeom prst="roundRect">
             <a:avLst>
@@ -5608,7 +5564,7 @@
           <p:cNvPr id="26" name="사각형: 둥근 모서리 25">
             <a:extLst>
               <a:ext uri="{FF2B5EF4-FFF2-40B4-BE49-F238E27FC236}">
-                <a16:creationId xmlns:a16="http://schemas.microsoft.com/office/drawing/2014/main" id="{03D0F2D9-544B-913E-AC0F-8F8835A9FEE8}"/>
+                <a16:creationId xmlns:a16="http://schemas.microsoft.com/office/drawing/2014/main" id="{B073FA0F-66B5-6BAF-0E1F-7AC6E77B5191}"/>
               </a:ext>
             </a:extLst>
           </p:cNvPr>
@@ -5617,8 +5573,8 @@
         </p:nvSpPr>
         <p:spPr>
           <a:xfrm>
-            <a:off x="807085" y="745556"/>
-            <a:ext cx="2321877" cy="592988"/>
+            <a:off x="818197" y="745559"/>
+            <a:ext cx="2291713" cy="592988"/>
           </a:xfrm>
           <a:prstGeom prst="roundRect">
             <a:avLst>
@@ -5667,7 +5623,7 @@
           <p:cNvPr id="21" name="사각형: 둥근 모서리 20">
             <a:extLst>
               <a:ext uri="{FF2B5EF4-FFF2-40B4-BE49-F238E27FC236}">
-                <a16:creationId xmlns:a16="http://schemas.microsoft.com/office/drawing/2014/main" id="{E5058D95-90AD-1016-2E65-18605E3E9BE6}"/>
+                <a16:creationId xmlns:a16="http://schemas.microsoft.com/office/drawing/2014/main" id="{993AC22E-D82C-01DF-84E7-90AC9AD4AD3F}"/>
               </a:ext>
             </a:extLst>
           </p:cNvPr>
@@ -5676,7 +5632,7 @@
         </p:nvSpPr>
         <p:spPr>
           <a:xfrm>
-            <a:off x="73819" y="324614"/>
+            <a:off x="84929" y="324615"/>
             <a:ext cx="721520" cy="382344"/>
           </a:xfrm>
           <a:prstGeom prst="roundRect">
@@ -5724,7 +5680,7 @@
           <p:cNvPr id="3" name="TextBox 2">
             <a:extLst>
               <a:ext uri="{FF2B5EF4-FFF2-40B4-BE49-F238E27FC236}">
-                <a16:creationId xmlns:a16="http://schemas.microsoft.com/office/drawing/2014/main" id="{9F97FB0F-28C7-082B-5253-34A585B2CFBE}"/>
+                <a16:creationId xmlns:a16="http://schemas.microsoft.com/office/drawing/2014/main" id="{CEABBF7A-4383-D72B-A05E-B56FEE94992E}"/>
               </a:ext>
             </a:extLst>
           </p:cNvPr>
@@ -5733,7 +5689,7 @@
         </p:nvSpPr>
         <p:spPr>
           <a:xfrm>
-            <a:off x="61773" y="54245"/>
+            <a:off x="41931" y="54250"/>
             <a:ext cx="1180381" cy="169277"/>
           </a:xfrm>
           <a:prstGeom prst="rect">
@@ -5777,7 +5733,7 @@
           <p:cNvPr id="7" name="TextBox 6">
             <a:extLst>
               <a:ext uri="{FF2B5EF4-FFF2-40B4-BE49-F238E27FC236}">
-                <a16:creationId xmlns:a16="http://schemas.microsoft.com/office/drawing/2014/main" id="{02AFD240-698E-9E23-3D0A-DE05664DEE0A}"/>
+                <a16:creationId xmlns:a16="http://schemas.microsoft.com/office/drawing/2014/main" id="{CF3CA475-D856-01FB-19C8-E100A19DE5EF}"/>
               </a:ext>
             </a:extLst>
           </p:cNvPr>
@@ -5786,8 +5742,8 @@
         </p:nvSpPr>
         <p:spPr>
           <a:xfrm>
-            <a:off x="755416" y="415758"/>
-            <a:ext cx="2627430" cy="215444"/>
+            <a:off x="735575" y="415757"/>
+            <a:ext cx="2627431" cy="215444"/>
           </a:xfrm>
           <a:prstGeom prst="rect">
             <a:avLst/>
@@ -5961,7 +5917,7 @@
           <p:cNvPr id="2" name="사각형: 둥근 모서리 1">
             <a:extLst>
               <a:ext uri="{FF2B5EF4-FFF2-40B4-BE49-F238E27FC236}">
-                <a16:creationId xmlns:a16="http://schemas.microsoft.com/office/drawing/2014/main" id="{3A3AE0C8-4C24-C963-70A7-4C53F40E0437}"/>
+                <a16:creationId xmlns:a16="http://schemas.microsoft.com/office/drawing/2014/main" id="{1B4DC618-B29F-845A-7DD8-6A834C8CEE4F}"/>
               </a:ext>
             </a:extLst>
           </p:cNvPr>
@@ -5970,7 +5926,7 @@
         </p:nvSpPr>
         <p:spPr>
           <a:xfrm>
-            <a:off x="73819" y="745555"/>
+            <a:off x="84929" y="745557"/>
             <a:ext cx="721520" cy="592987"/>
           </a:xfrm>
           <a:prstGeom prst="roundRect">
@@ -6018,7 +5974,7 @@
           <p:cNvPr id="11" name="TextBox 10">
             <a:extLst>
               <a:ext uri="{FF2B5EF4-FFF2-40B4-BE49-F238E27FC236}">
-                <a16:creationId xmlns:a16="http://schemas.microsoft.com/office/drawing/2014/main" id="{5BA91029-4C1F-8C06-664E-1235ADC9A9DE}"/>
+                <a16:creationId xmlns:a16="http://schemas.microsoft.com/office/drawing/2014/main" id="{0F29C902-63CB-1B88-5847-68EBD7D4096A}"/>
               </a:ext>
             </a:extLst>
           </p:cNvPr>
@@ -6027,8 +5983,8 @@
         </p:nvSpPr>
         <p:spPr>
           <a:xfrm>
-            <a:off x="796061" y="718077"/>
-            <a:ext cx="2321878" cy="628121"/>
+            <a:off x="807175" y="718078"/>
+            <a:ext cx="2321879" cy="628121"/>
           </a:xfrm>
           <a:prstGeom prst="rect">
             <a:avLst/>
@@ -6416,7 +6372,7 @@
           <p:cNvPr id="18" name="TextBox 17">
             <a:extLst>
               <a:ext uri="{FF2B5EF4-FFF2-40B4-BE49-F238E27FC236}">
-                <a16:creationId xmlns:a16="http://schemas.microsoft.com/office/drawing/2014/main" id="{6DFB947E-9115-317B-5CB8-04B325AD248F}"/>
+                <a16:creationId xmlns:a16="http://schemas.microsoft.com/office/drawing/2014/main" id="{A177CD16-1AA6-B8C7-0E32-C84E8AF73AC7}"/>
               </a:ext>
             </a:extLst>
           </p:cNvPr>
@@ -6425,7 +6381,7 @@
         </p:nvSpPr>
         <p:spPr>
           <a:xfrm>
-            <a:off x="254362" y="1408811"/>
+            <a:off x="265477" y="1408813"/>
             <a:ext cx="2709863" cy="200055"/>
           </a:xfrm>
           <a:prstGeom prst="rect">
@@ -6540,10 +6496,10 @@
       </p:sp>
       <p:sp>
         <p:nvSpPr>
-          <p:cNvPr id="10" name="TextBox 9">
+          <p:cNvPr id="17" name="TextBox 16">
             <a:extLst>
               <a:ext uri="{FF2B5EF4-FFF2-40B4-BE49-F238E27FC236}">
-                <a16:creationId xmlns:a16="http://schemas.microsoft.com/office/drawing/2014/main" id="{84683F1A-1C5C-B4B7-1064-31763EC0D2DC}"/>
+                <a16:creationId xmlns:a16="http://schemas.microsoft.com/office/drawing/2014/main" id="{67FFF511-7B20-E2F4-96D5-C91B888C0873}"/>
               </a:ext>
             </a:extLst>
           </p:cNvPr>
@@ -6552,132 +6508,7 @@
         </p:nvSpPr>
         <p:spPr>
           <a:xfrm>
-            <a:off x="487241" y="1408811"/>
-            <a:ext cx="308098" cy="200055"/>
-          </a:xfrm>
-          <a:prstGeom prst="rect">
-            <a:avLst/>
-          </a:prstGeom>
-          <a:noFill/>
-        </p:spPr>
-        <p:txBody>
-          <a:bodyPr wrap="none">
-            <a:spAutoFit/>
-          </a:bodyPr>
-          <a:lstStyle/>
-          <a:p>
-            <a:r>
-              <a:rPr lang="ko-KR" altLang="en-US" sz="700" dirty="0">
-                <a:solidFill>
-                  <a:srgbClr val="000000"/>
-                </a:solidFill>
-                <a:latin typeface="맑은 고딕" panose="020B0503020000020004" pitchFamily="50" charset="-127"/>
-                <a:ea typeface="맑은 고딕" panose="020B0503020000020004" pitchFamily="50" charset="-127"/>
-              </a:rPr>
-              <a:t>🔴</a:t>
-            </a:r>
-          </a:p>
-        </p:txBody>
-      </p:sp>
-      <p:sp>
-        <p:nvSpPr>
-          <p:cNvPr id="14" name="TextBox 13">
-            <a:extLst>
-              <a:ext uri="{FF2B5EF4-FFF2-40B4-BE49-F238E27FC236}">
-                <a16:creationId xmlns:a16="http://schemas.microsoft.com/office/drawing/2014/main" id="{32030167-CC51-1FAC-95B8-5C5BF0EA07B3}"/>
-              </a:ext>
-            </a:extLst>
-          </p:cNvPr>
-          <p:cNvSpPr txBox="1"/>
-          <p:nvPr/>
-        </p:nvSpPr>
-        <p:spPr>
-          <a:xfrm>
-            <a:off x="1188617" y="1408811"/>
-            <a:ext cx="308098" cy="200055"/>
-          </a:xfrm>
-          <a:prstGeom prst="rect">
-            <a:avLst/>
-          </a:prstGeom>
-          <a:noFill/>
-        </p:spPr>
-        <p:txBody>
-          <a:bodyPr wrap="none">
-            <a:spAutoFit/>
-          </a:bodyPr>
-          <a:lstStyle/>
-          <a:p>
-            <a:r>
-              <a:rPr lang="ko-KR" altLang="en-US" sz="700" dirty="0"/>
-              <a:t>🟢</a:t>
-            </a:r>
-            <a:endParaRPr lang="ko-KR" altLang="en-US" sz="700" dirty="0">
-              <a:solidFill>
-                <a:srgbClr val="000000"/>
-              </a:solidFill>
-              <a:latin typeface="맑은 고딕" panose="020B0503020000020004" pitchFamily="50" charset="-127"/>
-              <a:ea typeface="맑은 고딕" panose="020B0503020000020004" pitchFamily="50" charset="-127"/>
-            </a:endParaRPr>
-          </a:p>
-        </p:txBody>
-      </p:sp>
-      <p:sp>
-        <p:nvSpPr>
-          <p:cNvPr id="16" name="TextBox 15">
-            <a:extLst>
-              <a:ext uri="{FF2B5EF4-FFF2-40B4-BE49-F238E27FC236}">
-                <a16:creationId xmlns:a16="http://schemas.microsoft.com/office/drawing/2014/main" id="{CC76899E-FBBD-7633-0047-7ECA96232A65}"/>
-              </a:ext>
-            </a:extLst>
-          </p:cNvPr>
-          <p:cNvSpPr txBox="1"/>
-          <p:nvPr/>
-        </p:nvSpPr>
-        <p:spPr>
-          <a:xfrm>
-            <a:off x="1843546" y="1408811"/>
-            <a:ext cx="308098" cy="200055"/>
-          </a:xfrm>
-          <a:prstGeom prst="rect">
-            <a:avLst/>
-          </a:prstGeom>
-          <a:noFill/>
-        </p:spPr>
-        <p:txBody>
-          <a:bodyPr wrap="none">
-            <a:spAutoFit/>
-          </a:bodyPr>
-          <a:lstStyle/>
-          <a:p>
-            <a:r>
-              <a:rPr lang="ko-KR" altLang="en-US" sz="700" dirty="0">
-                <a:solidFill>
-                  <a:srgbClr val="000000"/>
-                </a:solidFill>
-                <a:latin typeface="맑은 고딕" panose="020B0503020000020004" pitchFamily="50" charset="-127"/>
-                <a:ea typeface="맑은 고딕" panose="020B0503020000020004" pitchFamily="50" charset="-127"/>
-              </a:rPr>
-              <a:t>🟡</a:t>
-            </a:r>
-            <a:endParaRPr lang="ko-KR" altLang="en-US" sz="700" dirty="0"/>
-          </a:p>
-        </p:txBody>
-      </p:sp>
-      <p:sp>
-        <p:nvSpPr>
-          <p:cNvPr id="17" name="TextBox 16">
-            <a:extLst>
-              <a:ext uri="{FF2B5EF4-FFF2-40B4-BE49-F238E27FC236}">
-                <a16:creationId xmlns:a16="http://schemas.microsoft.com/office/drawing/2014/main" id="{DA897FDB-79ED-7E65-078D-DE9EB6E9F576}"/>
-              </a:ext>
-            </a:extLst>
-          </p:cNvPr>
-          <p:cNvSpPr txBox="1"/>
-          <p:nvPr/>
-        </p:nvSpPr>
-        <p:spPr>
-          <a:xfrm>
-            <a:off x="157821" y="366661"/>
+            <a:off x="127333" y="366664"/>
             <a:ext cx="636713" cy="338554"/>
           </a:xfrm>
           <a:prstGeom prst="rect">
@@ -6740,7 +6571,7 @@
           <p:cNvPr id="19" name="TextBox 18">
             <a:extLst>
               <a:ext uri="{FF2B5EF4-FFF2-40B4-BE49-F238E27FC236}">
-                <a16:creationId xmlns:a16="http://schemas.microsoft.com/office/drawing/2014/main" id="{42305ABC-9E1A-332B-2D40-4B8E3980D595}"/>
+                <a16:creationId xmlns:a16="http://schemas.microsoft.com/office/drawing/2014/main" id="{80AC34A0-F9F3-3EDB-E7DE-AF18BCE089E6}"/>
               </a:ext>
             </a:extLst>
           </p:cNvPr>
@@ -6749,7 +6580,7 @@
         </p:nvSpPr>
         <p:spPr>
           <a:xfrm>
-            <a:off x="128847" y="932596"/>
+            <a:off x="104891" y="932596"/>
             <a:ext cx="681597" cy="215444"/>
           </a:xfrm>
           <a:prstGeom prst="rect">
@@ -6799,7 +6630,7 @@
           <p:cNvPr id="24" name="직선 연결선 23">
             <a:extLst>
               <a:ext uri="{FF2B5EF4-FFF2-40B4-BE49-F238E27FC236}">
-                <a16:creationId xmlns:a16="http://schemas.microsoft.com/office/drawing/2014/main" id="{AEA05CEA-141B-2837-C5B2-AC41CE533AC8}"/>
+                <a16:creationId xmlns:a16="http://schemas.microsoft.com/office/drawing/2014/main" id="{EF6F1791-FF02-2FDA-4F5D-44CDEE636F8C}"/>
               </a:ext>
             </a:extLst>
           </p:cNvPr>
@@ -6808,7 +6639,7 @@
         </p:nvCxnSpPr>
         <p:spPr>
           <a:xfrm flipH="1">
-            <a:off x="154781" y="1373677"/>
+            <a:off x="165891" y="1373677"/>
             <a:ext cx="2909888" cy="0"/>
           </a:xfrm>
           <a:prstGeom prst="line">
@@ -6839,98 +6670,179 @@
       </p:cxnSp>
       <p:sp>
         <p:nvSpPr>
-          <p:cNvPr id="4" name="TextBox 3">
+          <p:cNvPr id="6" name="타원 5">
             <a:extLst>
               <a:ext uri="{FF2B5EF4-FFF2-40B4-BE49-F238E27FC236}">
-                <a16:creationId xmlns:a16="http://schemas.microsoft.com/office/drawing/2014/main" id="{256B8E54-16DE-3797-7D73-8F1C9E349A75}"/>
+                <a16:creationId xmlns:a16="http://schemas.microsoft.com/office/drawing/2014/main" id="{CEA2B6CD-6F59-45DE-B26A-1E44DF2411D7}"/>
               </a:ext>
             </a:extLst>
           </p:cNvPr>
-          <p:cNvSpPr txBox="1"/>
+          <p:cNvSpPr/>
           <p:nvPr/>
         </p:nvSpPr>
         <p:spPr>
           <a:xfrm>
-            <a:off x="0" y="408064"/>
-            <a:ext cx="325730" cy="215444"/>
+            <a:off x="582615" y="1454947"/>
+            <a:ext cx="104775" cy="104775"/>
           </a:xfrm>
-          <a:prstGeom prst="rect">
+          <a:prstGeom prst="ellipse">
             <a:avLst/>
           </a:prstGeom>
-          <a:noFill/>
+          <a:solidFill>
+            <a:srgbClr val="FF0000"/>
+          </a:solidFill>
+          <a:ln>
+            <a:noFill/>
+          </a:ln>
         </p:spPr>
-        <p:txBody>
-          <a:bodyPr wrap="none">
-            <a:spAutoFit/>
+        <p:style>
+          <a:lnRef idx="2">
+            <a:schemeClr val="accent1">
+              <a:shade val="50000"/>
+            </a:schemeClr>
+          </a:lnRef>
+          <a:fillRef idx="1">
+            <a:schemeClr val="accent1"/>
+          </a:fillRef>
+          <a:effectRef idx="0">
+            <a:schemeClr val="accent1"/>
+          </a:effectRef>
+          <a:fontRef idx="minor">
+            <a:schemeClr val="lt1"/>
+          </a:fontRef>
+        </p:style>
+        <p:txBody>
+          <a:bodyPr rot="0" spcFirstLastPara="0" vertOverflow="overflow" horzOverflow="overflow" vert="horz" wrap="square" lIns="91440" tIns="45720" rIns="91440" bIns="45720" numCol="1" spcCol="0" rtlCol="0" fromWordArt="0" anchor="ctr" anchorCtr="0" forceAA="0" compatLnSpc="1">
+            <a:prstTxWarp prst="textNoShape">
+              <a:avLst/>
+            </a:prstTxWarp>
+            <a:noAutofit/>
           </a:bodyPr>
           <a:lstStyle/>
           <a:p>
-            <a:r>
-              <a:rPr lang="ko-KR" altLang="en-US" sz="800" dirty="0"/>
-              <a:t>📌</a:t>
-            </a:r>
-            <a:endParaRPr lang="ko-KR" altLang="en-US" sz="800" b="1" dirty="0">
-              <a:solidFill>
-                <a:srgbClr val="000000"/>
-              </a:solidFill>
-              <a:latin typeface="KoPub돋움체 Medium" panose="02020603020101020101" pitchFamily="18" charset="-127"/>
-              <a:ea typeface="KoPub돋움체 Medium" panose="02020603020101020101" pitchFamily="18" charset="-127"/>
-            </a:endParaRPr>
-          </a:p>
-        </p:txBody>
-      </p:sp>
-      <p:sp>
-        <p:nvSpPr>
-          <p:cNvPr id="5" name="TextBox 4">
+            <a:pPr algn="ctr"/>
+            <a:endParaRPr lang="ko-KR" altLang="en-US"/>
+          </a:p>
+        </p:txBody>
+      </p:sp>
+      <p:sp>
+        <p:nvSpPr>
+          <p:cNvPr id="20" name="타원 19">
             <a:extLst>
               <a:ext uri="{FF2B5EF4-FFF2-40B4-BE49-F238E27FC236}">
-                <a16:creationId xmlns:a16="http://schemas.microsoft.com/office/drawing/2014/main" id="{1DD9F539-E29E-6ABC-75F6-A769F6B3357F}"/>
+                <a16:creationId xmlns:a16="http://schemas.microsoft.com/office/drawing/2014/main" id="{5475DBC3-BF9A-42B4-81E3-C8A239B20A22}"/>
               </a:ext>
             </a:extLst>
           </p:cNvPr>
-          <p:cNvSpPr txBox="1"/>
+          <p:cNvSpPr/>
           <p:nvPr/>
         </p:nvSpPr>
         <p:spPr>
           <a:xfrm>
-            <a:off x="3206" y="932595"/>
-            <a:ext cx="322524" cy="215444"/>
+            <a:off x="1273177" y="1454947"/>
+            <a:ext cx="104775" cy="104775"/>
           </a:xfrm>
-          <a:prstGeom prst="rect">
+          <a:prstGeom prst="ellipse">
             <a:avLst/>
           </a:prstGeom>
-          <a:noFill/>
+          <a:solidFill>
+            <a:srgbClr val="F58400"/>
+          </a:solidFill>
+          <a:ln>
+            <a:noFill/>
+          </a:ln>
         </p:spPr>
-        <p:txBody>
-          <a:bodyPr wrap="none">
-            <a:spAutoFit/>
+        <p:style>
+          <a:lnRef idx="2">
+            <a:schemeClr val="accent1">
+              <a:shade val="50000"/>
+            </a:schemeClr>
+          </a:lnRef>
+          <a:fillRef idx="1">
+            <a:schemeClr val="accent1"/>
+          </a:fillRef>
+          <a:effectRef idx="0">
+            <a:schemeClr val="accent1"/>
+          </a:effectRef>
+          <a:fontRef idx="minor">
+            <a:schemeClr val="lt1"/>
+          </a:fontRef>
+        </p:style>
+        <p:txBody>
+          <a:bodyPr rot="0" spcFirstLastPara="0" vertOverflow="overflow" horzOverflow="overflow" vert="horz" wrap="square" lIns="91440" tIns="45720" rIns="91440" bIns="45720" numCol="1" spcCol="0" rtlCol="0" fromWordArt="0" anchor="ctr" anchorCtr="0" forceAA="0" compatLnSpc="1">
+            <a:prstTxWarp prst="textNoShape">
+              <a:avLst/>
+            </a:prstTxWarp>
+            <a:noAutofit/>
           </a:bodyPr>
           <a:lstStyle/>
           <a:p>
-            <a:r>
-              <a:rPr lang="ko-KR" altLang="en-US" sz="800" b="1" dirty="0">
-                <a:solidFill>
-                  <a:srgbClr val="000000"/>
-                </a:solidFill>
-                <a:latin typeface="맑은 고딕" panose="020B0503020000020004" pitchFamily="50" charset="-127"/>
-                <a:ea typeface="맑은 고딕" panose="020B0503020000020004" pitchFamily="50" charset="-127"/>
-              </a:rPr>
-              <a:t>🔄</a:t>
-            </a:r>
-            <a:endParaRPr lang="ko-KR" altLang="en-US" sz="2000" b="1" dirty="0">
-              <a:solidFill>
-                <a:srgbClr val="000000"/>
-              </a:solidFill>
-              <a:latin typeface="KoPub돋움체 Light" panose="02020603020101020101" pitchFamily="18" charset="-127"/>
-              <a:ea typeface="KoPub돋움체 Light" panose="02020603020101020101" pitchFamily="18" charset="-127"/>
-            </a:endParaRPr>
+            <a:pPr algn="ctr"/>
+            <a:endParaRPr lang="ko-KR" altLang="en-US"/>
+          </a:p>
+        </p:txBody>
+      </p:sp>
+      <p:sp>
+        <p:nvSpPr>
+          <p:cNvPr id="22" name="타원 21">
+            <a:extLst>
+              <a:ext uri="{FF2B5EF4-FFF2-40B4-BE49-F238E27FC236}">
+                <a16:creationId xmlns:a16="http://schemas.microsoft.com/office/drawing/2014/main" id="{AFF6DEC5-5BD9-4B7E-BF5B-F8104B5E3033}"/>
+              </a:ext>
+            </a:extLst>
+          </p:cNvPr>
+          <p:cNvSpPr/>
+          <p:nvPr/>
+        </p:nvSpPr>
+        <p:spPr>
+          <a:xfrm>
+            <a:off x="1963740" y="1454947"/>
+            <a:ext cx="104775" cy="104775"/>
+          </a:xfrm>
+          <a:prstGeom prst="ellipse">
+            <a:avLst/>
+          </a:prstGeom>
+          <a:solidFill>
+            <a:srgbClr val="00CC00"/>
+          </a:solidFill>
+          <a:ln>
+            <a:noFill/>
+          </a:ln>
+        </p:spPr>
+        <p:style>
+          <a:lnRef idx="2">
+            <a:schemeClr val="accent1">
+              <a:shade val="50000"/>
+            </a:schemeClr>
+          </a:lnRef>
+          <a:fillRef idx="1">
+            <a:schemeClr val="accent1"/>
+          </a:fillRef>
+          <a:effectRef idx="0">
+            <a:schemeClr val="accent1"/>
+          </a:effectRef>
+          <a:fontRef idx="minor">
+            <a:schemeClr val="lt1"/>
+          </a:fontRef>
+        </p:style>
+        <p:txBody>
+          <a:bodyPr rot="0" spcFirstLastPara="0" vertOverflow="overflow" horzOverflow="overflow" vert="horz" wrap="square" lIns="91440" tIns="45720" rIns="91440" bIns="45720" numCol="1" spcCol="0" rtlCol="0" fromWordArt="0" anchor="ctr" anchorCtr="0" forceAA="0" compatLnSpc="1">
+            <a:prstTxWarp prst="textNoShape">
+              <a:avLst/>
+            </a:prstTxWarp>
+            <a:noAutofit/>
+          </a:bodyPr>
+          <a:lstStyle/>
+          <a:p>
+            <a:pPr algn="ctr"/>
+            <a:endParaRPr lang="ko-KR" altLang="en-US"/>
           </a:p>
         </p:txBody>
       </p:sp>
     </p:spTree>
     <p:extLst>
       <p:ext uri="{BB962C8B-B14F-4D97-AF65-F5344CB8AC3E}">
-        <p14:creationId xmlns:p14="http://schemas.microsoft.com/office/powerpoint/2010/main" val="3849975432"/>
+        <p14:creationId xmlns:p14="http://schemas.microsoft.com/office/powerpoint/2010/main" val="64153278"/>
       </p:ext>
     </p:extLst>
   </p:cSld>
@@ -6948,7 +6860,7 @@
         <p:cNvPr id="1" name="">
           <a:extLst>
             <a:ext uri="{FF2B5EF4-FFF2-40B4-BE49-F238E27FC236}">
-              <a16:creationId xmlns:a16="http://schemas.microsoft.com/office/drawing/2014/main" id="{19DEF488-FE44-C190-3070-1EF1EC6E5F56}"/>
+              <a16:creationId xmlns:a16="http://schemas.microsoft.com/office/drawing/2014/main" id="{DFA44891-DB0B-9038-5B25-629A4C227FFF}"/>
             </a:ext>
           </a:extLst>
         </p:cNvPr>
@@ -6968,7 +6880,7 @@
           <p:cNvPr id="25" name="사각형: 둥근 모서리 24">
             <a:extLst>
               <a:ext uri="{FF2B5EF4-FFF2-40B4-BE49-F238E27FC236}">
-                <a16:creationId xmlns:a16="http://schemas.microsoft.com/office/drawing/2014/main" id="{88630C7C-90BA-384A-7088-23B2E6D4A493}"/>
+                <a16:creationId xmlns:a16="http://schemas.microsoft.com/office/drawing/2014/main" id="{4D2AB74B-0885-7248-82A8-738CC227DF1C}"/>
               </a:ext>
             </a:extLst>
           </p:cNvPr>
@@ -6977,8 +6889,8 @@
         </p:nvSpPr>
         <p:spPr>
           <a:xfrm>
-            <a:off x="807085" y="324614"/>
-            <a:ext cx="2321877" cy="382344"/>
+            <a:off x="818197" y="324615"/>
+            <a:ext cx="2291713" cy="382344"/>
           </a:xfrm>
           <a:prstGeom prst="roundRect">
             <a:avLst>
@@ -7027,7 +6939,7 @@
           <p:cNvPr id="26" name="사각형: 둥근 모서리 25">
             <a:extLst>
               <a:ext uri="{FF2B5EF4-FFF2-40B4-BE49-F238E27FC236}">
-                <a16:creationId xmlns:a16="http://schemas.microsoft.com/office/drawing/2014/main" id="{FCB73556-49F1-E266-704E-FBB1F0859CDE}"/>
+                <a16:creationId xmlns:a16="http://schemas.microsoft.com/office/drawing/2014/main" id="{B073FA0F-66B5-6BAF-0E1F-7AC6E77B5191}"/>
               </a:ext>
             </a:extLst>
           </p:cNvPr>
@@ -7036,8 +6948,8 @@
         </p:nvSpPr>
         <p:spPr>
           <a:xfrm>
-            <a:off x="807085" y="745556"/>
-            <a:ext cx="2321877" cy="592988"/>
+            <a:off x="818197" y="745559"/>
+            <a:ext cx="2291713" cy="592988"/>
           </a:xfrm>
           <a:prstGeom prst="roundRect">
             <a:avLst>
@@ -7086,7 +6998,7 @@
           <p:cNvPr id="21" name="사각형: 둥근 모서리 20">
             <a:extLst>
               <a:ext uri="{FF2B5EF4-FFF2-40B4-BE49-F238E27FC236}">
-                <a16:creationId xmlns:a16="http://schemas.microsoft.com/office/drawing/2014/main" id="{E15D1832-05AD-47D8-A21F-8EB177D40E79}"/>
+                <a16:creationId xmlns:a16="http://schemas.microsoft.com/office/drawing/2014/main" id="{993AC22E-D82C-01DF-84E7-90AC9AD4AD3F}"/>
               </a:ext>
             </a:extLst>
           </p:cNvPr>
@@ -7095,7 +7007,7 @@
         </p:nvSpPr>
         <p:spPr>
           <a:xfrm>
-            <a:off x="73819" y="324614"/>
+            <a:off x="84929" y="324615"/>
             <a:ext cx="721520" cy="382344"/>
           </a:xfrm>
           <a:prstGeom prst="roundRect">
@@ -7143,7 +7055,7 @@
           <p:cNvPr id="3" name="TextBox 2">
             <a:extLst>
               <a:ext uri="{FF2B5EF4-FFF2-40B4-BE49-F238E27FC236}">
-                <a16:creationId xmlns:a16="http://schemas.microsoft.com/office/drawing/2014/main" id="{5F97C886-E762-C2A7-B616-65B9C8FAE37D}"/>
+                <a16:creationId xmlns:a16="http://schemas.microsoft.com/office/drawing/2014/main" id="{CEABBF7A-4383-D72B-A05E-B56FEE94992E}"/>
               </a:ext>
             </a:extLst>
           </p:cNvPr>
@@ -7152,7 +7064,7 @@
         </p:nvSpPr>
         <p:spPr>
           <a:xfrm>
-            <a:off x="61773" y="54245"/>
+            <a:off x="41931" y="54250"/>
             <a:ext cx="1180381" cy="169277"/>
           </a:xfrm>
           <a:prstGeom prst="rect">
@@ -7196,7 +7108,7 @@
           <p:cNvPr id="7" name="TextBox 6">
             <a:extLst>
               <a:ext uri="{FF2B5EF4-FFF2-40B4-BE49-F238E27FC236}">
-                <a16:creationId xmlns:a16="http://schemas.microsoft.com/office/drawing/2014/main" id="{79081E0D-5034-CE30-BBA5-C787C5A36A77}"/>
+                <a16:creationId xmlns:a16="http://schemas.microsoft.com/office/drawing/2014/main" id="{CF3CA475-D856-01FB-19C8-E100A19DE5EF}"/>
               </a:ext>
             </a:extLst>
           </p:cNvPr>
@@ -7205,8 +7117,8 @@
         </p:nvSpPr>
         <p:spPr>
           <a:xfrm>
-            <a:off x="755416" y="415758"/>
-            <a:ext cx="2627430" cy="215444"/>
+            <a:off x="735575" y="415757"/>
+            <a:ext cx="2627431" cy="215444"/>
           </a:xfrm>
           <a:prstGeom prst="rect">
             <a:avLst/>
@@ -7380,7 +7292,7 @@
           <p:cNvPr id="2" name="사각형: 둥근 모서리 1">
             <a:extLst>
               <a:ext uri="{FF2B5EF4-FFF2-40B4-BE49-F238E27FC236}">
-                <a16:creationId xmlns:a16="http://schemas.microsoft.com/office/drawing/2014/main" id="{998811E5-5D10-5386-8577-DD276BEE5594}"/>
+                <a16:creationId xmlns:a16="http://schemas.microsoft.com/office/drawing/2014/main" id="{1B4DC618-B29F-845A-7DD8-6A834C8CEE4F}"/>
               </a:ext>
             </a:extLst>
           </p:cNvPr>
@@ -7389,7 +7301,7 @@
         </p:nvSpPr>
         <p:spPr>
           <a:xfrm>
-            <a:off x="73819" y="745555"/>
+            <a:off x="84929" y="745557"/>
             <a:ext cx="721520" cy="592987"/>
           </a:xfrm>
           <a:prstGeom prst="roundRect">
@@ -7437,7 +7349,7 @@
           <p:cNvPr id="11" name="TextBox 10">
             <a:extLst>
               <a:ext uri="{FF2B5EF4-FFF2-40B4-BE49-F238E27FC236}">
-                <a16:creationId xmlns:a16="http://schemas.microsoft.com/office/drawing/2014/main" id="{ABCF7331-ADDF-3ADF-F46B-2135DFDCF92B}"/>
+                <a16:creationId xmlns:a16="http://schemas.microsoft.com/office/drawing/2014/main" id="{0F29C902-63CB-1B88-5847-68EBD7D4096A}"/>
               </a:ext>
             </a:extLst>
           </p:cNvPr>
@@ -7446,8 +7358,8 @@
         </p:nvSpPr>
         <p:spPr>
           <a:xfrm>
-            <a:off x="796061" y="718077"/>
-            <a:ext cx="2321878" cy="628121"/>
+            <a:off x="807175" y="718078"/>
+            <a:ext cx="2321879" cy="628121"/>
           </a:xfrm>
           <a:prstGeom prst="rect">
             <a:avLst/>
@@ -7835,7 +7747,7 @@
           <p:cNvPr id="18" name="TextBox 17">
             <a:extLst>
               <a:ext uri="{FF2B5EF4-FFF2-40B4-BE49-F238E27FC236}">
-                <a16:creationId xmlns:a16="http://schemas.microsoft.com/office/drawing/2014/main" id="{6CFF78CD-C9B2-2F1C-9804-4C2D6804A637}"/>
+                <a16:creationId xmlns:a16="http://schemas.microsoft.com/office/drawing/2014/main" id="{A177CD16-1AA6-B8C7-0E32-C84E8AF73AC7}"/>
               </a:ext>
             </a:extLst>
           </p:cNvPr>
@@ -7844,7 +7756,7 @@
         </p:nvSpPr>
         <p:spPr>
           <a:xfrm>
-            <a:off x="254362" y="1408811"/>
+            <a:off x="265477" y="1408813"/>
             <a:ext cx="2709863" cy="200055"/>
           </a:xfrm>
           <a:prstGeom prst="rect">
@@ -7959,10 +7871,10 @@
       </p:sp>
       <p:sp>
         <p:nvSpPr>
-          <p:cNvPr id="10" name="TextBox 9">
+          <p:cNvPr id="17" name="TextBox 16">
             <a:extLst>
               <a:ext uri="{FF2B5EF4-FFF2-40B4-BE49-F238E27FC236}">
-                <a16:creationId xmlns:a16="http://schemas.microsoft.com/office/drawing/2014/main" id="{D9ABE135-7B3A-8D72-9803-8378CB7F8077}"/>
+                <a16:creationId xmlns:a16="http://schemas.microsoft.com/office/drawing/2014/main" id="{67FFF511-7B20-E2F4-96D5-C91B888C0873}"/>
               </a:ext>
             </a:extLst>
           </p:cNvPr>
@@ -7971,132 +7883,7 @@
         </p:nvSpPr>
         <p:spPr>
           <a:xfrm>
-            <a:off x="487241" y="1408811"/>
-            <a:ext cx="308098" cy="200055"/>
-          </a:xfrm>
-          <a:prstGeom prst="rect">
-            <a:avLst/>
-          </a:prstGeom>
-          <a:noFill/>
-        </p:spPr>
-        <p:txBody>
-          <a:bodyPr wrap="none">
-            <a:spAutoFit/>
-          </a:bodyPr>
-          <a:lstStyle/>
-          <a:p>
-            <a:r>
-              <a:rPr lang="ko-KR" altLang="en-US" sz="700" dirty="0">
-                <a:solidFill>
-                  <a:srgbClr val="000000"/>
-                </a:solidFill>
-                <a:latin typeface="맑은 고딕" panose="020B0503020000020004" pitchFamily="50" charset="-127"/>
-                <a:ea typeface="맑은 고딕" panose="020B0503020000020004" pitchFamily="50" charset="-127"/>
-              </a:rPr>
-              <a:t>🔴</a:t>
-            </a:r>
-          </a:p>
-        </p:txBody>
-      </p:sp>
-      <p:sp>
-        <p:nvSpPr>
-          <p:cNvPr id="14" name="TextBox 13">
-            <a:extLst>
-              <a:ext uri="{FF2B5EF4-FFF2-40B4-BE49-F238E27FC236}">
-                <a16:creationId xmlns:a16="http://schemas.microsoft.com/office/drawing/2014/main" id="{9A396CFC-A3AA-3CCB-1307-900AA87E7E1F}"/>
-              </a:ext>
-            </a:extLst>
-          </p:cNvPr>
-          <p:cNvSpPr txBox="1"/>
-          <p:nvPr/>
-        </p:nvSpPr>
-        <p:spPr>
-          <a:xfrm>
-            <a:off x="1188617" y="1408811"/>
-            <a:ext cx="308098" cy="200055"/>
-          </a:xfrm>
-          <a:prstGeom prst="rect">
-            <a:avLst/>
-          </a:prstGeom>
-          <a:noFill/>
-        </p:spPr>
-        <p:txBody>
-          <a:bodyPr wrap="none">
-            <a:spAutoFit/>
-          </a:bodyPr>
-          <a:lstStyle/>
-          <a:p>
-            <a:r>
-              <a:rPr lang="ko-KR" altLang="en-US" sz="700" dirty="0"/>
-              <a:t>🟢</a:t>
-            </a:r>
-            <a:endParaRPr lang="ko-KR" altLang="en-US" sz="700" dirty="0">
-              <a:solidFill>
-                <a:srgbClr val="000000"/>
-              </a:solidFill>
-              <a:latin typeface="맑은 고딕" panose="020B0503020000020004" pitchFamily="50" charset="-127"/>
-              <a:ea typeface="맑은 고딕" panose="020B0503020000020004" pitchFamily="50" charset="-127"/>
-            </a:endParaRPr>
-          </a:p>
-        </p:txBody>
-      </p:sp>
-      <p:sp>
-        <p:nvSpPr>
-          <p:cNvPr id="16" name="TextBox 15">
-            <a:extLst>
-              <a:ext uri="{FF2B5EF4-FFF2-40B4-BE49-F238E27FC236}">
-                <a16:creationId xmlns:a16="http://schemas.microsoft.com/office/drawing/2014/main" id="{4C534644-BA40-4725-513D-C54764BC4A0B}"/>
-              </a:ext>
-            </a:extLst>
-          </p:cNvPr>
-          <p:cNvSpPr txBox="1"/>
-          <p:nvPr/>
-        </p:nvSpPr>
-        <p:spPr>
-          <a:xfrm>
-            <a:off x="1843546" y="1408811"/>
-            <a:ext cx="308098" cy="200055"/>
-          </a:xfrm>
-          <a:prstGeom prst="rect">
-            <a:avLst/>
-          </a:prstGeom>
-          <a:noFill/>
-        </p:spPr>
-        <p:txBody>
-          <a:bodyPr wrap="none">
-            <a:spAutoFit/>
-          </a:bodyPr>
-          <a:lstStyle/>
-          <a:p>
-            <a:r>
-              <a:rPr lang="ko-KR" altLang="en-US" sz="700" dirty="0">
-                <a:solidFill>
-                  <a:srgbClr val="000000"/>
-                </a:solidFill>
-                <a:latin typeface="맑은 고딕" panose="020B0503020000020004" pitchFamily="50" charset="-127"/>
-                <a:ea typeface="맑은 고딕" panose="020B0503020000020004" pitchFamily="50" charset="-127"/>
-              </a:rPr>
-              <a:t>🟡</a:t>
-            </a:r>
-            <a:endParaRPr lang="ko-KR" altLang="en-US" sz="700" dirty="0"/>
-          </a:p>
-        </p:txBody>
-      </p:sp>
-      <p:sp>
-        <p:nvSpPr>
-          <p:cNvPr id="17" name="TextBox 16">
-            <a:extLst>
-              <a:ext uri="{FF2B5EF4-FFF2-40B4-BE49-F238E27FC236}">
-                <a16:creationId xmlns:a16="http://schemas.microsoft.com/office/drawing/2014/main" id="{B2EF3F77-52F3-638E-D00D-DF2A04B91F01}"/>
-              </a:ext>
-            </a:extLst>
-          </p:cNvPr>
-          <p:cNvSpPr txBox="1"/>
-          <p:nvPr/>
-        </p:nvSpPr>
-        <p:spPr>
-          <a:xfrm>
-            <a:off x="157821" y="366661"/>
+            <a:off x="127333" y="366664"/>
             <a:ext cx="636713" cy="338554"/>
           </a:xfrm>
           <a:prstGeom prst="rect">
@@ -8159,7 +7946,7 @@
           <p:cNvPr id="19" name="TextBox 18">
             <a:extLst>
               <a:ext uri="{FF2B5EF4-FFF2-40B4-BE49-F238E27FC236}">
-                <a16:creationId xmlns:a16="http://schemas.microsoft.com/office/drawing/2014/main" id="{71F9010E-3965-D159-1379-71F558280C54}"/>
+                <a16:creationId xmlns:a16="http://schemas.microsoft.com/office/drawing/2014/main" id="{80AC34A0-F9F3-3EDB-E7DE-AF18BCE089E6}"/>
               </a:ext>
             </a:extLst>
           </p:cNvPr>
@@ -8168,7 +7955,7 @@
         </p:nvSpPr>
         <p:spPr>
           <a:xfrm>
-            <a:off x="128847" y="932596"/>
+            <a:off x="104891" y="932596"/>
             <a:ext cx="681597" cy="215444"/>
           </a:xfrm>
           <a:prstGeom prst="rect">
@@ -8218,7 +8005,7 @@
           <p:cNvPr id="24" name="직선 연결선 23">
             <a:extLst>
               <a:ext uri="{FF2B5EF4-FFF2-40B4-BE49-F238E27FC236}">
-                <a16:creationId xmlns:a16="http://schemas.microsoft.com/office/drawing/2014/main" id="{10B4FC6C-D98D-ACEB-E494-CDD314CFB792}"/>
+                <a16:creationId xmlns:a16="http://schemas.microsoft.com/office/drawing/2014/main" id="{EF6F1791-FF02-2FDA-4F5D-44CDEE636F8C}"/>
               </a:ext>
             </a:extLst>
           </p:cNvPr>
@@ -8227,7 +8014,7 @@
         </p:nvCxnSpPr>
         <p:spPr>
           <a:xfrm flipH="1">
-            <a:off x="154781" y="1373677"/>
+            <a:off x="165891" y="1373677"/>
             <a:ext cx="2909888" cy="0"/>
           </a:xfrm>
           <a:prstGeom prst="line">
@@ -8258,98 +8045,179 @@
       </p:cxnSp>
       <p:sp>
         <p:nvSpPr>
-          <p:cNvPr id="4" name="TextBox 3">
+          <p:cNvPr id="6" name="타원 5">
             <a:extLst>
               <a:ext uri="{FF2B5EF4-FFF2-40B4-BE49-F238E27FC236}">
-                <a16:creationId xmlns:a16="http://schemas.microsoft.com/office/drawing/2014/main" id="{7DDA56DB-5278-E67F-17C1-FABC9AC0DE35}"/>
+                <a16:creationId xmlns:a16="http://schemas.microsoft.com/office/drawing/2014/main" id="{CEA2B6CD-6F59-45DE-B26A-1E44DF2411D7}"/>
               </a:ext>
             </a:extLst>
           </p:cNvPr>
-          <p:cNvSpPr txBox="1"/>
+          <p:cNvSpPr/>
           <p:nvPr/>
         </p:nvSpPr>
         <p:spPr>
           <a:xfrm>
-            <a:off x="0" y="408064"/>
-            <a:ext cx="325730" cy="215444"/>
+            <a:off x="582615" y="1454947"/>
+            <a:ext cx="104775" cy="104775"/>
           </a:xfrm>
-          <a:prstGeom prst="rect">
+          <a:prstGeom prst="ellipse">
             <a:avLst/>
           </a:prstGeom>
-          <a:noFill/>
+          <a:solidFill>
+            <a:srgbClr val="FF0000"/>
+          </a:solidFill>
+          <a:ln>
+            <a:noFill/>
+          </a:ln>
         </p:spPr>
-        <p:txBody>
-          <a:bodyPr wrap="none">
-            <a:spAutoFit/>
+        <p:style>
+          <a:lnRef idx="2">
+            <a:schemeClr val="accent1">
+              <a:shade val="50000"/>
+            </a:schemeClr>
+          </a:lnRef>
+          <a:fillRef idx="1">
+            <a:schemeClr val="accent1"/>
+          </a:fillRef>
+          <a:effectRef idx="0">
+            <a:schemeClr val="accent1"/>
+          </a:effectRef>
+          <a:fontRef idx="minor">
+            <a:schemeClr val="lt1"/>
+          </a:fontRef>
+        </p:style>
+        <p:txBody>
+          <a:bodyPr rot="0" spcFirstLastPara="0" vertOverflow="overflow" horzOverflow="overflow" vert="horz" wrap="square" lIns="91440" tIns="45720" rIns="91440" bIns="45720" numCol="1" spcCol="0" rtlCol="0" fromWordArt="0" anchor="ctr" anchorCtr="0" forceAA="0" compatLnSpc="1">
+            <a:prstTxWarp prst="textNoShape">
+              <a:avLst/>
+            </a:prstTxWarp>
+            <a:noAutofit/>
           </a:bodyPr>
           <a:lstStyle/>
           <a:p>
-            <a:r>
-              <a:rPr lang="ko-KR" altLang="en-US" sz="800" dirty="0"/>
-              <a:t>📌</a:t>
-            </a:r>
-            <a:endParaRPr lang="ko-KR" altLang="en-US" sz="800" b="1" dirty="0">
-              <a:solidFill>
-                <a:srgbClr val="000000"/>
-              </a:solidFill>
-              <a:latin typeface="KoPub돋움체 Medium" panose="02020603020101020101" pitchFamily="18" charset="-127"/>
-              <a:ea typeface="KoPub돋움체 Medium" panose="02020603020101020101" pitchFamily="18" charset="-127"/>
-            </a:endParaRPr>
-          </a:p>
-        </p:txBody>
-      </p:sp>
-      <p:sp>
-        <p:nvSpPr>
-          <p:cNvPr id="5" name="TextBox 4">
+            <a:pPr algn="ctr"/>
+            <a:endParaRPr lang="ko-KR" altLang="en-US"/>
+          </a:p>
+        </p:txBody>
+      </p:sp>
+      <p:sp>
+        <p:nvSpPr>
+          <p:cNvPr id="20" name="타원 19">
             <a:extLst>
               <a:ext uri="{FF2B5EF4-FFF2-40B4-BE49-F238E27FC236}">
-                <a16:creationId xmlns:a16="http://schemas.microsoft.com/office/drawing/2014/main" id="{E50B856A-789C-5151-0D1D-AD72CEE52CD9}"/>
+                <a16:creationId xmlns:a16="http://schemas.microsoft.com/office/drawing/2014/main" id="{5475DBC3-BF9A-42B4-81E3-C8A239B20A22}"/>
               </a:ext>
             </a:extLst>
           </p:cNvPr>
-          <p:cNvSpPr txBox="1"/>
+          <p:cNvSpPr/>
           <p:nvPr/>
         </p:nvSpPr>
         <p:spPr>
           <a:xfrm>
-            <a:off x="3206" y="932595"/>
-            <a:ext cx="322524" cy="215444"/>
+            <a:off x="1273177" y="1454947"/>
+            <a:ext cx="104775" cy="104775"/>
           </a:xfrm>
-          <a:prstGeom prst="rect">
+          <a:prstGeom prst="ellipse">
             <a:avLst/>
           </a:prstGeom>
-          <a:noFill/>
+          <a:solidFill>
+            <a:srgbClr val="F58400"/>
+          </a:solidFill>
+          <a:ln>
+            <a:noFill/>
+          </a:ln>
         </p:spPr>
-        <p:txBody>
-          <a:bodyPr wrap="none">
-            <a:spAutoFit/>
+        <p:style>
+          <a:lnRef idx="2">
+            <a:schemeClr val="accent1">
+              <a:shade val="50000"/>
+            </a:schemeClr>
+          </a:lnRef>
+          <a:fillRef idx="1">
+            <a:schemeClr val="accent1"/>
+          </a:fillRef>
+          <a:effectRef idx="0">
+            <a:schemeClr val="accent1"/>
+          </a:effectRef>
+          <a:fontRef idx="minor">
+            <a:schemeClr val="lt1"/>
+          </a:fontRef>
+        </p:style>
+        <p:txBody>
+          <a:bodyPr rot="0" spcFirstLastPara="0" vertOverflow="overflow" horzOverflow="overflow" vert="horz" wrap="square" lIns="91440" tIns="45720" rIns="91440" bIns="45720" numCol="1" spcCol="0" rtlCol="0" fromWordArt="0" anchor="ctr" anchorCtr="0" forceAA="0" compatLnSpc="1">
+            <a:prstTxWarp prst="textNoShape">
+              <a:avLst/>
+            </a:prstTxWarp>
+            <a:noAutofit/>
           </a:bodyPr>
           <a:lstStyle/>
           <a:p>
-            <a:r>
-              <a:rPr lang="ko-KR" altLang="en-US" sz="800" b="1" dirty="0">
-                <a:solidFill>
-                  <a:srgbClr val="000000"/>
-                </a:solidFill>
-                <a:latin typeface="맑은 고딕" panose="020B0503020000020004" pitchFamily="50" charset="-127"/>
-                <a:ea typeface="맑은 고딕" panose="020B0503020000020004" pitchFamily="50" charset="-127"/>
-              </a:rPr>
-              <a:t>🔄</a:t>
-            </a:r>
-            <a:endParaRPr lang="ko-KR" altLang="en-US" sz="2000" b="1" dirty="0">
-              <a:solidFill>
-                <a:srgbClr val="000000"/>
-              </a:solidFill>
-              <a:latin typeface="KoPub돋움체 Light" panose="02020603020101020101" pitchFamily="18" charset="-127"/>
-              <a:ea typeface="KoPub돋움체 Light" panose="02020603020101020101" pitchFamily="18" charset="-127"/>
-            </a:endParaRPr>
+            <a:pPr algn="ctr"/>
+            <a:endParaRPr lang="ko-KR" altLang="en-US"/>
+          </a:p>
+        </p:txBody>
+      </p:sp>
+      <p:sp>
+        <p:nvSpPr>
+          <p:cNvPr id="22" name="타원 21">
+            <a:extLst>
+              <a:ext uri="{FF2B5EF4-FFF2-40B4-BE49-F238E27FC236}">
+                <a16:creationId xmlns:a16="http://schemas.microsoft.com/office/drawing/2014/main" id="{AFF6DEC5-5BD9-4B7E-BF5B-F8104B5E3033}"/>
+              </a:ext>
+            </a:extLst>
+          </p:cNvPr>
+          <p:cNvSpPr/>
+          <p:nvPr/>
+        </p:nvSpPr>
+        <p:spPr>
+          <a:xfrm>
+            <a:off x="1963740" y="1454947"/>
+            <a:ext cx="104775" cy="104775"/>
+          </a:xfrm>
+          <a:prstGeom prst="ellipse">
+            <a:avLst/>
+          </a:prstGeom>
+          <a:solidFill>
+            <a:srgbClr val="00CC00"/>
+          </a:solidFill>
+          <a:ln>
+            <a:noFill/>
+          </a:ln>
+        </p:spPr>
+        <p:style>
+          <a:lnRef idx="2">
+            <a:schemeClr val="accent1">
+              <a:shade val="50000"/>
+            </a:schemeClr>
+          </a:lnRef>
+          <a:fillRef idx="1">
+            <a:schemeClr val="accent1"/>
+          </a:fillRef>
+          <a:effectRef idx="0">
+            <a:schemeClr val="accent1"/>
+          </a:effectRef>
+          <a:fontRef idx="minor">
+            <a:schemeClr val="lt1"/>
+          </a:fontRef>
+        </p:style>
+        <p:txBody>
+          <a:bodyPr rot="0" spcFirstLastPara="0" vertOverflow="overflow" horzOverflow="overflow" vert="horz" wrap="square" lIns="91440" tIns="45720" rIns="91440" bIns="45720" numCol="1" spcCol="0" rtlCol="0" fromWordArt="0" anchor="ctr" anchorCtr="0" forceAA="0" compatLnSpc="1">
+            <a:prstTxWarp prst="textNoShape">
+              <a:avLst/>
+            </a:prstTxWarp>
+            <a:noAutofit/>
+          </a:bodyPr>
+          <a:lstStyle/>
+          <a:p>
+            <a:pPr algn="ctr"/>
+            <a:endParaRPr lang="ko-KR" altLang="en-US"/>
           </a:p>
         </p:txBody>
       </p:sp>
     </p:spTree>
     <p:extLst>
       <p:ext uri="{BB962C8B-B14F-4D97-AF65-F5344CB8AC3E}">
-        <p14:creationId xmlns:p14="http://schemas.microsoft.com/office/powerpoint/2010/main" val="2708984737"/>
+        <p14:creationId xmlns:p14="http://schemas.microsoft.com/office/powerpoint/2010/main" val="222488953"/>
       </p:ext>
     </p:extLst>
   </p:cSld>
@@ -8367,7 +8235,7 @@
         <p:cNvPr id="1" name="">
           <a:extLst>
             <a:ext uri="{FF2B5EF4-FFF2-40B4-BE49-F238E27FC236}">
-              <a16:creationId xmlns:a16="http://schemas.microsoft.com/office/drawing/2014/main" id="{A81F01F8-B307-51BC-8498-D7F5034A408A}"/>
+              <a16:creationId xmlns:a16="http://schemas.microsoft.com/office/drawing/2014/main" id="{DFA44891-DB0B-9038-5B25-629A4C227FFF}"/>
             </a:ext>
           </a:extLst>
         </p:cNvPr>
@@ -8387,7 +8255,7 @@
           <p:cNvPr id="25" name="사각형: 둥근 모서리 24">
             <a:extLst>
               <a:ext uri="{FF2B5EF4-FFF2-40B4-BE49-F238E27FC236}">
-                <a16:creationId xmlns:a16="http://schemas.microsoft.com/office/drawing/2014/main" id="{F70AB006-7788-AB88-73CD-82A1110E3AB2}"/>
+                <a16:creationId xmlns:a16="http://schemas.microsoft.com/office/drawing/2014/main" id="{4D2AB74B-0885-7248-82A8-738CC227DF1C}"/>
               </a:ext>
             </a:extLst>
           </p:cNvPr>
@@ -8396,8 +8264,8 @@
         </p:nvSpPr>
         <p:spPr>
           <a:xfrm>
-            <a:off x="807085" y="324614"/>
-            <a:ext cx="2321877" cy="382344"/>
+            <a:off x="818197" y="324615"/>
+            <a:ext cx="2291713" cy="382344"/>
           </a:xfrm>
           <a:prstGeom prst="roundRect">
             <a:avLst>
@@ -8446,7 +8314,7 @@
           <p:cNvPr id="26" name="사각형: 둥근 모서리 25">
             <a:extLst>
               <a:ext uri="{FF2B5EF4-FFF2-40B4-BE49-F238E27FC236}">
-                <a16:creationId xmlns:a16="http://schemas.microsoft.com/office/drawing/2014/main" id="{B1064822-8A2C-CE4A-ADB6-813379F875CA}"/>
+                <a16:creationId xmlns:a16="http://schemas.microsoft.com/office/drawing/2014/main" id="{B073FA0F-66B5-6BAF-0E1F-7AC6E77B5191}"/>
               </a:ext>
             </a:extLst>
           </p:cNvPr>
@@ -8455,8 +8323,8 @@
         </p:nvSpPr>
         <p:spPr>
           <a:xfrm>
-            <a:off x="807085" y="745556"/>
-            <a:ext cx="2321877" cy="592988"/>
+            <a:off x="818197" y="745559"/>
+            <a:ext cx="2291713" cy="592988"/>
           </a:xfrm>
           <a:prstGeom prst="roundRect">
             <a:avLst>
@@ -8505,7 +8373,7 @@
           <p:cNvPr id="21" name="사각형: 둥근 모서리 20">
             <a:extLst>
               <a:ext uri="{FF2B5EF4-FFF2-40B4-BE49-F238E27FC236}">
-                <a16:creationId xmlns:a16="http://schemas.microsoft.com/office/drawing/2014/main" id="{8FDD391B-618B-864D-A948-0D4A3B14CF50}"/>
+                <a16:creationId xmlns:a16="http://schemas.microsoft.com/office/drawing/2014/main" id="{993AC22E-D82C-01DF-84E7-90AC9AD4AD3F}"/>
               </a:ext>
             </a:extLst>
           </p:cNvPr>
@@ -8514,7 +8382,7 @@
         </p:nvSpPr>
         <p:spPr>
           <a:xfrm>
-            <a:off x="73819" y="324614"/>
+            <a:off x="84929" y="324615"/>
             <a:ext cx="721520" cy="382344"/>
           </a:xfrm>
           <a:prstGeom prst="roundRect">
@@ -8562,7 +8430,7 @@
           <p:cNvPr id="3" name="TextBox 2">
             <a:extLst>
               <a:ext uri="{FF2B5EF4-FFF2-40B4-BE49-F238E27FC236}">
-                <a16:creationId xmlns:a16="http://schemas.microsoft.com/office/drawing/2014/main" id="{990E5EE1-A47B-523B-9F3A-FDA75F5D4857}"/>
+                <a16:creationId xmlns:a16="http://schemas.microsoft.com/office/drawing/2014/main" id="{CEABBF7A-4383-D72B-A05E-B56FEE94992E}"/>
               </a:ext>
             </a:extLst>
           </p:cNvPr>
@@ -8571,7 +8439,7 @@
         </p:nvSpPr>
         <p:spPr>
           <a:xfrm>
-            <a:off x="61773" y="54245"/>
+            <a:off x="41931" y="54250"/>
             <a:ext cx="1180381" cy="169277"/>
           </a:xfrm>
           <a:prstGeom prst="rect">
@@ -8615,7 +8483,7 @@
           <p:cNvPr id="7" name="TextBox 6">
             <a:extLst>
               <a:ext uri="{FF2B5EF4-FFF2-40B4-BE49-F238E27FC236}">
-                <a16:creationId xmlns:a16="http://schemas.microsoft.com/office/drawing/2014/main" id="{9ADA1C98-CD75-8857-FB97-EAF56CFBA76B}"/>
+                <a16:creationId xmlns:a16="http://schemas.microsoft.com/office/drawing/2014/main" id="{CF3CA475-D856-01FB-19C8-E100A19DE5EF}"/>
               </a:ext>
             </a:extLst>
           </p:cNvPr>
@@ -8624,8 +8492,8 @@
         </p:nvSpPr>
         <p:spPr>
           <a:xfrm>
-            <a:off x="755416" y="415758"/>
-            <a:ext cx="2627430" cy="215444"/>
+            <a:off x="735575" y="415757"/>
+            <a:ext cx="2627431" cy="215444"/>
           </a:xfrm>
           <a:prstGeom prst="rect">
             <a:avLst/>
@@ -8799,7 +8667,7 @@
           <p:cNvPr id="2" name="사각형: 둥근 모서리 1">
             <a:extLst>
               <a:ext uri="{FF2B5EF4-FFF2-40B4-BE49-F238E27FC236}">
-                <a16:creationId xmlns:a16="http://schemas.microsoft.com/office/drawing/2014/main" id="{6B53F21F-0B6F-FA4D-FE29-00382B412444}"/>
+                <a16:creationId xmlns:a16="http://schemas.microsoft.com/office/drawing/2014/main" id="{1B4DC618-B29F-845A-7DD8-6A834C8CEE4F}"/>
               </a:ext>
             </a:extLst>
           </p:cNvPr>
@@ -8808,7 +8676,7 @@
         </p:nvSpPr>
         <p:spPr>
           <a:xfrm>
-            <a:off x="73819" y="745555"/>
+            <a:off x="84929" y="745557"/>
             <a:ext cx="721520" cy="592987"/>
           </a:xfrm>
           <a:prstGeom prst="roundRect">
@@ -8856,7 +8724,7 @@
           <p:cNvPr id="11" name="TextBox 10">
             <a:extLst>
               <a:ext uri="{FF2B5EF4-FFF2-40B4-BE49-F238E27FC236}">
-                <a16:creationId xmlns:a16="http://schemas.microsoft.com/office/drawing/2014/main" id="{DE258930-DA21-24FF-6ED2-FE0D384A5431}"/>
+                <a16:creationId xmlns:a16="http://schemas.microsoft.com/office/drawing/2014/main" id="{0F29C902-63CB-1B88-5847-68EBD7D4096A}"/>
               </a:ext>
             </a:extLst>
           </p:cNvPr>
@@ -8865,8 +8733,8 @@
         </p:nvSpPr>
         <p:spPr>
           <a:xfrm>
-            <a:off x="796061" y="718077"/>
-            <a:ext cx="2321878" cy="628121"/>
+            <a:off x="807175" y="718078"/>
+            <a:ext cx="2321879" cy="628121"/>
           </a:xfrm>
           <a:prstGeom prst="rect">
             <a:avLst/>
@@ -9254,7 +9122,7 @@
           <p:cNvPr id="18" name="TextBox 17">
             <a:extLst>
               <a:ext uri="{FF2B5EF4-FFF2-40B4-BE49-F238E27FC236}">
-                <a16:creationId xmlns:a16="http://schemas.microsoft.com/office/drawing/2014/main" id="{383E9192-D4C6-D5FC-25CE-304BA913006E}"/>
+                <a16:creationId xmlns:a16="http://schemas.microsoft.com/office/drawing/2014/main" id="{A177CD16-1AA6-B8C7-0E32-C84E8AF73AC7}"/>
               </a:ext>
             </a:extLst>
           </p:cNvPr>
@@ -9263,7 +9131,7 @@
         </p:nvSpPr>
         <p:spPr>
           <a:xfrm>
-            <a:off x="254362" y="1408811"/>
+            <a:off x="265477" y="1408813"/>
             <a:ext cx="2709863" cy="200055"/>
           </a:xfrm>
           <a:prstGeom prst="rect">
@@ -9378,10 +9246,10 @@
       </p:sp>
       <p:sp>
         <p:nvSpPr>
-          <p:cNvPr id="10" name="TextBox 9">
+          <p:cNvPr id="17" name="TextBox 16">
             <a:extLst>
               <a:ext uri="{FF2B5EF4-FFF2-40B4-BE49-F238E27FC236}">
-                <a16:creationId xmlns:a16="http://schemas.microsoft.com/office/drawing/2014/main" id="{3FDA0685-3108-7CD3-A56E-E194754F4EB1}"/>
+                <a16:creationId xmlns:a16="http://schemas.microsoft.com/office/drawing/2014/main" id="{67FFF511-7B20-E2F4-96D5-C91B888C0873}"/>
               </a:ext>
             </a:extLst>
           </p:cNvPr>
@@ -9390,132 +9258,7 @@
         </p:nvSpPr>
         <p:spPr>
           <a:xfrm>
-            <a:off x="487241" y="1408811"/>
-            <a:ext cx="308098" cy="200055"/>
-          </a:xfrm>
-          <a:prstGeom prst="rect">
-            <a:avLst/>
-          </a:prstGeom>
-          <a:noFill/>
-        </p:spPr>
-        <p:txBody>
-          <a:bodyPr wrap="none">
-            <a:spAutoFit/>
-          </a:bodyPr>
-          <a:lstStyle/>
-          <a:p>
-            <a:r>
-              <a:rPr lang="ko-KR" altLang="en-US" sz="700" dirty="0">
-                <a:solidFill>
-                  <a:srgbClr val="000000"/>
-                </a:solidFill>
-                <a:latin typeface="맑은 고딕" panose="020B0503020000020004" pitchFamily="50" charset="-127"/>
-                <a:ea typeface="맑은 고딕" panose="020B0503020000020004" pitchFamily="50" charset="-127"/>
-              </a:rPr>
-              <a:t>🔴</a:t>
-            </a:r>
-          </a:p>
-        </p:txBody>
-      </p:sp>
-      <p:sp>
-        <p:nvSpPr>
-          <p:cNvPr id="14" name="TextBox 13">
-            <a:extLst>
-              <a:ext uri="{FF2B5EF4-FFF2-40B4-BE49-F238E27FC236}">
-                <a16:creationId xmlns:a16="http://schemas.microsoft.com/office/drawing/2014/main" id="{03EC236D-4C8F-B27B-C223-22203844EE43}"/>
-              </a:ext>
-            </a:extLst>
-          </p:cNvPr>
-          <p:cNvSpPr txBox="1"/>
-          <p:nvPr/>
-        </p:nvSpPr>
-        <p:spPr>
-          <a:xfrm>
-            <a:off x="1188617" y="1408811"/>
-            <a:ext cx="308098" cy="200055"/>
-          </a:xfrm>
-          <a:prstGeom prst="rect">
-            <a:avLst/>
-          </a:prstGeom>
-          <a:noFill/>
-        </p:spPr>
-        <p:txBody>
-          <a:bodyPr wrap="none">
-            <a:spAutoFit/>
-          </a:bodyPr>
-          <a:lstStyle/>
-          <a:p>
-            <a:r>
-              <a:rPr lang="ko-KR" altLang="en-US" sz="700" dirty="0"/>
-              <a:t>🟢</a:t>
-            </a:r>
-            <a:endParaRPr lang="ko-KR" altLang="en-US" sz="700" dirty="0">
-              <a:solidFill>
-                <a:srgbClr val="000000"/>
-              </a:solidFill>
-              <a:latin typeface="맑은 고딕" panose="020B0503020000020004" pitchFamily="50" charset="-127"/>
-              <a:ea typeface="맑은 고딕" panose="020B0503020000020004" pitchFamily="50" charset="-127"/>
-            </a:endParaRPr>
-          </a:p>
-        </p:txBody>
-      </p:sp>
-      <p:sp>
-        <p:nvSpPr>
-          <p:cNvPr id="16" name="TextBox 15">
-            <a:extLst>
-              <a:ext uri="{FF2B5EF4-FFF2-40B4-BE49-F238E27FC236}">
-                <a16:creationId xmlns:a16="http://schemas.microsoft.com/office/drawing/2014/main" id="{78709CB8-D3BF-D4A1-8968-C17B6146EE58}"/>
-              </a:ext>
-            </a:extLst>
-          </p:cNvPr>
-          <p:cNvSpPr txBox="1"/>
-          <p:nvPr/>
-        </p:nvSpPr>
-        <p:spPr>
-          <a:xfrm>
-            <a:off x="1843546" y="1408811"/>
-            <a:ext cx="308098" cy="200055"/>
-          </a:xfrm>
-          <a:prstGeom prst="rect">
-            <a:avLst/>
-          </a:prstGeom>
-          <a:noFill/>
-        </p:spPr>
-        <p:txBody>
-          <a:bodyPr wrap="none">
-            <a:spAutoFit/>
-          </a:bodyPr>
-          <a:lstStyle/>
-          <a:p>
-            <a:r>
-              <a:rPr lang="ko-KR" altLang="en-US" sz="700" dirty="0">
-                <a:solidFill>
-                  <a:srgbClr val="000000"/>
-                </a:solidFill>
-                <a:latin typeface="맑은 고딕" panose="020B0503020000020004" pitchFamily="50" charset="-127"/>
-                <a:ea typeface="맑은 고딕" panose="020B0503020000020004" pitchFamily="50" charset="-127"/>
-              </a:rPr>
-              <a:t>🟡</a:t>
-            </a:r>
-            <a:endParaRPr lang="ko-KR" altLang="en-US" sz="700" dirty="0"/>
-          </a:p>
-        </p:txBody>
-      </p:sp>
-      <p:sp>
-        <p:nvSpPr>
-          <p:cNvPr id="17" name="TextBox 16">
-            <a:extLst>
-              <a:ext uri="{FF2B5EF4-FFF2-40B4-BE49-F238E27FC236}">
-                <a16:creationId xmlns:a16="http://schemas.microsoft.com/office/drawing/2014/main" id="{34FEEA1B-C965-9DE9-736D-FD3A4E8CD6D3}"/>
-              </a:ext>
-            </a:extLst>
-          </p:cNvPr>
-          <p:cNvSpPr txBox="1"/>
-          <p:nvPr/>
-        </p:nvSpPr>
-        <p:spPr>
-          <a:xfrm>
-            <a:off x="157821" y="366661"/>
+            <a:off x="127333" y="366664"/>
             <a:ext cx="636713" cy="338554"/>
           </a:xfrm>
           <a:prstGeom prst="rect">
@@ -9578,7 +9321,7 @@
           <p:cNvPr id="19" name="TextBox 18">
             <a:extLst>
               <a:ext uri="{FF2B5EF4-FFF2-40B4-BE49-F238E27FC236}">
-                <a16:creationId xmlns:a16="http://schemas.microsoft.com/office/drawing/2014/main" id="{A4A3BD76-CE9A-B99D-13F5-EF8F3A03127B}"/>
+                <a16:creationId xmlns:a16="http://schemas.microsoft.com/office/drawing/2014/main" id="{80AC34A0-F9F3-3EDB-E7DE-AF18BCE089E6}"/>
               </a:ext>
             </a:extLst>
           </p:cNvPr>
@@ -9587,7 +9330,7 @@
         </p:nvSpPr>
         <p:spPr>
           <a:xfrm>
-            <a:off x="128847" y="932596"/>
+            <a:off x="104891" y="932596"/>
             <a:ext cx="681597" cy="215444"/>
           </a:xfrm>
           <a:prstGeom prst="rect">
@@ -9637,7 +9380,7 @@
           <p:cNvPr id="24" name="직선 연결선 23">
             <a:extLst>
               <a:ext uri="{FF2B5EF4-FFF2-40B4-BE49-F238E27FC236}">
-                <a16:creationId xmlns:a16="http://schemas.microsoft.com/office/drawing/2014/main" id="{575BED3F-3CD3-A3D6-8C9E-96604971B862}"/>
+                <a16:creationId xmlns:a16="http://schemas.microsoft.com/office/drawing/2014/main" id="{EF6F1791-FF02-2FDA-4F5D-44CDEE636F8C}"/>
               </a:ext>
             </a:extLst>
           </p:cNvPr>
@@ -9646,7 +9389,7 @@
         </p:nvCxnSpPr>
         <p:spPr>
           <a:xfrm flipH="1">
-            <a:off x="154781" y="1373677"/>
+            <a:off x="165891" y="1373677"/>
             <a:ext cx="2909888" cy="0"/>
           </a:xfrm>
           <a:prstGeom prst="line">
@@ -9677,98 +9420,179 @@
       </p:cxnSp>
       <p:sp>
         <p:nvSpPr>
-          <p:cNvPr id="4" name="TextBox 3">
+          <p:cNvPr id="6" name="타원 5">
             <a:extLst>
               <a:ext uri="{FF2B5EF4-FFF2-40B4-BE49-F238E27FC236}">
-                <a16:creationId xmlns:a16="http://schemas.microsoft.com/office/drawing/2014/main" id="{E6C7134A-DF7A-AA66-74CD-C25D3FBCD159}"/>
+                <a16:creationId xmlns:a16="http://schemas.microsoft.com/office/drawing/2014/main" id="{CEA2B6CD-6F59-45DE-B26A-1E44DF2411D7}"/>
               </a:ext>
             </a:extLst>
           </p:cNvPr>
-          <p:cNvSpPr txBox="1"/>
+          <p:cNvSpPr/>
           <p:nvPr/>
         </p:nvSpPr>
         <p:spPr>
           <a:xfrm>
-            <a:off x="0" y="408064"/>
-            <a:ext cx="325730" cy="215444"/>
+            <a:off x="582615" y="1454947"/>
+            <a:ext cx="104775" cy="104775"/>
           </a:xfrm>
-          <a:prstGeom prst="rect">
+          <a:prstGeom prst="ellipse">
             <a:avLst/>
           </a:prstGeom>
-          <a:noFill/>
+          <a:solidFill>
+            <a:srgbClr val="FF0000"/>
+          </a:solidFill>
+          <a:ln>
+            <a:noFill/>
+          </a:ln>
         </p:spPr>
-        <p:txBody>
-          <a:bodyPr wrap="none">
-            <a:spAutoFit/>
+        <p:style>
+          <a:lnRef idx="2">
+            <a:schemeClr val="accent1">
+              <a:shade val="50000"/>
+            </a:schemeClr>
+          </a:lnRef>
+          <a:fillRef idx="1">
+            <a:schemeClr val="accent1"/>
+          </a:fillRef>
+          <a:effectRef idx="0">
+            <a:schemeClr val="accent1"/>
+          </a:effectRef>
+          <a:fontRef idx="minor">
+            <a:schemeClr val="lt1"/>
+          </a:fontRef>
+        </p:style>
+        <p:txBody>
+          <a:bodyPr rot="0" spcFirstLastPara="0" vertOverflow="overflow" horzOverflow="overflow" vert="horz" wrap="square" lIns="91440" tIns="45720" rIns="91440" bIns="45720" numCol="1" spcCol="0" rtlCol="0" fromWordArt="0" anchor="ctr" anchorCtr="0" forceAA="0" compatLnSpc="1">
+            <a:prstTxWarp prst="textNoShape">
+              <a:avLst/>
+            </a:prstTxWarp>
+            <a:noAutofit/>
           </a:bodyPr>
           <a:lstStyle/>
           <a:p>
-            <a:r>
-              <a:rPr lang="ko-KR" altLang="en-US" sz="800" dirty="0"/>
-              <a:t>📌</a:t>
-            </a:r>
-            <a:endParaRPr lang="ko-KR" altLang="en-US" sz="800" b="1" dirty="0">
-              <a:solidFill>
-                <a:srgbClr val="000000"/>
-              </a:solidFill>
-              <a:latin typeface="KoPub돋움체 Medium" panose="02020603020101020101" pitchFamily="18" charset="-127"/>
-              <a:ea typeface="KoPub돋움체 Medium" panose="02020603020101020101" pitchFamily="18" charset="-127"/>
-            </a:endParaRPr>
-          </a:p>
-        </p:txBody>
-      </p:sp>
-      <p:sp>
-        <p:nvSpPr>
-          <p:cNvPr id="5" name="TextBox 4">
+            <a:pPr algn="ctr"/>
+            <a:endParaRPr lang="ko-KR" altLang="en-US"/>
+          </a:p>
+        </p:txBody>
+      </p:sp>
+      <p:sp>
+        <p:nvSpPr>
+          <p:cNvPr id="20" name="타원 19">
             <a:extLst>
               <a:ext uri="{FF2B5EF4-FFF2-40B4-BE49-F238E27FC236}">
-                <a16:creationId xmlns:a16="http://schemas.microsoft.com/office/drawing/2014/main" id="{D423D299-82E8-94F6-0CE7-BAA91B9B6D4E}"/>
+                <a16:creationId xmlns:a16="http://schemas.microsoft.com/office/drawing/2014/main" id="{5475DBC3-BF9A-42B4-81E3-C8A239B20A22}"/>
               </a:ext>
             </a:extLst>
           </p:cNvPr>
-          <p:cNvSpPr txBox="1"/>
+          <p:cNvSpPr/>
           <p:nvPr/>
         </p:nvSpPr>
         <p:spPr>
           <a:xfrm>
-            <a:off x="3206" y="932595"/>
-            <a:ext cx="322524" cy="215444"/>
+            <a:off x="1273177" y="1454947"/>
+            <a:ext cx="104775" cy="104775"/>
           </a:xfrm>
-          <a:prstGeom prst="rect">
+          <a:prstGeom prst="ellipse">
             <a:avLst/>
           </a:prstGeom>
-          <a:noFill/>
+          <a:solidFill>
+            <a:srgbClr val="F58400"/>
+          </a:solidFill>
+          <a:ln>
+            <a:noFill/>
+          </a:ln>
         </p:spPr>
-        <p:txBody>
-          <a:bodyPr wrap="none">
-            <a:spAutoFit/>
+        <p:style>
+          <a:lnRef idx="2">
+            <a:schemeClr val="accent1">
+              <a:shade val="50000"/>
+            </a:schemeClr>
+          </a:lnRef>
+          <a:fillRef idx="1">
+            <a:schemeClr val="accent1"/>
+          </a:fillRef>
+          <a:effectRef idx="0">
+            <a:schemeClr val="accent1"/>
+          </a:effectRef>
+          <a:fontRef idx="minor">
+            <a:schemeClr val="lt1"/>
+          </a:fontRef>
+        </p:style>
+        <p:txBody>
+          <a:bodyPr rot="0" spcFirstLastPara="0" vertOverflow="overflow" horzOverflow="overflow" vert="horz" wrap="square" lIns="91440" tIns="45720" rIns="91440" bIns="45720" numCol="1" spcCol="0" rtlCol="0" fromWordArt="0" anchor="ctr" anchorCtr="0" forceAA="0" compatLnSpc="1">
+            <a:prstTxWarp prst="textNoShape">
+              <a:avLst/>
+            </a:prstTxWarp>
+            <a:noAutofit/>
           </a:bodyPr>
           <a:lstStyle/>
           <a:p>
-            <a:r>
-              <a:rPr lang="ko-KR" altLang="en-US" sz="800" b="1" dirty="0">
-                <a:solidFill>
-                  <a:srgbClr val="000000"/>
-                </a:solidFill>
-                <a:latin typeface="맑은 고딕" panose="020B0503020000020004" pitchFamily="50" charset="-127"/>
-                <a:ea typeface="맑은 고딕" panose="020B0503020000020004" pitchFamily="50" charset="-127"/>
-              </a:rPr>
-              <a:t>🔄</a:t>
-            </a:r>
-            <a:endParaRPr lang="ko-KR" altLang="en-US" sz="2000" b="1" dirty="0">
-              <a:solidFill>
-                <a:srgbClr val="000000"/>
-              </a:solidFill>
-              <a:latin typeface="KoPub돋움체 Light" panose="02020603020101020101" pitchFamily="18" charset="-127"/>
-              <a:ea typeface="KoPub돋움체 Light" panose="02020603020101020101" pitchFamily="18" charset="-127"/>
-            </a:endParaRPr>
+            <a:pPr algn="ctr"/>
+            <a:endParaRPr lang="ko-KR" altLang="en-US"/>
+          </a:p>
+        </p:txBody>
+      </p:sp>
+      <p:sp>
+        <p:nvSpPr>
+          <p:cNvPr id="22" name="타원 21">
+            <a:extLst>
+              <a:ext uri="{FF2B5EF4-FFF2-40B4-BE49-F238E27FC236}">
+                <a16:creationId xmlns:a16="http://schemas.microsoft.com/office/drawing/2014/main" id="{AFF6DEC5-5BD9-4B7E-BF5B-F8104B5E3033}"/>
+              </a:ext>
+            </a:extLst>
+          </p:cNvPr>
+          <p:cNvSpPr/>
+          <p:nvPr/>
+        </p:nvSpPr>
+        <p:spPr>
+          <a:xfrm>
+            <a:off x="1963740" y="1454947"/>
+            <a:ext cx="104775" cy="104775"/>
+          </a:xfrm>
+          <a:prstGeom prst="ellipse">
+            <a:avLst/>
+          </a:prstGeom>
+          <a:solidFill>
+            <a:srgbClr val="00CC00"/>
+          </a:solidFill>
+          <a:ln>
+            <a:noFill/>
+          </a:ln>
+        </p:spPr>
+        <p:style>
+          <a:lnRef idx="2">
+            <a:schemeClr val="accent1">
+              <a:shade val="50000"/>
+            </a:schemeClr>
+          </a:lnRef>
+          <a:fillRef idx="1">
+            <a:schemeClr val="accent1"/>
+          </a:fillRef>
+          <a:effectRef idx="0">
+            <a:schemeClr val="accent1"/>
+          </a:effectRef>
+          <a:fontRef idx="minor">
+            <a:schemeClr val="lt1"/>
+          </a:fontRef>
+        </p:style>
+        <p:txBody>
+          <a:bodyPr rot="0" spcFirstLastPara="0" vertOverflow="overflow" horzOverflow="overflow" vert="horz" wrap="square" lIns="91440" tIns="45720" rIns="91440" bIns="45720" numCol="1" spcCol="0" rtlCol="0" fromWordArt="0" anchor="ctr" anchorCtr="0" forceAA="0" compatLnSpc="1">
+            <a:prstTxWarp prst="textNoShape">
+              <a:avLst/>
+            </a:prstTxWarp>
+            <a:noAutofit/>
+          </a:bodyPr>
+          <a:lstStyle/>
+          <a:p>
+            <a:pPr algn="ctr"/>
+            <a:endParaRPr lang="ko-KR" altLang="en-US"/>
           </a:p>
         </p:txBody>
       </p:sp>
     </p:spTree>
     <p:extLst>
       <p:ext uri="{BB962C8B-B14F-4D97-AF65-F5344CB8AC3E}">
-        <p14:creationId xmlns:p14="http://schemas.microsoft.com/office/powerpoint/2010/main" val="46426722"/>
+        <p14:creationId xmlns:p14="http://schemas.microsoft.com/office/powerpoint/2010/main" val="3094331265"/>
       </p:ext>
     </p:extLst>
   </p:cSld>
@@ -9786,7 +9610,7 @@
         <p:cNvPr id="1" name="">
           <a:extLst>
             <a:ext uri="{FF2B5EF4-FFF2-40B4-BE49-F238E27FC236}">
-              <a16:creationId xmlns:a16="http://schemas.microsoft.com/office/drawing/2014/main" id="{5E65ABDA-6B0F-307A-10A2-CC4318BD5F0B}"/>
+              <a16:creationId xmlns:a16="http://schemas.microsoft.com/office/drawing/2014/main" id="{DFA44891-DB0B-9038-5B25-629A4C227FFF}"/>
             </a:ext>
           </a:extLst>
         </p:cNvPr>
@@ -9806,7 +9630,7 @@
           <p:cNvPr id="25" name="사각형: 둥근 모서리 24">
             <a:extLst>
               <a:ext uri="{FF2B5EF4-FFF2-40B4-BE49-F238E27FC236}">
-                <a16:creationId xmlns:a16="http://schemas.microsoft.com/office/drawing/2014/main" id="{0B4A6F20-08F7-8670-FF90-A2F6D9257CE4}"/>
+                <a16:creationId xmlns:a16="http://schemas.microsoft.com/office/drawing/2014/main" id="{4D2AB74B-0885-7248-82A8-738CC227DF1C}"/>
               </a:ext>
             </a:extLst>
           </p:cNvPr>
@@ -9815,8 +9639,8 @@
         </p:nvSpPr>
         <p:spPr>
           <a:xfrm>
-            <a:off x="807085" y="324614"/>
-            <a:ext cx="2321877" cy="382344"/>
+            <a:off x="818197" y="324615"/>
+            <a:ext cx="2291713" cy="382344"/>
           </a:xfrm>
           <a:prstGeom prst="roundRect">
             <a:avLst>
@@ -9865,7 +9689,7 @@
           <p:cNvPr id="26" name="사각형: 둥근 모서리 25">
             <a:extLst>
               <a:ext uri="{FF2B5EF4-FFF2-40B4-BE49-F238E27FC236}">
-                <a16:creationId xmlns:a16="http://schemas.microsoft.com/office/drawing/2014/main" id="{03D2FD58-C638-FE51-15CC-7228A1E43ECD}"/>
+                <a16:creationId xmlns:a16="http://schemas.microsoft.com/office/drawing/2014/main" id="{B073FA0F-66B5-6BAF-0E1F-7AC6E77B5191}"/>
               </a:ext>
             </a:extLst>
           </p:cNvPr>
@@ -9874,8 +9698,8 @@
         </p:nvSpPr>
         <p:spPr>
           <a:xfrm>
-            <a:off x="807085" y="745556"/>
-            <a:ext cx="2321877" cy="592988"/>
+            <a:off x="818197" y="745559"/>
+            <a:ext cx="2291713" cy="592988"/>
           </a:xfrm>
           <a:prstGeom prst="roundRect">
             <a:avLst>
@@ -9924,7 +9748,7 @@
           <p:cNvPr id="21" name="사각형: 둥근 모서리 20">
             <a:extLst>
               <a:ext uri="{FF2B5EF4-FFF2-40B4-BE49-F238E27FC236}">
-                <a16:creationId xmlns:a16="http://schemas.microsoft.com/office/drawing/2014/main" id="{23B0AE6C-7FEF-7C6F-7FFB-3CF01BB64E91}"/>
+                <a16:creationId xmlns:a16="http://schemas.microsoft.com/office/drawing/2014/main" id="{993AC22E-D82C-01DF-84E7-90AC9AD4AD3F}"/>
               </a:ext>
             </a:extLst>
           </p:cNvPr>
@@ -9933,7 +9757,7 @@
         </p:nvSpPr>
         <p:spPr>
           <a:xfrm>
-            <a:off x="73819" y="324614"/>
+            <a:off x="84929" y="324615"/>
             <a:ext cx="721520" cy="382344"/>
           </a:xfrm>
           <a:prstGeom prst="roundRect">
@@ -9981,7 +9805,7 @@
           <p:cNvPr id="3" name="TextBox 2">
             <a:extLst>
               <a:ext uri="{FF2B5EF4-FFF2-40B4-BE49-F238E27FC236}">
-                <a16:creationId xmlns:a16="http://schemas.microsoft.com/office/drawing/2014/main" id="{5D1A11B5-E8EC-3513-462C-5C1776F96158}"/>
+                <a16:creationId xmlns:a16="http://schemas.microsoft.com/office/drawing/2014/main" id="{CEABBF7A-4383-D72B-A05E-B56FEE94992E}"/>
               </a:ext>
             </a:extLst>
           </p:cNvPr>
@@ -9990,7 +9814,7 @@
         </p:nvSpPr>
         <p:spPr>
           <a:xfrm>
-            <a:off x="61773" y="54245"/>
+            <a:off x="41931" y="54250"/>
             <a:ext cx="1180381" cy="169277"/>
           </a:xfrm>
           <a:prstGeom prst="rect">
@@ -10034,7 +9858,7 @@
           <p:cNvPr id="7" name="TextBox 6">
             <a:extLst>
               <a:ext uri="{FF2B5EF4-FFF2-40B4-BE49-F238E27FC236}">
-                <a16:creationId xmlns:a16="http://schemas.microsoft.com/office/drawing/2014/main" id="{D45509E1-97B4-B624-990C-DBE0112B718A}"/>
+                <a16:creationId xmlns:a16="http://schemas.microsoft.com/office/drawing/2014/main" id="{CF3CA475-D856-01FB-19C8-E100A19DE5EF}"/>
               </a:ext>
             </a:extLst>
           </p:cNvPr>
@@ -10043,8 +9867,8 @@
         </p:nvSpPr>
         <p:spPr>
           <a:xfrm>
-            <a:off x="755416" y="415758"/>
-            <a:ext cx="2627430" cy="215444"/>
+            <a:off x="735575" y="415757"/>
+            <a:ext cx="2627431" cy="215444"/>
           </a:xfrm>
           <a:prstGeom prst="rect">
             <a:avLst/>
@@ -10218,7 +10042,7 @@
           <p:cNvPr id="2" name="사각형: 둥근 모서리 1">
             <a:extLst>
               <a:ext uri="{FF2B5EF4-FFF2-40B4-BE49-F238E27FC236}">
-                <a16:creationId xmlns:a16="http://schemas.microsoft.com/office/drawing/2014/main" id="{80A9E6AF-C77C-66B7-21D3-5A689C12E688}"/>
+                <a16:creationId xmlns:a16="http://schemas.microsoft.com/office/drawing/2014/main" id="{1B4DC618-B29F-845A-7DD8-6A834C8CEE4F}"/>
               </a:ext>
             </a:extLst>
           </p:cNvPr>
@@ -10227,7 +10051,7 @@
         </p:nvSpPr>
         <p:spPr>
           <a:xfrm>
-            <a:off x="73819" y="745555"/>
+            <a:off x="84929" y="745557"/>
             <a:ext cx="721520" cy="592987"/>
           </a:xfrm>
           <a:prstGeom prst="roundRect">
@@ -10275,7 +10099,7 @@
           <p:cNvPr id="11" name="TextBox 10">
             <a:extLst>
               <a:ext uri="{FF2B5EF4-FFF2-40B4-BE49-F238E27FC236}">
-                <a16:creationId xmlns:a16="http://schemas.microsoft.com/office/drawing/2014/main" id="{745AA328-5452-AEA8-F571-861C52E18CA0}"/>
+                <a16:creationId xmlns:a16="http://schemas.microsoft.com/office/drawing/2014/main" id="{0F29C902-63CB-1B88-5847-68EBD7D4096A}"/>
               </a:ext>
             </a:extLst>
           </p:cNvPr>
@@ -10284,8 +10108,8 @@
         </p:nvSpPr>
         <p:spPr>
           <a:xfrm>
-            <a:off x="796061" y="718077"/>
-            <a:ext cx="2321878" cy="628121"/>
+            <a:off x="807175" y="718078"/>
+            <a:ext cx="2321879" cy="628121"/>
           </a:xfrm>
           <a:prstGeom prst="rect">
             <a:avLst/>
@@ -10673,7 +10497,7 @@
           <p:cNvPr id="18" name="TextBox 17">
             <a:extLst>
               <a:ext uri="{FF2B5EF4-FFF2-40B4-BE49-F238E27FC236}">
-                <a16:creationId xmlns:a16="http://schemas.microsoft.com/office/drawing/2014/main" id="{070923BD-66CB-32D0-C0A0-88C96B83B379}"/>
+                <a16:creationId xmlns:a16="http://schemas.microsoft.com/office/drawing/2014/main" id="{A177CD16-1AA6-B8C7-0E32-C84E8AF73AC7}"/>
               </a:ext>
             </a:extLst>
           </p:cNvPr>
@@ -10682,7 +10506,7 @@
         </p:nvSpPr>
         <p:spPr>
           <a:xfrm>
-            <a:off x="254362" y="1408811"/>
+            <a:off x="265477" y="1408813"/>
             <a:ext cx="2709863" cy="200055"/>
           </a:xfrm>
           <a:prstGeom prst="rect">
@@ -10797,10 +10621,10 @@
       </p:sp>
       <p:sp>
         <p:nvSpPr>
-          <p:cNvPr id="10" name="TextBox 9">
+          <p:cNvPr id="17" name="TextBox 16">
             <a:extLst>
               <a:ext uri="{FF2B5EF4-FFF2-40B4-BE49-F238E27FC236}">
-                <a16:creationId xmlns:a16="http://schemas.microsoft.com/office/drawing/2014/main" id="{6016D1D3-9352-C85F-6F26-114DBB4C4C80}"/>
+                <a16:creationId xmlns:a16="http://schemas.microsoft.com/office/drawing/2014/main" id="{67FFF511-7B20-E2F4-96D5-C91B888C0873}"/>
               </a:ext>
             </a:extLst>
           </p:cNvPr>
@@ -10809,132 +10633,7 @@
         </p:nvSpPr>
         <p:spPr>
           <a:xfrm>
-            <a:off x="487241" y="1408811"/>
-            <a:ext cx="308098" cy="200055"/>
-          </a:xfrm>
-          <a:prstGeom prst="rect">
-            <a:avLst/>
-          </a:prstGeom>
-          <a:noFill/>
-        </p:spPr>
-        <p:txBody>
-          <a:bodyPr wrap="none">
-            <a:spAutoFit/>
-          </a:bodyPr>
-          <a:lstStyle/>
-          <a:p>
-            <a:r>
-              <a:rPr lang="ko-KR" altLang="en-US" sz="700" dirty="0">
-                <a:solidFill>
-                  <a:srgbClr val="000000"/>
-                </a:solidFill>
-                <a:latin typeface="맑은 고딕" panose="020B0503020000020004" pitchFamily="50" charset="-127"/>
-                <a:ea typeface="맑은 고딕" panose="020B0503020000020004" pitchFamily="50" charset="-127"/>
-              </a:rPr>
-              <a:t>🔴</a:t>
-            </a:r>
-          </a:p>
-        </p:txBody>
-      </p:sp>
-      <p:sp>
-        <p:nvSpPr>
-          <p:cNvPr id="14" name="TextBox 13">
-            <a:extLst>
-              <a:ext uri="{FF2B5EF4-FFF2-40B4-BE49-F238E27FC236}">
-                <a16:creationId xmlns:a16="http://schemas.microsoft.com/office/drawing/2014/main" id="{8A862103-5AE5-B6D2-424A-7A899873504D}"/>
-              </a:ext>
-            </a:extLst>
-          </p:cNvPr>
-          <p:cNvSpPr txBox="1"/>
-          <p:nvPr/>
-        </p:nvSpPr>
-        <p:spPr>
-          <a:xfrm>
-            <a:off x="1188617" y="1408811"/>
-            <a:ext cx="308098" cy="200055"/>
-          </a:xfrm>
-          <a:prstGeom prst="rect">
-            <a:avLst/>
-          </a:prstGeom>
-          <a:noFill/>
-        </p:spPr>
-        <p:txBody>
-          <a:bodyPr wrap="none">
-            <a:spAutoFit/>
-          </a:bodyPr>
-          <a:lstStyle/>
-          <a:p>
-            <a:r>
-              <a:rPr lang="ko-KR" altLang="en-US" sz="700" dirty="0"/>
-              <a:t>🟢</a:t>
-            </a:r>
-            <a:endParaRPr lang="ko-KR" altLang="en-US" sz="700" dirty="0">
-              <a:solidFill>
-                <a:srgbClr val="000000"/>
-              </a:solidFill>
-              <a:latin typeface="맑은 고딕" panose="020B0503020000020004" pitchFamily="50" charset="-127"/>
-              <a:ea typeface="맑은 고딕" panose="020B0503020000020004" pitchFamily="50" charset="-127"/>
-            </a:endParaRPr>
-          </a:p>
-        </p:txBody>
-      </p:sp>
-      <p:sp>
-        <p:nvSpPr>
-          <p:cNvPr id="16" name="TextBox 15">
-            <a:extLst>
-              <a:ext uri="{FF2B5EF4-FFF2-40B4-BE49-F238E27FC236}">
-                <a16:creationId xmlns:a16="http://schemas.microsoft.com/office/drawing/2014/main" id="{1470FEB9-BF0C-EAFC-0218-8EEB3297BC32}"/>
-              </a:ext>
-            </a:extLst>
-          </p:cNvPr>
-          <p:cNvSpPr txBox="1"/>
-          <p:nvPr/>
-        </p:nvSpPr>
-        <p:spPr>
-          <a:xfrm>
-            <a:off x="1843546" y="1408811"/>
-            <a:ext cx="308098" cy="200055"/>
-          </a:xfrm>
-          <a:prstGeom prst="rect">
-            <a:avLst/>
-          </a:prstGeom>
-          <a:noFill/>
-        </p:spPr>
-        <p:txBody>
-          <a:bodyPr wrap="none">
-            <a:spAutoFit/>
-          </a:bodyPr>
-          <a:lstStyle/>
-          <a:p>
-            <a:r>
-              <a:rPr lang="ko-KR" altLang="en-US" sz="700" dirty="0">
-                <a:solidFill>
-                  <a:srgbClr val="000000"/>
-                </a:solidFill>
-                <a:latin typeface="맑은 고딕" panose="020B0503020000020004" pitchFamily="50" charset="-127"/>
-                <a:ea typeface="맑은 고딕" panose="020B0503020000020004" pitchFamily="50" charset="-127"/>
-              </a:rPr>
-              <a:t>🟡</a:t>
-            </a:r>
-            <a:endParaRPr lang="ko-KR" altLang="en-US" sz="700" dirty="0"/>
-          </a:p>
-        </p:txBody>
-      </p:sp>
-      <p:sp>
-        <p:nvSpPr>
-          <p:cNvPr id="17" name="TextBox 16">
-            <a:extLst>
-              <a:ext uri="{FF2B5EF4-FFF2-40B4-BE49-F238E27FC236}">
-                <a16:creationId xmlns:a16="http://schemas.microsoft.com/office/drawing/2014/main" id="{D1F4DD8B-5AF2-296F-E5AD-8975D0560067}"/>
-              </a:ext>
-            </a:extLst>
-          </p:cNvPr>
-          <p:cNvSpPr txBox="1"/>
-          <p:nvPr/>
-        </p:nvSpPr>
-        <p:spPr>
-          <a:xfrm>
-            <a:off x="157821" y="366661"/>
+            <a:off x="127333" y="366664"/>
             <a:ext cx="636713" cy="338554"/>
           </a:xfrm>
           <a:prstGeom prst="rect">
@@ -10997,7 +10696,7 @@
           <p:cNvPr id="19" name="TextBox 18">
             <a:extLst>
               <a:ext uri="{FF2B5EF4-FFF2-40B4-BE49-F238E27FC236}">
-                <a16:creationId xmlns:a16="http://schemas.microsoft.com/office/drawing/2014/main" id="{FA7B8D6B-4766-F742-2105-03143A0629EF}"/>
+                <a16:creationId xmlns:a16="http://schemas.microsoft.com/office/drawing/2014/main" id="{80AC34A0-F9F3-3EDB-E7DE-AF18BCE089E6}"/>
               </a:ext>
             </a:extLst>
           </p:cNvPr>
@@ -11006,7 +10705,7 @@
         </p:nvSpPr>
         <p:spPr>
           <a:xfrm>
-            <a:off x="128847" y="932596"/>
+            <a:off x="104891" y="932596"/>
             <a:ext cx="681597" cy="215444"/>
           </a:xfrm>
           <a:prstGeom prst="rect">
@@ -11056,7 +10755,7 @@
           <p:cNvPr id="24" name="직선 연결선 23">
             <a:extLst>
               <a:ext uri="{FF2B5EF4-FFF2-40B4-BE49-F238E27FC236}">
-                <a16:creationId xmlns:a16="http://schemas.microsoft.com/office/drawing/2014/main" id="{6C400830-1BEF-FF7F-FC03-4BEE17ECC247}"/>
+                <a16:creationId xmlns:a16="http://schemas.microsoft.com/office/drawing/2014/main" id="{EF6F1791-FF02-2FDA-4F5D-44CDEE636F8C}"/>
               </a:ext>
             </a:extLst>
           </p:cNvPr>
@@ -11065,7 +10764,7 @@
         </p:nvCxnSpPr>
         <p:spPr>
           <a:xfrm flipH="1">
-            <a:off x="154781" y="1373677"/>
+            <a:off x="165891" y="1373677"/>
             <a:ext cx="2909888" cy="0"/>
           </a:xfrm>
           <a:prstGeom prst="line">
@@ -11096,98 +10795,179 @@
       </p:cxnSp>
       <p:sp>
         <p:nvSpPr>
-          <p:cNvPr id="4" name="TextBox 3">
+          <p:cNvPr id="6" name="타원 5">
             <a:extLst>
               <a:ext uri="{FF2B5EF4-FFF2-40B4-BE49-F238E27FC236}">
-                <a16:creationId xmlns:a16="http://schemas.microsoft.com/office/drawing/2014/main" id="{1F3CE021-9C90-4B71-83E1-DC009654F2FF}"/>
+                <a16:creationId xmlns:a16="http://schemas.microsoft.com/office/drawing/2014/main" id="{CEA2B6CD-6F59-45DE-B26A-1E44DF2411D7}"/>
               </a:ext>
             </a:extLst>
           </p:cNvPr>
-          <p:cNvSpPr txBox="1"/>
+          <p:cNvSpPr/>
           <p:nvPr/>
         </p:nvSpPr>
         <p:spPr>
           <a:xfrm>
-            <a:off x="0" y="408064"/>
-            <a:ext cx="325730" cy="215444"/>
+            <a:off x="582615" y="1454947"/>
+            <a:ext cx="104775" cy="104775"/>
           </a:xfrm>
-          <a:prstGeom prst="rect">
+          <a:prstGeom prst="ellipse">
             <a:avLst/>
           </a:prstGeom>
-          <a:noFill/>
+          <a:solidFill>
+            <a:srgbClr val="FF0000"/>
+          </a:solidFill>
+          <a:ln>
+            <a:noFill/>
+          </a:ln>
         </p:spPr>
-        <p:txBody>
-          <a:bodyPr wrap="none">
-            <a:spAutoFit/>
+        <p:style>
+          <a:lnRef idx="2">
+            <a:schemeClr val="accent1">
+              <a:shade val="50000"/>
+            </a:schemeClr>
+          </a:lnRef>
+          <a:fillRef idx="1">
+            <a:schemeClr val="accent1"/>
+          </a:fillRef>
+          <a:effectRef idx="0">
+            <a:schemeClr val="accent1"/>
+          </a:effectRef>
+          <a:fontRef idx="minor">
+            <a:schemeClr val="lt1"/>
+          </a:fontRef>
+        </p:style>
+        <p:txBody>
+          <a:bodyPr rot="0" spcFirstLastPara="0" vertOverflow="overflow" horzOverflow="overflow" vert="horz" wrap="square" lIns="91440" tIns="45720" rIns="91440" bIns="45720" numCol="1" spcCol="0" rtlCol="0" fromWordArt="0" anchor="ctr" anchorCtr="0" forceAA="0" compatLnSpc="1">
+            <a:prstTxWarp prst="textNoShape">
+              <a:avLst/>
+            </a:prstTxWarp>
+            <a:noAutofit/>
           </a:bodyPr>
           <a:lstStyle/>
           <a:p>
-            <a:r>
-              <a:rPr lang="ko-KR" altLang="en-US" sz="800" dirty="0"/>
-              <a:t>📌</a:t>
-            </a:r>
-            <a:endParaRPr lang="ko-KR" altLang="en-US" sz="800" b="1" dirty="0">
-              <a:solidFill>
-                <a:srgbClr val="000000"/>
-              </a:solidFill>
-              <a:latin typeface="KoPub돋움체 Medium" panose="02020603020101020101" pitchFamily="18" charset="-127"/>
-              <a:ea typeface="KoPub돋움체 Medium" panose="02020603020101020101" pitchFamily="18" charset="-127"/>
-            </a:endParaRPr>
-          </a:p>
-        </p:txBody>
-      </p:sp>
-      <p:sp>
-        <p:nvSpPr>
-          <p:cNvPr id="5" name="TextBox 4">
+            <a:pPr algn="ctr"/>
+            <a:endParaRPr lang="ko-KR" altLang="en-US"/>
+          </a:p>
+        </p:txBody>
+      </p:sp>
+      <p:sp>
+        <p:nvSpPr>
+          <p:cNvPr id="20" name="타원 19">
             <a:extLst>
               <a:ext uri="{FF2B5EF4-FFF2-40B4-BE49-F238E27FC236}">
-                <a16:creationId xmlns:a16="http://schemas.microsoft.com/office/drawing/2014/main" id="{E3A3DB21-65F5-35BB-83C9-8DA858BD88D8}"/>
+                <a16:creationId xmlns:a16="http://schemas.microsoft.com/office/drawing/2014/main" id="{5475DBC3-BF9A-42B4-81E3-C8A239B20A22}"/>
               </a:ext>
             </a:extLst>
           </p:cNvPr>
-          <p:cNvSpPr txBox="1"/>
+          <p:cNvSpPr/>
           <p:nvPr/>
         </p:nvSpPr>
         <p:spPr>
           <a:xfrm>
-            <a:off x="3206" y="932595"/>
-            <a:ext cx="322524" cy="215444"/>
+            <a:off x="1273177" y="1454947"/>
+            <a:ext cx="104775" cy="104775"/>
           </a:xfrm>
-          <a:prstGeom prst="rect">
+          <a:prstGeom prst="ellipse">
             <a:avLst/>
           </a:prstGeom>
-          <a:noFill/>
+          <a:solidFill>
+            <a:srgbClr val="F58400"/>
+          </a:solidFill>
+          <a:ln>
+            <a:noFill/>
+          </a:ln>
         </p:spPr>
-        <p:txBody>
-          <a:bodyPr wrap="none">
-            <a:spAutoFit/>
+        <p:style>
+          <a:lnRef idx="2">
+            <a:schemeClr val="accent1">
+              <a:shade val="50000"/>
+            </a:schemeClr>
+          </a:lnRef>
+          <a:fillRef idx="1">
+            <a:schemeClr val="accent1"/>
+          </a:fillRef>
+          <a:effectRef idx="0">
+            <a:schemeClr val="accent1"/>
+          </a:effectRef>
+          <a:fontRef idx="minor">
+            <a:schemeClr val="lt1"/>
+          </a:fontRef>
+        </p:style>
+        <p:txBody>
+          <a:bodyPr rot="0" spcFirstLastPara="0" vertOverflow="overflow" horzOverflow="overflow" vert="horz" wrap="square" lIns="91440" tIns="45720" rIns="91440" bIns="45720" numCol="1" spcCol="0" rtlCol="0" fromWordArt="0" anchor="ctr" anchorCtr="0" forceAA="0" compatLnSpc="1">
+            <a:prstTxWarp prst="textNoShape">
+              <a:avLst/>
+            </a:prstTxWarp>
+            <a:noAutofit/>
           </a:bodyPr>
           <a:lstStyle/>
           <a:p>
-            <a:r>
-              <a:rPr lang="ko-KR" altLang="en-US" sz="800" b="1" dirty="0">
-                <a:solidFill>
-                  <a:srgbClr val="000000"/>
-                </a:solidFill>
-                <a:latin typeface="맑은 고딕" panose="020B0503020000020004" pitchFamily="50" charset="-127"/>
-                <a:ea typeface="맑은 고딕" panose="020B0503020000020004" pitchFamily="50" charset="-127"/>
-              </a:rPr>
-              <a:t>🔄</a:t>
-            </a:r>
-            <a:endParaRPr lang="ko-KR" altLang="en-US" sz="2000" b="1" dirty="0">
-              <a:solidFill>
-                <a:srgbClr val="000000"/>
-              </a:solidFill>
-              <a:latin typeface="KoPub돋움체 Light" panose="02020603020101020101" pitchFamily="18" charset="-127"/>
-              <a:ea typeface="KoPub돋움체 Light" panose="02020603020101020101" pitchFamily="18" charset="-127"/>
-            </a:endParaRPr>
+            <a:pPr algn="ctr"/>
+            <a:endParaRPr lang="ko-KR" altLang="en-US"/>
+          </a:p>
+        </p:txBody>
+      </p:sp>
+      <p:sp>
+        <p:nvSpPr>
+          <p:cNvPr id="22" name="타원 21">
+            <a:extLst>
+              <a:ext uri="{FF2B5EF4-FFF2-40B4-BE49-F238E27FC236}">
+                <a16:creationId xmlns:a16="http://schemas.microsoft.com/office/drawing/2014/main" id="{AFF6DEC5-5BD9-4B7E-BF5B-F8104B5E3033}"/>
+              </a:ext>
+            </a:extLst>
+          </p:cNvPr>
+          <p:cNvSpPr/>
+          <p:nvPr/>
+        </p:nvSpPr>
+        <p:spPr>
+          <a:xfrm>
+            <a:off x="1963740" y="1454947"/>
+            <a:ext cx="104775" cy="104775"/>
+          </a:xfrm>
+          <a:prstGeom prst="ellipse">
+            <a:avLst/>
+          </a:prstGeom>
+          <a:solidFill>
+            <a:srgbClr val="00CC00"/>
+          </a:solidFill>
+          <a:ln>
+            <a:noFill/>
+          </a:ln>
+        </p:spPr>
+        <p:style>
+          <a:lnRef idx="2">
+            <a:schemeClr val="accent1">
+              <a:shade val="50000"/>
+            </a:schemeClr>
+          </a:lnRef>
+          <a:fillRef idx="1">
+            <a:schemeClr val="accent1"/>
+          </a:fillRef>
+          <a:effectRef idx="0">
+            <a:schemeClr val="accent1"/>
+          </a:effectRef>
+          <a:fontRef idx="minor">
+            <a:schemeClr val="lt1"/>
+          </a:fontRef>
+        </p:style>
+        <p:txBody>
+          <a:bodyPr rot="0" spcFirstLastPara="0" vertOverflow="overflow" horzOverflow="overflow" vert="horz" wrap="square" lIns="91440" tIns="45720" rIns="91440" bIns="45720" numCol="1" spcCol="0" rtlCol="0" fromWordArt="0" anchor="ctr" anchorCtr="0" forceAA="0" compatLnSpc="1">
+            <a:prstTxWarp prst="textNoShape">
+              <a:avLst/>
+            </a:prstTxWarp>
+            <a:noAutofit/>
+          </a:bodyPr>
+          <a:lstStyle/>
+          <a:p>
+            <a:pPr algn="ctr"/>
+            <a:endParaRPr lang="ko-KR" altLang="en-US"/>
           </a:p>
         </p:txBody>
       </p:sp>
     </p:spTree>
     <p:extLst>
       <p:ext uri="{BB962C8B-B14F-4D97-AF65-F5344CB8AC3E}">
-        <p14:creationId xmlns:p14="http://schemas.microsoft.com/office/powerpoint/2010/main" val="3349585182"/>
+        <p14:creationId xmlns:p14="http://schemas.microsoft.com/office/powerpoint/2010/main" val="3967405731"/>
       </p:ext>
     </p:extLst>
   </p:cSld>
@@ -11205,7 +10985,7 @@
         <p:cNvPr id="1" name="">
           <a:extLst>
             <a:ext uri="{FF2B5EF4-FFF2-40B4-BE49-F238E27FC236}">
-              <a16:creationId xmlns:a16="http://schemas.microsoft.com/office/drawing/2014/main" id="{566DB05A-3E6B-3247-4A65-E5763C441D19}"/>
+              <a16:creationId xmlns:a16="http://schemas.microsoft.com/office/drawing/2014/main" id="{DFA44891-DB0B-9038-5B25-629A4C227FFF}"/>
             </a:ext>
           </a:extLst>
         </p:cNvPr>
@@ -11225,7 +11005,7 @@
           <p:cNvPr id="25" name="사각형: 둥근 모서리 24">
             <a:extLst>
               <a:ext uri="{FF2B5EF4-FFF2-40B4-BE49-F238E27FC236}">
-                <a16:creationId xmlns:a16="http://schemas.microsoft.com/office/drawing/2014/main" id="{F14530EE-6C6E-00B8-04DA-86394A15B6DC}"/>
+                <a16:creationId xmlns:a16="http://schemas.microsoft.com/office/drawing/2014/main" id="{4D2AB74B-0885-7248-82A8-738CC227DF1C}"/>
               </a:ext>
             </a:extLst>
           </p:cNvPr>
@@ -11234,8 +11014,8 @@
         </p:nvSpPr>
         <p:spPr>
           <a:xfrm>
-            <a:off x="807085" y="324614"/>
-            <a:ext cx="2321877" cy="382344"/>
+            <a:off x="818197" y="324615"/>
+            <a:ext cx="2291713" cy="382344"/>
           </a:xfrm>
           <a:prstGeom prst="roundRect">
             <a:avLst>
@@ -11284,7 +11064,7 @@
           <p:cNvPr id="26" name="사각형: 둥근 모서리 25">
             <a:extLst>
               <a:ext uri="{FF2B5EF4-FFF2-40B4-BE49-F238E27FC236}">
-                <a16:creationId xmlns:a16="http://schemas.microsoft.com/office/drawing/2014/main" id="{C814A8FD-F140-B902-7F8F-01BACF978DB3}"/>
+                <a16:creationId xmlns:a16="http://schemas.microsoft.com/office/drawing/2014/main" id="{B073FA0F-66B5-6BAF-0E1F-7AC6E77B5191}"/>
               </a:ext>
             </a:extLst>
           </p:cNvPr>
@@ -11293,8 +11073,8 @@
         </p:nvSpPr>
         <p:spPr>
           <a:xfrm>
-            <a:off x="807085" y="745556"/>
-            <a:ext cx="2321877" cy="592988"/>
+            <a:off x="818197" y="745559"/>
+            <a:ext cx="2291713" cy="592988"/>
           </a:xfrm>
           <a:prstGeom prst="roundRect">
             <a:avLst>
@@ -11343,7 +11123,7 @@
           <p:cNvPr id="21" name="사각형: 둥근 모서리 20">
             <a:extLst>
               <a:ext uri="{FF2B5EF4-FFF2-40B4-BE49-F238E27FC236}">
-                <a16:creationId xmlns:a16="http://schemas.microsoft.com/office/drawing/2014/main" id="{34867447-CBBA-A163-C030-01D16F0AA44F}"/>
+                <a16:creationId xmlns:a16="http://schemas.microsoft.com/office/drawing/2014/main" id="{993AC22E-D82C-01DF-84E7-90AC9AD4AD3F}"/>
               </a:ext>
             </a:extLst>
           </p:cNvPr>
@@ -11352,7 +11132,7 @@
         </p:nvSpPr>
         <p:spPr>
           <a:xfrm>
-            <a:off x="73819" y="324614"/>
+            <a:off x="84929" y="324615"/>
             <a:ext cx="721520" cy="382344"/>
           </a:xfrm>
           <a:prstGeom prst="roundRect">
@@ -11400,7 +11180,7 @@
           <p:cNvPr id="3" name="TextBox 2">
             <a:extLst>
               <a:ext uri="{FF2B5EF4-FFF2-40B4-BE49-F238E27FC236}">
-                <a16:creationId xmlns:a16="http://schemas.microsoft.com/office/drawing/2014/main" id="{AC10C9D4-2974-A5E1-61C1-8D6C17866098}"/>
+                <a16:creationId xmlns:a16="http://schemas.microsoft.com/office/drawing/2014/main" id="{CEABBF7A-4383-D72B-A05E-B56FEE94992E}"/>
               </a:ext>
             </a:extLst>
           </p:cNvPr>
@@ -11409,7 +11189,7 @@
         </p:nvSpPr>
         <p:spPr>
           <a:xfrm>
-            <a:off x="61773" y="54245"/>
+            <a:off x="41931" y="54250"/>
             <a:ext cx="1180381" cy="169277"/>
           </a:xfrm>
           <a:prstGeom prst="rect">
@@ -11453,7 +11233,7 @@
           <p:cNvPr id="7" name="TextBox 6">
             <a:extLst>
               <a:ext uri="{FF2B5EF4-FFF2-40B4-BE49-F238E27FC236}">
-                <a16:creationId xmlns:a16="http://schemas.microsoft.com/office/drawing/2014/main" id="{2E15FF55-D65C-D72A-F9C2-60767170D9B2}"/>
+                <a16:creationId xmlns:a16="http://schemas.microsoft.com/office/drawing/2014/main" id="{CF3CA475-D856-01FB-19C8-E100A19DE5EF}"/>
               </a:ext>
             </a:extLst>
           </p:cNvPr>
@@ -11462,8 +11242,8 @@
         </p:nvSpPr>
         <p:spPr>
           <a:xfrm>
-            <a:off x="755416" y="415758"/>
-            <a:ext cx="2627430" cy="215444"/>
+            <a:off x="735575" y="415757"/>
+            <a:ext cx="2627431" cy="215444"/>
           </a:xfrm>
           <a:prstGeom prst="rect">
             <a:avLst/>
@@ -11637,7 +11417,7 @@
           <p:cNvPr id="2" name="사각형: 둥근 모서리 1">
             <a:extLst>
               <a:ext uri="{FF2B5EF4-FFF2-40B4-BE49-F238E27FC236}">
-                <a16:creationId xmlns:a16="http://schemas.microsoft.com/office/drawing/2014/main" id="{F4D2629A-B95B-40C6-8D84-8DDD332B7253}"/>
+                <a16:creationId xmlns:a16="http://schemas.microsoft.com/office/drawing/2014/main" id="{1B4DC618-B29F-845A-7DD8-6A834C8CEE4F}"/>
               </a:ext>
             </a:extLst>
           </p:cNvPr>
@@ -11646,7 +11426,7 @@
         </p:nvSpPr>
         <p:spPr>
           <a:xfrm>
-            <a:off x="73819" y="745555"/>
+            <a:off x="84929" y="745557"/>
             <a:ext cx="721520" cy="592987"/>
           </a:xfrm>
           <a:prstGeom prst="roundRect">
@@ -11694,7 +11474,7 @@
           <p:cNvPr id="11" name="TextBox 10">
             <a:extLst>
               <a:ext uri="{FF2B5EF4-FFF2-40B4-BE49-F238E27FC236}">
-                <a16:creationId xmlns:a16="http://schemas.microsoft.com/office/drawing/2014/main" id="{85C45383-A445-2A0A-63A4-FD139F13FF2C}"/>
+                <a16:creationId xmlns:a16="http://schemas.microsoft.com/office/drawing/2014/main" id="{0F29C902-63CB-1B88-5847-68EBD7D4096A}"/>
               </a:ext>
             </a:extLst>
           </p:cNvPr>
@@ -11703,8 +11483,8 @@
         </p:nvSpPr>
         <p:spPr>
           <a:xfrm>
-            <a:off x="796061" y="718077"/>
-            <a:ext cx="2321878" cy="628121"/>
+            <a:off x="807175" y="718078"/>
+            <a:ext cx="2321879" cy="628121"/>
           </a:xfrm>
           <a:prstGeom prst="rect">
             <a:avLst/>
@@ -12092,7 +11872,7 @@
           <p:cNvPr id="18" name="TextBox 17">
             <a:extLst>
               <a:ext uri="{FF2B5EF4-FFF2-40B4-BE49-F238E27FC236}">
-                <a16:creationId xmlns:a16="http://schemas.microsoft.com/office/drawing/2014/main" id="{89108A57-9699-58DA-2060-EF9B8299ACFF}"/>
+                <a16:creationId xmlns:a16="http://schemas.microsoft.com/office/drawing/2014/main" id="{A177CD16-1AA6-B8C7-0E32-C84E8AF73AC7}"/>
               </a:ext>
             </a:extLst>
           </p:cNvPr>
@@ -12101,7 +11881,7 @@
         </p:nvSpPr>
         <p:spPr>
           <a:xfrm>
-            <a:off x="254362" y="1408811"/>
+            <a:off x="265477" y="1408813"/>
             <a:ext cx="2709863" cy="200055"/>
           </a:xfrm>
           <a:prstGeom prst="rect">
@@ -12216,10 +11996,10 @@
       </p:sp>
       <p:sp>
         <p:nvSpPr>
-          <p:cNvPr id="10" name="TextBox 9">
+          <p:cNvPr id="17" name="TextBox 16">
             <a:extLst>
               <a:ext uri="{FF2B5EF4-FFF2-40B4-BE49-F238E27FC236}">
-                <a16:creationId xmlns:a16="http://schemas.microsoft.com/office/drawing/2014/main" id="{AB7989B5-3860-0F23-EEBF-DC0646A473EF}"/>
+                <a16:creationId xmlns:a16="http://schemas.microsoft.com/office/drawing/2014/main" id="{67FFF511-7B20-E2F4-96D5-C91B888C0873}"/>
               </a:ext>
             </a:extLst>
           </p:cNvPr>
@@ -12228,132 +12008,7 @@
         </p:nvSpPr>
         <p:spPr>
           <a:xfrm>
-            <a:off x="487241" y="1408811"/>
-            <a:ext cx="308098" cy="200055"/>
-          </a:xfrm>
-          <a:prstGeom prst="rect">
-            <a:avLst/>
-          </a:prstGeom>
-          <a:noFill/>
-        </p:spPr>
-        <p:txBody>
-          <a:bodyPr wrap="none">
-            <a:spAutoFit/>
-          </a:bodyPr>
-          <a:lstStyle/>
-          <a:p>
-            <a:r>
-              <a:rPr lang="ko-KR" altLang="en-US" sz="700" dirty="0">
-                <a:solidFill>
-                  <a:srgbClr val="000000"/>
-                </a:solidFill>
-                <a:latin typeface="맑은 고딕" panose="020B0503020000020004" pitchFamily="50" charset="-127"/>
-                <a:ea typeface="맑은 고딕" panose="020B0503020000020004" pitchFamily="50" charset="-127"/>
-              </a:rPr>
-              <a:t>🔴</a:t>
-            </a:r>
-          </a:p>
-        </p:txBody>
-      </p:sp>
-      <p:sp>
-        <p:nvSpPr>
-          <p:cNvPr id="14" name="TextBox 13">
-            <a:extLst>
-              <a:ext uri="{FF2B5EF4-FFF2-40B4-BE49-F238E27FC236}">
-                <a16:creationId xmlns:a16="http://schemas.microsoft.com/office/drawing/2014/main" id="{FF0F2C7A-C4DB-8609-70A0-9E7C81230870}"/>
-              </a:ext>
-            </a:extLst>
-          </p:cNvPr>
-          <p:cNvSpPr txBox="1"/>
-          <p:nvPr/>
-        </p:nvSpPr>
-        <p:spPr>
-          <a:xfrm>
-            <a:off x="1188617" y="1408811"/>
-            <a:ext cx="308098" cy="200055"/>
-          </a:xfrm>
-          <a:prstGeom prst="rect">
-            <a:avLst/>
-          </a:prstGeom>
-          <a:noFill/>
-        </p:spPr>
-        <p:txBody>
-          <a:bodyPr wrap="none">
-            <a:spAutoFit/>
-          </a:bodyPr>
-          <a:lstStyle/>
-          <a:p>
-            <a:r>
-              <a:rPr lang="ko-KR" altLang="en-US" sz="700" dirty="0"/>
-              <a:t>🟢</a:t>
-            </a:r>
-            <a:endParaRPr lang="ko-KR" altLang="en-US" sz="700" dirty="0">
-              <a:solidFill>
-                <a:srgbClr val="000000"/>
-              </a:solidFill>
-              <a:latin typeface="맑은 고딕" panose="020B0503020000020004" pitchFamily="50" charset="-127"/>
-              <a:ea typeface="맑은 고딕" panose="020B0503020000020004" pitchFamily="50" charset="-127"/>
-            </a:endParaRPr>
-          </a:p>
-        </p:txBody>
-      </p:sp>
-      <p:sp>
-        <p:nvSpPr>
-          <p:cNvPr id="16" name="TextBox 15">
-            <a:extLst>
-              <a:ext uri="{FF2B5EF4-FFF2-40B4-BE49-F238E27FC236}">
-                <a16:creationId xmlns:a16="http://schemas.microsoft.com/office/drawing/2014/main" id="{995E2FEB-6F9F-AC7E-72C2-29A93762E4EF}"/>
-              </a:ext>
-            </a:extLst>
-          </p:cNvPr>
-          <p:cNvSpPr txBox="1"/>
-          <p:nvPr/>
-        </p:nvSpPr>
-        <p:spPr>
-          <a:xfrm>
-            <a:off x="1843546" y="1408811"/>
-            <a:ext cx="308098" cy="200055"/>
-          </a:xfrm>
-          <a:prstGeom prst="rect">
-            <a:avLst/>
-          </a:prstGeom>
-          <a:noFill/>
-        </p:spPr>
-        <p:txBody>
-          <a:bodyPr wrap="none">
-            <a:spAutoFit/>
-          </a:bodyPr>
-          <a:lstStyle/>
-          <a:p>
-            <a:r>
-              <a:rPr lang="ko-KR" altLang="en-US" sz="700" dirty="0">
-                <a:solidFill>
-                  <a:srgbClr val="000000"/>
-                </a:solidFill>
-                <a:latin typeface="맑은 고딕" panose="020B0503020000020004" pitchFamily="50" charset="-127"/>
-                <a:ea typeface="맑은 고딕" panose="020B0503020000020004" pitchFamily="50" charset="-127"/>
-              </a:rPr>
-              <a:t>🟡</a:t>
-            </a:r>
-            <a:endParaRPr lang="ko-KR" altLang="en-US" sz="700" dirty="0"/>
-          </a:p>
-        </p:txBody>
-      </p:sp>
-      <p:sp>
-        <p:nvSpPr>
-          <p:cNvPr id="17" name="TextBox 16">
-            <a:extLst>
-              <a:ext uri="{FF2B5EF4-FFF2-40B4-BE49-F238E27FC236}">
-                <a16:creationId xmlns:a16="http://schemas.microsoft.com/office/drawing/2014/main" id="{C0E97406-7C69-4EA0-ABFB-0F3257B0935A}"/>
-              </a:ext>
-            </a:extLst>
-          </p:cNvPr>
-          <p:cNvSpPr txBox="1"/>
-          <p:nvPr/>
-        </p:nvSpPr>
-        <p:spPr>
-          <a:xfrm>
-            <a:off x="157821" y="366661"/>
+            <a:off x="127333" y="366664"/>
             <a:ext cx="636713" cy="338554"/>
           </a:xfrm>
           <a:prstGeom prst="rect">
@@ -12416,7 +12071,7 @@
           <p:cNvPr id="19" name="TextBox 18">
             <a:extLst>
               <a:ext uri="{FF2B5EF4-FFF2-40B4-BE49-F238E27FC236}">
-                <a16:creationId xmlns:a16="http://schemas.microsoft.com/office/drawing/2014/main" id="{B25388BE-7D3A-F30E-B956-7A464AA3BC38}"/>
+                <a16:creationId xmlns:a16="http://schemas.microsoft.com/office/drawing/2014/main" id="{80AC34A0-F9F3-3EDB-E7DE-AF18BCE089E6}"/>
               </a:ext>
             </a:extLst>
           </p:cNvPr>
@@ -12425,7 +12080,7 @@
         </p:nvSpPr>
         <p:spPr>
           <a:xfrm>
-            <a:off x="128847" y="932596"/>
+            <a:off x="104891" y="932596"/>
             <a:ext cx="681597" cy="215444"/>
           </a:xfrm>
           <a:prstGeom prst="rect">
@@ -12475,7 +12130,7 @@
           <p:cNvPr id="24" name="직선 연결선 23">
             <a:extLst>
               <a:ext uri="{FF2B5EF4-FFF2-40B4-BE49-F238E27FC236}">
-                <a16:creationId xmlns:a16="http://schemas.microsoft.com/office/drawing/2014/main" id="{AEC697FC-4126-4CEA-8C24-61ABFF83A8E9}"/>
+                <a16:creationId xmlns:a16="http://schemas.microsoft.com/office/drawing/2014/main" id="{EF6F1791-FF02-2FDA-4F5D-44CDEE636F8C}"/>
               </a:ext>
             </a:extLst>
           </p:cNvPr>
@@ -12484,7 +12139,7 @@
         </p:nvCxnSpPr>
         <p:spPr>
           <a:xfrm flipH="1">
-            <a:off x="154781" y="1373677"/>
+            <a:off x="165891" y="1373677"/>
             <a:ext cx="2909888" cy="0"/>
           </a:xfrm>
           <a:prstGeom prst="line">
@@ -12515,98 +12170,179 @@
       </p:cxnSp>
       <p:sp>
         <p:nvSpPr>
-          <p:cNvPr id="4" name="TextBox 3">
+          <p:cNvPr id="6" name="타원 5">
             <a:extLst>
               <a:ext uri="{FF2B5EF4-FFF2-40B4-BE49-F238E27FC236}">
-                <a16:creationId xmlns:a16="http://schemas.microsoft.com/office/drawing/2014/main" id="{9A1CB27F-84FF-A386-7166-BFE14401292E}"/>
+                <a16:creationId xmlns:a16="http://schemas.microsoft.com/office/drawing/2014/main" id="{CEA2B6CD-6F59-45DE-B26A-1E44DF2411D7}"/>
               </a:ext>
             </a:extLst>
           </p:cNvPr>
-          <p:cNvSpPr txBox="1"/>
+          <p:cNvSpPr/>
           <p:nvPr/>
         </p:nvSpPr>
         <p:spPr>
           <a:xfrm>
-            <a:off x="0" y="408064"/>
-            <a:ext cx="325730" cy="215444"/>
+            <a:off x="582615" y="1454947"/>
+            <a:ext cx="104775" cy="104775"/>
           </a:xfrm>
-          <a:prstGeom prst="rect">
+          <a:prstGeom prst="ellipse">
             <a:avLst/>
           </a:prstGeom>
-          <a:noFill/>
+          <a:solidFill>
+            <a:srgbClr val="FF0000"/>
+          </a:solidFill>
+          <a:ln>
+            <a:noFill/>
+          </a:ln>
         </p:spPr>
-        <p:txBody>
-          <a:bodyPr wrap="none">
-            <a:spAutoFit/>
+        <p:style>
+          <a:lnRef idx="2">
+            <a:schemeClr val="accent1">
+              <a:shade val="50000"/>
+            </a:schemeClr>
+          </a:lnRef>
+          <a:fillRef idx="1">
+            <a:schemeClr val="accent1"/>
+          </a:fillRef>
+          <a:effectRef idx="0">
+            <a:schemeClr val="accent1"/>
+          </a:effectRef>
+          <a:fontRef idx="minor">
+            <a:schemeClr val="lt1"/>
+          </a:fontRef>
+        </p:style>
+        <p:txBody>
+          <a:bodyPr rot="0" spcFirstLastPara="0" vertOverflow="overflow" horzOverflow="overflow" vert="horz" wrap="square" lIns="91440" tIns="45720" rIns="91440" bIns="45720" numCol="1" spcCol="0" rtlCol="0" fromWordArt="0" anchor="ctr" anchorCtr="0" forceAA="0" compatLnSpc="1">
+            <a:prstTxWarp prst="textNoShape">
+              <a:avLst/>
+            </a:prstTxWarp>
+            <a:noAutofit/>
           </a:bodyPr>
           <a:lstStyle/>
           <a:p>
-            <a:r>
-              <a:rPr lang="ko-KR" altLang="en-US" sz="800" dirty="0"/>
-              <a:t>📌</a:t>
-            </a:r>
-            <a:endParaRPr lang="ko-KR" altLang="en-US" sz="800" b="1" dirty="0">
-              <a:solidFill>
-                <a:srgbClr val="000000"/>
-              </a:solidFill>
-              <a:latin typeface="KoPub돋움체 Medium" panose="02020603020101020101" pitchFamily="18" charset="-127"/>
-              <a:ea typeface="KoPub돋움체 Medium" panose="02020603020101020101" pitchFamily="18" charset="-127"/>
-            </a:endParaRPr>
-          </a:p>
-        </p:txBody>
-      </p:sp>
-      <p:sp>
-        <p:nvSpPr>
-          <p:cNvPr id="5" name="TextBox 4">
+            <a:pPr algn="ctr"/>
+            <a:endParaRPr lang="ko-KR" altLang="en-US"/>
+          </a:p>
+        </p:txBody>
+      </p:sp>
+      <p:sp>
+        <p:nvSpPr>
+          <p:cNvPr id="20" name="타원 19">
             <a:extLst>
               <a:ext uri="{FF2B5EF4-FFF2-40B4-BE49-F238E27FC236}">
-                <a16:creationId xmlns:a16="http://schemas.microsoft.com/office/drawing/2014/main" id="{08A4958C-6E0E-7166-50FB-4955804D4818}"/>
+                <a16:creationId xmlns:a16="http://schemas.microsoft.com/office/drawing/2014/main" id="{5475DBC3-BF9A-42B4-81E3-C8A239B20A22}"/>
               </a:ext>
             </a:extLst>
           </p:cNvPr>
-          <p:cNvSpPr txBox="1"/>
+          <p:cNvSpPr/>
           <p:nvPr/>
         </p:nvSpPr>
         <p:spPr>
           <a:xfrm>
-            <a:off x="3206" y="932595"/>
-            <a:ext cx="322524" cy="215444"/>
+            <a:off x="1273177" y="1454947"/>
+            <a:ext cx="104775" cy="104775"/>
           </a:xfrm>
-          <a:prstGeom prst="rect">
+          <a:prstGeom prst="ellipse">
             <a:avLst/>
           </a:prstGeom>
-          <a:noFill/>
+          <a:solidFill>
+            <a:srgbClr val="F58400"/>
+          </a:solidFill>
+          <a:ln>
+            <a:noFill/>
+          </a:ln>
         </p:spPr>
-        <p:txBody>
-          <a:bodyPr wrap="none">
-            <a:spAutoFit/>
+        <p:style>
+          <a:lnRef idx="2">
+            <a:schemeClr val="accent1">
+              <a:shade val="50000"/>
+            </a:schemeClr>
+          </a:lnRef>
+          <a:fillRef idx="1">
+            <a:schemeClr val="accent1"/>
+          </a:fillRef>
+          <a:effectRef idx="0">
+            <a:schemeClr val="accent1"/>
+          </a:effectRef>
+          <a:fontRef idx="minor">
+            <a:schemeClr val="lt1"/>
+          </a:fontRef>
+        </p:style>
+        <p:txBody>
+          <a:bodyPr rot="0" spcFirstLastPara="0" vertOverflow="overflow" horzOverflow="overflow" vert="horz" wrap="square" lIns="91440" tIns="45720" rIns="91440" bIns="45720" numCol="1" spcCol="0" rtlCol="0" fromWordArt="0" anchor="ctr" anchorCtr="0" forceAA="0" compatLnSpc="1">
+            <a:prstTxWarp prst="textNoShape">
+              <a:avLst/>
+            </a:prstTxWarp>
+            <a:noAutofit/>
           </a:bodyPr>
           <a:lstStyle/>
           <a:p>
-            <a:r>
-              <a:rPr lang="ko-KR" altLang="en-US" sz="800" b="1" dirty="0">
-                <a:solidFill>
-                  <a:srgbClr val="000000"/>
-                </a:solidFill>
-                <a:latin typeface="맑은 고딕" panose="020B0503020000020004" pitchFamily="50" charset="-127"/>
-                <a:ea typeface="맑은 고딕" panose="020B0503020000020004" pitchFamily="50" charset="-127"/>
-              </a:rPr>
-              <a:t>🔄</a:t>
-            </a:r>
-            <a:endParaRPr lang="ko-KR" altLang="en-US" sz="2000" b="1" dirty="0">
-              <a:solidFill>
-                <a:srgbClr val="000000"/>
-              </a:solidFill>
-              <a:latin typeface="KoPub돋움체 Light" panose="02020603020101020101" pitchFamily="18" charset="-127"/>
-              <a:ea typeface="KoPub돋움체 Light" panose="02020603020101020101" pitchFamily="18" charset="-127"/>
-            </a:endParaRPr>
+            <a:pPr algn="ctr"/>
+            <a:endParaRPr lang="ko-KR" altLang="en-US"/>
+          </a:p>
+        </p:txBody>
+      </p:sp>
+      <p:sp>
+        <p:nvSpPr>
+          <p:cNvPr id="22" name="타원 21">
+            <a:extLst>
+              <a:ext uri="{FF2B5EF4-FFF2-40B4-BE49-F238E27FC236}">
+                <a16:creationId xmlns:a16="http://schemas.microsoft.com/office/drawing/2014/main" id="{AFF6DEC5-5BD9-4B7E-BF5B-F8104B5E3033}"/>
+              </a:ext>
+            </a:extLst>
+          </p:cNvPr>
+          <p:cNvSpPr/>
+          <p:nvPr/>
+        </p:nvSpPr>
+        <p:spPr>
+          <a:xfrm>
+            <a:off x="1963740" y="1454947"/>
+            <a:ext cx="104775" cy="104775"/>
+          </a:xfrm>
+          <a:prstGeom prst="ellipse">
+            <a:avLst/>
+          </a:prstGeom>
+          <a:solidFill>
+            <a:srgbClr val="00CC00"/>
+          </a:solidFill>
+          <a:ln>
+            <a:noFill/>
+          </a:ln>
+        </p:spPr>
+        <p:style>
+          <a:lnRef idx="2">
+            <a:schemeClr val="accent1">
+              <a:shade val="50000"/>
+            </a:schemeClr>
+          </a:lnRef>
+          <a:fillRef idx="1">
+            <a:schemeClr val="accent1"/>
+          </a:fillRef>
+          <a:effectRef idx="0">
+            <a:schemeClr val="accent1"/>
+          </a:effectRef>
+          <a:fontRef idx="minor">
+            <a:schemeClr val="lt1"/>
+          </a:fontRef>
+        </p:style>
+        <p:txBody>
+          <a:bodyPr rot="0" spcFirstLastPara="0" vertOverflow="overflow" horzOverflow="overflow" vert="horz" wrap="square" lIns="91440" tIns="45720" rIns="91440" bIns="45720" numCol="1" spcCol="0" rtlCol="0" fromWordArt="0" anchor="ctr" anchorCtr="0" forceAA="0" compatLnSpc="1">
+            <a:prstTxWarp prst="textNoShape">
+              <a:avLst/>
+            </a:prstTxWarp>
+            <a:noAutofit/>
+          </a:bodyPr>
+          <a:lstStyle/>
+          <a:p>
+            <a:pPr algn="ctr"/>
+            <a:endParaRPr lang="ko-KR" altLang="en-US"/>
           </a:p>
         </p:txBody>
       </p:sp>
     </p:spTree>
     <p:extLst>
       <p:ext uri="{BB962C8B-B14F-4D97-AF65-F5344CB8AC3E}">
-        <p14:creationId xmlns:p14="http://schemas.microsoft.com/office/powerpoint/2010/main" val="1118756353"/>
+        <p14:creationId xmlns:p14="http://schemas.microsoft.com/office/powerpoint/2010/main" val="3616013075"/>
       </p:ext>
     </p:extLst>
   </p:cSld>
@@ -12871,7 +12607,7 @@
   <a:extraClrSchemeLst/>
   <a:extLst>
     <a:ext uri="{05A4C25C-085E-4340-85A3-A5531E510DB2}">
-      <thm15:themeFamily xmlns:thm15="http://schemas.microsoft.com/office/thememl/2012/main" name="Office 2013 - 2022 Theme" id="{62F939B6-93AF-4DB8-9C6B-D6C7DFDC589F}" vid="{4A3C46E8-61CC-4603-A589-7422A47A8E4A}"/>
+      <thm15:themeFamily xmlns:thm15="http://schemas.microsoft.com/office/thememl/2012/main" name="Office Theme" id="{62F939B6-93AF-4DB8-9C6B-D6C7DFDC589F}" vid="{4A3C46E8-61CC-4603-A589-7422A47A8E4A}"/>
     </a:ext>
   </a:extLst>
 </a:theme>

--- a/documents/명함제작/[2026 우리가치(WeValue) QI 활동 프로젝트 명함2(앞).pptx
+++ b/documents/명함제작/[2026 우리가치(WeValue) QI 활동 프로젝트 명함2(앞).pptx
@@ -2,7 +2,7 @@
 <file path=ppt/presentation.xml><?xml version="1.0" encoding="utf-8"?>
 <p:presentation xmlns:a="http://schemas.openxmlformats.org/drawingml/2006/main" xmlns:r="http://schemas.openxmlformats.org/officeDocument/2006/relationships" xmlns:p="http://schemas.openxmlformats.org/presentationml/2006/main" saveSubsetFonts="1">
   <p:sldMasterIdLst>
-    <p:sldMasterId id="2147483883" r:id="rId1"/>
+    <p:sldMasterId id="2147483909" r:id="rId1"/>
   </p:sldMasterIdLst>
   <p:notesMasterIdLst>
     <p:notesMasterId r:id="rId8"/>
@@ -233,7 +233,7 @@
           <a:p>
             <a:fld id="{F929F65E-AEE7-45C5-814B-4468CAF1E537}" type="datetimeFigureOut">
               <a:rPr lang="ko-KR" altLang="en-US" smtClean="0"/>
-              <a:t>2026-03-15</a:t>
+              <a:t>2026-04-09</a:t>
             </a:fld>
             <a:endParaRPr lang="ko-KR" altLang="en-US"/>
           </a:p>
@@ -251,8 +251,8 @@
         </p:nvSpPr>
         <p:spPr>
           <a:xfrm>
-            <a:off x="444500" y="1241425"/>
-            <a:ext cx="5969000" cy="3359150"/>
+            <a:off x="442913" y="1241425"/>
+            <a:ext cx="5972175" cy="3359150"/>
           </a:xfrm>
           <a:prstGeom prst="rect">
             <a:avLst/>
@@ -529,7 +529,7 @@
         </p:nvSpPr>
         <p:spPr>
           <a:xfrm>
-            <a:off x="400051" y="294622"/>
+            <a:off x="400050" y="294620"/>
             <a:ext cx="2400300" cy="626745"/>
           </a:xfrm>
         </p:spPr>
@@ -561,7 +561,7 @@
         </p:nvSpPr>
         <p:spPr>
           <a:xfrm>
-            <a:off x="400051" y="945535"/>
+            <a:off x="400050" y="945535"/>
             <a:ext cx="2400300" cy="434638"/>
           </a:xfrm>
         </p:spPr>
@@ -570,37 +570,37 @@
           <a:lstStyle>
             <a:lvl1pPr marL="0" indent="0" algn="ctr">
               <a:buNone/>
-              <a:defRPr sz="629"/>
+              <a:defRPr sz="630"/>
             </a:lvl1pPr>
-            <a:lvl2pPr marL="120012" indent="0" algn="ctr">
+            <a:lvl2pPr marL="120015" indent="0" algn="ctr">
               <a:buNone/>
               <a:defRPr sz="525"/>
             </a:lvl2pPr>
-            <a:lvl3pPr marL="240025" indent="0" algn="ctr">
+            <a:lvl3pPr marL="240030" indent="0" algn="ctr">
               <a:buNone/>
               <a:defRPr sz="472"/>
             </a:lvl3pPr>
-            <a:lvl4pPr marL="360036" indent="0" algn="ctr">
+            <a:lvl4pPr marL="360045" indent="0" algn="ctr">
               <a:buNone/>
               <a:defRPr sz="420"/>
             </a:lvl4pPr>
-            <a:lvl5pPr marL="480048" indent="0" algn="ctr">
+            <a:lvl5pPr marL="480060" indent="0" algn="ctr">
               <a:buNone/>
               <a:defRPr sz="420"/>
             </a:lvl5pPr>
-            <a:lvl6pPr marL="600060" indent="0" algn="ctr">
+            <a:lvl6pPr marL="600075" indent="0" algn="ctr">
               <a:buNone/>
               <a:defRPr sz="420"/>
             </a:lvl6pPr>
-            <a:lvl7pPr marL="720073" indent="0" algn="ctr">
+            <a:lvl7pPr marL="720090" indent="0" algn="ctr">
               <a:buNone/>
               <a:defRPr sz="420"/>
             </a:lvl7pPr>
-            <a:lvl8pPr marL="840084" indent="0" algn="ctr">
+            <a:lvl8pPr marL="840105" indent="0" algn="ctr">
               <a:buNone/>
               <a:defRPr sz="420"/>
             </a:lvl8pPr>
-            <a:lvl9pPr marL="960096" indent="0" algn="ctr">
+            <a:lvl9pPr marL="960120" indent="0" algn="ctr">
               <a:buNone/>
               <a:defRPr sz="420"/>
             </a:lvl9pPr>
@@ -631,7 +631,7 @@
           <a:p>
             <a:fld id="{149F34B4-7175-41BD-B98B-2E7021201D7D}" type="datetimeFigureOut">
               <a:rPr lang="ko-KR" altLang="en-US" smtClean="0"/>
-              <a:t>2026-03-15</a:t>
+              <a:t>2026-04-09</a:t>
             </a:fld>
             <a:endParaRPr lang="ko-KR" altLang="en-US"/>
           </a:p>
@@ -682,7 +682,7 @@
     </p:spTree>
     <p:extLst>
       <p:ext uri="{BB962C8B-B14F-4D97-AF65-F5344CB8AC3E}">
-        <p14:creationId xmlns:p14="http://schemas.microsoft.com/office/powerpoint/2010/main" val="2109556029"/>
+        <p14:creationId xmlns:p14="http://schemas.microsoft.com/office/powerpoint/2010/main" val="3834009166"/>
       </p:ext>
     </p:extLst>
   </p:cSld>
@@ -750,35 +750,35 @@
             <a:pPr lvl="0"/>
             <a:r>
               <a:rPr lang="ko-KR" altLang="en-US"/>
-              <a:t>마스터 텍스트 스타일 편집</a:t>
+              <a:t>마스터 텍스트 스타일을 편집하려면 클릭</a:t>
             </a:r>
           </a:p>
           <a:p>
             <a:pPr lvl="1"/>
             <a:r>
               <a:rPr lang="ko-KR" altLang="en-US"/>
-              <a:t>둘째 수준</a:t>
+              <a:t>두 번째 수준</a:t>
             </a:r>
           </a:p>
           <a:p>
             <a:pPr lvl="2"/>
             <a:r>
               <a:rPr lang="ko-KR" altLang="en-US"/>
-              <a:t>셋째 수준</a:t>
+              <a:t>세 번째 수준</a:t>
             </a:r>
           </a:p>
           <a:p>
             <a:pPr lvl="3"/>
             <a:r>
               <a:rPr lang="ko-KR" altLang="en-US"/>
-              <a:t>넷째 수준</a:t>
+              <a:t>네 번째 수준</a:t>
             </a:r>
           </a:p>
           <a:p>
             <a:pPr lvl="4"/>
             <a:r>
               <a:rPr lang="ko-KR" altLang="en-US"/>
-              <a:t>다섯째 수준</a:t>
+              <a:t>다섯 번째 수준</a:t>
             </a:r>
             <a:endParaRPr lang="en-US" dirty="0"/>
           </a:p>
@@ -801,7 +801,7 @@
           <a:p>
             <a:fld id="{149F34B4-7175-41BD-B98B-2E7021201D7D}" type="datetimeFigureOut">
               <a:rPr lang="ko-KR" altLang="en-US" smtClean="0"/>
-              <a:t>2026-03-15</a:t>
+              <a:t>2026-04-09</a:t>
             </a:fld>
             <a:endParaRPr lang="ko-KR" altLang="en-US"/>
           </a:p>
@@ -852,7 +852,7 @@
     </p:spTree>
     <p:extLst>
       <p:ext uri="{BB962C8B-B14F-4D97-AF65-F5344CB8AC3E}">
-        <p14:creationId xmlns:p14="http://schemas.microsoft.com/office/powerpoint/2010/main" val="3539607565"/>
+        <p14:creationId xmlns:p14="http://schemas.microsoft.com/office/powerpoint/2010/main" val="703143421"/>
       </p:ext>
     </p:extLst>
   </p:cSld>
@@ -891,8 +891,8 @@
         </p:nvSpPr>
         <p:spPr>
           <a:xfrm>
-            <a:off x="2290286" y="95848"/>
-            <a:ext cx="690087" cy="1525607"/>
+            <a:off x="2290286" y="95846"/>
+            <a:ext cx="690086" cy="1525607"/>
           </a:xfrm>
         </p:spPr>
         <p:txBody>
@@ -919,8 +919,8 @@
         </p:nvSpPr>
         <p:spPr>
           <a:xfrm>
-            <a:off x="220027" y="95848"/>
-            <a:ext cx="2030255" cy="1525607"/>
+            <a:off x="220027" y="95846"/>
+            <a:ext cx="2030254" cy="1525607"/>
           </a:xfrm>
         </p:spPr>
         <p:txBody>
@@ -930,35 +930,35 @@
             <a:pPr lvl="0"/>
             <a:r>
               <a:rPr lang="ko-KR" altLang="en-US"/>
-              <a:t>마스터 텍스트 스타일 편집</a:t>
+              <a:t>마스터 텍스트 스타일을 편집하려면 클릭</a:t>
             </a:r>
           </a:p>
           <a:p>
             <a:pPr lvl="1"/>
             <a:r>
               <a:rPr lang="ko-KR" altLang="en-US"/>
-              <a:t>둘째 수준</a:t>
+              <a:t>두 번째 수준</a:t>
             </a:r>
           </a:p>
           <a:p>
             <a:pPr lvl="2"/>
             <a:r>
               <a:rPr lang="ko-KR" altLang="en-US"/>
-              <a:t>셋째 수준</a:t>
+              <a:t>세 번째 수준</a:t>
             </a:r>
           </a:p>
           <a:p>
             <a:pPr lvl="3"/>
             <a:r>
               <a:rPr lang="ko-KR" altLang="en-US"/>
-              <a:t>넷째 수준</a:t>
+              <a:t>네 번째 수준</a:t>
             </a:r>
           </a:p>
           <a:p>
             <a:pPr lvl="4"/>
             <a:r>
               <a:rPr lang="ko-KR" altLang="en-US"/>
-              <a:t>다섯째 수준</a:t>
+              <a:t>다섯 번째 수준</a:t>
             </a:r>
             <a:endParaRPr lang="en-US" dirty="0"/>
           </a:p>
@@ -981,7 +981,7 @@
           <a:p>
             <a:fld id="{149F34B4-7175-41BD-B98B-2E7021201D7D}" type="datetimeFigureOut">
               <a:rPr lang="ko-KR" altLang="en-US" smtClean="0"/>
-              <a:t>2026-03-15</a:t>
+              <a:t>2026-04-09</a:t>
             </a:fld>
             <a:endParaRPr lang="ko-KR" altLang="en-US"/>
           </a:p>
@@ -1032,7 +1032,7 @@
     </p:spTree>
     <p:extLst>
       <p:ext uri="{BB962C8B-B14F-4D97-AF65-F5344CB8AC3E}">
-        <p14:creationId xmlns:p14="http://schemas.microsoft.com/office/powerpoint/2010/main" val="3065570235"/>
+        <p14:creationId xmlns:p14="http://schemas.microsoft.com/office/powerpoint/2010/main" val="1044877363"/>
       </p:ext>
     </p:extLst>
   </p:cSld>
@@ -1073,7 +1073,7 @@
         </p:nvSpPr>
         <p:spPr>
           <a:xfrm>
-            <a:off x="3" y="1"/>
+            <a:off x="4" y="1"/>
             <a:ext cx="3207068" cy="1800225"/>
           </a:xfrm>
           <a:prstGeom prst="rect">
@@ -1109,7 +1109,7 @@
           <a:lstStyle/>
           <a:p>
             <a:pPr algn="ctr"/>
-            <a:endParaRPr lang="ko-KR" altLang="en-US" sz="133" dirty="0"/>
+            <a:endParaRPr lang="ko-KR" altLang="en-US" sz="135" dirty="0"/>
           </a:p>
         </p:txBody>
       </p:sp>
@@ -1127,7 +1127,7 @@
         </p:nvSpPr>
         <p:spPr>
           <a:xfrm>
-            <a:off x="29544" y="30485"/>
+            <a:off x="29545" y="30487"/>
             <a:ext cx="3143285" cy="1728467"/>
           </a:xfrm>
           <a:prstGeom prst="rect">
@@ -1161,7 +1161,7 @@
           <a:lstStyle/>
           <a:p>
             <a:pPr algn="ctr"/>
-            <a:endParaRPr lang="ko-KR" altLang="en-US" sz="133"/>
+            <a:endParaRPr lang="ko-KR" altLang="en-US" sz="135"/>
           </a:p>
         </p:txBody>
       </p:sp>
@@ -1187,7 +1187,7 @@
         </p:blipFill>
         <p:spPr>
           <a:xfrm>
-            <a:off x="2756640" y="81588"/>
+            <a:off x="2756641" y="81588"/>
             <a:ext cx="358715" cy="203042"/>
           </a:xfrm>
           <a:prstGeom prst="rect">
@@ -1214,7 +1214,7 @@
         </p:nvSpPr>
         <p:spPr>
           <a:xfrm>
-            <a:off x="2072572" y="1569908"/>
+            <a:off x="2072573" y="1569910"/>
             <a:ext cx="1127829" cy="169277"/>
           </a:xfrm>
           <a:prstGeom prst="rect">
@@ -1230,7 +1230,7 @@
           <a:p>
             <a:pPr algn="r"/>
             <a:r>
-              <a:rPr lang="ko-KR" altLang="en-US" sz="500" b="1" dirty="0">
+              <a:rPr lang="ko-KR" altLang="en-US" sz="506" b="1" dirty="0">
                 <a:solidFill>
                   <a:srgbClr val="4472C4"/>
                 </a:solidFill>
@@ -1239,7 +1239,7 @@
               </a:rPr>
               <a:t>진료지원간호팀</a:t>
             </a:r>
-            <a:endParaRPr lang="ko-KR" altLang="en-US" sz="600" b="1" dirty="0">
+            <a:endParaRPr lang="ko-KR" altLang="en-US" sz="607" b="1" dirty="0">
               <a:solidFill>
                 <a:srgbClr val="4472C4"/>
               </a:solidFill>
@@ -1252,22 +1252,22 @@
     </p:spTree>
     <p:extLst>
       <p:ext uri="{BB962C8B-B14F-4D97-AF65-F5344CB8AC3E}">
-        <p14:creationId xmlns:p14="http://schemas.microsoft.com/office/powerpoint/2010/main" val="1244911523"/>
+        <p14:creationId xmlns:p14="http://schemas.microsoft.com/office/powerpoint/2010/main" val="1560317576"/>
       </p:ext>
     </p:extLst>
   </p:cSld>
   <p:clrMapOvr>
     <a:masterClrMapping/>
   </p:clrMapOvr>
-  <p:extLst mod="1">
+  <p:extLst>
     <p:ext uri="{DCECCB84-F9BA-43D5-87BE-67443E8EF086}">
       <p15:sldGuideLst xmlns:p15="http://schemas.microsoft.com/office/powerpoint/2012/main">
-        <p15:guide id="1" orient="horz" pos="567" userDrawn="1">
+        <p15:guide id="1" orient="horz" pos="567">
           <p15:clr>
             <a:srgbClr val="FBAE40"/>
           </p15:clr>
         </p15:guide>
-        <p15:guide id="2" pos="1008" userDrawn="1">
+        <p15:guide id="2" pos="1008">
           <p15:clr>
             <a:srgbClr val="FBAE40"/>
           </p15:clr>
@@ -1309,7 +1309,7 @@
         </p:nvSpPr>
         <p:spPr>
           <a:xfrm>
-            <a:off x="3" y="1"/>
+            <a:off x="4" y="1"/>
             <a:ext cx="3207068" cy="1800225"/>
           </a:xfrm>
           <a:prstGeom prst="rect">
@@ -1345,7 +1345,7 @@
           <a:lstStyle/>
           <a:p>
             <a:pPr algn="ctr"/>
-            <a:endParaRPr lang="ko-KR" altLang="en-US" sz="133" dirty="0"/>
+            <a:endParaRPr lang="ko-KR" altLang="en-US" sz="135" dirty="0"/>
           </a:p>
         </p:txBody>
       </p:sp>
@@ -1397,7 +1397,7 @@
           <a:lstStyle/>
           <a:p>
             <a:pPr algn="ctr"/>
-            <a:endParaRPr lang="ko-KR" altLang="en-US" sz="133"/>
+            <a:endParaRPr lang="ko-KR" altLang="en-US" sz="135"/>
           </a:p>
         </p:txBody>
       </p:sp>
@@ -1450,7 +1450,7 @@
         </p:nvSpPr>
         <p:spPr>
           <a:xfrm>
-            <a:off x="2829701" y="1686924"/>
+            <a:off x="2829702" y="1686924"/>
             <a:ext cx="285655" cy="133242"/>
           </a:xfrm>
           <a:prstGeom prst="rect">
@@ -1466,7 +1466,7 @@
           <a:p>
             <a:pPr algn="r"/>
             <a:r>
-              <a:rPr lang="ko-KR" altLang="en-US" sz="133" b="1" dirty="0">
+              <a:rPr lang="ko-KR" altLang="en-US" sz="135" b="1" dirty="0">
                 <a:solidFill>
                   <a:srgbClr val="4472C4"/>
                 </a:solidFill>
@@ -1475,7 +1475,7 @@
               </a:rPr>
               <a:t>진료지원간호팀</a:t>
             </a:r>
-            <a:endParaRPr lang="en-US" altLang="ko-KR" sz="133" b="1" dirty="0">
+            <a:endParaRPr lang="en-US" altLang="ko-KR" sz="135" b="1" dirty="0">
               <a:solidFill>
                 <a:srgbClr val="4472C4"/>
               </a:solidFill>
@@ -1486,7 +1486,7 @@
           <a:p>
             <a:pPr algn="r"/>
             <a:r>
-              <a:rPr lang="ko-KR" altLang="en-US" sz="133" b="1" dirty="0">
+              <a:rPr lang="ko-KR" altLang="en-US" sz="135" b="1" dirty="0">
                 <a:solidFill>
                   <a:srgbClr val="4472C4"/>
                 </a:solidFill>
@@ -1508,7 +1508,7 @@
   <p:clrMapOvr>
     <a:masterClrMapping/>
   </p:clrMapOvr>
-  <p:extLst mod="1">
+  <p:extLst>
     <p:ext uri="{DCECCB84-F9BA-43D5-87BE-67443E8EF086}">
       <p15:sldGuideLst xmlns:p15="http://schemas.microsoft.com/office/powerpoint/2012/main">
         <p15:guide id="1" orient="horz" pos="567" userDrawn="1">
@@ -1558,7 +1558,7 @@
         </p:nvSpPr>
         <p:spPr>
           <a:xfrm>
-            <a:off x="3" y="1"/>
+            <a:off x="4" y="1"/>
             <a:ext cx="3207068" cy="1800225"/>
           </a:xfrm>
           <a:prstGeom prst="rect">
@@ -1594,7 +1594,7 @@
           <a:lstStyle/>
           <a:p>
             <a:pPr algn="ctr"/>
-            <a:endParaRPr lang="ko-KR" altLang="en-US" sz="133" dirty="0"/>
+            <a:endParaRPr lang="ko-KR" altLang="en-US" sz="135" dirty="0"/>
           </a:p>
         </p:txBody>
       </p:sp>
@@ -1646,7 +1646,7 @@
           <a:lstStyle/>
           <a:p>
             <a:pPr algn="ctr"/>
-            <a:endParaRPr lang="ko-KR" altLang="en-US" sz="133" dirty="0"/>
+            <a:endParaRPr lang="ko-KR" altLang="en-US" sz="135" dirty="0"/>
           </a:p>
         </p:txBody>
       </p:sp>
@@ -1672,7 +1672,7 @@
         </p:blipFill>
         <p:spPr>
           <a:xfrm>
-            <a:off x="2793286" y="29235"/>
+            <a:off x="2793287" y="29235"/>
             <a:ext cx="320513" cy="75610"/>
           </a:xfrm>
           <a:prstGeom prst="rect">
@@ -1715,7 +1715,7 @@
           <a:p>
             <a:pPr algn="r"/>
             <a:r>
-              <a:rPr lang="ko-KR" altLang="en-US" sz="133" b="1" dirty="0">
+              <a:rPr lang="ko-KR" altLang="en-US" sz="135" b="1" dirty="0">
                 <a:solidFill>
                   <a:srgbClr val="4472C4"/>
                 </a:solidFill>
@@ -1725,7 +1725,7 @@
               <a:t>이비인후과 </a:t>
             </a:r>
             <a:r>
-              <a:rPr lang="en-US" altLang="ko-KR" sz="133" b="1" dirty="0">
+              <a:rPr lang="en-US" altLang="ko-KR" sz="135" b="1" dirty="0">
                 <a:solidFill>
                   <a:srgbClr val="4472C4"/>
                 </a:solidFill>
@@ -1735,7 +1735,7 @@
               <a:t>131</a:t>
             </a:r>
             <a:r>
-              <a:rPr lang="ko-KR" altLang="en-US" sz="133" b="1" dirty="0">
+              <a:rPr lang="ko-KR" altLang="en-US" sz="135" b="1" dirty="0">
                 <a:solidFill>
                   <a:srgbClr val="4472C4"/>
                 </a:solidFill>
@@ -1757,7 +1757,7 @@
   <p:clrMapOvr>
     <a:masterClrMapping/>
   </p:clrMapOvr>
-  <p:extLst mod="1">
+  <p:extLst>
     <p:ext uri="{DCECCB84-F9BA-43D5-87BE-67443E8EF086}">
       <p15:sldGuideLst xmlns:p15="http://schemas.microsoft.com/office/powerpoint/2012/main">
         <p15:guide id="1" orient="horz" pos="567" userDrawn="1">
@@ -1839,35 +1839,35 @@
             <a:pPr lvl="0"/>
             <a:r>
               <a:rPr lang="ko-KR" altLang="en-US"/>
-              <a:t>마스터 텍스트 스타일 편집</a:t>
+              <a:t>마스터 텍스트 스타일을 편집하려면 클릭</a:t>
             </a:r>
           </a:p>
           <a:p>
             <a:pPr lvl="1"/>
             <a:r>
               <a:rPr lang="ko-KR" altLang="en-US"/>
-              <a:t>둘째 수준</a:t>
+              <a:t>두 번째 수준</a:t>
             </a:r>
           </a:p>
           <a:p>
             <a:pPr lvl="2"/>
             <a:r>
               <a:rPr lang="ko-KR" altLang="en-US"/>
-              <a:t>셋째 수준</a:t>
+              <a:t>세 번째 수준</a:t>
             </a:r>
           </a:p>
           <a:p>
             <a:pPr lvl="3"/>
             <a:r>
               <a:rPr lang="ko-KR" altLang="en-US"/>
-              <a:t>넷째 수준</a:t>
+              <a:t>네 번째 수준</a:t>
             </a:r>
           </a:p>
           <a:p>
             <a:pPr lvl="4"/>
             <a:r>
               <a:rPr lang="ko-KR" altLang="en-US"/>
-              <a:t>다섯째 수준</a:t>
+              <a:t>다섯 번째 수준</a:t>
             </a:r>
             <a:endParaRPr lang="en-US" dirty="0"/>
           </a:p>
@@ -1890,7 +1890,7 @@
           <a:p>
             <a:fld id="{149F34B4-7175-41BD-B98B-2E7021201D7D}" type="datetimeFigureOut">
               <a:rPr lang="ko-KR" altLang="en-US" smtClean="0"/>
-              <a:t>2026-03-15</a:t>
+              <a:t>2026-04-09</a:t>
             </a:fld>
             <a:endParaRPr lang="ko-KR" altLang="en-US"/>
           </a:p>
@@ -1941,7 +1941,7 @@
     </p:spTree>
     <p:extLst>
       <p:ext uri="{BB962C8B-B14F-4D97-AF65-F5344CB8AC3E}">
-        <p14:creationId xmlns:p14="http://schemas.microsoft.com/office/powerpoint/2010/main" val="2456798218"/>
+        <p14:creationId xmlns:p14="http://schemas.microsoft.com/office/powerpoint/2010/main" val="702969966"/>
       </p:ext>
     </p:extLst>
   </p:cSld>
@@ -1980,7 +1980,7 @@
         </p:nvSpPr>
         <p:spPr>
           <a:xfrm>
-            <a:off x="218362" y="448809"/>
+            <a:off x="218361" y="448807"/>
             <a:ext cx="2760345" cy="748843"/>
           </a:xfrm>
         </p:spPr>
@@ -2012,7 +2012,7 @@
         </p:nvSpPr>
         <p:spPr>
           <a:xfrm>
-            <a:off x="218362" y="1204736"/>
+            <a:off x="218361" y="1204734"/>
             <a:ext cx="2760345" cy="393799"/>
           </a:xfrm>
         </p:spPr>
@@ -2021,7 +2021,7 @@
           <a:lstStyle>
             <a:lvl1pPr marL="0" indent="0">
               <a:buNone/>
-              <a:defRPr sz="629">
+              <a:defRPr sz="630">
                 <a:solidFill>
                   <a:schemeClr val="tx1">
                     <a:tint val="75000"/>
@@ -2029,7 +2029,7 @@
                 </a:solidFill>
               </a:defRPr>
             </a:lvl1pPr>
-            <a:lvl2pPr marL="120012" indent="0">
+            <a:lvl2pPr marL="120015" indent="0">
               <a:buNone/>
               <a:defRPr sz="525">
                 <a:solidFill>
@@ -2039,7 +2039,7 @@
                 </a:solidFill>
               </a:defRPr>
             </a:lvl2pPr>
-            <a:lvl3pPr marL="240025" indent="0">
+            <a:lvl3pPr marL="240030" indent="0">
               <a:buNone/>
               <a:defRPr sz="472">
                 <a:solidFill>
@@ -2049,7 +2049,7 @@
                 </a:solidFill>
               </a:defRPr>
             </a:lvl3pPr>
-            <a:lvl4pPr marL="360036" indent="0">
+            <a:lvl4pPr marL="360045" indent="0">
               <a:buNone/>
               <a:defRPr sz="420">
                 <a:solidFill>
@@ -2059,7 +2059,7 @@
                 </a:solidFill>
               </a:defRPr>
             </a:lvl4pPr>
-            <a:lvl5pPr marL="480048" indent="0">
+            <a:lvl5pPr marL="480060" indent="0">
               <a:buNone/>
               <a:defRPr sz="420">
                 <a:solidFill>
@@ -2069,7 +2069,7 @@
                 </a:solidFill>
               </a:defRPr>
             </a:lvl5pPr>
-            <a:lvl6pPr marL="600060" indent="0">
+            <a:lvl6pPr marL="600075" indent="0">
               <a:buNone/>
               <a:defRPr sz="420">
                 <a:solidFill>
@@ -2079,7 +2079,7 @@
                 </a:solidFill>
               </a:defRPr>
             </a:lvl6pPr>
-            <a:lvl7pPr marL="720073" indent="0">
+            <a:lvl7pPr marL="720090" indent="0">
               <a:buNone/>
               <a:defRPr sz="420">
                 <a:solidFill>
@@ -2089,7 +2089,7 @@
                 </a:solidFill>
               </a:defRPr>
             </a:lvl7pPr>
-            <a:lvl8pPr marL="840084" indent="0">
+            <a:lvl8pPr marL="840105" indent="0">
               <a:buNone/>
               <a:defRPr sz="420">
                 <a:solidFill>
@@ -2099,7 +2099,7 @@
                 </a:solidFill>
               </a:defRPr>
             </a:lvl8pPr>
-            <a:lvl9pPr marL="960096" indent="0">
+            <a:lvl9pPr marL="960120" indent="0">
               <a:buNone/>
               <a:defRPr sz="420">
                 <a:solidFill>
@@ -2114,7 +2114,7 @@
             <a:pPr lvl="0"/>
             <a:r>
               <a:rPr lang="ko-KR" altLang="en-US"/>
-              <a:t>마스터 텍스트 스타일 편집</a:t>
+              <a:t>마스터 텍스트 스타일을 편집하려면 클릭</a:t>
             </a:r>
           </a:p>
         </p:txBody>
@@ -2136,7 +2136,7 @@
           <a:p>
             <a:fld id="{149F34B4-7175-41BD-B98B-2E7021201D7D}" type="datetimeFigureOut">
               <a:rPr lang="ko-KR" altLang="en-US" smtClean="0"/>
-              <a:t>2026-03-15</a:t>
+              <a:t>2026-04-09</a:t>
             </a:fld>
             <a:endParaRPr lang="ko-KR" altLang="en-US"/>
           </a:p>
@@ -2187,7 +2187,7 @@
     </p:spTree>
     <p:extLst>
       <p:ext uri="{BB962C8B-B14F-4D97-AF65-F5344CB8AC3E}">
-        <p14:creationId xmlns:p14="http://schemas.microsoft.com/office/powerpoint/2010/main" val="1474384663"/>
+        <p14:creationId xmlns:p14="http://schemas.microsoft.com/office/powerpoint/2010/main" val="458992119"/>
       </p:ext>
     </p:extLst>
   </p:cSld>
@@ -2250,7 +2250,7 @@
         <p:spPr>
           <a:xfrm>
             <a:off x="220028" y="479227"/>
-            <a:ext cx="1360171" cy="1142226"/>
+            <a:ext cx="1360170" cy="1142226"/>
           </a:xfrm>
         </p:spPr>
         <p:txBody>
@@ -2260,35 +2260,35 @@
             <a:pPr lvl="0"/>
             <a:r>
               <a:rPr lang="ko-KR" altLang="en-US"/>
-              <a:t>마스터 텍스트 스타일 편집</a:t>
+              <a:t>마스터 텍스트 스타일을 편집하려면 클릭</a:t>
             </a:r>
           </a:p>
           <a:p>
             <a:pPr lvl="1"/>
             <a:r>
               <a:rPr lang="ko-KR" altLang="en-US"/>
-              <a:t>둘째 수준</a:t>
+              <a:t>두 번째 수준</a:t>
             </a:r>
           </a:p>
           <a:p>
             <a:pPr lvl="2"/>
             <a:r>
               <a:rPr lang="ko-KR" altLang="en-US"/>
-              <a:t>셋째 수준</a:t>
+              <a:t>세 번째 수준</a:t>
             </a:r>
           </a:p>
           <a:p>
             <a:pPr lvl="3"/>
             <a:r>
               <a:rPr lang="ko-KR" altLang="en-US"/>
-              <a:t>넷째 수준</a:t>
+              <a:t>네 번째 수준</a:t>
             </a:r>
           </a:p>
           <a:p>
             <a:pPr lvl="4"/>
             <a:r>
               <a:rPr lang="ko-KR" altLang="en-US"/>
-              <a:t>다섯째 수준</a:t>
+              <a:t>다섯 번째 수준</a:t>
             </a:r>
             <a:endParaRPr lang="en-US" dirty="0"/>
           </a:p>
@@ -2307,7 +2307,7 @@
         <p:spPr>
           <a:xfrm>
             <a:off x="1620203" y="479227"/>
-            <a:ext cx="1360171" cy="1142226"/>
+            <a:ext cx="1360170" cy="1142226"/>
           </a:xfrm>
         </p:spPr>
         <p:txBody>
@@ -2317,35 +2317,35 @@
             <a:pPr lvl="0"/>
             <a:r>
               <a:rPr lang="ko-KR" altLang="en-US"/>
-              <a:t>마스터 텍스트 스타일 편집</a:t>
+              <a:t>마스터 텍스트 스타일을 편집하려면 클릭</a:t>
             </a:r>
           </a:p>
           <a:p>
             <a:pPr lvl="1"/>
             <a:r>
               <a:rPr lang="ko-KR" altLang="en-US"/>
-              <a:t>둘째 수준</a:t>
+              <a:t>두 번째 수준</a:t>
             </a:r>
           </a:p>
           <a:p>
             <a:pPr lvl="2"/>
             <a:r>
               <a:rPr lang="ko-KR" altLang="en-US"/>
-              <a:t>셋째 수준</a:t>
+              <a:t>세 번째 수준</a:t>
             </a:r>
           </a:p>
           <a:p>
             <a:pPr lvl="3"/>
             <a:r>
               <a:rPr lang="ko-KR" altLang="en-US"/>
-              <a:t>넷째 수준</a:t>
+              <a:t>네 번째 수준</a:t>
             </a:r>
           </a:p>
           <a:p>
             <a:pPr lvl="4"/>
             <a:r>
               <a:rPr lang="ko-KR" altLang="en-US"/>
-              <a:t>다섯째 수준</a:t>
+              <a:t>다섯 번째 수준</a:t>
             </a:r>
             <a:endParaRPr lang="en-US" dirty="0"/>
           </a:p>
@@ -2368,7 +2368,7 @@
           <a:p>
             <a:fld id="{149F34B4-7175-41BD-B98B-2E7021201D7D}" type="datetimeFigureOut">
               <a:rPr lang="ko-KR" altLang="en-US" smtClean="0"/>
-              <a:t>2026-03-15</a:t>
+              <a:t>2026-04-09</a:t>
             </a:fld>
             <a:endParaRPr lang="ko-KR" altLang="en-US"/>
           </a:p>
@@ -2419,7 +2419,7 @@
     </p:spTree>
     <p:extLst>
       <p:ext uri="{BB962C8B-B14F-4D97-AF65-F5344CB8AC3E}">
-        <p14:creationId xmlns:p14="http://schemas.microsoft.com/office/powerpoint/2010/main" val="49352313"/>
+        <p14:creationId xmlns:p14="http://schemas.microsoft.com/office/powerpoint/2010/main" val="3049921085"/>
       </p:ext>
     </p:extLst>
   </p:cSld>
@@ -2458,7 +2458,7 @@
         </p:nvSpPr>
         <p:spPr>
           <a:xfrm>
-            <a:off x="220445" y="95846"/>
+            <a:off x="220444" y="95846"/>
             <a:ext cx="2760345" cy="347960"/>
           </a:xfrm>
         </p:spPr>
@@ -2486,7 +2486,7 @@
         </p:nvSpPr>
         <p:spPr>
           <a:xfrm>
-            <a:off x="220446" y="441307"/>
+            <a:off x="220445" y="441305"/>
             <a:ext cx="1353919" cy="216277"/>
           </a:xfrm>
         </p:spPr>
@@ -2495,37 +2495,37 @@
           <a:lstStyle>
             <a:lvl1pPr marL="0" indent="0">
               <a:buNone/>
-              <a:defRPr sz="629" b="1"/>
+              <a:defRPr sz="630" b="1"/>
             </a:lvl1pPr>
-            <a:lvl2pPr marL="120012" indent="0">
+            <a:lvl2pPr marL="120015" indent="0">
               <a:buNone/>
               <a:defRPr sz="525" b="1"/>
             </a:lvl2pPr>
-            <a:lvl3pPr marL="240025" indent="0">
+            <a:lvl3pPr marL="240030" indent="0">
               <a:buNone/>
               <a:defRPr sz="472" b="1"/>
             </a:lvl3pPr>
-            <a:lvl4pPr marL="360036" indent="0">
+            <a:lvl4pPr marL="360045" indent="0">
               <a:buNone/>
               <a:defRPr sz="420" b="1"/>
             </a:lvl4pPr>
-            <a:lvl5pPr marL="480048" indent="0">
+            <a:lvl5pPr marL="480060" indent="0">
               <a:buNone/>
               <a:defRPr sz="420" b="1"/>
             </a:lvl5pPr>
-            <a:lvl6pPr marL="600060" indent="0">
+            <a:lvl6pPr marL="600075" indent="0">
               <a:buNone/>
               <a:defRPr sz="420" b="1"/>
             </a:lvl6pPr>
-            <a:lvl7pPr marL="720073" indent="0">
+            <a:lvl7pPr marL="720090" indent="0">
               <a:buNone/>
               <a:defRPr sz="420" b="1"/>
             </a:lvl7pPr>
-            <a:lvl8pPr marL="840084" indent="0">
+            <a:lvl8pPr marL="840105" indent="0">
               <a:buNone/>
               <a:defRPr sz="420" b="1"/>
             </a:lvl8pPr>
-            <a:lvl9pPr marL="960096" indent="0">
+            <a:lvl9pPr marL="960120" indent="0">
               <a:buNone/>
               <a:defRPr sz="420" b="1"/>
             </a:lvl9pPr>
@@ -2534,7 +2534,7 @@
             <a:pPr lvl="0"/>
             <a:r>
               <a:rPr lang="ko-KR" altLang="en-US"/>
-              <a:t>마스터 텍스트 스타일 편집</a:t>
+              <a:t>마스터 텍스트 스타일을 편집하려면 클릭</a:t>
             </a:r>
           </a:p>
         </p:txBody>
@@ -2551,7 +2551,7 @@
         </p:nvSpPr>
         <p:spPr>
           <a:xfrm>
-            <a:off x="220446" y="657582"/>
+            <a:off x="220445" y="657582"/>
             <a:ext cx="1353919" cy="967204"/>
           </a:xfrm>
         </p:spPr>
@@ -2562,35 +2562,35 @@
             <a:pPr lvl="0"/>
             <a:r>
               <a:rPr lang="ko-KR" altLang="en-US"/>
-              <a:t>마스터 텍스트 스타일 편집</a:t>
+              <a:t>마스터 텍스트 스타일을 편집하려면 클릭</a:t>
             </a:r>
           </a:p>
           <a:p>
             <a:pPr lvl="1"/>
             <a:r>
               <a:rPr lang="ko-KR" altLang="en-US"/>
-              <a:t>둘째 수준</a:t>
+              <a:t>두 번째 수준</a:t>
             </a:r>
           </a:p>
           <a:p>
             <a:pPr lvl="2"/>
             <a:r>
               <a:rPr lang="ko-KR" altLang="en-US"/>
-              <a:t>셋째 수준</a:t>
+              <a:t>세 번째 수준</a:t>
             </a:r>
           </a:p>
           <a:p>
             <a:pPr lvl="3"/>
             <a:r>
               <a:rPr lang="ko-KR" altLang="en-US"/>
-              <a:t>넷째 수준</a:t>
+              <a:t>네 번째 수준</a:t>
             </a:r>
           </a:p>
           <a:p>
             <a:pPr lvl="4"/>
             <a:r>
               <a:rPr lang="ko-KR" altLang="en-US"/>
-              <a:t>다섯째 수준</a:t>
+              <a:t>다섯 번째 수준</a:t>
             </a:r>
             <a:endParaRPr lang="en-US" dirty="0"/>
           </a:p>
@@ -2608,7 +2608,7 @@
         </p:nvSpPr>
         <p:spPr>
           <a:xfrm>
-            <a:off x="1620203" y="441307"/>
+            <a:off x="1620202" y="441305"/>
             <a:ext cx="1360587" cy="216277"/>
           </a:xfrm>
         </p:spPr>
@@ -2617,37 +2617,37 @@
           <a:lstStyle>
             <a:lvl1pPr marL="0" indent="0">
               <a:buNone/>
-              <a:defRPr sz="629" b="1"/>
+              <a:defRPr sz="630" b="1"/>
             </a:lvl1pPr>
-            <a:lvl2pPr marL="120012" indent="0">
+            <a:lvl2pPr marL="120015" indent="0">
               <a:buNone/>
               <a:defRPr sz="525" b="1"/>
             </a:lvl2pPr>
-            <a:lvl3pPr marL="240025" indent="0">
+            <a:lvl3pPr marL="240030" indent="0">
               <a:buNone/>
               <a:defRPr sz="472" b="1"/>
             </a:lvl3pPr>
-            <a:lvl4pPr marL="360036" indent="0">
+            <a:lvl4pPr marL="360045" indent="0">
               <a:buNone/>
               <a:defRPr sz="420" b="1"/>
             </a:lvl4pPr>
-            <a:lvl5pPr marL="480048" indent="0">
+            <a:lvl5pPr marL="480060" indent="0">
               <a:buNone/>
               <a:defRPr sz="420" b="1"/>
             </a:lvl5pPr>
-            <a:lvl6pPr marL="600060" indent="0">
+            <a:lvl6pPr marL="600075" indent="0">
               <a:buNone/>
               <a:defRPr sz="420" b="1"/>
             </a:lvl6pPr>
-            <a:lvl7pPr marL="720073" indent="0">
+            <a:lvl7pPr marL="720090" indent="0">
               <a:buNone/>
               <a:defRPr sz="420" b="1"/>
             </a:lvl7pPr>
-            <a:lvl8pPr marL="840084" indent="0">
+            <a:lvl8pPr marL="840105" indent="0">
               <a:buNone/>
               <a:defRPr sz="420" b="1"/>
             </a:lvl8pPr>
-            <a:lvl9pPr marL="960096" indent="0">
+            <a:lvl9pPr marL="960120" indent="0">
               <a:buNone/>
               <a:defRPr sz="420" b="1"/>
             </a:lvl9pPr>
@@ -2656,7 +2656,7 @@
             <a:pPr lvl="0"/>
             <a:r>
               <a:rPr lang="ko-KR" altLang="en-US"/>
-              <a:t>마스터 텍스트 스타일 편집</a:t>
+              <a:t>마스터 텍스트 스타일을 편집하려면 클릭</a:t>
             </a:r>
           </a:p>
         </p:txBody>
@@ -2673,7 +2673,7 @@
         </p:nvSpPr>
         <p:spPr>
           <a:xfrm>
-            <a:off x="1620203" y="657582"/>
+            <a:off x="1620202" y="657582"/>
             <a:ext cx="1360587" cy="967204"/>
           </a:xfrm>
         </p:spPr>
@@ -2684,35 +2684,35 @@
             <a:pPr lvl="0"/>
             <a:r>
               <a:rPr lang="ko-KR" altLang="en-US"/>
-              <a:t>마스터 텍스트 스타일 편집</a:t>
+              <a:t>마스터 텍스트 스타일을 편집하려면 클릭</a:t>
             </a:r>
           </a:p>
           <a:p>
             <a:pPr lvl="1"/>
             <a:r>
               <a:rPr lang="ko-KR" altLang="en-US"/>
-              <a:t>둘째 수준</a:t>
+              <a:t>두 번째 수준</a:t>
             </a:r>
           </a:p>
           <a:p>
             <a:pPr lvl="2"/>
             <a:r>
               <a:rPr lang="ko-KR" altLang="en-US"/>
-              <a:t>셋째 수준</a:t>
+              <a:t>세 번째 수준</a:t>
             </a:r>
           </a:p>
           <a:p>
             <a:pPr lvl="3"/>
             <a:r>
               <a:rPr lang="ko-KR" altLang="en-US"/>
-              <a:t>넷째 수준</a:t>
+              <a:t>네 번째 수준</a:t>
             </a:r>
           </a:p>
           <a:p>
             <a:pPr lvl="4"/>
             <a:r>
               <a:rPr lang="ko-KR" altLang="en-US"/>
-              <a:t>다섯째 수준</a:t>
+              <a:t>다섯 번째 수준</a:t>
             </a:r>
             <a:endParaRPr lang="en-US" dirty="0"/>
           </a:p>
@@ -2735,7 +2735,7 @@
           <a:p>
             <a:fld id="{149F34B4-7175-41BD-B98B-2E7021201D7D}" type="datetimeFigureOut">
               <a:rPr lang="ko-KR" altLang="en-US" smtClean="0"/>
-              <a:t>2026-03-15</a:t>
+              <a:t>2026-04-09</a:t>
             </a:fld>
             <a:endParaRPr lang="ko-KR" altLang="en-US"/>
           </a:p>
@@ -2786,7 +2786,7 @@
     </p:spTree>
     <p:extLst>
       <p:ext uri="{BB962C8B-B14F-4D97-AF65-F5344CB8AC3E}">
-        <p14:creationId xmlns:p14="http://schemas.microsoft.com/office/powerpoint/2010/main" val="2534278424"/>
+        <p14:creationId xmlns:p14="http://schemas.microsoft.com/office/powerpoint/2010/main" val="3186959238"/>
       </p:ext>
     </p:extLst>
   </p:cSld>
@@ -2853,7 +2853,7 @@
           <a:p>
             <a:fld id="{149F34B4-7175-41BD-B98B-2E7021201D7D}" type="datetimeFigureOut">
               <a:rPr lang="ko-KR" altLang="en-US" smtClean="0"/>
-              <a:t>2026-03-15</a:t>
+              <a:t>2026-04-09</a:t>
             </a:fld>
             <a:endParaRPr lang="ko-KR" altLang="en-US"/>
           </a:p>
@@ -2904,7 +2904,7 @@
     </p:spTree>
     <p:extLst>
       <p:ext uri="{BB962C8B-B14F-4D97-AF65-F5344CB8AC3E}">
-        <p14:creationId xmlns:p14="http://schemas.microsoft.com/office/powerpoint/2010/main" val="930363317"/>
+        <p14:creationId xmlns:p14="http://schemas.microsoft.com/office/powerpoint/2010/main" val="3404899182"/>
       </p:ext>
     </p:extLst>
   </p:cSld>
@@ -2948,7 +2948,7 @@
           <a:p>
             <a:fld id="{149F34B4-7175-41BD-B98B-2E7021201D7D}" type="datetimeFigureOut">
               <a:rPr lang="ko-KR" altLang="en-US" smtClean="0"/>
-              <a:t>2026-03-15</a:t>
+              <a:t>2026-04-09</a:t>
             </a:fld>
             <a:endParaRPr lang="ko-KR" altLang="en-US"/>
           </a:p>
@@ -2999,7 +2999,7 @@
     </p:spTree>
     <p:extLst>
       <p:ext uri="{BB962C8B-B14F-4D97-AF65-F5344CB8AC3E}">
-        <p14:creationId xmlns:p14="http://schemas.microsoft.com/office/powerpoint/2010/main" val="1697096734"/>
+        <p14:creationId xmlns:p14="http://schemas.microsoft.com/office/powerpoint/2010/main" val="4281839279"/>
       </p:ext>
     </p:extLst>
   </p:cSld>
@@ -3038,7 +3038,7 @@
         </p:nvSpPr>
         <p:spPr>
           <a:xfrm>
-            <a:off x="220446" y="120017"/>
+            <a:off x="220445" y="120015"/>
             <a:ext cx="1032212" cy="420053"/>
           </a:xfrm>
         </p:spPr>
@@ -3070,7 +3070,7 @@
         </p:nvSpPr>
         <p:spPr>
           <a:xfrm>
-            <a:off x="1360588" y="259201"/>
+            <a:off x="1360587" y="259199"/>
             <a:ext cx="1620203" cy="1279327"/>
           </a:xfrm>
         </p:spPr>
@@ -3084,7 +3084,7 @@
               <a:defRPr sz="735"/>
             </a:lvl2pPr>
             <a:lvl3pPr>
-              <a:defRPr sz="629"/>
+              <a:defRPr sz="630"/>
             </a:lvl3pPr>
             <a:lvl4pPr>
               <a:defRPr sz="525"/>
@@ -3109,35 +3109,35 @@
             <a:pPr lvl="0"/>
             <a:r>
               <a:rPr lang="ko-KR" altLang="en-US"/>
-              <a:t>마스터 텍스트 스타일 편집</a:t>
+              <a:t>마스터 텍스트 스타일을 편집하려면 클릭</a:t>
             </a:r>
           </a:p>
           <a:p>
             <a:pPr lvl="1"/>
             <a:r>
               <a:rPr lang="ko-KR" altLang="en-US"/>
-              <a:t>둘째 수준</a:t>
+              <a:t>두 번째 수준</a:t>
             </a:r>
           </a:p>
           <a:p>
             <a:pPr lvl="2"/>
             <a:r>
               <a:rPr lang="ko-KR" altLang="en-US"/>
-              <a:t>셋째 수준</a:t>
+              <a:t>세 번째 수준</a:t>
             </a:r>
           </a:p>
           <a:p>
             <a:pPr lvl="3"/>
             <a:r>
               <a:rPr lang="ko-KR" altLang="en-US"/>
-              <a:t>넷째 수준</a:t>
+              <a:t>네 번째 수준</a:t>
             </a:r>
           </a:p>
           <a:p>
             <a:pPr lvl="4"/>
             <a:r>
               <a:rPr lang="ko-KR" altLang="en-US"/>
-              <a:t>다섯째 수준</a:t>
+              <a:t>다섯 번째 수준</a:t>
             </a:r>
             <a:endParaRPr lang="en-US" dirty="0"/>
           </a:p>
@@ -3155,7 +3155,7 @@
         </p:nvSpPr>
         <p:spPr>
           <a:xfrm>
-            <a:off x="220446" y="540067"/>
+            <a:off x="220445" y="540067"/>
             <a:ext cx="1032212" cy="1000542"/>
           </a:xfrm>
         </p:spPr>
@@ -3166,35 +3166,35 @@
               <a:buNone/>
               <a:defRPr sz="420"/>
             </a:lvl1pPr>
-            <a:lvl2pPr marL="120012" indent="0">
+            <a:lvl2pPr marL="120015" indent="0">
               <a:buNone/>
               <a:defRPr sz="368"/>
             </a:lvl2pPr>
-            <a:lvl3pPr marL="240025" indent="0">
+            <a:lvl3pPr marL="240030" indent="0">
               <a:buNone/>
               <a:defRPr sz="315"/>
             </a:lvl3pPr>
-            <a:lvl4pPr marL="360036" indent="0">
+            <a:lvl4pPr marL="360045" indent="0">
               <a:buNone/>
               <a:defRPr sz="263"/>
             </a:lvl4pPr>
-            <a:lvl5pPr marL="480048" indent="0">
+            <a:lvl5pPr marL="480060" indent="0">
               <a:buNone/>
               <a:defRPr sz="263"/>
             </a:lvl5pPr>
-            <a:lvl6pPr marL="600060" indent="0">
+            <a:lvl6pPr marL="600075" indent="0">
               <a:buNone/>
               <a:defRPr sz="263"/>
             </a:lvl6pPr>
-            <a:lvl7pPr marL="720073" indent="0">
+            <a:lvl7pPr marL="720090" indent="0">
               <a:buNone/>
               <a:defRPr sz="263"/>
             </a:lvl7pPr>
-            <a:lvl8pPr marL="840084" indent="0">
+            <a:lvl8pPr marL="840105" indent="0">
               <a:buNone/>
               <a:defRPr sz="263"/>
             </a:lvl8pPr>
-            <a:lvl9pPr marL="960096" indent="0">
+            <a:lvl9pPr marL="960120" indent="0">
               <a:buNone/>
               <a:defRPr sz="263"/>
             </a:lvl9pPr>
@@ -3203,7 +3203,7 @@
             <a:pPr lvl="0"/>
             <a:r>
               <a:rPr lang="ko-KR" altLang="en-US"/>
-              <a:t>마스터 텍스트 스타일 편집</a:t>
+              <a:t>마스터 텍스트 스타일을 편집하려면 클릭</a:t>
             </a:r>
           </a:p>
         </p:txBody>
@@ -3225,7 +3225,7 @@
           <a:p>
             <a:fld id="{149F34B4-7175-41BD-B98B-2E7021201D7D}" type="datetimeFigureOut">
               <a:rPr lang="ko-KR" altLang="en-US" smtClean="0"/>
-              <a:t>2026-03-15</a:t>
+              <a:t>2026-04-09</a:t>
             </a:fld>
             <a:endParaRPr lang="ko-KR" altLang="en-US"/>
           </a:p>
@@ -3276,7 +3276,7 @@
     </p:spTree>
     <p:extLst>
       <p:ext uri="{BB962C8B-B14F-4D97-AF65-F5344CB8AC3E}">
-        <p14:creationId xmlns:p14="http://schemas.microsoft.com/office/powerpoint/2010/main" val="971393235"/>
+        <p14:creationId xmlns:p14="http://schemas.microsoft.com/office/powerpoint/2010/main" val="3280658682"/>
       </p:ext>
     </p:extLst>
   </p:cSld>
@@ -3315,7 +3315,7 @@
         </p:nvSpPr>
         <p:spPr>
           <a:xfrm>
-            <a:off x="220446" y="120017"/>
+            <a:off x="220445" y="120015"/>
             <a:ext cx="1032212" cy="420053"/>
           </a:xfrm>
         </p:spPr>
@@ -3347,7 +3347,7 @@
         </p:nvSpPr>
         <p:spPr>
           <a:xfrm>
-            <a:off x="1360588" y="259201"/>
+            <a:off x="1360587" y="259199"/>
             <a:ext cx="1620203" cy="1279327"/>
           </a:xfrm>
         </p:spPr>
@@ -3358,35 +3358,35 @@
               <a:buNone/>
               <a:defRPr sz="840"/>
             </a:lvl1pPr>
-            <a:lvl2pPr marL="120012" indent="0">
+            <a:lvl2pPr marL="120015" indent="0">
               <a:buNone/>
               <a:defRPr sz="735"/>
             </a:lvl2pPr>
-            <a:lvl3pPr marL="240025" indent="0">
+            <a:lvl3pPr marL="240030" indent="0">
               <a:buNone/>
-              <a:defRPr sz="629"/>
+              <a:defRPr sz="630"/>
             </a:lvl3pPr>
-            <a:lvl4pPr marL="360036" indent="0">
+            <a:lvl4pPr marL="360045" indent="0">
               <a:buNone/>
               <a:defRPr sz="525"/>
             </a:lvl4pPr>
-            <a:lvl5pPr marL="480048" indent="0">
+            <a:lvl5pPr marL="480060" indent="0">
               <a:buNone/>
               <a:defRPr sz="525"/>
             </a:lvl5pPr>
-            <a:lvl6pPr marL="600060" indent="0">
+            <a:lvl6pPr marL="600075" indent="0">
               <a:buNone/>
               <a:defRPr sz="525"/>
             </a:lvl6pPr>
-            <a:lvl7pPr marL="720073" indent="0">
+            <a:lvl7pPr marL="720090" indent="0">
               <a:buNone/>
               <a:defRPr sz="525"/>
             </a:lvl7pPr>
-            <a:lvl8pPr marL="840084" indent="0">
+            <a:lvl8pPr marL="840105" indent="0">
               <a:buNone/>
               <a:defRPr sz="525"/>
             </a:lvl8pPr>
-            <a:lvl9pPr marL="960096" indent="0">
+            <a:lvl9pPr marL="960120" indent="0">
               <a:buNone/>
               <a:defRPr sz="525"/>
             </a:lvl9pPr>
@@ -3412,7 +3412,7 @@
         </p:nvSpPr>
         <p:spPr>
           <a:xfrm>
-            <a:off x="220446" y="540067"/>
+            <a:off x="220445" y="540067"/>
             <a:ext cx="1032212" cy="1000542"/>
           </a:xfrm>
         </p:spPr>
@@ -3423,35 +3423,35 @@
               <a:buNone/>
               <a:defRPr sz="420"/>
             </a:lvl1pPr>
-            <a:lvl2pPr marL="120012" indent="0">
+            <a:lvl2pPr marL="120015" indent="0">
               <a:buNone/>
               <a:defRPr sz="368"/>
             </a:lvl2pPr>
-            <a:lvl3pPr marL="240025" indent="0">
+            <a:lvl3pPr marL="240030" indent="0">
               <a:buNone/>
               <a:defRPr sz="315"/>
             </a:lvl3pPr>
-            <a:lvl4pPr marL="360036" indent="0">
+            <a:lvl4pPr marL="360045" indent="0">
               <a:buNone/>
               <a:defRPr sz="263"/>
             </a:lvl4pPr>
-            <a:lvl5pPr marL="480048" indent="0">
+            <a:lvl5pPr marL="480060" indent="0">
               <a:buNone/>
               <a:defRPr sz="263"/>
             </a:lvl5pPr>
-            <a:lvl6pPr marL="600060" indent="0">
+            <a:lvl6pPr marL="600075" indent="0">
               <a:buNone/>
               <a:defRPr sz="263"/>
             </a:lvl6pPr>
-            <a:lvl7pPr marL="720073" indent="0">
+            <a:lvl7pPr marL="720090" indent="0">
               <a:buNone/>
               <a:defRPr sz="263"/>
             </a:lvl7pPr>
-            <a:lvl8pPr marL="840084" indent="0">
+            <a:lvl8pPr marL="840105" indent="0">
               <a:buNone/>
               <a:defRPr sz="263"/>
             </a:lvl8pPr>
-            <a:lvl9pPr marL="960096" indent="0">
+            <a:lvl9pPr marL="960120" indent="0">
               <a:buNone/>
               <a:defRPr sz="263"/>
             </a:lvl9pPr>
@@ -3460,7 +3460,7 @@
             <a:pPr lvl="0"/>
             <a:r>
               <a:rPr lang="ko-KR" altLang="en-US"/>
-              <a:t>마스터 텍스트 스타일 편집</a:t>
+              <a:t>마스터 텍스트 스타일을 편집하려면 클릭</a:t>
             </a:r>
           </a:p>
         </p:txBody>
@@ -3482,7 +3482,7 @@
           <a:p>
             <a:fld id="{149F34B4-7175-41BD-B98B-2E7021201D7D}" type="datetimeFigureOut">
               <a:rPr lang="ko-KR" altLang="en-US" smtClean="0"/>
-              <a:t>2026-03-15</a:t>
+              <a:t>2026-04-09</a:t>
             </a:fld>
             <a:endParaRPr lang="ko-KR" altLang="en-US"/>
           </a:p>
@@ -3533,7 +3533,7 @@
     </p:spTree>
     <p:extLst>
       <p:ext uri="{BB962C8B-B14F-4D97-AF65-F5344CB8AC3E}">
-        <p14:creationId xmlns:p14="http://schemas.microsoft.com/office/powerpoint/2010/main" val="3271137851"/>
+        <p14:creationId xmlns:p14="http://schemas.microsoft.com/office/powerpoint/2010/main" val="3261396925"/>
       </p:ext>
     </p:extLst>
   </p:cSld>
@@ -3577,7 +3577,7 @@
         </p:nvSpPr>
         <p:spPr>
           <a:xfrm>
-            <a:off x="220029" y="95846"/>
+            <a:off x="220028" y="95846"/>
             <a:ext cx="2760345" cy="347960"/>
           </a:xfrm>
           <a:prstGeom prst="rect">
@@ -3610,7 +3610,7 @@
         </p:nvSpPr>
         <p:spPr>
           <a:xfrm>
-            <a:off x="220029" y="479227"/>
+            <a:off x="220028" y="479227"/>
             <a:ext cx="2760345" cy="1142226"/>
           </a:xfrm>
           <a:prstGeom prst="rect">
@@ -3626,35 +3626,35 @@
             <a:pPr lvl="0"/>
             <a:r>
               <a:rPr lang="ko-KR" altLang="en-US"/>
-              <a:t>마스터 텍스트 스타일 편집</a:t>
+              <a:t>마스터 텍스트 스타일을 편집하려면 클릭</a:t>
             </a:r>
           </a:p>
           <a:p>
             <a:pPr lvl="1"/>
             <a:r>
               <a:rPr lang="ko-KR" altLang="en-US"/>
-              <a:t>둘째 수준</a:t>
+              <a:t>두 번째 수준</a:t>
             </a:r>
           </a:p>
           <a:p>
             <a:pPr lvl="2"/>
             <a:r>
               <a:rPr lang="ko-KR" altLang="en-US"/>
-              <a:t>셋째 수준</a:t>
+              <a:t>세 번째 수준</a:t>
             </a:r>
           </a:p>
           <a:p>
             <a:pPr lvl="3"/>
             <a:r>
               <a:rPr lang="ko-KR" altLang="en-US"/>
-              <a:t>넷째 수준</a:t>
+              <a:t>네 번째 수준</a:t>
             </a:r>
           </a:p>
           <a:p>
             <a:pPr lvl="4"/>
             <a:r>
               <a:rPr lang="ko-KR" altLang="en-US"/>
-              <a:t>다섯째 수준</a:t>
+              <a:t>다섯 번째 수준</a:t>
             </a:r>
             <a:endParaRPr lang="en-US" dirty="0"/>
           </a:p>
@@ -3672,8 +3672,8 @@
         </p:nvSpPr>
         <p:spPr>
           <a:xfrm>
-            <a:off x="220028" y="1668544"/>
-            <a:ext cx="720091" cy="95845"/>
+            <a:off x="220028" y="1668542"/>
+            <a:ext cx="720090" cy="95845"/>
           </a:xfrm>
           <a:prstGeom prst="rect">
             <a:avLst/>
@@ -3695,7 +3695,7 @@
           <a:p>
             <a:fld id="{149F34B4-7175-41BD-B98B-2E7021201D7D}" type="datetimeFigureOut">
               <a:rPr lang="ko-KR" altLang="en-US" smtClean="0"/>
-              <a:t>2026-03-15</a:t>
+              <a:t>2026-04-09</a:t>
             </a:fld>
             <a:endParaRPr lang="ko-KR" altLang="en-US"/>
           </a:p>
@@ -3713,7 +3713,7 @@
         </p:nvSpPr>
         <p:spPr>
           <a:xfrm>
-            <a:off x="1060134" y="1668544"/>
+            <a:off x="1060133" y="1668542"/>
             <a:ext cx="1080135" cy="95845"/>
           </a:xfrm>
           <a:prstGeom prst="rect">
@@ -3750,8 +3750,8 @@
         </p:nvSpPr>
         <p:spPr>
           <a:xfrm>
-            <a:off x="2260283" y="1668544"/>
-            <a:ext cx="720091" cy="95845"/>
+            <a:off x="2260283" y="1668542"/>
+            <a:ext cx="720090" cy="95845"/>
           </a:xfrm>
           <a:prstGeom prst="rect">
             <a:avLst/>
@@ -3782,30 +3782,30 @@
     </p:spTree>
     <p:extLst>
       <p:ext uri="{BB962C8B-B14F-4D97-AF65-F5344CB8AC3E}">
-        <p14:creationId xmlns:p14="http://schemas.microsoft.com/office/powerpoint/2010/main" val="2770691194"/>
+        <p14:creationId xmlns:p14="http://schemas.microsoft.com/office/powerpoint/2010/main" val="3830167849"/>
       </p:ext>
     </p:extLst>
   </p:cSld>
   <p:clrMap bg1="lt1" tx1="dk1" bg2="lt2" tx2="dk2" accent1="accent1" accent2="accent2" accent3="accent3" accent4="accent4" accent5="accent5" accent6="accent6" hlink="hlink" folHlink="folHlink"/>
   <p:sldLayoutIdLst>
-    <p:sldLayoutId id="2147483884" r:id="rId1"/>
-    <p:sldLayoutId id="2147483885" r:id="rId2"/>
-    <p:sldLayoutId id="2147483886" r:id="rId3"/>
-    <p:sldLayoutId id="2147483887" r:id="rId4"/>
-    <p:sldLayoutId id="2147483888" r:id="rId5"/>
-    <p:sldLayoutId id="2147483889" r:id="rId6"/>
-    <p:sldLayoutId id="2147483890" r:id="rId7"/>
-    <p:sldLayoutId id="2147483891" r:id="rId8"/>
-    <p:sldLayoutId id="2147483892" r:id="rId9"/>
-    <p:sldLayoutId id="2147483893" r:id="rId10"/>
-    <p:sldLayoutId id="2147483894" r:id="rId11"/>
-    <p:sldLayoutId id="2147483895" r:id="rId12"/>
+    <p:sldLayoutId id="2147483910" r:id="rId1"/>
+    <p:sldLayoutId id="2147483911" r:id="rId2"/>
+    <p:sldLayoutId id="2147483912" r:id="rId3"/>
+    <p:sldLayoutId id="2147483913" r:id="rId4"/>
+    <p:sldLayoutId id="2147483914" r:id="rId5"/>
+    <p:sldLayoutId id="2147483915" r:id="rId6"/>
+    <p:sldLayoutId id="2147483916" r:id="rId7"/>
+    <p:sldLayoutId id="2147483917" r:id="rId8"/>
+    <p:sldLayoutId id="2147483918" r:id="rId9"/>
+    <p:sldLayoutId id="2147483919" r:id="rId10"/>
+    <p:sldLayoutId id="2147483920" r:id="rId11"/>
+    <p:sldLayoutId id="2147483921" r:id="rId12"/>
     <p:sldLayoutId id="2147483790" r:id="rId13"/>
     <p:sldLayoutId id="2147483789" r:id="rId14"/>
   </p:sldLayoutIdLst>
   <p:txStyles>
     <p:titleStyle>
-      <a:lvl1pPr algn="l" defTabSz="240025" rtl="0" eaLnBrk="1" latinLnBrk="1" hangingPunct="1">
+      <a:lvl1pPr algn="l" defTabSz="240030" rtl="0" eaLnBrk="1" latinLnBrk="1" hangingPunct="1">
         <a:lnSpc>
           <a:spcPct val="90000"/>
         </a:lnSpc>
@@ -3824,7 +3824,7 @@
       </a:lvl1pPr>
     </p:titleStyle>
     <p:bodyStyle>
-      <a:lvl1pPr marL="60006" indent="-60006" algn="l" defTabSz="240025" rtl="0" eaLnBrk="1" latinLnBrk="1" hangingPunct="1">
+      <a:lvl1pPr marL="60008" indent="-60008" algn="l" defTabSz="240030" rtl="0" eaLnBrk="1" latinLnBrk="1" hangingPunct="1">
         <a:lnSpc>
           <a:spcPct val="90000"/>
         </a:lnSpc>
@@ -3842,7 +3842,7 @@
           <a:cs typeface="+mn-cs"/>
         </a:defRPr>
       </a:lvl1pPr>
-      <a:lvl2pPr marL="180018" indent="-60006" algn="l" defTabSz="240025" rtl="0" eaLnBrk="1" latinLnBrk="1" hangingPunct="1">
+      <a:lvl2pPr marL="180023" indent="-60008" algn="l" defTabSz="240030" rtl="0" eaLnBrk="1" latinLnBrk="1" hangingPunct="1">
         <a:lnSpc>
           <a:spcPct val="90000"/>
         </a:lnSpc>
@@ -3851,7 +3851,7 @@
         </a:spcBef>
         <a:buFont typeface="Arial" panose="020B0604020202020204" pitchFamily="34" charset="0"/>
         <a:buChar char="•"/>
-        <a:defRPr sz="629" kern="1200">
+        <a:defRPr sz="630" kern="1200">
           <a:solidFill>
             <a:schemeClr val="tx1"/>
           </a:solidFill>
@@ -3860,7 +3860,7 @@
           <a:cs typeface="+mn-cs"/>
         </a:defRPr>
       </a:lvl2pPr>
-      <a:lvl3pPr marL="300031" indent="-60006" algn="l" defTabSz="240025" rtl="0" eaLnBrk="1" latinLnBrk="1" hangingPunct="1">
+      <a:lvl3pPr marL="300038" indent="-60008" algn="l" defTabSz="240030" rtl="0" eaLnBrk="1" latinLnBrk="1" hangingPunct="1">
         <a:lnSpc>
           <a:spcPct val="90000"/>
         </a:lnSpc>
@@ -3878,7 +3878,7 @@
           <a:cs typeface="+mn-cs"/>
         </a:defRPr>
       </a:lvl3pPr>
-      <a:lvl4pPr marL="420043" indent="-60006" algn="l" defTabSz="240025" rtl="0" eaLnBrk="1" latinLnBrk="1" hangingPunct="1">
+      <a:lvl4pPr marL="420053" indent="-60008" algn="l" defTabSz="240030" rtl="0" eaLnBrk="1" latinLnBrk="1" hangingPunct="1">
         <a:lnSpc>
           <a:spcPct val="90000"/>
         </a:lnSpc>
@@ -3896,7 +3896,7 @@
           <a:cs typeface="+mn-cs"/>
         </a:defRPr>
       </a:lvl4pPr>
-      <a:lvl5pPr marL="540054" indent="-60006" algn="l" defTabSz="240025" rtl="0" eaLnBrk="1" latinLnBrk="1" hangingPunct="1">
+      <a:lvl5pPr marL="540068" indent="-60008" algn="l" defTabSz="240030" rtl="0" eaLnBrk="1" latinLnBrk="1" hangingPunct="1">
         <a:lnSpc>
           <a:spcPct val="90000"/>
         </a:lnSpc>
@@ -3914,7 +3914,7 @@
           <a:cs typeface="+mn-cs"/>
         </a:defRPr>
       </a:lvl5pPr>
-      <a:lvl6pPr marL="660066" indent="-60006" algn="l" defTabSz="240025" rtl="0" eaLnBrk="1" latinLnBrk="1" hangingPunct="1">
+      <a:lvl6pPr marL="660083" indent="-60008" algn="l" defTabSz="240030" rtl="0" eaLnBrk="1" latinLnBrk="1" hangingPunct="1">
         <a:lnSpc>
           <a:spcPct val="90000"/>
         </a:lnSpc>
@@ -3932,7 +3932,7 @@
           <a:cs typeface="+mn-cs"/>
         </a:defRPr>
       </a:lvl6pPr>
-      <a:lvl7pPr marL="780079" indent="-60006" algn="l" defTabSz="240025" rtl="0" eaLnBrk="1" latinLnBrk="1" hangingPunct="1">
+      <a:lvl7pPr marL="780098" indent="-60008" algn="l" defTabSz="240030" rtl="0" eaLnBrk="1" latinLnBrk="1" hangingPunct="1">
         <a:lnSpc>
           <a:spcPct val="90000"/>
         </a:lnSpc>
@@ -3950,7 +3950,7 @@
           <a:cs typeface="+mn-cs"/>
         </a:defRPr>
       </a:lvl7pPr>
-      <a:lvl8pPr marL="900091" indent="-60006" algn="l" defTabSz="240025" rtl="0" eaLnBrk="1" latinLnBrk="1" hangingPunct="1">
+      <a:lvl8pPr marL="900113" indent="-60008" algn="l" defTabSz="240030" rtl="0" eaLnBrk="1" latinLnBrk="1" hangingPunct="1">
         <a:lnSpc>
           <a:spcPct val="90000"/>
         </a:lnSpc>
@@ -3968,7 +3968,7 @@
           <a:cs typeface="+mn-cs"/>
         </a:defRPr>
       </a:lvl8pPr>
-      <a:lvl9pPr marL="1020102" indent="-60006" algn="l" defTabSz="240025" rtl="0" eaLnBrk="1" latinLnBrk="1" hangingPunct="1">
+      <a:lvl9pPr marL="1020128" indent="-60008" algn="l" defTabSz="240030" rtl="0" eaLnBrk="1" latinLnBrk="1" hangingPunct="1">
         <a:lnSpc>
           <a:spcPct val="90000"/>
         </a:lnSpc>
@@ -3991,7 +3991,7 @@
       <a:defPPr>
         <a:defRPr lang="en-US"/>
       </a:defPPr>
-      <a:lvl1pPr marL="0" algn="l" defTabSz="240025" rtl="0" eaLnBrk="1" latinLnBrk="1" hangingPunct="1">
+      <a:lvl1pPr marL="0" algn="l" defTabSz="240030" rtl="0" eaLnBrk="1" latinLnBrk="1" hangingPunct="1">
         <a:defRPr sz="472" kern="1200">
           <a:solidFill>
             <a:schemeClr val="tx1"/>
@@ -4001,7 +4001,7 @@
           <a:cs typeface="+mn-cs"/>
         </a:defRPr>
       </a:lvl1pPr>
-      <a:lvl2pPr marL="120012" algn="l" defTabSz="240025" rtl="0" eaLnBrk="1" latinLnBrk="1" hangingPunct="1">
+      <a:lvl2pPr marL="120015" algn="l" defTabSz="240030" rtl="0" eaLnBrk="1" latinLnBrk="1" hangingPunct="1">
         <a:defRPr sz="472" kern="1200">
           <a:solidFill>
             <a:schemeClr val="tx1"/>
@@ -4011,7 +4011,7 @@
           <a:cs typeface="+mn-cs"/>
         </a:defRPr>
       </a:lvl2pPr>
-      <a:lvl3pPr marL="240025" algn="l" defTabSz="240025" rtl="0" eaLnBrk="1" latinLnBrk="1" hangingPunct="1">
+      <a:lvl3pPr marL="240030" algn="l" defTabSz="240030" rtl="0" eaLnBrk="1" latinLnBrk="1" hangingPunct="1">
         <a:defRPr sz="472" kern="1200">
           <a:solidFill>
             <a:schemeClr val="tx1"/>
@@ -4021,7 +4021,7 @@
           <a:cs typeface="+mn-cs"/>
         </a:defRPr>
       </a:lvl3pPr>
-      <a:lvl4pPr marL="360036" algn="l" defTabSz="240025" rtl="0" eaLnBrk="1" latinLnBrk="1" hangingPunct="1">
+      <a:lvl4pPr marL="360045" algn="l" defTabSz="240030" rtl="0" eaLnBrk="1" latinLnBrk="1" hangingPunct="1">
         <a:defRPr sz="472" kern="1200">
           <a:solidFill>
             <a:schemeClr val="tx1"/>
@@ -4031,7 +4031,7 @@
           <a:cs typeface="+mn-cs"/>
         </a:defRPr>
       </a:lvl4pPr>
-      <a:lvl5pPr marL="480048" algn="l" defTabSz="240025" rtl="0" eaLnBrk="1" latinLnBrk="1" hangingPunct="1">
+      <a:lvl5pPr marL="480060" algn="l" defTabSz="240030" rtl="0" eaLnBrk="1" latinLnBrk="1" hangingPunct="1">
         <a:defRPr sz="472" kern="1200">
           <a:solidFill>
             <a:schemeClr val="tx1"/>
@@ -4041,7 +4041,7 @@
           <a:cs typeface="+mn-cs"/>
         </a:defRPr>
       </a:lvl5pPr>
-      <a:lvl6pPr marL="600060" algn="l" defTabSz="240025" rtl="0" eaLnBrk="1" latinLnBrk="1" hangingPunct="1">
+      <a:lvl6pPr marL="600075" algn="l" defTabSz="240030" rtl="0" eaLnBrk="1" latinLnBrk="1" hangingPunct="1">
         <a:defRPr sz="472" kern="1200">
           <a:solidFill>
             <a:schemeClr val="tx1"/>
@@ -4051,7 +4051,7 @@
           <a:cs typeface="+mn-cs"/>
         </a:defRPr>
       </a:lvl6pPr>
-      <a:lvl7pPr marL="720073" algn="l" defTabSz="240025" rtl="0" eaLnBrk="1" latinLnBrk="1" hangingPunct="1">
+      <a:lvl7pPr marL="720090" algn="l" defTabSz="240030" rtl="0" eaLnBrk="1" latinLnBrk="1" hangingPunct="1">
         <a:defRPr sz="472" kern="1200">
           <a:solidFill>
             <a:schemeClr val="tx1"/>
@@ -4061,7 +4061,7 @@
           <a:cs typeface="+mn-cs"/>
         </a:defRPr>
       </a:lvl7pPr>
-      <a:lvl8pPr marL="840084" algn="l" defTabSz="240025" rtl="0" eaLnBrk="1" latinLnBrk="1" hangingPunct="1">
+      <a:lvl8pPr marL="840105" algn="l" defTabSz="240030" rtl="0" eaLnBrk="1" latinLnBrk="1" hangingPunct="1">
         <a:defRPr sz="472" kern="1200">
           <a:solidFill>
             <a:schemeClr val="tx1"/>
@@ -4071,7 +4071,7 @@
           <a:cs typeface="+mn-cs"/>
         </a:defRPr>
       </a:lvl8pPr>
-      <a:lvl9pPr marL="960096" algn="l" defTabSz="240025" rtl="0" eaLnBrk="1" latinLnBrk="1" hangingPunct="1">
+      <a:lvl9pPr marL="960120" algn="l" defTabSz="240030" rtl="0" eaLnBrk="1" latinLnBrk="1" hangingPunct="1">
         <a:defRPr sz="472" kern="1200">
           <a:solidFill>
             <a:schemeClr val="tx1"/>
@@ -4139,8 +4139,8 @@
         </p:nvSpPr>
         <p:spPr>
           <a:xfrm>
-            <a:off x="818197" y="324615"/>
-            <a:ext cx="2291713" cy="382344"/>
+            <a:off x="808500" y="317480"/>
+            <a:ext cx="2320132" cy="387085"/>
           </a:xfrm>
           <a:prstGeom prst="roundRect">
             <a:avLst>
@@ -4177,7 +4177,7 @@
           <a:lstStyle/>
           <a:p>
             <a:pPr algn="ctr"/>
-            <a:endParaRPr lang="ko-KR" altLang="en-US">
+            <a:endParaRPr lang="ko-KR" altLang="en-US" sz="1822">
               <a:latin typeface="KoPub돋움체 Medium" panose="02020603020101020101" pitchFamily="18" charset="-127"/>
               <a:ea typeface="KoPub돋움체 Medium" panose="02020603020101020101" pitchFamily="18" charset="-127"/>
             </a:endParaRPr>
@@ -4198,8 +4198,8 @@
         </p:nvSpPr>
         <p:spPr>
           <a:xfrm>
-            <a:off x="818197" y="745559"/>
-            <a:ext cx="2291713" cy="592988"/>
+            <a:off x="808500" y="743642"/>
+            <a:ext cx="2320132" cy="600342"/>
           </a:xfrm>
           <a:prstGeom prst="roundRect">
             <a:avLst>
@@ -4236,7 +4236,7 @@
           <a:lstStyle/>
           <a:p>
             <a:pPr algn="ctr"/>
-            <a:endParaRPr lang="ko-KR" altLang="en-US">
+            <a:endParaRPr lang="ko-KR" altLang="en-US" sz="1822">
               <a:latin typeface="KoPub돋움체 Medium" panose="02020603020101020101" pitchFamily="18" charset="-127"/>
               <a:ea typeface="KoPub돋움체 Medium" panose="02020603020101020101" pitchFamily="18" charset="-127"/>
             </a:endParaRPr>
@@ -4257,8 +4257,8 @@
         </p:nvSpPr>
         <p:spPr>
           <a:xfrm>
-            <a:off x="84929" y="324615"/>
-            <a:ext cx="721520" cy="382344"/>
+            <a:off x="66140" y="317480"/>
+            <a:ext cx="730467" cy="387085"/>
           </a:xfrm>
           <a:prstGeom prst="roundRect">
             <a:avLst>
@@ -4293,7 +4293,7 @@
           <a:lstStyle/>
           <a:p>
             <a:pPr algn="ctr"/>
-            <a:endParaRPr lang="ko-KR" altLang="en-US">
+            <a:endParaRPr lang="ko-KR" altLang="en-US" sz="1822">
               <a:latin typeface="KoPub돋움체 Medium" panose="02020603020101020101" pitchFamily="18" charset="-127"/>
               <a:ea typeface="KoPub돋움체 Medium" panose="02020603020101020101" pitchFamily="18" charset="-127"/>
             </a:endParaRPr>
@@ -4314,8 +4314,8 @@
         </p:nvSpPr>
         <p:spPr>
           <a:xfrm>
-            <a:off x="41931" y="54250"/>
-            <a:ext cx="1180381" cy="169277"/>
+            <a:off x="22609" y="43762"/>
+            <a:ext cx="1195019" cy="170175"/>
           </a:xfrm>
           <a:prstGeom prst="rect">
             <a:avLst/>
@@ -4330,21 +4330,21 @@
           <a:p>
             <a:pPr algn="ctr"/>
             <a:r>
-              <a:rPr lang="ko-KR" altLang="en-US" sz="500" spc="-11" dirty="0">
+              <a:rPr lang="ko-KR" altLang="en-US" sz="506" spc="-11" dirty="0">
                 <a:latin typeface="KoPub돋움체 Light" panose="02020603020101020101" pitchFamily="18" charset="-127"/>
                 <a:ea typeface="KoPub돋움체 Light" panose="02020603020101020101" pitchFamily="18" charset="-127"/>
               </a:rPr>
               <a:t>순천향대학교 천안병원 </a:t>
             </a:r>
             <a:r>
-              <a:rPr lang="en-US" altLang="ko-KR" sz="500" spc="-11" dirty="0">
+              <a:rPr lang="en-US" altLang="ko-KR" sz="506" spc="-11" dirty="0">
                 <a:latin typeface="KoPub돋움체 Light" panose="02020603020101020101" pitchFamily="18" charset="-127"/>
                 <a:ea typeface="KoPub돋움체 Light" panose="02020603020101020101" pitchFamily="18" charset="-127"/>
               </a:rPr>
               <a:t>| </a:t>
             </a:r>
             <a:r>
-              <a:rPr lang="ko-KR" altLang="en-US" sz="500" spc="-11" dirty="0">
+              <a:rPr lang="ko-KR" altLang="en-US" sz="506" spc="-11" dirty="0">
                 <a:latin typeface="KoPub돋움체 Light" panose="02020603020101020101" pitchFamily="18" charset="-127"/>
                 <a:ea typeface="KoPub돋움체 Light" panose="02020603020101020101" pitchFamily="18" charset="-127"/>
               </a:rPr>
@@ -4367,8 +4367,8 @@
         </p:nvSpPr>
         <p:spPr>
           <a:xfrm>
-            <a:off x="735575" y="415757"/>
-            <a:ext cx="2627431" cy="215444"/>
+            <a:off x="724855" y="409750"/>
+            <a:ext cx="2660013" cy="218116"/>
           </a:xfrm>
           <a:prstGeom prst="rect">
             <a:avLst/>
@@ -4382,7 +4382,7 @@
           <a:lstStyle/>
           <a:p>
             <a:r>
-              <a:rPr lang="en-US" altLang="ko-KR" sz="800" b="1" dirty="0">
+              <a:rPr lang="en-US" altLang="ko-KR" sz="810" b="1" dirty="0">
                 <a:solidFill>
                   <a:schemeClr val="tx2">
                     <a:lumMod val="50000"/>
@@ -4394,7 +4394,7 @@
               <a:t>Case ID : </a:t>
             </a:r>
             <a:r>
-              <a:rPr lang="ko-KR" altLang="en-US" sz="800" b="1" dirty="0">
+              <a:rPr lang="ko-KR" altLang="en-US" sz="810" b="1" dirty="0">
                 <a:solidFill>
                   <a:schemeClr val="tx2">
                     <a:lumMod val="50000"/>
@@ -4406,7 +4406,7 @@
               <a:t>병실</a:t>
             </a:r>
             <a:r>
-              <a:rPr lang="en-US" altLang="ko-KR" sz="800" b="1" dirty="0">
+              <a:rPr lang="en-US" altLang="ko-KR" sz="810" b="1" dirty="0">
                 <a:solidFill>
                   <a:schemeClr val="tx2">
                     <a:lumMod val="50000"/>
@@ -4418,7 +4418,7 @@
               <a:t>-</a:t>
             </a:r>
             <a:r>
-              <a:rPr lang="ko-KR" altLang="en-US" sz="800" b="1" dirty="0">
+              <a:rPr lang="ko-KR" altLang="en-US" sz="810" b="1" dirty="0">
                 <a:solidFill>
                   <a:schemeClr val="tx2">
                     <a:lumMod val="50000"/>
@@ -4430,7 +4430,7 @@
               <a:t>등록</a:t>
             </a:r>
             <a:r>
-              <a:rPr lang="en-US" altLang="ko-KR" sz="800" b="1" dirty="0">
+              <a:rPr lang="en-US" altLang="ko-KR" sz="810" b="1" dirty="0">
                 <a:solidFill>
                   <a:schemeClr val="tx2">
                     <a:lumMod val="50000"/>
@@ -4442,7 +4442,7 @@
               <a:t>-</a:t>
             </a:r>
             <a:r>
-              <a:rPr lang="ko-KR" altLang="en-US" sz="800" b="1" dirty="0">
+              <a:rPr lang="ko-KR" altLang="en-US" sz="810" b="1" dirty="0">
                 <a:solidFill>
                   <a:schemeClr val="tx2">
                     <a:lumMod val="50000"/>
@@ -4454,7 +4454,7 @@
               <a:t>성함</a:t>
             </a:r>
             <a:r>
-              <a:rPr lang="en-US" altLang="ko-KR" sz="800" b="1" dirty="0">
+              <a:rPr lang="en-US" altLang="ko-KR" sz="810" b="1" dirty="0">
                 <a:solidFill>
                   <a:schemeClr val="tx2">
                     <a:lumMod val="50000"/>
@@ -4466,7 +4466,7 @@
               <a:t>-</a:t>
             </a:r>
             <a:r>
-              <a:rPr lang="ko-KR" altLang="en-US" sz="800" b="1" dirty="0">
+              <a:rPr lang="ko-KR" altLang="en-US" sz="810" b="1" dirty="0">
                 <a:solidFill>
                   <a:schemeClr val="tx2">
                     <a:lumMod val="50000"/>
@@ -4478,7 +4478,7 @@
               <a:t>교수</a:t>
             </a:r>
             <a:r>
-              <a:rPr lang="en-US" altLang="ko-KR" sz="800" b="1" dirty="0">
+              <a:rPr lang="en-US" altLang="ko-KR" sz="810" b="1" dirty="0">
                 <a:solidFill>
                   <a:schemeClr val="tx2">
                     <a:lumMod val="50000"/>
@@ -4490,7 +4490,7 @@
               <a:t>-</a:t>
             </a:r>
             <a:r>
-              <a:rPr lang="ko-KR" altLang="en-US" sz="800" b="1" dirty="0">
+              <a:rPr lang="ko-KR" altLang="en-US" sz="810" b="1" dirty="0">
                 <a:solidFill>
                   <a:schemeClr val="tx2">
                     <a:lumMod val="50000"/>
@@ -4502,7 +4502,7 @@
               <a:t>월일</a:t>
             </a:r>
             <a:r>
-              <a:rPr lang="en-US" altLang="ko-KR" sz="800" b="1" dirty="0">
+              <a:rPr lang="en-US" altLang="ko-KR" sz="810" b="1" dirty="0">
                 <a:solidFill>
                   <a:schemeClr val="tx2">
                     <a:lumMod val="50000"/>
@@ -4514,7 +4514,7 @@
               <a:t>-</a:t>
             </a:r>
             <a:r>
-              <a:rPr lang="ko-KR" altLang="en-US" sz="800" b="1" dirty="0">
+              <a:rPr lang="ko-KR" altLang="en-US" sz="810" b="1" dirty="0">
                 <a:solidFill>
                   <a:schemeClr val="tx2">
                     <a:lumMod val="50000"/>
@@ -4525,7 +4525,7 @@
               </a:rPr>
               <a:t>시간</a:t>
             </a:r>
-            <a:endParaRPr lang="en-US" altLang="ko-KR" sz="800" dirty="0">
+            <a:endParaRPr lang="en-US" altLang="ko-KR" sz="810" dirty="0">
               <a:solidFill>
                 <a:schemeClr val="tx2">
                   <a:lumMod val="50000"/>
@@ -4551,8 +4551,8 @@
         </p:nvSpPr>
         <p:spPr>
           <a:xfrm>
-            <a:off x="84929" y="745557"/>
-            <a:ext cx="721520" cy="592987"/>
+            <a:off x="66140" y="743642"/>
+            <a:ext cx="730467" cy="600341"/>
           </a:xfrm>
           <a:prstGeom prst="roundRect">
             <a:avLst>
@@ -4587,7 +4587,7 @@
           <a:lstStyle/>
           <a:p>
             <a:pPr algn="ctr"/>
-            <a:endParaRPr lang="ko-KR" altLang="en-US">
+            <a:endParaRPr lang="ko-KR" altLang="en-US" sz="1822">
               <a:latin typeface="KoPub돋움체 Medium" panose="02020603020101020101" pitchFamily="18" charset="-127"/>
               <a:ea typeface="KoPub돋움체 Medium" panose="02020603020101020101" pitchFamily="18" charset="-127"/>
             </a:endParaRPr>
@@ -4608,8 +4608,8 @@
         </p:nvSpPr>
         <p:spPr>
           <a:xfrm>
-            <a:off x="807175" y="718078"/>
-            <a:ext cx="2321879" cy="628121"/>
+            <a:off x="797341" y="715821"/>
+            <a:ext cx="2350672" cy="642727"/>
           </a:xfrm>
           <a:prstGeom prst="rect">
             <a:avLst/>
@@ -4628,7 +4628,7 @@
               </a:lnSpc>
             </a:pPr>
             <a:r>
-              <a:rPr lang="en-US" altLang="ko-KR" sz="800" b="1" dirty="0">
+              <a:rPr lang="en-US" altLang="ko-KR" sz="810" b="1" dirty="0">
                 <a:solidFill>
                   <a:schemeClr val="tx2">
                     <a:lumMod val="50000"/>
@@ -4640,7 +4640,7 @@
               <a:t>[A] </a:t>
             </a:r>
             <a:r>
-              <a:rPr lang="ko-KR" altLang="en-US" sz="800" b="1" dirty="0">
+              <a:rPr lang="ko-KR" altLang="en-US" sz="810" b="1" dirty="0">
                 <a:solidFill>
                   <a:schemeClr val="tx2">
                     <a:lumMod val="50000"/>
@@ -4652,7 +4652,7 @@
               <a:t>보고 </a:t>
             </a:r>
             <a:r>
-              <a:rPr lang="en-US" altLang="ko-KR" sz="800" b="1" dirty="0">
+              <a:rPr lang="en-US" altLang="ko-KR" sz="810" b="1" dirty="0">
                 <a:solidFill>
                   <a:schemeClr val="tx2">
                     <a:lumMod val="50000"/>
@@ -4664,7 +4664,7 @@
               <a:t>(</a:t>
             </a:r>
             <a:r>
-              <a:rPr lang="ko-KR" altLang="en-US" sz="800" b="1" dirty="0">
+              <a:rPr lang="ko-KR" altLang="en-US" sz="810" b="1" dirty="0">
                 <a:solidFill>
                   <a:schemeClr val="tx2">
                     <a:lumMod val="50000"/>
@@ -4676,7 +4676,7 @@
               <a:t>병동</a:t>
             </a:r>
             <a:r>
-              <a:rPr lang="en-US" altLang="ko-KR" sz="800" b="1" dirty="0">
+              <a:rPr lang="en-US" altLang="ko-KR" sz="810" b="1" dirty="0">
                 <a:solidFill>
                   <a:schemeClr val="tx2">
                     <a:lumMod val="50000"/>
@@ -4688,7 +4688,7 @@
               <a:t>) : </a:t>
             </a:r>
             <a:r>
-              <a:rPr lang="en-US" altLang="ko-KR" sz="800" dirty="0">
+              <a:rPr lang="en-US" altLang="ko-KR" sz="810" dirty="0">
                 <a:solidFill>
                   <a:schemeClr val="tx2">
                     <a:lumMod val="50000"/>
@@ -4700,7 +4700,7 @@
               <a:t>ID / </a:t>
             </a:r>
             <a:r>
-              <a:rPr lang="ko-KR" altLang="en-US" sz="800" dirty="0">
+              <a:rPr lang="ko-KR" altLang="en-US" sz="810" dirty="0">
                 <a:solidFill>
                   <a:schemeClr val="tx2">
                     <a:lumMod val="50000"/>
@@ -4712,7 +4712,7 @@
               <a:t>지금 </a:t>
             </a:r>
             <a:r>
-              <a:rPr lang="en-US" altLang="ko-KR" sz="800" dirty="0">
+              <a:rPr lang="en-US" altLang="ko-KR" sz="810" dirty="0">
                 <a:solidFill>
                   <a:schemeClr val="tx2">
                     <a:lumMod val="50000"/>
@@ -4724,7 +4724,7 @@
               <a:t>/ </a:t>
             </a:r>
             <a:r>
-              <a:rPr lang="ko-KR" altLang="en-US" sz="800" dirty="0">
+              <a:rPr lang="ko-KR" altLang="en-US" sz="810" dirty="0">
                 <a:solidFill>
                   <a:schemeClr val="tx2">
                     <a:lumMod val="50000"/>
@@ -4736,7 +4736,7 @@
               <a:t>근거 </a:t>
             </a:r>
             <a:r>
-              <a:rPr lang="en-US" altLang="ko-KR" sz="800" dirty="0">
+              <a:rPr lang="en-US" altLang="ko-KR" sz="810" dirty="0">
                 <a:solidFill>
                   <a:schemeClr val="tx2">
                     <a:lumMod val="50000"/>
@@ -4748,7 +4748,7 @@
               <a:t>/ </a:t>
             </a:r>
             <a:r>
-              <a:rPr lang="ko-KR" altLang="en-US" sz="800" dirty="0">
+              <a:rPr lang="ko-KR" altLang="en-US" sz="810" dirty="0">
                 <a:solidFill>
                   <a:schemeClr val="tx2">
                     <a:lumMod val="50000"/>
@@ -4760,7 +4760,7 @@
               <a:t>요청 </a:t>
             </a:r>
             <a:r>
-              <a:rPr lang="en-US" altLang="ko-KR" sz="800" dirty="0">
+              <a:rPr lang="en-US" altLang="ko-KR" sz="810" dirty="0">
                 <a:solidFill>
                   <a:schemeClr val="tx2">
                     <a:lumMod val="50000"/>
@@ -4779,7 +4779,7 @@
               </a:lnSpc>
             </a:pPr>
             <a:r>
-              <a:rPr lang="en-US" altLang="ko-KR" sz="800" b="1" dirty="0">
+              <a:rPr lang="en-US" altLang="ko-KR" sz="810" b="1" dirty="0">
                 <a:solidFill>
                   <a:schemeClr val="tx2">
                     <a:lumMod val="50000"/>
@@ -4791,7 +4791,7 @@
               <a:t>[C] </a:t>
             </a:r>
             <a:r>
-              <a:rPr lang="ko-KR" altLang="en-US" sz="800" b="1" dirty="0">
+              <a:rPr lang="ko-KR" altLang="en-US" sz="810" b="1" dirty="0">
                 <a:solidFill>
                   <a:schemeClr val="tx2">
                     <a:lumMod val="50000"/>
@@ -4803,7 +4803,7 @@
               <a:t>상황 </a:t>
             </a:r>
             <a:r>
-              <a:rPr lang="en-US" altLang="ko-KR" sz="800" b="1" dirty="0">
+              <a:rPr lang="en-US" altLang="ko-KR" sz="810" b="1" dirty="0">
                 <a:solidFill>
                   <a:schemeClr val="tx2">
                     <a:lumMod val="50000"/>
@@ -4815,7 +4815,7 @@
               <a:t>(PA) : </a:t>
             </a:r>
             <a:r>
-              <a:rPr lang="en-US" altLang="ko-KR" sz="800" dirty="0">
+              <a:rPr lang="en-US" altLang="ko-KR" sz="810" dirty="0">
                 <a:solidFill>
                   <a:schemeClr val="tx2">
                     <a:lumMod val="50000"/>
@@ -4827,7 +4827,7 @@
               <a:t>ID / </a:t>
             </a:r>
             <a:r>
-              <a:rPr lang="ko-KR" altLang="en-US" sz="800" dirty="0">
+              <a:rPr lang="ko-KR" altLang="en-US" sz="810" dirty="0">
                 <a:solidFill>
                   <a:schemeClr val="tx2">
                     <a:lumMod val="50000"/>
@@ -4839,7 +4839,7 @@
               <a:t>상황</a:t>
             </a:r>
             <a:r>
-              <a:rPr lang="en-US" altLang="ko-KR" sz="800" dirty="0">
+              <a:rPr lang="en-US" altLang="ko-KR" sz="810" dirty="0">
                 <a:solidFill>
                   <a:schemeClr val="tx2">
                     <a:lumMod val="50000"/>
@@ -4851,7 +4851,7 @@
               <a:t>(C</a:t>
             </a:r>
             <a:r>
-              <a:rPr lang="ko-KR" altLang="en-US" sz="800" dirty="0">
+              <a:rPr lang="ko-KR" altLang="en-US" sz="810" dirty="0">
                 <a:solidFill>
                   <a:schemeClr val="tx2">
                     <a:lumMod val="50000"/>
@@ -4863,7 +4863,7 @@
               <a:t>코드</a:t>
             </a:r>
             <a:r>
-              <a:rPr lang="en-US" altLang="ko-KR" sz="800" dirty="0">
+              <a:rPr lang="en-US" altLang="ko-KR" sz="810" dirty="0">
                 <a:solidFill>
                   <a:schemeClr val="tx2">
                     <a:lumMod val="50000"/>
@@ -4875,7 +4875,7 @@
               <a:t>) / </a:t>
             </a:r>
             <a:r>
-              <a:rPr lang="ko-KR" altLang="en-US" sz="800" dirty="0">
+              <a:rPr lang="ko-KR" altLang="en-US" sz="810" dirty="0">
                 <a:solidFill>
                   <a:schemeClr val="tx2">
                     <a:lumMod val="50000"/>
@@ -4887,7 +4887,7 @@
               <a:t>다음 </a:t>
             </a:r>
             <a:r>
-              <a:rPr lang="en-US" altLang="ko-KR" sz="800" dirty="0">
+              <a:rPr lang="en-US" altLang="ko-KR" sz="810" dirty="0">
                 <a:solidFill>
                   <a:schemeClr val="tx2">
                     <a:lumMod val="50000"/>
@@ -4906,7 +4906,7 @@
               </a:lnSpc>
             </a:pPr>
             <a:r>
-              <a:rPr lang="en-US" altLang="ko-KR" sz="800" b="1" dirty="0">
+              <a:rPr lang="en-US" altLang="ko-KR" sz="810" b="1" dirty="0">
                 <a:solidFill>
                   <a:schemeClr val="tx2">
                     <a:lumMod val="50000"/>
@@ -4918,7 +4918,7 @@
               <a:t>[D] </a:t>
             </a:r>
             <a:r>
-              <a:rPr lang="ko-KR" altLang="en-US" sz="800" b="1" dirty="0">
+              <a:rPr lang="ko-KR" altLang="en-US" sz="810" b="1" dirty="0">
                 <a:solidFill>
                   <a:schemeClr val="tx2">
                     <a:lumMod val="50000"/>
@@ -4930,7 +4930,7 @@
               <a:t>완료 </a:t>
             </a:r>
             <a:r>
-              <a:rPr lang="en-US" altLang="ko-KR" sz="800" b="1" dirty="0">
+              <a:rPr lang="en-US" altLang="ko-KR" sz="810" b="1" dirty="0">
                 <a:solidFill>
                   <a:schemeClr val="tx2">
                     <a:lumMod val="50000"/>
@@ -4942,7 +4942,7 @@
               <a:t>(PA) : </a:t>
             </a:r>
             <a:r>
-              <a:rPr lang="en-US" altLang="ko-KR" sz="800" dirty="0">
+              <a:rPr lang="en-US" altLang="ko-KR" sz="810" dirty="0">
                 <a:solidFill>
                   <a:schemeClr val="tx2">
                     <a:lumMod val="50000"/>
@@ -4954,7 +4954,7 @@
               <a:t>ID / </a:t>
             </a:r>
             <a:r>
-              <a:rPr lang="ko-KR" altLang="en-US" sz="800" dirty="0">
+              <a:rPr lang="ko-KR" altLang="en-US" sz="810" dirty="0">
                 <a:solidFill>
                   <a:schemeClr val="tx2">
                     <a:lumMod val="50000"/>
@@ -4966,7 +4966,7 @@
               <a:t>조치결과 </a:t>
             </a:r>
             <a:r>
-              <a:rPr lang="en-US" altLang="ko-KR" sz="800" dirty="0">
+              <a:rPr lang="en-US" altLang="ko-KR" sz="810" dirty="0">
                 <a:solidFill>
                   <a:schemeClr val="tx2">
                     <a:lumMod val="50000"/>
@@ -4978,7 +4978,7 @@
               <a:t>/ F/U </a:t>
             </a:r>
             <a:r>
-              <a:rPr lang="ko-KR" altLang="en-US" sz="800" dirty="0">
+              <a:rPr lang="ko-KR" altLang="en-US" sz="810" dirty="0">
                 <a:solidFill>
                   <a:schemeClr val="tx2">
                     <a:lumMod val="50000"/>
@@ -5006,8 +5006,8 @@
         </p:nvSpPr>
         <p:spPr>
           <a:xfrm>
-            <a:off x="265477" y="1408813"/>
-            <a:ext cx="2709863" cy="200055"/>
+            <a:off x="248927" y="1415122"/>
+            <a:ext cx="2743467" cy="202536"/>
           </a:xfrm>
           <a:prstGeom prst="rect">
             <a:avLst/>
@@ -5022,97 +5022,97 @@
           <a:p>
             <a:pPr algn="ctr"/>
             <a:r>
-              <a:rPr lang="ko-KR" altLang="en-US" sz="700" b="1" dirty="0">
+              <a:rPr lang="ko-KR" altLang="en-US" sz="709" b="1" dirty="0">
                 <a:latin typeface="KoPub돋움체 Medium" panose="02020603020101020101" pitchFamily="18" charset="-127"/>
                 <a:ea typeface="KoPub돋움체 Medium" panose="02020603020101020101" pitchFamily="18" charset="-127"/>
               </a:rPr>
               <a:t> </a:t>
             </a:r>
             <a:r>
-              <a:rPr lang="en-US" altLang="ko-KR" sz="700" b="1" dirty="0">
+              <a:rPr lang="en-US" altLang="ko-KR" sz="709" b="1" dirty="0">
                 <a:latin typeface="KoPub돋움체 Medium" panose="02020603020101020101" pitchFamily="18" charset="-127"/>
                 <a:ea typeface="KoPub돋움체 Medium" panose="02020603020101020101" pitchFamily="18" charset="-127"/>
               </a:rPr>
               <a:t>10</a:t>
             </a:r>
             <a:r>
-              <a:rPr lang="ko-KR" altLang="en-US" sz="700" b="1" dirty="0">
+              <a:rPr lang="ko-KR" altLang="en-US" sz="709" b="1" dirty="0">
                 <a:latin typeface="KoPub돋움체 Medium" panose="02020603020101020101" pitchFamily="18" charset="-127"/>
                 <a:ea typeface="KoPub돋움체 Medium" panose="02020603020101020101" pitchFamily="18" charset="-127"/>
               </a:rPr>
               <a:t>분 </a:t>
             </a:r>
             <a:r>
-              <a:rPr lang="en-US" altLang="ko-KR" sz="700" b="1" dirty="0">
+              <a:rPr lang="en-US" altLang="ko-KR" sz="709" b="1" dirty="0">
                 <a:latin typeface="KoPub돋움체 Medium" panose="02020603020101020101" pitchFamily="18" charset="-127"/>
                 <a:ea typeface="KoPub돋움체 Medium" panose="02020603020101020101" pitchFamily="18" charset="-127"/>
               </a:rPr>
               <a:t>: </a:t>
             </a:r>
             <a:r>
-              <a:rPr lang="ko-KR" altLang="en-US" sz="700" b="1" dirty="0">
+              <a:rPr lang="ko-KR" altLang="en-US" sz="709" b="1" dirty="0">
                 <a:latin typeface="KoPub돋움체 Medium" panose="02020603020101020101" pitchFamily="18" charset="-127"/>
                 <a:ea typeface="KoPub돋움체 Medium" panose="02020603020101020101" pitchFamily="18" charset="-127"/>
               </a:rPr>
               <a:t>응급            </a:t>
             </a:r>
             <a:r>
-              <a:rPr lang="en-US" altLang="ko-KR" sz="700" b="1" dirty="0">
+              <a:rPr lang="en-US" altLang="ko-KR" sz="709" b="1" dirty="0">
                 <a:latin typeface="KoPub돋움체 Medium" panose="02020603020101020101" pitchFamily="18" charset="-127"/>
                 <a:ea typeface="KoPub돋움체 Medium" panose="02020603020101020101" pitchFamily="18" charset="-127"/>
               </a:rPr>
               <a:t>4</a:t>
             </a:r>
             <a:r>
-              <a:rPr lang="ko-KR" altLang="en-US" sz="700" b="1" dirty="0">
+              <a:rPr lang="ko-KR" altLang="en-US" sz="709" b="1" dirty="0">
                 <a:latin typeface="KoPub돋움체 Medium" panose="02020603020101020101" pitchFamily="18" charset="-127"/>
                 <a:ea typeface="KoPub돋움체 Medium" panose="02020603020101020101" pitchFamily="18" charset="-127"/>
               </a:rPr>
               <a:t>시간 </a:t>
             </a:r>
             <a:r>
-              <a:rPr lang="en-US" altLang="ko-KR" sz="700" b="1" dirty="0">
+              <a:rPr lang="en-US" altLang="ko-KR" sz="709" b="1" dirty="0">
                 <a:latin typeface="KoPub돋움체 Medium" panose="02020603020101020101" pitchFamily="18" charset="-127"/>
                 <a:ea typeface="KoPub돋움체 Medium" panose="02020603020101020101" pitchFamily="18" charset="-127"/>
               </a:rPr>
               <a:t>: </a:t>
             </a:r>
             <a:r>
-              <a:rPr lang="ko-KR" altLang="en-US" sz="700" b="1" dirty="0">
+              <a:rPr lang="ko-KR" altLang="en-US" sz="709" b="1" dirty="0">
                 <a:latin typeface="KoPub돋움체 Medium" panose="02020603020101020101" pitchFamily="18" charset="-127"/>
                 <a:ea typeface="KoPub돋움체 Medium" panose="02020603020101020101" pitchFamily="18" charset="-127"/>
               </a:rPr>
               <a:t>우선  </a:t>
             </a:r>
             <a:r>
-              <a:rPr lang="en-US" altLang="ko-KR" sz="700" b="1" dirty="0">
+              <a:rPr lang="en-US" altLang="ko-KR" sz="709" b="1" dirty="0">
                 <a:latin typeface="KoPub돋움체 Medium" panose="02020603020101020101" pitchFamily="18" charset="-127"/>
                 <a:ea typeface="KoPub돋움체 Medium" panose="02020603020101020101" pitchFamily="18" charset="-127"/>
               </a:rPr>
               <a:t>       12</a:t>
             </a:r>
             <a:r>
-              <a:rPr lang="ko-KR" altLang="en-US" sz="700" b="1" dirty="0">
+              <a:rPr lang="ko-KR" altLang="en-US" sz="709" b="1" dirty="0">
                 <a:latin typeface="KoPub돋움체 Medium" panose="02020603020101020101" pitchFamily="18" charset="-127"/>
                 <a:ea typeface="KoPub돋움체 Medium" panose="02020603020101020101" pitchFamily="18" charset="-127"/>
               </a:rPr>
               <a:t>시간 </a:t>
             </a:r>
             <a:r>
-              <a:rPr lang="en-US" altLang="ko-KR" sz="700" b="1" dirty="0">
+              <a:rPr lang="en-US" altLang="ko-KR" sz="709" b="1" dirty="0">
                 <a:latin typeface="KoPub돋움체 Medium" panose="02020603020101020101" pitchFamily="18" charset="-127"/>
                 <a:ea typeface="KoPub돋움체 Medium" panose="02020603020101020101" pitchFamily="18" charset="-127"/>
               </a:rPr>
               <a:t>: </a:t>
             </a:r>
             <a:r>
-              <a:rPr lang="ko-KR" altLang="en-US" sz="700" b="1" dirty="0">
+              <a:rPr lang="ko-KR" altLang="en-US" sz="709" b="1" dirty="0">
                 <a:latin typeface="KoPub돋움체 Medium" panose="02020603020101020101" pitchFamily="18" charset="-127"/>
                 <a:ea typeface="KoPub돋움체 Medium" panose="02020603020101020101" pitchFamily="18" charset="-127"/>
               </a:rPr>
               <a:t>루틴</a:t>
             </a:r>
-            <a:endParaRPr lang="en-US" altLang="ko-KR" sz="700" b="1" dirty="0">
+            <a:endParaRPr lang="en-US" altLang="ko-KR" sz="709" b="1" dirty="0">
               <a:latin typeface="KoPub돋움체 Medium" panose="02020603020101020101" pitchFamily="18" charset="-127"/>
               <a:ea typeface="KoPub돋움체 Medium" panose="02020603020101020101" pitchFamily="18" charset="-127"/>
             </a:endParaRPr>
@@ -5133,8 +5133,8 @@
         </p:nvSpPr>
         <p:spPr>
           <a:xfrm>
-            <a:off x="127333" y="366664"/>
-            <a:ext cx="636713" cy="338554"/>
+            <a:off x="109070" y="360049"/>
+            <a:ext cx="644609" cy="342752"/>
           </a:xfrm>
           <a:prstGeom prst="rect">
             <a:avLst/>
@@ -5149,7 +5149,7 @@
           <a:p>
             <a:pPr algn="ctr"/>
             <a:r>
-              <a:rPr lang="ko-KR" altLang="en-US" sz="800" b="1" dirty="0">
+              <a:rPr lang="ko-KR" altLang="en-US" sz="810" b="1" dirty="0">
                 <a:solidFill>
                   <a:srgbClr val="000000"/>
                 </a:solidFill>
@@ -5158,7 +5158,7 @@
               </a:rPr>
               <a:t>실전 소통</a:t>
             </a:r>
-            <a:endParaRPr lang="en-US" altLang="ko-KR" sz="800" b="1" dirty="0">
+            <a:endParaRPr lang="en-US" altLang="ko-KR" sz="810" b="1" dirty="0">
               <a:solidFill>
                 <a:srgbClr val="000000"/>
               </a:solidFill>
@@ -5169,7 +5169,7 @@
           <a:p>
             <a:pPr algn="ctr"/>
             <a:r>
-              <a:rPr lang="en-US" altLang="ko-KR" sz="800" b="1" dirty="0">
+              <a:rPr lang="en-US" altLang="ko-KR" sz="810" b="1" dirty="0">
                 <a:solidFill>
                   <a:srgbClr val="000000"/>
                 </a:solidFill>
@@ -5179,7 +5179,7 @@
               <a:t>&amp; </a:t>
             </a:r>
             <a:r>
-              <a:rPr lang="ko-KR" altLang="en-US" sz="800" b="1" dirty="0">
+              <a:rPr lang="ko-KR" altLang="en-US" sz="810" b="1" dirty="0">
                 <a:solidFill>
                   <a:srgbClr val="000000"/>
                 </a:solidFill>
@@ -5205,8 +5205,8 @@
         </p:nvSpPr>
         <p:spPr>
           <a:xfrm>
-            <a:off x="104891" y="932596"/>
-            <a:ext cx="681597" cy="215444"/>
+            <a:off x="86350" y="932999"/>
+            <a:ext cx="690049" cy="218116"/>
           </a:xfrm>
           <a:prstGeom prst="rect">
             <a:avLst/>
@@ -5221,7 +5221,7 @@
           <a:p>
             <a:pPr algn="ctr"/>
             <a:r>
-              <a:rPr lang="ko-KR" altLang="en-US" sz="800" b="1" dirty="0">
+              <a:rPr lang="ko-KR" altLang="en-US" sz="810" b="1" dirty="0">
                 <a:solidFill>
                   <a:srgbClr val="000000"/>
                 </a:solidFill>
@@ -5231,7 +5231,7 @@
               <a:t> </a:t>
             </a:r>
             <a:r>
-              <a:rPr lang="en-US" altLang="ko-KR" sz="800" b="1" dirty="0">
+              <a:rPr lang="en-US" altLang="ko-KR" sz="810" b="1" dirty="0">
                 <a:solidFill>
                   <a:srgbClr val="000000"/>
                 </a:solidFill>
@@ -5240,7 +5240,7 @@
               </a:rPr>
               <a:t>ACD Loop</a:t>
             </a:r>
-            <a:endParaRPr lang="ko-KR" altLang="en-US" sz="2000" b="1" dirty="0">
+            <a:endParaRPr lang="ko-KR" altLang="en-US" sz="2025" b="1" dirty="0">
               <a:solidFill>
                 <a:srgbClr val="000000"/>
               </a:solidFill>
@@ -5264,8 +5264,8 @@
         </p:nvCxnSpPr>
         <p:spPr>
           <a:xfrm flipH="1">
-            <a:off x="165891" y="1373677"/>
-            <a:ext cx="2909888" cy="0"/>
+            <a:off x="148105" y="1379550"/>
+            <a:ext cx="2945973" cy="0"/>
           </a:xfrm>
           <a:prstGeom prst="line">
             <a:avLst/>
@@ -5307,8 +5307,8 @@
         </p:nvSpPr>
         <p:spPr>
           <a:xfrm>
-            <a:off x="582615" y="1454947"/>
-            <a:ext cx="104775" cy="104775"/>
+            <a:off x="569997" y="1461828"/>
+            <a:ext cx="106074" cy="106074"/>
           </a:xfrm>
           <a:prstGeom prst="ellipse">
             <a:avLst/>
@@ -5337,7 +5337,7 @@
           </a:fontRef>
         </p:style>
         <p:txBody>
-          <a:bodyPr rot="0" spcFirstLastPara="0" vertOverflow="overflow" horzOverflow="overflow" vert="horz" wrap="square" lIns="91440" tIns="45720" rIns="91440" bIns="45720" numCol="1" spcCol="0" rtlCol="0" fromWordArt="0" anchor="ctr" anchorCtr="0" forceAA="0" compatLnSpc="1">
+          <a:bodyPr rot="0" spcFirstLastPara="0" vertOverflow="overflow" horzOverflow="overflow" vert="horz" wrap="square" lIns="92574" tIns="46287" rIns="92574" bIns="46287" numCol="1" spcCol="0" rtlCol="0" fromWordArt="0" anchor="ctr" anchorCtr="0" forceAA="0" compatLnSpc="1">
             <a:prstTxWarp prst="textNoShape">
               <a:avLst/>
             </a:prstTxWarp>
@@ -5346,7 +5346,7 @@
           <a:lstStyle/>
           <a:p>
             <a:pPr algn="ctr"/>
-            <a:endParaRPr lang="ko-KR" altLang="en-US"/>
+            <a:endParaRPr lang="ko-KR" altLang="en-US" sz="1822"/>
           </a:p>
         </p:txBody>
       </p:sp>
@@ -5364,8 +5364,8 @@
         </p:nvSpPr>
         <p:spPr>
           <a:xfrm>
-            <a:off x="1273177" y="1454947"/>
-            <a:ext cx="104775" cy="104775"/>
+            <a:off x="1269122" y="1461828"/>
+            <a:ext cx="106074" cy="106074"/>
           </a:xfrm>
           <a:prstGeom prst="ellipse">
             <a:avLst/>
@@ -5394,7 +5394,7 @@
           </a:fontRef>
         </p:style>
         <p:txBody>
-          <a:bodyPr rot="0" spcFirstLastPara="0" vertOverflow="overflow" horzOverflow="overflow" vert="horz" wrap="square" lIns="91440" tIns="45720" rIns="91440" bIns="45720" numCol="1" spcCol="0" rtlCol="0" fromWordArt="0" anchor="ctr" anchorCtr="0" forceAA="0" compatLnSpc="1">
+          <a:bodyPr rot="0" spcFirstLastPara="0" vertOverflow="overflow" horzOverflow="overflow" vert="horz" wrap="square" lIns="92574" tIns="46287" rIns="92574" bIns="46287" numCol="1" spcCol="0" rtlCol="0" fromWordArt="0" anchor="ctr" anchorCtr="0" forceAA="0" compatLnSpc="1">
             <a:prstTxWarp prst="textNoShape">
               <a:avLst/>
             </a:prstTxWarp>
@@ -5403,7 +5403,7 @@
           <a:lstStyle/>
           <a:p>
             <a:pPr algn="ctr"/>
-            <a:endParaRPr lang="ko-KR" altLang="en-US"/>
+            <a:endParaRPr lang="ko-KR" altLang="en-US" sz="1822"/>
           </a:p>
         </p:txBody>
       </p:sp>
@@ -5421,8 +5421,8 @@
         </p:nvSpPr>
         <p:spPr>
           <a:xfrm>
-            <a:off x="1963740" y="1454947"/>
-            <a:ext cx="104775" cy="104775"/>
+            <a:off x="1968249" y="1461828"/>
+            <a:ext cx="106074" cy="106074"/>
           </a:xfrm>
           <a:prstGeom prst="ellipse">
             <a:avLst/>
@@ -5451,7 +5451,7 @@
           </a:fontRef>
         </p:style>
         <p:txBody>
-          <a:bodyPr rot="0" spcFirstLastPara="0" vertOverflow="overflow" horzOverflow="overflow" vert="horz" wrap="square" lIns="91440" tIns="45720" rIns="91440" bIns="45720" numCol="1" spcCol="0" rtlCol="0" fromWordArt="0" anchor="ctr" anchorCtr="0" forceAA="0" compatLnSpc="1">
+          <a:bodyPr rot="0" spcFirstLastPara="0" vertOverflow="overflow" horzOverflow="overflow" vert="horz" wrap="square" lIns="92574" tIns="46287" rIns="92574" bIns="46287" numCol="1" spcCol="0" rtlCol="0" fromWordArt="0" anchor="ctr" anchorCtr="0" forceAA="0" compatLnSpc="1">
             <a:prstTxWarp prst="textNoShape">
               <a:avLst/>
             </a:prstTxWarp>
@@ -5460,7 +5460,7 @@
           <a:lstStyle/>
           <a:p>
             <a:pPr algn="ctr"/>
-            <a:endParaRPr lang="ko-KR" altLang="en-US"/>
+            <a:endParaRPr lang="ko-KR" altLang="en-US" sz="1822"/>
           </a:p>
         </p:txBody>
       </p:sp>
@@ -5514,8 +5514,8 @@
         </p:nvSpPr>
         <p:spPr>
           <a:xfrm>
-            <a:off x="818197" y="324615"/>
-            <a:ext cx="2291713" cy="382344"/>
+            <a:off x="808500" y="317480"/>
+            <a:ext cx="2320132" cy="387085"/>
           </a:xfrm>
           <a:prstGeom prst="roundRect">
             <a:avLst>
@@ -5552,7 +5552,7 @@
           <a:lstStyle/>
           <a:p>
             <a:pPr algn="ctr"/>
-            <a:endParaRPr lang="ko-KR" altLang="en-US">
+            <a:endParaRPr lang="ko-KR" altLang="en-US" sz="1822">
               <a:latin typeface="KoPub돋움체 Medium" panose="02020603020101020101" pitchFamily="18" charset="-127"/>
               <a:ea typeface="KoPub돋움체 Medium" panose="02020603020101020101" pitchFamily="18" charset="-127"/>
             </a:endParaRPr>
@@ -5573,8 +5573,8 @@
         </p:nvSpPr>
         <p:spPr>
           <a:xfrm>
-            <a:off x="818197" y="745559"/>
-            <a:ext cx="2291713" cy="592988"/>
+            <a:off x="808500" y="743642"/>
+            <a:ext cx="2320132" cy="600342"/>
           </a:xfrm>
           <a:prstGeom prst="roundRect">
             <a:avLst>
@@ -5611,7 +5611,7 @@
           <a:lstStyle/>
           <a:p>
             <a:pPr algn="ctr"/>
-            <a:endParaRPr lang="ko-KR" altLang="en-US">
+            <a:endParaRPr lang="ko-KR" altLang="en-US" sz="1822">
               <a:latin typeface="KoPub돋움체 Medium" panose="02020603020101020101" pitchFamily="18" charset="-127"/>
               <a:ea typeface="KoPub돋움체 Medium" panose="02020603020101020101" pitchFamily="18" charset="-127"/>
             </a:endParaRPr>
@@ -5632,8 +5632,8 @@
         </p:nvSpPr>
         <p:spPr>
           <a:xfrm>
-            <a:off x="84929" y="324615"/>
-            <a:ext cx="721520" cy="382344"/>
+            <a:off x="66140" y="317480"/>
+            <a:ext cx="730467" cy="387085"/>
           </a:xfrm>
           <a:prstGeom prst="roundRect">
             <a:avLst>
@@ -5668,7 +5668,7 @@
           <a:lstStyle/>
           <a:p>
             <a:pPr algn="ctr"/>
-            <a:endParaRPr lang="ko-KR" altLang="en-US">
+            <a:endParaRPr lang="ko-KR" altLang="en-US" sz="1822">
               <a:latin typeface="KoPub돋움체 Medium" panose="02020603020101020101" pitchFamily="18" charset="-127"/>
               <a:ea typeface="KoPub돋움체 Medium" panose="02020603020101020101" pitchFamily="18" charset="-127"/>
             </a:endParaRPr>
@@ -5689,8 +5689,8 @@
         </p:nvSpPr>
         <p:spPr>
           <a:xfrm>
-            <a:off x="41931" y="54250"/>
-            <a:ext cx="1180381" cy="169277"/>
+            <a:off x="22609" y="43762"/>
+            <a:ext cx="1195019" cy="170175"/>
           </a:xfrm>
           <a:prstGeom prst="rect">
             <a:avLst/>
@@ -5705,21 +5705,21 @@
           <a:p>
             <a:pPr algn="ctr"/>
             <a:r>
-              <a:rPr lang="ko-KR" altLang="en-US" sz="500" spc="-11" dirty="0">
+              <a:rPr lang="ko-KR" altLang="en-US" sz="506" spc="-11" dirty="0">
                 <a:latin typeface="KoPub돋움체 Light" panose="02020603020101020101" pitchFamily="18" charset="-127"/>
                 <a:ea typeface="KoPub돋움체 Light" panose="02020603020101020101" pitchFamily="18" charset="-127"/>
               </a:rPr>
               <a:t>순천향대학교 천안병원 </a:t>
             </a:r>
             <a:r>
-              <a:rPr lang="en-US" altLang="ko-KR" sz="500" spc="-11" dirty="0">
+              <a:rPr lang="en-US" altLang="ko-KR" sz="506" spc="-11" dirty="0">
                 <a:latin typeface="KoPub돋움체 Light" panose="02020603020101020101" pitchFamily="18" charset="-127"/>
                 <a:ea typeface="KoPub돋움체 Light" panose="02020603020101020101" pitchFamily="18" charset="-127"/>
               </a:rPr>
               <a:t>| </a:t>
             </a:r>
             <a:r>
-              <a:rPr lang="ko-KR" altLang="en-US" sz="500" spc="-11" dirty="0">
+              <a:rPr lang="ko-KR" altLang="en-US" sz="506" spc="-11" dirty="0">
                 <a:latin typeface="KoPub돋움체 Light" panose="02020603020101020101" pitchFamily="18" charset="-127"/>
                 <a:ea typeface="KoPub돋움체 Light" panose="02020603020101020101" pitchFamily="18" charset="-127"/>
               </a:rPr>
@@ -5742,8 +5742,8 @@
         </p:nvSpPr>
         <p:spPr>
           <a:xfrm>
-            <a:off x="735575" y="415757"/>
-            <a:ext cx="2627431" cy="215444"/>
+            <a:off x="724855" y="409750"/>
+            <a:ext cx="2660013" cy="218116"/>
           </a:xfrm>
           <a:prstGeom prst="rect">
             <a:avLst/>
@@ -5757,7 +5757,7 @@
           <a:lstStyle/>
           <a:p>
             <a:r>
-              <a:rPr lang="en-US" altLang="ko-KR" sz="800" b="1" dirty="0">
+              <a:rPr lang="en-US" altLang="ko-KR" sz="810" b="1" dirty="0">
                 <a:solidFill>
                   <a:schemeClr val="tx2">
                     <a:lumMod val="50000"/>
@@ -5769,7 +5769,7 @@
               <a:t>Case ID : </a:t>
             </a:r>
             <a:r>
-              <a:rPr lang="ko-KR" altLang="en-US" sz="800" b="1" dirty="0">
+              <a:rPr lang="ko-KR" altLang="en-US" sz="810" b="1" dirty="0">
                 <a:solidFill>
                   <a:schemeClr val="tx2">
                     <a:lumMod val="50000"/>
@@ -5781,7 +5781,7 @@
               <a:t>병실</a:t>
             </a:r>
             <a:r>
-              <a:rPr lang="en-US" altLang="ko-KR" sz="800" b="1" dirty="0">
+              <a:rPr lang="en-US" altLang="ko-KR" sz="810" b="1" dirty="0">
                 <a:solidFill>
                   <a:schemeClr val="tx2">
                     <a:lumMod val="50000"/>
@@ -5793,7 +5793,7 @@
               <a:t>-</a:t>
             </a:r>
             <a:r>
-              <a:rPr lang="ko-KR" altLang="en-US" sz="800" b="1" dirty="0">
+              <a:rPr lang="ko-KR" altLang="en-US" sz="810" b="1" dirty="0">
                 <a:solidFill>
                   <a:schemeClr val="tx2">
                     <a:lumMod val="50000"/>
@@ -5805,7 +5805,7 @@
               <a:t>등록</a:t>
             </a:r>
             <a:r>
-              <a:rPr lang="en-US" altLang="ko-KR" sz="800" b="1" dirty="0">
+              <a:rPr lang="en-US" altLang="ko-KR" sz="810" b="1" dirty="0">
                 <a:solidFill>
                   <a:schemeClr val="tx2">
                     <a:lumMod val="50000"/>
@@ -5817,7 +5817,7 @@
               <a:t>-</a:t>
             </a:r>
             <a:r>
-              <a:rPr lang="ko-KR" altLang="en-US" sz="800" b="1" dirty="0">
+              <a:rPr lang="ko-KR" altLang="en-US" sz="810" b="1" dirty="0">
                 <a:solidFill>
                   <a:schemeClr val="tx2">
                     <a:lumMod val="50000"/>
@@ -5829,7 +5829,7 @@
               <a:t>성함</a:t>
             </a:r>
             <a:r>
-              <a:rPr lang="en-US" altLang="ko-KR" sz="800" b="1" dirty="0">
+              <a:rPr lang="en-US" altLang="ko-KR" sz="810" b="1" dirty="0">
                 <a:solidFill>
                   <a:schemeClr val="tx2">
                     <a:lumMod val="50000"/>
@@ -5841,7 +5841,7 @@
               <a:t>-</a:t>
             </a:r>
             <a:r>
-              <a:rPr lang="ko-KR" altLang="en-US" sz="800" b="1" dirty="0">
+              <a:rPr lang="ko-KR" altLang="en-US" sz="810" b="1" dirty="0">
                 <a:solidFill>
                   <a:schemeClr val="tx2">
                     <a:lumMod val="50000"/>
@@ -5853,7 +5853,7 @@
               <a:t>교수</a:t>
             </a:r>
             <a:r>
-              <a:rPr lang="en-US" altLang="ko-KR" sz="800" b="1" dirty="0">
+              <a:rPr lang="en-US" altLang="ko-KR" sz="810" b="1" dirty="0">
                 <a:solidFill>
                   <a:schemeClr val="tx2">
                     <a:lumMod val="50000"/>
@@ -5865,7 +5865,7 @@
               <a:t>-</a:t>
             </a:r>
             <a:r>
-              <a:rPr lang="ko-KR" altLang="en-US" sz="800" b="1" dirty="0">
+              <a:rPr lang="ko-KR" altLang="en-US" sz="810" b="1" dirty="0">
                 <a:solidFill>
                   <a:schemeClr val="tx2">
                     <a:lumMod val="50000"/>
@@ -5877,7 +5877,7 @@
               <a:t>월일</a:t>
             </a:r>
             <a:r>
-              <a:rPr lang="en-US" altLang="ko-KR" sz="800" b="1" dirty="0">
+              <a:rPr lang="en-US" altLang="ko-KR" sz="810" b="1" dirty="0">
                 <a:solidFill>
                   <a:schemeClr val="tx2">
                     <a:lumMod val="50000"/>
@@ -5889,7 +5889,7 @@
               <a:t>-</a:t>
             </a:r>
             <a:r>
-              <a:rPr lang="ko-KR" altLang="en-US" sz="800" b="1" dirty="0">
+              <a:rPr lang="ko-KR" altLang="en-US" sz="810" b="1" dirty="0">
                 <a:solidFill>
                   <a:schemeClr val="tx2">
                     <a:lumMod val="50000"/>
@@ -5900,7 +5900,7 @@
               </a:rPr>
               <a:t>시간</a:t>
             </a:r>
-            <a:endParaRPr lang="en-US" altLang="ko-KR" sz="800" dirty="0">
+            <a:endParaRPr lang="en-US" altLang="ko-KR" sz="810" dirty="0">
               <a:solidFill>
                 <a:schemeClr val="tx2">
                   <a:lumMod val="50000"/>
@@ -5926,8 +5926,8 @@
         </p:nvSpPr>
         <p:spPr>
           <a:xfrm>
-            <a:off x="84929" y="745557"/>
-            <a:ext cx="721520" cy="592987"/>
+            <a:off x="66140" y="743642"/>
+            <a:ext cx="730467" cy="600341"/>
           </a:xfrm>
           <a:prstGeom prst="roundRect">
             <a:avLst>
@@ -5962,7 +5962,7 @@
           <a:lstStyle/>
           <a:p>
             <a:pPr algn="ctr"/>
-            <a:endParaRPr lang="ko-KR" altLang="en-US">
+            <a:endParaRPr lang="ko-KR" altLang="en-US" sz="1822">
               <a:latin typeface="KoPub돋움체 Medium" panose="02020603020101020101" pitchFamily="18" charset="-127"/>
               <a:ea typeface="KoPub돋움체 Medium" panose="02020603020101020101" pitchFamily="18" charset="-127"/>
             </a:endParaRPr>
@@ -5983,8 +5983,8 @@
         </p:nvSpPr>
         <p:spPr>
           <a:xfrm>
-            <a:off x="807175" y="718078"/>
-            <a:ext cx="2321879" cy="628121"/>
+            <a:off x="797341" y="715821"/>
+            <a:ext cx="2350672" cy="642727"/>
           </a:xfrm>
           <a:prstGeom prst="rect">
             <a:avLst/>
@@ -6003,7 +6003,7 @@
               </a:lnSpc>
             </a:pPr>
             <a:r>
-              <a:rPr lang="en-US" altLang="ko-KR" sz="800" b="1" dirty="0">
+              <a:rPr lang="en-US" altLang="ko-KR" sz="810" b="1" dirty="0">
                 <a:solidFill>
                   <a:schemeClr val="tx2">
                     <a:lumMod val="50000"/>
@@ -6015,7 +6015,7 @@
               <a:t>[A] </a:t>
             </a:r>
             <a:r>
-              <a:rPr lang="ko-KR" altLang="en-US" sz="800" b="1" dirty="0">
+              <a:rPr lang="ko-KR" altLang="en-US" sz="810" b="1" dirty="0">
                 <a:solidFill>
                   <a:schemeClr val="tx2">
                     <a:lumMod val="50000"/>
@@ -6027,7 +6027,7 @@
               <a:t>보고 </a:t>
             </a:r>
             <a:r>
-              <a:rPr lang="en-US" altLang="ko-KR" sz="800" b="1" dirty="0">
+              <a:rPr lang="en-US" altLang="ko-KR" sz="810" b="1" dirty="0">
                 <a:solidFill>
                   <a:schemeClr val="tx2">
                     <a:lumMod val="50000"/>
@@ -6039,7 +6039,7 @@
               <a:t>(</a:t>
             </a:r>
             <a:r>
-              <a:rPr lang="ko-KR" altLang="en-US" sz="800" b="1" dirty="0">
+              <a:rPr lang="ko-KR" altLang="en-US" sz="810" b="1" dirty="0">
                 <a:solidFill>
                   <a:schemeClr val="tx2">
                     <a:lumMod val="50000"/>
@@ -6051,7 +6051,7 @@
               <a:t>병동</a:t>
             </a:r>
             <a:r>
-              <a:rPr lang="en-US" altLang="ko-KR" sz="800" b="1" dirty="0">
+              <a:rPr lang="en-US" altLang="ko-KR" sz="810" b="1" dirty="0">
                 <a:solidFill>
                   <a:schemeClr val="tx2">
                     <a:lumMod val="50000"/>
@@ -6063,7 +6063,7 @@
               <a:t>) : </a:t>
             </a:r>
             <a:r>
-              <a:rPr lang="en-US" altLang="ko-KR" sz="800" dirty="0">
+              <a:rPr lang="en-US" altLang="ko-KR" sz="810" dirty="0">
                 <a:solidFill>
                   <a:schemeClr val="tx2">
                     <a:lumMod val="50000"/>
@@ -6075,7 +6075,7 @@
               <a:t>ID / </a:t>
             </a:r>
             <a:r>
-              <a:rPr lang="ko-KR" altLang="en-US" sz="800" dirty="0">
+              <a:rPr lang="ko-KR" altLang="en-US" sz="810" dirty="0">
                 <a:solidFill>
                   <a:schemeClr val="tx2">
                     <a:lumMod val="50000"/>
@@ -6087,7 +6087,7 @@
               <a:t>지금 </a:t>
             </a:r>
             <a:r>
-              <a:rPr lang="en-US" altLang="ko-KR" sz="800" dirty="0">
+              <a:rPr lang="en-US" altLang="ko-KR" sz="810" dirty="0">
                 <a:solidFill>
                   <a:schemeClr val="tx2">
                     <a:lumMod val="50000"/>
@@ -6099,7 +6099,7 @@
               <a:t>/ </a:t>
             </a:r>
             <a:r>
-              <a:rPr lang="ko-KR" altLang="en-US" sz="800" dirty="0">
+              <a:rPr lang="ko-KR" altLang="en-US" sz="810" dirty="0">
                 <a:solidFill>
                   <a:schemeClr val="tx2">
                     <a:lumMod val="50000"/>
@@ -6111,7 +6111,7 @@
               <a:t>근거 </a:t>
             </a:r>
             <a:r>
-              <a:rPr lang="en-US" altLang="ko-KR" sz="800" dirty="0">
+              <a:rPr lang="en-US" altLang="ko-KR" sz="810" dirty="0">
                 <a:solidFill>
                   <a:schemeClr val="tx2">
                     <a:lumMod val="50000"/>
@@ -6123,7 +6123,7 @@
               <a:t>/ </a:t>
             </a:r>
             <a:r>
-              <a:rPr lang="ko-KR" altLang="en-US" sz="800" dirty="0">
+              <a:rPr lang="ko-KR" altLang="en-US" sz="810" dirty="0">
                 <a:solidFill>
                   <a:schemeClr val="tx2">
                     <a:lumMod val="50000"/>
@@ -6135,7 +6135,7 @@
               <a:t>요청 </a:t>
             </a:r>
             <a:r>
-              <a:rPr lang="en-US" altLang="ko-KR" sz="800" dirty="0">
+              <a:rPr lang="en-US" altLang="ko-KR" sz="810" dirty="0">
                 <a:solidFill>
                   <a:schemeClr val="tx2">
                     <a:lumMod val="50000"/>
@@ -6154,7 +6154,7 @@
               </a:lnSpc>
             </a:pPr>
             <a:r>
-              <a:rPr lang="en-US" altLang="ko-KR" sz="800" b="1" dirty="0">
+              <a:rPr lang="en-US" altLang="ko-KR" sz="810" b="1" dirty="0">
                 <a:solidFill>
                   <a:schemeClr val="tx2">
                     <a:lumMod val="50000"/>
@@ -6166,7 +6166,7 @@
               <a:t>[C] </a:t>
             </a:r>
             <a:r>
-              <a:rPr lang="ko-KR" altLang="en-US" sz="800" b="1" dirty="0">
+              <a:rPr lang="ko-KR" altLang="en-US" sz="810" b="1" dirty="0">
                 <a:solidFill>
                   <a:schemeClr val="tx2">
                     <a:lumMod val="50000"/>
@@ -6178,7 +6178,7 @@
               <a:t>상황 </a:t>
             </a:r>
             <a:r>
-              <a:rPr lang="en-US" altLang="ko-KR" sz="800" b="1" dirty="0">
+              <a:rPr lang="en-US" altLang="ko-KR" sz="810" b="1" dirty="0">
                 <a:solidFill>
                   <a:schemeClr val="tx2">
                     <a:lumMod val="50000"/>
@@ -6190,7 +6190,7 @@
               <a:t>(PA) : </a:t>
             </a:r>
             <a:r>
-              <a:rPr lang="en-US" altLang="ko-KR" sz="800" dirty="0">
+              <a:rPr lang="en-US" altLang="ko-KR" sz="810" dirty="0">
                 <a:solidFill>
                   <a:schemeClr val="tx2">
                     <a:lumMod val="50000"/>
@@ -6202,7 +6202,7 @@
               <a:t>ID / </a:t>
             </a:r>
             <a:r>
-              <a:rPr lang="ko-KR" altLang="en-US" sz="800" dirty="0">
+              <a:rPr lang="ko-KR" altLang="en-US" sz="810" dirty="0">
                 <a:solidFill>
                   <a:schemeClr val="tx2">
                     <a:lumMod val="50000"/>
@@ -6214,7 +6214,7 @@
               <a:t>상황</a:t>
             </a:r>
             <a:r>
-              <a:rPr lang="en-US" altLang="ko-KR" sz="800" dirty="0">
+              <a:rPr lang="en-US" altLang="ko-KR" sz="810" dirty="0">
                 <a:solidFill>
                   <a:schemeClr val="tx2">
                     <a:lumMod val="50000"/>
@@ -6226,7 +6226,7 @@
               <a:t>(C</a:t>
             </a:r>
             <a:r>
-              <a:rPr lang="ko-KR" altLang="en-US" sz="800" dirty="0">
+              <a:rPr lang="ko-KR" altLang="en-US" sz="810" dirty="0">
                 <a:solidFill>
                   <a:schemeClr val="tx2">
                     <a:lumMod val="50000"/>
@@ -6238,7 +6238,7 @@
               <a:t>코드</a:t>
             </a:r>
             <a:r>
-              <a:rPr lang="en-US" altLang="ko-KR" sz="800" dirty="0">
+              <a:rPr lang="en-US" altLang="ko-KR" sz="810" dirty="0">
                 <a:solidFill>
                   <a:schemeClr val="tx2">
                     <a:lumMod val="50000"/>
@@ -6250,7 +6250,7 @@
               <a:t>) / </a:t>
             </a:r>
             <a:r>
-              <a:rPr lang="ko-KR" altLang="en-US" sz="800" dirty="0">
+              <a:rPr lang="ko-KR" altLang="en-US" sz="810" dirty="0">
                 <a:solidFill>
                   <a:schemeClr val="tx2">
                     <a:lumMod val="50000"/>
@@ -6262,7 +6262,7 @@
               <a:t>다음 </a:t>
             </a:r>
             <a:r>
-              <a:rPr lang="en-US" altLang="ko-KR" sz="800" dirty="0">
+              <a:rPr lang="en-US" altLang="ko-KR" sz="810" dirty="0">
                 <a:solidFill>
                   <a:schemeClr val="tx2">
                     <a:lumMod val="50000"/>
@@ -6281,7 +6281,7 @@
               </a:lnSpc>
             </a:pPr>
             <a:r>
-              <a:rPr lang="en-US" altLang="ko-KR" sz="800" b="1" dirty="0">
+              <a:rPr lang="en-US" altLang="ko-KR" sz="810" b="1" dirty="0">
                 <a:solidFill>
                   <a:schemeClr val="tx2">
                     <a:lumMod val="50000"/>
@@ -6293,7 +6293,7 @@
               <a:t>[D] </a:t>
             </a:r>
             <a:r>
-              <a:rPr lang="ko-KR" altLang="en-US" sz="800" b="1" dirty="0">
+              <a:rPr lang="ko-KR" altLang="en-US" sz="810" b="1" dirty="0">
                 <a:solidFill>
                   <a:schemeClr val="tx2">
                     <a:lumMod val="50000"/>
@@ -6305,7 +6305,7 @@
               <a:t>완료 </a:t>
             </a:r>
             <a:r>
-              <a:rPr lang="en-US" altLang="ko-KR" sz="800" b="1" dirty="0">
+              <a:rPr lang="en-US" altLang="ko-KR" sz="810" b="1" dirty="0">
                 <a:solidFill>
                   <a:schemeClr val="tx2">
                     <a:lumMod val="50000"/>
@@ -6317,7 +6317,7 @@
               <a:t>(PA) : </a:t>
             </a:r>
             <a:r>
-              <a:rPr lang="en-US" altLang="ko-KR" sz="800" dirty="0">
+              <a:rPr lang="en-US" altLang="ko-KR" sz="810" dirty="0">
                 <a:solidFill>
                   <a:schemeClr val="tx2">
                     <a:lumMod val="50000"/>
@@ -6329,7 +6329,7 @@
               <a:t>ID / </a:t>
             </a:r>
             <a:r>
-              <a:rPr lang="ko-KR" altLang="en-US" sz="800" dirty="0">
+              <a:rPr lang="ko-KR" altLang="en-US" sz="810" dirty="0">
                 <a:solidFill>
                   <a:schemeClr val="tx2">
                     <a:lumMod val="50000"/>
@@ -6341,7 +6341,7 @@
               <a:t>조치결과 </a:t>
             </a:r>
             <a:r>
-              <a:rPr lang="en-US" altLang="ko-KR" sz="800" dirty="0">
+              <a:rPr lang="en-US" altLang="ko-KR" sz="810" dirty="0">
                 <a:solidFill>
                   <a:schemeClr val="tx2">
                     <a:lumMod val="50000"/>
@@ -6353,7 +6353,7 @@
               <a:t>/ F/U </a:t>
             </a:r>
             <a:r>
-              <a:rPr lang="ko-KR" altLang="en-US" sz="800" dirty="0">
+              <a:rPr lang="ko-KR" altLang="en-US" sz="810" dirty="0">
                 <a:solidFill>
                   <a:schemeClr val="tx2">
                     <a:lumMod val="50000"/>
@@ -6381,8 +6381,8 @@
         </p:nvSpPr>
         <p:spPr>
           <a:xfrm>
-            <a:off x="265477" y="1408813"/>
-            <a:ext cx="2709863" cy="200055"/>
+            <a:off x="248927" y="1415122"/>
+            <a:ext cx="2743467" cy="202536"/>
           </a:xfrm>
           <a:prstGeom prst="rect">
             <a:avLst/>
@@ -6397,97 +6397,97 @@
           <a:p>
             <a:pPr algn="ctr"/>
             <a:r>
-              <a:rPr lang="ko-KR" altLang="en-US" sz="700" b="1" dirty="0">
+              <a:rPr lang="ko-KR" altLang="en-US" sz="709" b="1" dirty="0">
                 <a:latin typeface="KoPub돋움체 Medium" panose="02020603020101020101" pitchFamily="18" charset="-127"/>
                 <a:ea typeface="KoPub돋움체 Medium" panose="02020603020101020101" pitchFamily="18" charset="-127"/>
               </a:rPr>
               <a:t> </a:t>
             </a:r>
             <a:r>
-              <a:rPr lang="en-US" altLang="ko-KR" sz="700" b="1" dirty="0">
+              <a:rPr lang="en-US" altLang="ko-KR" sz="709" b="1" dirty="0">
                 <a:latin typeface="KoPub돋움체 Medium" panose="02020603020101020101" pitchFamily="18" charset="-127"/>
                 <a:ea typeface="KoPub돋움체 Medium" panose="02020603020101020101" pitchFamily="18" charset="-127"/>
               </a:rPr>
               <a:t>10</a:t>
             </a:r>
             <a:r>
-              <a:rPr lang="ko-KR" altLang="en-US" sz="700" b="1" dirty="0">
+              <a:rPr lang="ko-KR" altLang="en-US" sz="709" b="1" dirty="0">
                 <a:latin typeface="KoPub돋움체 Medium" panose="02020603020101020101" pitchFamily="18" charset="-127"/>
                 <a:ea typeface="KoPub돋움체 Medium" panose="02020603020101020101" pitchFamily="18" charset="-127"/>
               </a:rPr>
               <a:t>분 </a:t>
             </a:r>
             <a:r>
-              <a:rPr lang="en-US" altLang="ko-KR" sz="700" b="1" dirty="0">
+              <a:rPr lang="en-US" altLang="ko-KR" sz="709" b="1" dirty="0">
                 <a:latin typeface="KoPub돋움체 Medium" panose="02020603020101020101" pitchFamily="18" charset="-127"/>
                 <a:ea typeface="KoPub돋움체 Medium" panose="02020603020101020101" pitchFamily="18" charset="-127"/>
               </a:rPr>
               <a:t>: </a:t>
             </a:r>
             <a:r>
-              <a:rPr lang="ko-KR" altLang="en-US" sz="700" b="1" dirty="0">
+              <a:rPr lang="ko-KR" altLang="en-US" sz="709" b="1" dirty="0">
                 <a:latin typeface="KoPub돋움체 Medium" panose="02020603020101020101" pitchFamily="18" charset="-127"/>
                 <a:ea typeface="KoPub돋움체 Medium" panose="02020603020101020101" pitchFamily="18" charset="-127"/>
               </a:rPr>
               <a:t>응급            </a:t>
             </a:r>
             <a:r>
-              <a:rPr lang="en-US" altLang="ko-KR" sz="700" b="1" dirty="0">
+              <a:rPr lang="en-US" altLang="ko-KR" sz="709" b="1" dirty="0">
                 <a:latin typeface="KoPub돋움체 Medium" panose="02020603020101020101" pitchFamily="18" charset="-127"/>
                 <a:ea typeface="KoPub돋움체 Medium" panose="02020603020101020101" pitchFamily="18" charset="-127"/>
               </a:rPr>
               <a:t>4</a:t>
             </a:r>
             <a:r>
-              <a:rPr lang="ko-KR" altLang="en-US" sz="700" b="1" dirty="0">
+              <a:rPr lang="ko-KR" altLang="en-US" sz="709" b="1" dirty="0">
                 <a:latin typeface="KoPub돋움체 Medium" panose="02020603020101020101" pitchFamily="18" charset="-127"/>
                 <a:ea typeface="KoPub돋움체 Medium" panose="02020603020101020101" pitchFamily="18" charset="-127"/>
               </a:rPr>
               <a:t>시간 </a:t>
             </a:r>
             <a:r>
-              <a:rPr lang="en-US" altLang="ko-KR" sz="700" b="1" dirty="0">
+              <a:rPr lang="en-US" altLang="ko-KR" sz="709" b="1" dirty="0">
                 <a:latin typeface="KoPub돋움체 Medium" panose="02020603020101020101" pitchFamily="18" charset="-127"/>
                 <a:ea typeface="KoPub돋움체 Medium" panose="02020603020101020101" pitchFamily="18" charset="-127"/>
               </a:rPr>
               <a:t>: </a:t>
             </a:r>
             <a:r>
-              <a:rPr lang="ko-KR" altLang="en-US" sz="700" b="1" dirty="0">
+              <a:rPr lang="ko-KR" altLang="en-US" sz="709" b="1" dirty="0">
                 <a:latin typeface="KoPub돋움체 Medium" panose="02020603020101020101" pitchFamily="18" charset="-127"/>
                 <a:ea typeface="KoPub돋움체 Medium" panose="02020603020101020101" pitchFamily="18" charset="-127"/>
               </a:rPr>
               <a:t>우선  </a:t>
             </a:r>
             <a:r>
-              <a:rPr lang="en-US" altLang="ko-KR" sz="700" b="1" dirty="0">
+              <a:rPr lang="en-US" altLang="ko-KR" sz="709" b="1" dirty="0">
                 <a:latin typeface="KoPub돋움체 Medium" panose="02020603020101020101" pitchFamily="18" charset="-127"/>
                 <a:ea typeface="KoPub돋움체 Medium" panose="02020603020101020101" pitchFamily="18" charset="-127"/>
               </a:rPr>
               <a:t>       12</a:t>
             </a:r>
             <a:r>
-              <a:rPr lang="ko-KR" altLang="en-US" sz="700" b="1" dirty="0">
+              <a:rPr lang="ko-KR" altLang="en-US" sz="709" b="1" dirty="0">
                 <a:latin typeface="KoPub돋움체 Medium" panose="02020603020101020101" pitchFamily="18" charset="-127"/>
                 <a:ea typeface="KoPub돋움체 Medium" panose="02020603020101020101" pitchFamily="18" charset="-127"/>
               </a:rPr>
               <a:t>시간 </a:t>
             </a:r>
             <a:r>
-              <a:rPr lang="en-US" altLang="ko-KR" sz="700" b="1" dirty="0">
+              <a:rPr lang="en-US" altLang="ko-KR" sz="709" b="1" dirty="0">
                 <a:latin typeface="KoPub돋움체 Medium" panose="02020603020101020101" pitchFamily="18" charset="-127"/>
                 <a:ea typeface="KoPub돋움체 Medium" panose="02020603020101020101" pitchFamily="18" charset="-127"/>
               </a:rPr>
               <a:t>: </a:t>
             </a:r>
             <a:r>
-              <a:rPr lang="ko-KR" altLang="en-US" sz="700" b="1" dirty="0">
+              <a:rPr lang="ko-KR" altLang="en-US" sz="709" b="1" dirty="0">
                 <a:latin typeface="KoPub돋움체 Medium" panose="02020603020101020101" pitchFamily="18" charset="-127"/>
                 <a:ea typeface="KoPub돋움체 Medium" panose="02020603020101020101" pitchFamily="18" charset="-127"/>
               </a:rPr>
               <a:t>루틴</a:t>
             </a:r>
-            <a:endParaRPr lang="en-US" altLang="ko-KR" sz="700" b="1" dirty="0">
+            <a:endParaRPr lang="en-US" altLang="ko-KR" sz="709" b="1" dirty="0">
               <a:latin typeface="KoPub돋움체 Medium" panose="02020603020101020101" pitchFamily="18" charset="-127"/>
               <a:ea typeface="KoPub돋움체 Medium" panose="02020603020101020101" pitchFamily="18" charset="-127"/>
             </a:endParaRPr>
@@ -6508,8 +6508,8 @@
         </p:nvSpPr>
         <p:spPr>
           <a:xfrm>
-            <a:off x="127333" y="366664"/>
-            <a:ext cx="636713" cy="338554"/>
+            <a:off x="109070" y="360049"/>
+            <a:ext cx="644609" cy="342752"/>
           </a:xfrm>
           <a:prstGeom prst="rect">
             <a:avLst/>
@@ -6524,7 +6524,7 @@
           <a:p>
             <a:pPr algn="ctr"/>
             <a:r>
-              <a:rPr lang="ko-KR" altLang="en-US" sz="800" b="1" dirty="0">
+              <a:rPr lang="ko-KR" altLang="en-US" sz="810" b="1" dirty="0">
                 <a:solidFill>
                   <a:srgbClr val="000000"/>
                 </a:solidFill>
@@ -6533,7 +6533,7 @@
               </a:rPr>
               <a:t>실전 소통</a:t>
             </a:r>
-            <a:endParaRPr lang="en-US" altLang="ko-KR" sz="800" b="1" dirty="0">
+            <a:endParaRPr lang="en-US" altLang="ko-KR" sz="810" b="1" dirty="0">
               <a:solidFill>
                 <a:srgbClr val="000000"/>
               </a:solidFill>
@@ -6544,7 +6544,7 @@
           <a:p>
             <a:pPr algn="ctr"/>
             <a:r>
-              <a:rPr lang="en-US" altLang="ko-KR" sz="800" b="1" dirty="0">
+              <a:rPr lang="en-US" altLang="ko-KR" sz="810" b="1" dirty="0">
                 <a:solidFill>
                   <a:srgbClr val="000000"/>
                 </a:solidFill>
@@ -6554,7 +6554,7 @@
               <a:t>&amp; </a:t>
             </a:r>
             <a:r>
-              <a:rPr lang="ko-KR" altLang="en-US" sz="800" b="1" dirty="0">
+              <a:rPr lang="ko-KR" altLang="en-US" sz="810" b="1" dirty="0">
                 <a:solidFill>
                   <a:srgbClr val="000000"/>
                 </a:solidFill>
@@ -6580,8 +6580,8 @@
         </p:nvSpPr>
         <p:spPr>
           <a:xfrm>
-            <a:off x="104891" y="932596"/>
-            <a:ext cx="681597" cy="215444"/>
+            <a:off x="86350" y="932999"/>
+            <a:ext cx="690049" cy="218116"/>
           </a:xfrm>
           <a:prstGeom prst="rect">
             <a:avLst/>
@@ -6596,7 +6596,7 @@
           <a:p>
             <a:pPr algn="ctr"/>
             <a:r>
-              <a:rPr lang="ko-KR" altLang="en-US" sz="800" b="1" dirty="0">
+              <a:rPr lang="ko-KR" altLang="en-US" sz="810" b="1" dirty="0">
                 <a:solidFill>
                   <a:srgbClr val="000000"/>
                 </a:solidFill>
@@ -6606,7 +6606,7 @@
               <a:t> </a:t>
             </a:r>
             <a:r>
-              <a:rPr lang="en-US" altLang="ko-KR" sz="800" b="1" dirty="0">
+              <a:rPr lang="en-US" altLang="ko-KR" sz="810" b="1" dirty="0">
                 <a:solidFill>
                   <a:srgbClr val="000000"/>
                 </a:solidFill>
@@ -6615,7 +6615,7 @@
               </a:rPr>
               <a:t>ACD Loop</a:t>
             </a:r>
-            <a:endParaRPr lang="ko-KR" altLang="en-US" sz="2000" b="1" dirty="0">
+            <a:endParaRPr lang="ko-KR" altLang="en-US" sz="2025" b="1" dirty="0">
               <a:solidFill>
                 <a:srgbClr val="000000"/>
               </a:solidFill>
@@ -6639,8 +6639,8 @@
         </p:nvCxnSpPr>
         <p:spPr>
           <a:xfrm flipH="1">
-            <a:off x="165891" y="1373677"/>
-            <a:ext cx="2909888" cy="0"/>
+            <a:off x="148105" y="1379550"/>
+            <a:ext cx="2945973" cy="0"/>
           </a:xfrm>
           <a:prstGeom prst="line">
             <a:avLst/>
@@ -6682,8 +6682,8 @@
         </p:nvSpPr>
         <p:spPr>
           <a:xfrm>
-            <a:off x="582615" y="1454947"/>
-            <a:ext cx="104775" cy="104775"/>
+            <a:off x="569997" y="1461828"/>
+            <a:ext cx="106074" cy="106074"/>
           </a:xfrm>
           <a:prstGeom prst="ellipse">
             <a:avLst/>
@@ -6712,7 +6712,7 @@
           </a:fontRef>
         </p:style>
         <p:txBody>
-          <a:bodyPr rot="0" spcFirstLastPara="0" vertOverflow="overflow" horzOverflow="overflow" vert="horz" wrap="square" lIns="91440" tIns="45720" rIns="91440" bIns="45720" numCol="1" spcCol="0" rtlCol="0" fromWordArt="0" anchor="ctr" anchorCtr="0" forceAA="0" compatLnSpc="1">
+          <a:bodyPr rot="0" spcFirstLastPara="0" vertOverflow="overflow" horzOverflow="overflow" vert="horz" wrap="square" lIns="92574" tIns="46287" rIns="92574" bIns="46287" numCol="1" spcCol="0" rtlCol="0" fromWordArt="0" anchor="ctr" anchorCtr="0" forceAA="0" compatLnSpc="1">
             <a:prstTxWarp prst="textNoShape">
               <a:avLst/>
             </a:prstTxWarp>
@@ -6721,7 +6721,7 @@
           <a:lstStyle/>
           <a:p>
             <a:pPr algn="ctr"/>
-            <a:endParaRPr lang="ko-KR" altLang="en-US"/>
+            <a:endParaRPr lang="ko-KR" altLang="en-US" sz="1822"/>
           </a:p>
         </p:txBody>
       </p:sp>
@@ -6739,8 +6739,8 @@
         </p:nvSpPr>
         <p:spPr>
           <a:xfrm>
-            <a:off x="1273177" y="1454947"/>
-            <a:ext cx="104775" cy="104775"/>
+            <a:off x="1269122" y="1461828"/>
+            <a:ext cx="106074" cy="106074"/>
           </a:xfrm>
           <a:prstGeom prst="ellipse">
             <a:avLst/>
@@ -6769,7 +6769,7 @@
           </a:fontRef>
         </p:style>
         <p:txBody>
-          <a:bodyPr rot="0" spcFirstLastPara="0" vertOverflow="overflow" horzOverflow="overflow" vert="horz" wrap="square" lIns="91440" tIns="45720" rIns="91440" bIns="45720" numCol="1" spcCol="0" rtlCol="0" fromWordArt="0" anchor="ctr" anchorCtr="0" forceAA="0" compatLnSpc="1">
+          <a:bodyPr rot="0" spcFirstLastPara="0" vertOverflow="overflow" horzOverflow="overflow" vert="horz" wrap="square" lIns="92574" tIns="46287" rIns="92574" bIns="46287" numCol="1" spcCol="0" rtlCol="0" fromWordArt="0" anchor="ctr" anchorCtr="0" forceAA="0" compatLnSpc="1">
             <a:prstTxWarp prst="textNoShape">
               <a:avLst/>
             </a:prstTxWarp>
@@ -6778,7 +6778,7 @@
           <a:lstStyle/>
           <a:p>
             <a:pPr algn="ctr"/>
-            <a:endParaRPr lang="ko-KR" altLang="en-US"/>
+            <a:endParaRPr lang="ko-KR" altLang="en-US" sz="1822"/>
           </a:p>
         </p:txBody>
       </p:sp>
@@ -6796,8 +6796,8 @@
         </p:nvSpPr>
         <p:spPr>
           <a:xfrm>
-            <a:off x="1963740" y="1454947"/>
-            <a:ext cx="104775" cy="104775"/>
+            <a:off x="1968249" y="1461828"/>
+            <a:ext cx="106074" cy="106074"/>
           </a:xfrm>
           <a:prstGeom prst="ellipse">
             <a:avLst/>
@@ -6826,7 +6826,7 @@
           </a:fontRef>
         </p:style>
         <p:txBody>
-          <a:bodyPr rot="0" spcFirstLastPara="0" vertOverflow="overflow" horzOverflow="overflow" vert="horz" wrap="square" lIns="91440" tIns="45720" rIns="91440" bIns="45720" numCol="1" spcCol="0" rtlCol="0" fromWordArt="0" anchor="ctr" anchorCtr="0" forceAA="0" compatLnSpc="1">
+          <a:bodyPr rot="0" spcFirstLastPara="0" vertOverflow="overflow" horzOverflow="overflow" vert="horz" wrap="square" lIns="92574" tIns="46287" rIns="92574" bIns="46287" numCol="1" spcCol="0" rtlCol="0" fromWordArt="0" anchor="ctr" anchorCtr="0" forceAA="0" compatLnSpc="1">
             <a:prstTxWarp prst="textNoShape">
               <a:avLst/>
             </a:prstTxWarp>
@@ -6835,7 +6835,7 @@
           <a:lstStyle/>
           <a:p>
             <a:pPr algn="ctr"/>
-            <a:endParaRPr lang="ko-KR" altLang="en-US"/>
+            <a:endParaRPr lang="ko-KR" altLang="en-US" sz="1822"/>
           </a:p>
         </p:txBody>
       </p:sp>
@@ -6889,8 +6889,8 @@
         </p:nvSpPr>
         <p:spPr>
           <a:xfrm>
-            <a:off x="818197" y="324615"/>
-            <a:ext cx="2291713" cy="382344"/>
+            <a:off x="808500" y="317480"/>
+            <a:ext cx="2320132" cy="387085"/>
           </a:xfrm>
           <a:prstGeom prst="roundRect">
             <a:avLst>
@@ -6927,7 +6927,7 @@
           <a:lstStyle/>
           <a:p>
             <a:pPr algn="ctr"/>
-            <a:endParaRPr lang="ko-KR" altLang="en-US">
+            <a:endParaRPr lang="ko-KR" altLang="en-US" sz="1822">
               <a:latin typeface="KoPub돋움체 Medium" panose="02020603020101020101" pitchFamily="18" charset="-127"/>
               <a:ea typeface="KoPub돋움체 Medium" panose="02020603020101020101" pitchFamily="18" charset="-127"/>
             </a:endParaRPr>
@@ -6948,8 +6948,8 @@
         </p:nvSpPr>
         <p:spPr>
           <a:xfrm>
-            <a:off x="818197" y="745559"/>
-            <a:ext cx="2291713" cy="592988"/>
+            <a:off x="808500" y="743642"/>
+            <a:ext cx="2320132" cy="600342"/>
           </a:xfrm>
           <a:prstGeom prst="roundRect">
             <a:avLst>
@@ -6986,7 +6986,7 @@
           <a:lstStyle/>
           <a:p>
             <a:pPr algn="ctr"/>
-            <a:endParaRPr lang="ko-KR" altLang="en-US">
+            <a:endParaRPr lang="ko-KR" altLang="en-US" sz="1822">
               <a:latin typeface="KoPub돋움체 Medium" panose="02020603020101020101" pitchFamily="18" charset="-127"/>
               <a:ea typeface="KoPub돋움체 Medium" panose="02020603020101020101" pitchFamily="18" charset="-127"/>
             </a:endParaRPr>
@@ -7007,8 +7007,8 @@
         </p:nvSpPr>
         <p:spPr>
           <a:xfrm>
-            <a:off x="84929" y="324615"/>
-            <a:ext cx="721520" cy="382344"/>
+            <a:off x="66140" y="317480"/>
+            <a:ext cx="730467" cy="387085"/>
           </a:xfrm>
           <a:prstGeom prst="roundRect">
             <a:avLst>
@@ -7043,7 +7043,7 @@
           <a:lstStyle/>
           <a:p>
             <a:pPr algn="ctr"/>
-            <a:endParaRPr lang="ko-KR" altLang="en-US">
+            <a:endParaRPr lang="ko-KR" altLang="en-US" sz="1822">
               <a:latin typeface="KoPub돋움체 Medium" panose="02020603020101020101" pitchFamily="18" charset="-127"/>
               <a:ea typeface="KoPub돋움체 Medium" panose="02020603020101020101" pitchFamily="18" charset="-127"/>
             </a:endParaRPr>
@@ -7064,8 +7064,8 @@
         </p:nvSpPr>
         <p:spPr>
           <a:xfrm>
-            <a:off x="41931" y="54250"/>
-            <a:ext cx="1180381" cy="169277"/>
+            <a:off x="22609" y="43762"/>
+            <a:ext cx="1195019" cy="170175"/>
           </a:xfrm>
           <a:prstGeom prst="rect">
             <a:avLst/>
@@ -7080,21 +7080,21 @@
           <a:p>
             <a:pPr algn="ctr"/>
             <a:r>
-              <a:rPr lang="ko-KR" altLang="en-US" sz="500" spc="-11" dirty="0">
+              <a:rPr lang="ko-KR" altLang="en-US" sz="506" spc="-11" dirty="0">
                 <a:latin typeface="KoPub돋움체 Light" panose="02020603020101020101" pitchFamily="18" charset="-127"/>
                 <a:ea typeface="KoPub돋움체 Light" panose="02020603020101020101" pitchFamily="18" charset="-127"/>
               </a:rPr>
               <a:t>순천향대학교 천안병원 </a:t>
             </a:r>
             <a:r>
-              <a:rPr lang="en-US" altLang="ko-KR" sz="500" spc="-11" dirty="0">
+              <a:rPr lang="en-US" altLang="ko-KR" sz="506" spc="-11" dirty="0">
                 <a:latin typeface="KoPub돋움체 Light" panose="02020603020101020101" pitchFamily="18" charset="-127"/>
                 <a:ea typeface="KoPub돋움체 Light" panose="02020603020101020101" pitchFamily="18" charset="-127"/>
               </a:rPr>
               <a:t>| </a:t>
             </a:r>
             <a:r>
-              <a:rPr lang="ko-KR" altLang="en-US" sz="500" spc="-11" dirty="0">
+              <a:rPr lang="ko-KR" altLang="en-US" sz="506" spc="-11" dirty="0">
                 <a:latin typeface="KoPub돋움체 Light" panose="02020603020101020101" pitchFamily="18" charset="-127"/>
                 <a:ea typeface="KoPub돋움체 Light" panose="02020603020101020101" pitchFamily="18" charset="-127"/>
               </a:rPr>
@@ -7117,8 +7117,8 @@
         </p:nvSpPr>
         <p:spPr>
           <a:xfrm>
-            <a:off x="735575" y="415757"/>
-            <a:ext cx="2627431" cy="215444"/>
+            <a:off x="724855" y="409750"/>
+            <a:ext cx="2660013" cy="218116"/>
           </a:xfrm>
           <a:prstGeom prst="rect">
             <a:avLst/>
@@ -7132,7 +7132,7 @@
           <a:lstStyle/>
           <a:p>
             <a:r>
-              <a:rPr lang="en-US" altLang="ko-KR" sz="800" b="1" dirty="0">
+              <a:rPr lang="en-US" altLang="ko-KR" sz="810" b="1" dirty="0">
                 <a:solidFill>
                   <a:schemeClr val="tx2">
                     <a:lumMod val="50000"/>
@@ -7144,7 +7144,7 @@
               <a:t>Case ID : </a:t>
             </a:r>
             <a:r>
-              <a:rPr lang="ko-KR" altLang="en-US" sz="800" b="1" dirty="0">
+              <a:rPr lang="ko-KR" altLang="en-US" sz="810" b="1" dirty="0">
                 <a:solidFill>
                   <a:schemeClr val="tx2">
                     <a:lumMod val="50000"/>
@@ -7156,7 +7156,7 @@
               <a:t>병실</a:t>
             </a:r>
             <a:r>
-              <a:rPr lang="en-US" altLang="ko-KR" sz="800" b="1" dirty="0">
+              <a:rPr lang="en-US" altLang="ko-KR" sz="810" b="1" dirty="0">
                 <a:solidFill>
                   <a:schemeClr val="tx2">
                     <a:lumMod val="50000"/>
@@ -7168,7 +7168,7 @@
               <a:t>-</a:t>
             </a:r>
             <a:r>
-              <a:rPr lang="ko-KR" altLang="en-US" sz="800" b="1" dirty="0">
+              <a:rPr lang="ko-KR" altLang="en-US" sz="810" b="1" dirty="0">
                 <a:solidFill>
                   <a:schemeClr val="tx2">
                     <a:lumMod val="50000"/>
@@ -7180,7 +7180,7 @@
               <a:t>등록</a:t>
             </a:r>
             <a:r>
-              <a:rPr lang="en-US" altLang="ko-KR" sz="800" b="1" dirty="0">
+              <a:rPr lang="en-US" altLang="ko-KR" sz="810" b="1" dirty="0">
                 <a:solidFill>
                   <a:schemeClr val="tx2">
                     <a:lumMod val="50000"/>
@@ -7192,7 +7192,7 @@
               <a:t>-</a:t>
             </a:r>
             <a:r>
-              <a:rPr lang="ko-KR" altLang="en-US" sz="800" b="1" dirty="0">
+              <a:rPr lang="ko-KR" altLang="en-US" sz="810" b="1" dirty="0">
                 <a:solidFill>
                   <a:schemeClr val="tx2">
                     <a:lumMod val="50000"/>
@@ -7204,7 +7204,7 @@
               <a:t>성함</a:t>
             </a:r>
             <a:r>
-              <a:rPr lang="en-US" altLang="ko-KR" sz="800" b="1" dirty="0">
+              <a:rPr lang="en-US" altLang="ko-KR" sz="810" b="1" dirty="0">
                 <a:solidFill>
                   <a:schemeClr val="tx2">
                     <a:lumMod val="50000"/>
@@ -7216,7 +7216,7 @@
               <a:t>-</a:t>
             </a:r>
             <a:r>
-              <a:rPr lang="ko-KR" altLang="en-US" sz="800" b="1" dirty="0">
+              <a:rPr lang="ko-KR" altLang="en-US" sz="810" b="1" dirty="0">
                 <a:solidFill>
                   <a:schemeClr val="tx2">
                     <a:lumMod val="50000"/>
@@ -7228,7 +7228,7 @@
               <a:t>교수</a:t>
             </a:r>
             <a:r>
-              <a:rPr lang="en-US" altLang="ko-KR" sz="800" b="1" dirty="0">
+              <a:rPr lang="en-US" altLang="ko-KR" sz="810" b="1" dirty="0">
                 <a:solidFill>
                   <a:schemeClr val="tx2">
                     <a:lumMod val="50000"/>
@@ -7240,7 +7240,7 @@
               <a:t>-</a:t>
             </a:r>
             <a:r>
-              <a:rPr lang="ko-KR" altLang="en-US" sz="800" b="1" dirty="0">
+              <a:rPr lang="ko-KR" altLang="en-US" sz="810" b="1" dirty="0">
                 <a:solidFill>
                   <a:schemeClr val="tx2">
                     <a:lumMod val="50000"/>
@@ -7252,7 +7252,7 @@
               <a:t>월일</a:t>
             </a:r>
             <a:r>
-              <a:rPr lang="en-US" altLang="ko-KR" sz="800" b="1" dirty="0">
+              <a:rPr lang="en-US" altLang="ko-KR" sz="810" b="1" dirty="0">
                 <a:solidFill>
                   <a:schemeClr val="tx2">
                     <a:lumMod val="50000"/>
@@ -7264,7 +7264,7 @@
               <a:t>-</a:t>
             </a:r>
             <a:r>
-              <a:rPr lang="ko-KR" altLang="en-US" sz="800" b="1" dirty="0">
+              <a:rPr lang="ko-KR" altLang="en-US" sz="810" b="1" dirty="0">
                 <a:solidFill>
                   <a:schemeClr val="tx2">
                     <a:lumMod val="50000"/>
@@ -7275,7 +7275,7 @@
               </a:rPr>
               <a:t>시간</a:t>
             </a:r>
-            <a:endParaRPr lang="en-US" altLang="ko-KR" sz="800" dirty="0">
+            <a:endParaRPr lang="en-US" altLang="ko-KR" sz="810" dirty="0">
               <a:solidFill>
                 <a:schemeClr val="tx2">
                   <a:lumMod val="50000"/>
@@ -7301,8 +7301,8 @@
         </p:nvSpPr>
         <p:spPr>
           <a:xfrm>
-            <a:off x="84929" y="745557"/>
-            <a:ext cx="721520" cy="592987"/>
+            <a:off x="66140" y="743642"/>
+            <a:ext cx="730467" cy="600341"/>
           </a:xfrm>
           <a:prstGeom prst="roundRect">
             <a:avLst>
@@ -7337,7 +7337,7 @@
           <a:lstStyle/>
           <a:p>
             <a:pPr algn="ctr"/>
-            <a:endParaRPr lang="ko-KR" altLang="en-US">
+            <a:endParaRPr lang="ko-KR" altLang="en-US" sz="1822">
               <a:latin typeface="KoPub돋움체 Medium" panose="02020603020101020101" pitchFamily="18" charset="-127"/>
               <a:ea typeface="KoPub돋움체 Medium" panose="02020603020101020101" pitchFamily="18" charset="-127"/>
             </a:endParaRPr>
@@ -7358,8 +7358,8 @@
         </p:nvSpPr>
         <p:spPr>
           <a:xfrm>
-            <a:off x="807175" y="718078"/>
-            <a:ext cx="2321879" cy="628121"/>
+            <a:off x="797341" y="715821"/>
+            <a:ext cx="2350672" cy="642727"/>
           </a:xfrm>
           <a:prstGeom prst="rect">
             <a:avLst/>
@@ -7378,7 +7378,7 @@
               </a:lnSpc>
             </a:pPr>
             <a:r>
-              <a:rPr lang="en-US" altLang="ko-KR" sz="800" b="1" dirty="0">
+              <a:rPr lang="en-US" altLang="ko-KR" sz="810" b="1" dirty="0">
                 <a:solidFill>
                   <a:schemeClr val="tx2">
                     <a:lumMod val="50000"/>
@@ -7390,7 +7390,7 @@
               <a:t>[A] </a:t>
             </a:r>
             <a:r>
-              <a:rPr lang="ko-KR" altLang="en-US" sz="800" b="1" dirty="0">
+              <a:rPr lang="ko-KR" altLang="en-US" sz="810" b="1" dirty="0">
                 <a:solidFill>
                   <a:schemeClr val="tx2">
                     <a:lumMod val="50000"/>
@@ -7402,7 +7402,7 @@
               <a:t>보고 </a:t>
             </a:r>
             <a:r>
-              <a:rPr lang="en-US" altLang="ko-KR" sz="800" b="1" dirty="0">
+              <a:rPr lang="en-US" altLang="ko-KR" sz="810" b="1" dirty="0">
                 <a:solidFill>
                   <a:schemeClr val="tx2">
                     <a:lumMod val="50000"/>
@@ -7414,7 +7414,7 @@
               <a:t>(</a:t>
             </a:r>
             <a:r>
-              <a:rPr lang="ko-KR" altLang="en-US" sz="800" b="1" dirty="0">
+              <a:rPr lang="ko-KR" altLang="en-US" sz="810" b="1" dirty="0">
                 <a:solidFill>
                   <a:schemeClr val="tx2">
                     <a:lumMod val="50000"/>
@@ -7426,7 +7426,7 @@
               <a:t>병동</a:t>
             </a:r>
             <a:r>
-              <a:rPr lang="en-US" altLang="ko-KR" sz="800" b="1" dirty="0">
+              <a:rPr lang="en-US" altLang="ko-KR" sz="810" b="1" dirty="0">
                 <a:solidFill>
                   <a:schemeClr val="tx2">
                     <a:lumMod val="50000"/>
@@ -7438,7 +7438,7 @@
               <a:t>) : </a:t>
             </a:r>
             <a:r>
-              <a:rPr lang="en-US" altLang="ko-KR" sz="800" dirty="0">
+              <a:rPr lang="en-US" altLang="ko-KR" sz="810" dirty="0">
                 <a:solidFill>
                   <a:schemeClr val="tx2">
                     <a:lumMod val="50000"/>
@@ -7450,7 +7450,7 @@
               <a:t>ID / </a:t>
             </a:r>
             <a:r>
-              <a:rPr lang="ko-KR" altLang="en-US" sz="800" dirty="0">
+              <a:rPr lang="ko-KR" altLang="en-US" sz="810" dirty="0">
                 <a:solidFill>
                   <a:schemeClr val="tx2">
                     <a:lumMod val="50000"/>
@@ -7462,7 +7462,7 @@
               <a:t>지금 </a:t>
             </a:r>
             <a:r>
-              <a:rPr lang="en-US" altLang="ko-KR" sz="800" dirty="0">
+              <a:rPr lang="en-US" altLang="ko-KR" sz="810" dirty="0">
                 <a:solidFill>
                   <a:schemeClr val="tx2">
                     <a:lumMod val="50000"/>
@@ -7474,7 +7474,7 @@
               <a:t>/ </a:t>
             </a:r>
             <a:r>
-              <a:rPr lang="ko-KR" altLang="en-US" sz="800" dirty="0">
+              <a:rPr lang="ko-KR" altLang="en-US" sz="810" dirty="0">
                 <a:solidFill>
                   <a:schemeClr val="tx2">
                     <a:lumMod val="50000"/>
@@ -7486,7 +7486,7 @@
               <a:t>근거 </a:t>
             </a:r>
             <a:r>
-              <a:rPr lang="en-US" altLang="ko-KR" sz="800" dirty="0">
+              <a:rPr lang="en-US" altLang="ko-KR" sz="810" dirty="0">
                 <a:solidFill>
                   <a:schemeClr val="tx2">
                     <a:lumMod val="50000"/>
@@ -7498,7 +7498,7 @@
               <a:t>/ </a:t>
             </a:r>
             <a:r>
-              <a:rPr lang="ko-KR" altLang="en-US" sz="800" dirty="0">
+              <a:rPr lang="ko-KR" altLang="en-US" sz="810" dirty="0">
                 <a:solidFill>
                   <a:schemeClr val="tx2">
                     <a:lumMod val="50000"/>
@@ -7510,7 +7510,7 @@
               <a:t>요청 </a:t>
             </a:r>
             <a:r>
-              <a:rPr lang="en-US" altLang="ko-KR" sz="800" dirty="0">
+              <a:rPr lang="en-US" altLang="ko-KR" sz="810" dirty="0">
                 <a:solidFill>
                   <a:schemeClr val="tx2">
                     <a:lumMod val="50000"/>
@@ -7529,7 +7529,7 @@
               </a:lnSpc>
             </a:pPr>
             <a:r>
-              <a:rPr lang="en-US" altLang="ko-KR" sz="800" b="1" dirty="0">
+              <a:rPr lang="en-US" altLang="ko-KR" sz="810" b="1" dirty="0">
                 <a:solidFill>
                   <a:schemeClr val="tx2">
                     <a:lumMod val="50000"/>
@@ -7541,7 +7541,7 @@
               <a:t>[C] </a:t>
             </a:r>
             <a:r>
-              <a:rPr lang="ko-KR" altLang="en-US" sz="800" b="1" dirty="0">
+              <a:rPr lang="ko-KR" altLang="en-US" sz="810" b="1" dirty="0">
                 <a:solidFill>
                   <a:schemeClr val="tx2">
                     <a:lumMod val="50000"/>
@@ -7553,7 +7553,7 @@
               <a:t>상황 </a:t>
             </a:r>
             <a:r>
-              <a:rPr lang="en-US" altLang="ko-KR" sz="800" b="1" dirty="0">
+              <a:rPr lang="en-US" altLang="ko-KR" sz="810" b="1" dirty="0">
                 <a:solidFill>
                   <a:schemeClr val="tx2">
                     <a:lumMod val="50000"/>
@@ -7565,7 +7565,7 @@
               <a:t>(PA) : </a:t>
             </a:r>
             <a:r>
-              <a:rPr lang="en-US" altLang="ko-KR" sz="800" dirty="0">
+              <a:rPr lang="en-US" altLang="ko-KR" sz="810" dirty="0">
                 <a:solidFill>
                   <a:schemeClr val="tx2">
                     <a:lumMod val="50000"/>
@@ -7577,7 +7577,7 @@
               <a:t>ID / </a:t>
             </a:r>
             <a:r>
-              <a:rPr lang="ko-KR" altLang="en-US" sz="800" dirty="0">
+              <a:rPr lang="ko-KR" altLang="en-US" sz="810" dirty="0">
                 <a:solidFill>
                   <a:schemeClr val="tx2">
                     <a:lumMod val="50000"/>
@@ -7589,7 +7589,7 @@
               <a:t>상황</a:t>
             </a:r>
             <a:r>
-              <a:rPr lang="en-US" altLang="ko-KR" sz="800" dirty="0">
+              <a:rPr lang="en-US" altLang="ko-KR" sz="810" dirty="0">
                 <a:solidFill>
                   <a:schemeClr val="tx2">
                     <a:lumMod val="50000"/>
@@ -7601,7 +7601,7 @@
               <a:t>(C</a:t>
             </a:r>
             <a:r>
-              <a:rPr lang="ko-KR" altLang="en-US" sz="800" dirty="0">
+              <a:rPr lang="ko-KR" altLang="en-US" sz="810" dirty="0">
                 <a:solidFill>
                   <a:schemeClr val="tx2">
                     <a:lumMod val="50000"/>
@@ -7613,7 +7613,7 @@
               <a:t>코드</a:t>
             </a:r>
             <a:r>
-              <a:rPr lang="en-US" altLang="ko-KR" sz="800" dirty="0">
+              <a:rPr lang="en-US" altLang="ko-KR" sz="810" dirty="0">
                 <a:solidFill>
                   <a:schemeClr val="tx2">
                     <a:lumMod val="50000"/>
@@ -7625,7 +7625,7 @@
               <a:t>) / </a:t>
             </a:r>
             <a:r>
-              <a:rPr lang="ko-KR" altLang="en-US" sz="800" dirty="0">
+              <a:rPr lang="ko-KR" altLang="en-US" sz="810" dirty="0">
                 <a:solidFill>
                   <a:schemeClr val="tx2">
                     <a:lumMod val="50000"/>
@@ -7637,7 +7637,7 @@
               <a:t>다음 </a:t>
             </a:r>
             <a:r>
-              <a:rPr lang="en-US" altLang="ko-KR" sz="800" dirty="0">
+              <a:rPr lang="en-US" altLang="ko-KR" sz="810" dirty="0">
                 <a:solidFill>
                   <a:schemeClr val="tx2">
                     <a:lumMod val="50000"/>
@@ -7656,7 +7656,7 @@
               </a:lnSpc>
             </a:pPr>
             <a:r>
-              <a:rPr lang="en-US" altLang="ko-KR" sz="800" b="1" dirty="0">
+              <a:rPr lang="en-US" altLang="ko-KR" sz="810" b="1" dirty="0">
                 <a:solidFill>
                   <a:schemeClr val="tx2">
                     <a:lumMod val="50000"/>
@@ -7668,7 +7668,7 @@
               <a:t>[D] </a:t>
             </a:r>
             <a:r>
-              <a:rPr lang="ko-KR" altLang="en-US" sz="800" b="1" dirty="0">
+              <a:rPr lang="ko-KR" altLang="en-US" sz="810" b="1" dirty="0">
                 <a:solidFill>
                   <a:schemeClr val="tx2">
                     <a:lumMod val="50000"/>
@@ -7680,7 +7680,7 @@
               <a:t>완료 </a:t>
             </a:r>
             <a:r>
-              <a:rPr lang="en-US" altLang="ko-KR" sz="800" b="1" dirty="0">
+              <a:rPr lang="en-US" altLang="ko-KR" sz="810" b="1" dirty="0">
                 <a:solidFill>
                   <a:schemeClr val="tx2">
                     <a:lumMod val="50000"/>
@@ -7692,7 +7692,7 @@
               <a:t>(PA) : </a:t>
             </a:r>
             <a:r>
-              <a:rPr lang="en-US" altLang="ko-KR" sz="800" dirty="0">
+              <a:rPr lang="en-US" altLang="ko-KR" sz="810" dirty="0">
                 <a:solidFill>
                   <a:schemeClr val="tx2">
                     <a:lumMod val="50000"/>
@@ -7704,7 +7704,7 @@
               <a:t>ID / </a:t>
             </a:r>
             <a:r>
-              <a:rPr lang="ko-KR" altLang="en-US" sz="800" dirty="0">
+              <a:rPr lang="ko-KR" altLang="en-US" sz="810" dirty="0">
                 <a:solidFill>
                   <a:schemeClr val="tx2">
                     <a:lumMod val="50000"/>
@@ -7716,7 +7716,7 @@
               <a:t>조치결과 </a:t>
             </a:r>
             <a:r>
-              <a:rPr lang="en-US" altLang="ko-KR" sz="800" dirty="0">
+              <a:rPr lang="en-US" altLang="ko-KR" sz="810" dirty="0">
                 <a:solidFill>
                   <a:schemeClr val="tx2">
                     <a:lumMod val="50000"/>
@@ -7728,7 +7728,7 @@
               <a:t>/ F/U </a:t>
             </a:r>
             <a:r>
-              <a:rPr lang="ko-KR" altLang="en-US" sz="800" dirty="0">
+              <a:rPr lang="ko-KR" altLang="en-US" sz="810" dirty="0">
                 <a:solidFill>
                   <a:schemeClr val="tx2">
                     <a:lumMod val="50000"/>
@@ -7756,8 +7756,8 @@
         </p:nvSpPr>
         <p:spPr>
           <a:xfrm>
-            <a:off x="265477" y="1408813"/>
-            <a:ext cx="2709863" cy="200055"/>
+            <a:off x="248927" y="1415122"/>
+            <a:ext cx="2743467" cy="202536"/>
           </a:xfrm>
           <a:prstGeom prst="rect">
             <a:avLst/>
@@ -7772,97 +7772,97 @@
           <a:p>
             <a:pPr algn="ctr"/>
             <a:r>
-              <a:rPr lang="ko-KR" altLang="en-US" sz="700" b="1" dirty="0">
+              <a:rPr lang="ko-KR" altLang="en-US" sz="709" b="1" dirty="0">
                 <a:latin typeface="KoPub돋움체 Medium" panose="02020603020101020101" pitchFamily="18" charset="-127"/>
                 <a:ea typeface="KoPub돋움체 Medium" panose="02020603020101020101" pitchFamily="18" charset="-127"/>
               </a:rPr>
               <a:t> </a:t>
             </a:r>
             <a:r>
-              <a:rPr lang="en-US" altLang="ko-KR" sz="700" b="1" dirty="0">
+              <a:rPr lang="en-US" altLang="ko-KR" sz="709" b="1" dirty="0">
                 <a:latin typeface="KoPub돋움체 Medium" panose="02020603020101020101" pitchFamily="18" charset="-127"/>
                 <a:ea typeface="KoPub돋움체 Medium" panose="02020603020101020101" pitchFamily="18" charset="-127"/>
               </a:rPr>
               <a:t>10</a:t>
             </a:r>
             <a:r>
-              <a:rPr lang="ko-KR" altLang="en-US" sz="700" b="1" dirty="0">
+              <a:rPr lang="ko-KR" altLang="en-US" sz="709" b="1" dirty="0">
                 <a:latin typeface="KoPub돋움체 Medium" panose="02020603020101020101" pitchFamily="18" charset="-127"/>
                 <a:ea typeface="KoPub돋움체 Medium" panose="02020603020101020101" pitchFamily="18" charset="-127"/>
               </a:rPr>
               <a:t>분 </a:t>
             </a:r>
             <a:r>
-              <a:rPr lang="en-US" altLang="ko-KR" sz="700" b="1" dirty="0">
+              <a:rPr lang="en-US" altLang="ko-KR" sz="709" b="1" dirty="0">
                 <a:latin typeface="KoPub돋움체 Medium" panose="02020603020101020101" pitchFamily="18" charset="-127"/>
                 <a:ea typeface="KoPub돋움체 Medium" panose="02020603020101020101" pitchFamily="18" charset="-127"/>
               </a:rPr>
               <a:t>: </a:t>
             </a:r>
             <a:r>
-              <a:rPr lang="ko-KR" altLang="en-US" sz="700" b="1" dirty="0">
+              <a:rPr lang="ko-KR" altLang="en-US" sz="709" b="1" dirty="0">
                 <a:latin typeface="KoPub돋움체 Medium" panose="02020603020101020101" pitchFamily="18" charset="-127"/>
                 <a:ea typeface="KoPub돋움체 Medium" panose="02020603020101020101" pitchFamily="18" charset="-127"/>
               </a:rPr>
               <a:t>응급            </a:t>
             </a:r>
             <a:r>
-              <a:rPr lang="en-US" altLang="ko-KR" sz="700" b="1" dirty="0">
+              <a:rPr lang="en-US" altLang="ko-KR" sz="709" b="1" dirty="0">
                 <a:latin typeface="KoPub돋움체 Medium" panose="02020603020101020101" pitchFamily="18" charset="-127"/>
                 <a:ea typeface="KoPub돋움체 Medium" panose="02020603020101020101" pitchFamily="18" charset="-127"/>
               </a:rPr>
               <a:t>4</a:t>
             </a:r>
             <a:r>
-              <a:rPr lang="ko-KR" altLang="en-US" sz="700" b="1" dirty="0">
+              <a:rPr lang="ko-KR" altLang="en-US" sz="709" b="1" dirty="0">
                 <a:latin typeface="KoPub돋움체 Medium" panose="02020603020101020101" pitchFamily="18" charset="-127"/>
                 <a:ea typeface="KoPub돋움체 Medium" panose="02020603020101020101" pitchFamily="18" charset="-127"/>
               </a:rPr>
               <a:t>시간 </a:t>
             </a:r>
             <a:r>
-              <a:rPr lang="en-US" altLang="ko-KR" sz="700" b="1" dirty="0">
+              <a:rPr lang="en-US" altLang="ko-KR" sz="709" b="1" dirty="0">
                 <a:latin typeface="KoPub돋움체 Medium" panose="02020603020101020101" pitchFamily="18" charset="-127"/>
                 <a:ea typeface="KoPub돋움체 Medium" panose="02020603020101020101" pitchFamily="18" charset="-127"/>
               </a:rPr>
               <a:t>: </a:t>
             </a:r>
             <a:r>
-              <a:rPr lang="ko-KR" altLang="en-US" sz="700" b="1" dirty="0">
+              <a:rPr lang="ko-KR" altLang="en-US" sz="709" b="1" dirty="0">
                 <a:latin typeface="KoPub돋움체 Medium" panose="02020603020101020101" pitchFamily="18" charset="-127"/>
                 <a:ea typeface="KoPub돋움체 Medium" panose="02020603020101020101" pitchFamily="18" charset="-127"/>
               </a:rPr>
               <a:t>우선  </a:t>
             </a:r>
             <a:r>
-              <a:rPr lang="en-US" altLang="ko-KR" sz="700" b="1" dirty="0">
+              <a:rPr lang="en-US" altLang="ko-KR" sz="709" b="1" dirty="0">
                 <a:latin typeface="KoPub돋움체 Medium" panose="02020603020101020101" pitchFamily="18" charset="-127"/>
                 <a:ea typeface="KoPub돋움체 Medium" panose="02020603020101020101" pitchFamily="18" charset="-127"/>
               </a:rPr>
               <a:t>       12</a:t>
             </a:r>
             <a:r>
-              <a:rPr lang="ko-KR" altLang="en-US" sz="700" b="1" dirty="0">
+              <a:rPr lang="ko-KR" altLang="en-US" sz="709" b="1" dirty="0">
                 <a:latin typeface="KoPub돋움체 Medium" panose="02020603020101020101" pitchFamily="18" charset="-127"/>
                 <a:ea typeface="KoPub돋움체 Medium" panose="02020603020101020101" pitchFamily="18" charset="-127"/>
               </a:rPr>
               <a:t>시간 </a:t>
             </a:r>
             <a:r>
-              <a:rPr lang="en-US" altLang="ko-KR" sz="700" b="1" dirty="0">
+              <a:rPr lang="en-US" altLang="ko-KR" sz="709" b="1" dirty="0">
                 <a:latin typeface="KoPub돋움체 Medium" panose="02020603020101020101" pitchFamily="18" charset="-127"/>
                 <a:ea typeface="KoPub돋움체 Medium" panose="02020603020101020101" pitchFamily="18" charset="-127"/>
               </a:rPr>
               <a:t>: </a:t>
             </a:r>
             <a:r>
-              <a:rPr lang="ko-KR" altLang="en-US" sz="700" b="1" dirty="0">
+              <a:rPr lang="ko-KR" altLang="en-US" sz="709" b="1" dirty="0">
                 <a:latin typeface="KoPub돋움체 Medium" panose="02020603020101020101" pitchFamily="18" charset="-127"/>
                 <a:ea typeface="KoPub돋움체 Medium" panose="02020603020101020101" pitchFamily="18" charset="-127"/>
               </a:rPr>
               <a:t>루틴</a:t>
             </a:r>
-            <a:endParaRPr lang="en-US" altLang="ko-KR" sz="700" b="1" dirty="0">
+            <a:endParaRPr lang="en-US" altLang="ko-KR" sz="709" b="1" dirty="0">
               <a:latin typeface="KoPub돋움체 Medium" panose="02020603020101020101" pitchFamily="18" charset="-127"/>
               <a:ea typeface="KoPub돋움체 Medium" panose="02020603020101020101" pitchFamily="18" charset="-127"/>
             </a:endParaRPr>
@@ -7883,8 +7883,8 @@
         </p:nvSpPr>
         <p:spPr>
           <a:xfrm>
-            <a:off x="127333" y="366664"/>
-            <a:ext cx="636713" cy="338554"/>
+            <a:off x="109070" y="360049"/>
+            <a:ext cx="644609" cy="342752"/>
           </a:xfrm>
           <a:prstGeom prst="rect">
             <a:avLst/>
@@ -7899,7 +7899,7 @@
           <a:p>
             <a:pPr algn="ctr"/>
             <a:r>
-              <a:rPr lang="ko-KR" altLang="en-US" sz="800" b="1" dirty="0">
+              <a:rPr lang="ko-KR" altLang="en-US" sz="810" b="1" dirty="0">
                 <a:solidFill>
                   <a:srgbClr val="000000"/>
                 </a:solidFill>
@@ -7908,7 +7908,7 @@
               </a:rPr>
               <a:t>실전 소통</a:t>
             </a:r>
-            <a:endParaRPr lang="en-US" altLang="ko-KR" sz="800" b="1" dirty="0">
+            <a:endParaRPr lang="en-US" altLang="ko-KR" sz="810" b="1" dirty="0">
               <a:solidFill>
                 <a:srgbClr val="000000"/>
               </a:solidFill>
@@ -7919,7 +7919,7 @@
           <a:p>
             <a:pPr algn="ctr"/>
             <a:r>
-              <a:rPr lang="en-US" altLang="ko-KR" sz="800" b="1" dirty="0">
+              <a:rPr lang="en-US" altLang="ko-KR" sz="810" b="1" dirty="0">
                 <a:solidFill>
                   <a:srgbClr val="000000"/>
                 </a:solidFill>
@@ -7929,7 +7929,7 @@
               <a:t>&amp; </a:t>
             </a:r>
             <a:r>
-              <a:rPr lang="ko-KR" altLang="en-US" sz="800" b="1" dirty="0">
+              <a:rPr lang="ko-KR" altLang="en-US" sz="810" b="1" dirty="0">
                 <a:solidFill>
                   <a:srgbClr val="000000"/>
                 </a:solidFill>
@@ -7955,8 +7955,8 @@
         </p:nvSpPr>
         <p:spPr>
           <a:xfrm>
-            <a:off x="104891" y="932596"/>
-            <a:ext cx="681597" cy="215444"/>
+            <a:off x="86350" y="932999"/>
+            <a:ext cx="690049" cy="218116"/>
           </a:xfrm>
           <a:prstGeom prst="rect">
             <a:avLst/>
@@ -7971,7 +7971,7 @@
           <a:p>
             <a:pPr algn="ctr"/>
             <a:r>
-              <a:rPr lang="ko-KR" altLang="en-US" sz="800" b="1" dirty="0">
+              <a:rPr lang="ko-KR" altLang="en-US" sz="810" b="1" dirty="0">
                 <a:solidFill>
                   <a:srgbClr val="000000"/>
                 </a:solidFill>
@@ -7981,7 +7981,7 @@
               <a:t> </a:t>
             </a:r>
             <a:r>
-              <a:rPr lang="en-US" altLang="ko-KR" sz="800" b="1" dirty="0">
+              <a:rPr lang="en-US" altLang="ko-KR" sz="810" b="1" dirty="0">
                 <a:solidFill>
                   <a:srgbClr val="000000"/>
                 </a:solidFill>
@@ -7990,7 +7990,7 @@
               </a:rPr>
               <a:t>ACD Loop</a:t>
             </a:r>
-            <a:endParaRPr lang="ko-KR" altLang="en-US" sz="2000" b="1" dirty="0">
+            <a:endParaRPr lang="ko-KR" altLang="en-US" sz="2025" b="1" dirty="0">
               <a:solidFill>
                 <a:srgbClr val="000000"/>
               </a:solidFill>
@@ -8014,8 +8014,8 @@
         </p:nvCxnSpPr>
         <p:spPr>
           <a:xfrm flipH="1">
-            <a:off x="165891" y="1373677"/>
-            <a:ext cx="2909888" cy="0"/>
+            <a:off x="148105" y="1379550"/>
+            <a:ext cx="2945973" cy="0"/>
           </a:xfrm>
           <a:prstGeom prst="line">
             <a:avLst/>
@@ -8057,8 +8057,8 @@
         </p:nvSpPr>
         <p:spPr>
           <a:xfrm>
-            <a:off x="582615" y="1454947"/>
-            <a:ext cx="104775" cy="104775"/>
+            <a:off x="569997" y="1461828"/>
+            <a:ext cx="106074" cy="106074"/>
           </a:xfrm>
           <a:prstGeom prst="ellipse">
             <a:avLst/>
@@ -8087,7 +8087,7 @@
           </a:fontRef>
         </p:style>
         <p:txBody>
-          <a:bodyPr rot="0" spcFirstLastPara="0" vertOverflow="overflow" horzOverflow="overflow" vert="horz" wrap="square" lIns="91440" tIns="45720" rIns="91440" bIns="45720" numCol="1" spcCol="0" rtlCol="0" fromWordArt="0" anchor="ctr" anchorCtr="0" forceAA="0" compatLnSpc="1">
+          <a:bodyPr rot="0" spcFirstLastPara="0" vertOverflow="overflow" horzOverflow="overflow" vert="horz" wrap="square" lIns="92574" tIns="46287" rIns="92574" bIns="46287" numCol="1" spcCol="0" rtlCol="0" fromWordArt="0" anchor="ctr" anchorCtr="0" forceAA="0" compatLnSpc="1">
             <a:prstTxWarp prst="textNoShape">
               <a:avLst/>
             </a:prstTxWarp>
@@ -8096,7 +8096,7 @@
           <a:lstStyle/>
           <a:p>
             <a:pPr algn="ctr"/>
-            <a:endParaRPr lang="ko-KR" altLang="en-US"/>
+            <a:endParaRPr lang="ko-KR" altLang="en-US" sz="1822"/>
           </a:p>
         </p:txBody>
       </p:sp>
@@ -8114,8 +8114,8 @@
         </p:nvSpPr>
         <p:spPr>
           <a:xfrm>
-            <a:off x="1273177" y="1454947"/>
-            <a:ext cx="104775" cy="104775"/>
+            <a:off x="1269122" y="1461828"/>
+            <a:ext cx="106074" cy="106074"/>
           </a:xfrm>
           <a:prstGeom prst="ellipse">
             <a:avLst/>
@@ -8144,7 +8144,7 @@
           </a:fontRef>
         </p:style>
         <p:txBody>
-          <a:bodyPr rot="0" spcFirstLastPara="0" vertOverflow="overflow" horzOverflow="overflow" vert="horz" wrap="square" lIns="91440" tIns="45720" rIns="91440" bIns="45720" numCol="1" spcCol="0" rtlCol="0" fromWordArt="0" anchor="ctr" anchorCtr="0" forceAA="0" compatLnSpc="1">
+          <a:bodyPr rot="0" spcFirstLastPara="0" vertOverflow="overflow" horzOverflow="overflow" vert="horz" wrap="square" lIns="92574" tIns="46287" rIns="92574" bIns="46287" numCol="1" spcCol="0" rtlCol="0" fromWordArt="0" anchor="ctr" anchorCtr="0" forceAA="0" compatLnSpc="1">
             <a:prstTxWarp prst="textNoShape">
               <a:avLst/>
             </a:prstTxWarp>
@@ -8153,7 +8153,7 @@
           <a:lstStyle/>
           <a:p>
             <a:pPr algn="ctr"/>
-            <a:endParaRPr lang="ko-KR" altLang="en-US"/>
+            <a:endParaRPr lang="ko-KR" altLang="en-US" sz="1822"/>
           </a:p>
         </p:txBody>
       </p:sp>
@@ -8171,8 +8171,8 @@
         </p:nvSpPr>
         <p:spPr>
           <a:xfrm>
-            <a:off x="1963740" y="1454947"/>
-            <a:ext cx="104775" cy="104775"/>
+            <a:off x="1968249" y="1461828"/>
+            <a:ext cx="106074" cy="106074"/>
           </a:xfrm>
           <a:prstGeom prst="ellipse">
             <a:avLst/>
@@ -8201,7 +8201,7 @@
           </a:fontRef>
         </p:style>
         <p:txBody>
-          <a:bodyPr rot="0" spcFirstLastPara="0" vertOverflow="overflow" horzOverflow="overflow" vert="horz" wrap="square" lIns="91440" tIns="45720" rIns="91440" bIns="45720" numCol="1" spcCol="0" rtlCol="0" fromWordArt="0" anchor="ctr" anchorCtr="0" forceAA="0" compatLnSpc="1">
+          <a:bodyPr rot="0" spcFirstLastPara="0" vertOverflow="overflow" horzOverflow="overflow" vert="horz" wrap="square" lIns="92574" tIns="46287" rIns="92574" bIns="46287" numCol="1" spcCol="0" rtlCol="0" fromWordArt="0" anchor="ctr" anchorCtr="0" forceAA="0" compatLnSpc="1">
             <a:prstTxWarp prst="textNoShape">
               <a:avLst/>
             </a:prstTxWarp>
@@ -8210,7 +8210,7 @@
           <a:lstStyle/>
           <a:p>
             <a:pPr algn="ctr"/>
-            <a:endParaRPr lang="ko-KR" altLang="en-US"/>
+            <a:endParaRPr lang="ko-KR" altLang="en-US" sz="1822"/>
           </a:p>
         </p:txBody>
       </p:sp>
@@ -8264,8 +8264,8 @@
         </p:nvSpPr>
         <p:spPr>
           <a:xfrm>
-            <a:off x="818197" y="324615"/>
-            <a:ext cx="2291713" cy="382344"/>
+            <a:off x="808500" y="317480"/>
+            <a:ext cx="2320132" cy="387085"/>
           </a:xfrm>
           <a:prstGeom prst="roundRect">
             <a:avLst>
@@ -8302,7 +8302,7 @@
           <a:lstStyle/>
           <a:p>
             <a:pPr algn="ctr"/>
-            <a:endParaRPr lang="ko-KR" altLang="en-US">
+            <a:endParaRPr lang="ko-KR" altLang="en-US" sz="1822">
               <a:latin typeface="KoPub돋움체 Medium" panose="02020603020101020101" pitchFamily="18" charset="-127"/>
               <a:ea typeface="KoPub돋움체 Medium" panose="02020603020101020101" pitchFamily="18" charset="-127"/>
             </a:endParaRPr>
@@ -8323,8 +8323,8 @@
         </p:nvSpPr>
         <p:spPr>
           <a:xfrm>
-            <a:off x="818197" y="745559"/>
-            <a:ext cx="2291713" cy="592988"/>
+            <a:off x="808500" y="743642"/>
+            <a:ext cx="2320132" cy="600342"/>
           </a:xfrm>
           <a:prstGeom prst="roundRect">
             <a:avLst>
@@ -8361,7 +8361,7 @@
           <a:lstStyle/>
           <a:p>
             <a:pPr algn="ctr"/>
-            <a:endParaRPr lang="ko-KR" altLang="en-US">
+            <a:endParaRPr lang="ko-KR" altLang="en-US" sz="1822">
               <a:latin typeface="KoPub돋움체 Medium" panose="02020603020101020101" pitchFamily="18" charset="-127"/>
               <a:ea typeface="KoPub돋움체 Medium" panose="02020603020101020101" pitchFamily="18" charset="-127"/>
             </a:endParaRPr>
@@ -8382,8 +8382,8 @@
         </p:nvSpPr>
         <p:spPr>
           <a:xfrm>
-            <a:off x="84929" y="324615"/>
-            <a:ext cx="721520" cy="382344"/>
+            <a:off x="66140" y="317480"/>
+            <a:ext cx="730467" cy="387085"/>
           </a:xfrm>
           <a:prstGeom prst="roundRect">
             <a:avLst>
@@ -8418,7 +8418,7 @@
           <a:lstStyle/>
           <a:p>
             <a:pPr algn="ctr"/>
-            <a:endParaRPr lang="ko-KR" altLang="en-US">
+            <a:endParaRPr lang="ko-KR" altLang="en-US" sz="1822">
               <a:latin typeface="KoPub돋움체 Medium" panose="02020603020101020101" pitchFamily="18" charset="-127"/>
               <a:ea typeface="KoPub돋움체 Medium" panose="02020603020101020101" pitchFamily="18" charset="-127"/>
             </a:endParaRPr>
@@ -8439,8 +8439,8 @@
         </p:nvSpPr>
         <p:spPr>
           <a:xfrm>
-            <a:off x="41931" y="54250"/>
-            <a:ext cx="1180381" cy="169277"/>
+            <a:off x="22609" y="43762"/>
+            <a:ext cx="1195019" cy="170175"/>
           </a:xfrm>
           <a:prstGeom prst="rect">
             <a:avLst/>
@@ -8455,21 +8455,21 @@
           <a:p>
             <a:pPr algn="ctr"/>
             <a:r>
-              <a:rPr lang="ko-KR" altLang="en-US" sz="500" spc="-11" dirty="0">
+              <a:rPr lang="ko-KR" altLang="en-US" sz="506" spc="-11" dirty="0">
                 <a:latin typeface="KoPub돋움체 Light" panose="02020603020101020101" pitchFamily="18" charset="-127"/>
                 <a:ea typeface="KoPub돋움체 Light" panose="02020603020101020101" pitchFamily="18" charset="-127"/>
               </a:rPr>
               <a:t>순천향대학교 천안병원 </a:t>
             </a:r>
             <a:r>
-              <a:rPr lang="en-US" altLang="ko-KR" sz="500" spc="-11" dirty="0">
+              <a:rPr lang="en-US" altLang="ko-KR" sz="506" spc="-11" dirty="0">
                 <a:latin typeface="KoPub돋움체 Light" panose="02020603020101020101" pitchFamily="18" charset="-127"/>
                 <a:ea typeface="KoPub돋움체 Light" panose="02020603020101020101" pitchFamily="18" charset="-127"/>
               </a:rPr>
               <a:t>| </a:t>
             </a:r>
             <a:r>
-              <a:rPr lang="ko-KR" altLang="en-US" sz="500" spc="-11" dirty="0">
+              <a:rPr lang="ko-KR" altLang="en-US" sz="506" spc="-11" dirty="0">
                 <a:latin typeface="KoPub돋움체 Light" panose="02020603020101020101" pitchFamily="18" charset="-127"/>
                 <a:ea typeface="KoPub돋움체 Light" panose="02020603020101020101" pitchFamily="18" charset="-127"/>
               </a:rPr>
@@ -8492,8 +8492,8 @@
         </p:nvSpPr>
         <p:spPr>
           <a:xfrm>
-            <a:off x="735575" y="415757"/>
-            <a:ext cx="2627431" cy="215444"/>
+            <a:off x="724855" y="409750"/>
+            <a:ext cx="2660013" cy="218116"/>
           </a:xfrm>
           <a:prstGeom prst="rect">
             <a:avLst/>
@@ -8507,7 +8507,7 @@
           <a:lstStyle/>
           <a:p>
             <a:r>
-              <a:rPr lang="en-US" altLang="ko-KR" sz="800" b="1" dirty="0">
+              <a:rPr lang="en-US" altLang="ko-KR" sz="810" b="1" dirty="0">
                 <a:solidFill>
                   <a:schemeClr val="tx2">
                     <a:lumMod val="50000"/>
@@ -8519,7 +8519,7 @@
               <a:t>Case ID : </a:t>
             </a:r>
             <a:r>
-              <a:rPr lang="ko-KR" altLang="en-US" sz="800" b="1" dirty="0">
+              <a:rPr lang="ko-KR" altLang="en-US" sz="810" b="1" dirty="0">
                 <a:solidFill>
                   <a:schemeClr val="tx2">
                     <a:lumMod val="50000"/>
@@ -8531,7 +8531,7 @@
               <a:t>병실</a:t>
             </a:r>
             <a:r>
-              <a:rPr lang="en-US" altLang="ko-KR" sz="800" b="1" dirty="0">
+              <a:rPr lang="en-US" altLang="ko-KR" sz="810" b="1" dirty="0">
                 <a:solidFill>
                   <a:schemeClr val="tx2">
                     <a:lumMod val="50000"/>
@@ -8543,7 +8543,7 @@
               <a:t>-</a:t>
             </a:r>
             <a:r>
-              <a:rPr lang="ko-KR" altLang="en-US" sz="800" b="1" dirty="0">
+              <a:rPr lang="ko-KR" altLang="en-US" sz="810" b="1" dirty="0">
                 <a:solidFill>
                   <a:schemeClr val="tx2">
                     <a:lumMod val="50000"/>
@@ -8555,7 +8555,7 @@
               <a:t>등록</a:t>
             </a:r>
             <a:r>
-              <a:rPr lang="en-US" altLang="ko-KR" sz="800" b="1" dirty="0">
+              <a:rPr lang="en-US" altLang="ko-KR" sz="810" b="1" dirty="0">
                 <a:solidFill>
                   <a:schemeClr val="tx2">
                     <a:lumMod val="50000"/>
@@ -8567,7 +8567,7 @@
               <a:t>-</a:t>
             </a:r>
             <a:r>
-              <a:rPr lang="ko-KR" altLang="en-US" sz="800" b="1" dirty="0">
+              <a:rPr lang="ko-KR" altLang="en-US" sz="810" b="1" dirty="0">
                 <a:solidFill>
                   <a:schemeClr val="tx2">
                     <a:lumMod val="50000"/>
@@ -8579,7 +8579,7 @@
               <a:t>성함</a:t>
             </a:r>
             <a:r>
-              <a:rPr lang="en-US" altLang="ko-KR" sz="800" b="1" dirty="0">
+              <a:rPr lang="en-US" altLang="ko-KR" sz="810" b="1" dirty="0">
                 <a:solidFill>
                   <a:schemeClr val="tx2">
                     <a:lumMod val="50000"/>
@@ -8591,7 +8591,7 @@
               <a:t>-</a:t>
             </a:r>
             <a:r>
-              <a:rPr lang="ko-KR" altLang="en-US" sz="800" b="1" dirty="0">
+              <a:rPr lang="ko-KR" altLang="en-US" sz="810" b="1" dirty="0">
                 <a:solidFill>
                   <a:schemeClr val="tx2">
                     <a:lumMod val="50000"/>
@@ -8603,7 +8603,7 @@
               <a:t>교수</a:t>
             </a:r>
             <a:r>
-              <a:rPr lang="en-US" altLang="ko-KR" sz="800" b="1" dirty="0">
+              <a:rPr lang="en-US" altLang="ko-KR" sz="810" b="1" dirty="0">
                 <a:solidFill>
                   <a:schemeClr val="tx2">
                     <a:lumMod val="50000"/>
@@ -8615,7 +8615,7 @@
               <a:t>-</a:t>
             </a:r>
             <a:r>
-              <a:rPr lang="ko-KR" altLang="en-US" sz="800" b="1" dirty="0">
+              <a:rPr lang="ko-KR" altLang="en-US" sz="810" b="1" dirty="0">
                 <a:solidFill>
                   <a:schemeClr val="tx2">
                     <a:lumMod val="50000"/>
@@ -8627,7 +8627,7 @@
               <a:t>월일</a:t>
             </a:r>
             <a:r>
-              <a:rPr lang="en-US" altLang="ko-KR" sz="800" b="1" dirty="0">
+              <a:rPr lang="en-US" altLang="ko-KR" sz="810" b="1" dirty="0">
                 <a:solidFill>
                   <a:schemeClr val="tx2">
                     <a:lumMod val="50000"/>
@@ -8639,7 +8639,7 @@
               <a:t>-</a:t>
             </a:r>
             <a:r>
-              <a:rPr lang="ko-KR" altLang="en-US" sz="800" b="1" dirty="0">
+              <a:rPr lang="ko-KR" altLang="en-US" sz="810" b="1" dirty="0">
                 <a:solidFill>
                   <a:schemeClr val="tx2">
                     <a:lumMod val="50000"/>
@@ -8650,7 +8650,7 @@
               </a:rPr>
               <a:t>시간</a:t>
             </a:r>
-            <a:endParaRPr lang="en-US" altLang="ko-KR" sz="800" dirty="0">
+            <a:endParaRPr lang="en-US" altLang="ko-KR" sz="810" dirty="0">
               <a:solidFill>
                 <a:schemeClr val="tx2">
                   <a:lumMod val="50000"/>
@@ -8676,8 +8676,8 @@
         </p:nvSpPr>
         <p:spPr>
           <a:xfrm>
-            <a:off x="84929" y="745557"/>
-            <a:ext cx="721520" cy="592987"/>
+            <a:off x="66140" y="743642"/>
+            <a:ext cx="730467" cy="600341"/>
           </a:xfrm>
           <a:prstGeom prst="roundRect">
             <a:avLst>
@@ -8712,7 +8712,7 @@
           <a:lstStyle/>
           <a:p>
             <a:pPr algn="ctr"/>
-            <a:endParaRPr lang="ko-KR" altLang="en-US">
+            <a:endParaRPr lang="ko-KR" altLang="en-US" sz="1822">
               <a:latin typeface="KoPub돋움체 Medium" panose="02020603020101020101" pitchFamily="18" charset="-127"/>
               <a:ea typeface="KoPub돋움체 Medium" panose="02020603020101020101" pitchFamily="18" charset="-127"/>
             </a:endParaRPr>
@@ -8733,8 +8733,8 @@
         </p:nvSpPr>
         <p:spPr>
           <a:xfrm>
-            <a:off x="807175" y="718078"/>
-            <a:ext cx="2321879" cy="628121"/>
+            <a:off x="797341" y="715821"/>
+            <a:ext cx="2350672" cy="642727"/>
           </a:xfrm>
           <a:prstGeom prst="rect">
             <a:avLst/>
@@ -8753,7 +8753,7 @@
               </a:lnSpc>
             </a:pPr>
             <a:r>
-              <a:rPr lang="en-US" altLang="ko-KR" sz="800" b="1" dirty="0">
+              <a:rPr lang="en-US" altLang="ko-KR" sz="810" b="1" dirty="0">
                 <a:solidFill>
                   <a:schemeClr val="tx2">
                     <a:lumMod val="50000"/>
@@ -8765,7 +8765,7 @@
               <a:t>[A] </a:t>
             </a:r>
             <a:r>
-              <a:rPr lang="ko-KR" altLang="en-US" sz="800" b="1" dirty="0">
+              <a:rPr lang="ko-KR" altLang="en-US" sz="810" b="1" dirty="0">
                 <a:solidFill>
                   <a:schemeClr val="tx2">
                     <a:lumMod val="50000"/>
@@ -8777,7 +8777,7 @@
               <a:t>보고 </a:t>
             </a:r>
             <a:r>
-              <a:rPr lang="en-US" altLang="ko-KR" sz="800" b="1" dirty="0">
+              <a:rPr lang="en-US" altLang="ko-KR" sz="810" b="1" dirty="0">
                 <a:solidFill>
                   <a:schemeClr val="tx2">
                     <a:lumMod val="50000"/>
@@ -8789,7 +8789,7 @@
               <a:t>(</a:t>
             </a:r>
             <a:r>
-              <a:rPr lang="ko-KR" altLang="en-US" sz="800" b="1" dirty="0">
+              <a:rPr lang="ko-KR" altLang="en-US" sz="810" b="1" dirty="0">
                 <a:solidFill>
                   <a:schemeClr val="tx2">
                     <a:lumMod val="50000"/>
@@ -8801,7 +8801,7 @@
               <a:t>병동</a:t>
             </a:r>
             <a:r>
-              <a:rPr lang="en-US" altLang="ko-KR" sz="800" b="1" dirty="0">
+              <a:rPr lang="en-US" altLang="ko-KR" sz="810" b="1" dirty="0">
                 <a:solidFill>
                   <a:schemeClr val="tx2">
                     <a:lumMod val="50000"/>
@@ -8813,7 +8813,7 @@
               <a:t>) : </a:t>
             </a:r>
             <a:r>
-              <a:rPr lang="en-US" altLang="ko-KR" sz="800" dirty="0">
+              <a:rPr lang="en-US" altLang="ko-KR" sz="810" dirty="0">
                 <a:solidFill>
                   <a:schemeClr val="tx2">
                     <a:lumMod val="50000"/>
@@ -8825,7 +8825,7 @@
               <a:t>ID / </a:t>
             </a:r>
             <a:r>
-              <a:rPr lang="ko-KR" altLang="en-US" sz="800" dirty="0">
+              <a:rPr lang="ko-KR" altLang="en-US" sz="810" dirty="0">
                 <a:solidFill>
                   <a:schemeClr val="tx2">
                     <a:lumMod val="50000"/>
@@ -8837,7 +8837,7 @@
               <a:t>지금 </a:t>
             </a:r>
             <a:r>
-              <a:rPr lang="en-US" altLang="ko-KR" sz="800" dirty="0">
+              <a:rPr lang="en-US" altLang="ko-KR" sz="810" dirty="0">
                 <a:solidFill>
                   <a:schemeClr val="tx2">
                     <a:lumMod val="50000"/>
@@ -8849,7 +8849,7 @@
               <a:t>/ </a:t>
             </a:r>
             <a:r>
-              <a:rPr lang="ko-KR" altLang="en-US" sz="800" dirty="0">
+              <a:rPr lang="ko-KR" altLang="en-US" sz="810" dirty="0">
                 <a:solidFill>
                   <a:schemeClr val="tx2">
                     <a:lumMod val="50000"/>
@@ -8861,7 +8861,7 @@
               <a:t>근거 </a:t>
             </a:r>
             <a:r>
-              <a:rPr lang="en-US" altLang="ko-KR" sz="800" dirty="0">
+              <a:rPr lang="en-US" altLang="ko-KR" sz="810" dirty="0">
                 <a:solidFill>
                   <a:schemeClr val="tx2">
                     <a:lumMod val="50000"/>
@@ -8873,7 +8873,7 @@
               <a:t>/ </a:t>
             </a:r>
             <a:r>
-              <a:rPr lang="ko-KR" altLang="en-US" sz="800" dirty="0">
+              <a:rPr lang="ko-KR" altLang="en-US" sz="810" dirty="0">
                 <a:solidFill>
                   <a:schemeClr val="tx2">
                     <a:lumMod val="50000"/>
@@ -8885,7 +8885,7 @@
               <a:t>요청 </a:t>
             </a:r>
             <a:r>
-              <a:rPr lang="en-US" altLang="ko-KR" sz="800" dirty="0">
+              <a:rPr lang="en-US" altLang="ko-KR" sz="810" dirty="0">
                 <a:solidFill>
                   <a:schemeClr val="tx2">
                     <a:lumMod val="50000"/>
@@ -8904,7 +8904,7 @@
               </a:lnSpc>
             </a:pPr>
             <a:r>
-              <a:rPr lang="en-US" altLang="ko-KR" sz="800" b="1" dirty="0">
+              <a:rPr lang="en-US" altLang="ko-KR" sz="810" b="1" dirty="0">
                 <a:solidFill>
                   <a:schemeClr val="tx2">
                     <a:lumMod val="50000"/>
@@ -8916,7 +8916,7 @@
               <a:t>[C] </a:t>
             </a:r>
             <a:r>
-              <a:rPr lang="ko-KR" altLang="en-US" sz="800" b="1" dirty="0">
+              <a:rPr lang="ko-KR" altLang="en-US" sz="810" b="1" dirty="0">
                 <a:solidFill>
                   <a:schemeClr val="tx2">
                     <a:lumMod val="50000"/>
@@ -8928,7 +8928,7 @@
               <a:t>상황 </a:t>
             </a:r>
             <a:r>
-              <a:rPr lang="en-US" altLang="ko-KR" sz="800" b="1" dirty="0">
+              <a:rPr lang="en-US" altLang="ko-KR" sz="810" b="1" dirty="0">
                 <a:solidFill>
                   <a:schemeClr val="tx2">
                     <a:lumMod val="50000"/>
@@ -8940,7 +8940,7 @@
               <a:t>(PA) : </a:t>
             </a:r>
             <a:r>
-              <a:rPr lang="en-US" altLang="ko-KR" sz="800" dirty="0">
+              <a:rPr lang="en-US" altLang="ko-KR" sz="810" dirty="0">
                 <a:solidFill>
                   <a:schemeClr val="tx2">
                     <a:lumMod val="50000"/>
@@ -8952,7 +8952,7 @@
               <a:t>ID / </a:t>
             </a:r>
             <a:r>
-              <a:rPr lang="ko-KR" altLang="en-US" sz="800" dirty="0">
+              <a:rPr lang="ko-KR" altLang="en-US" sz="810" dirty="0">
                 <a:solidFill>
                   <a:schemeClr val="tx2">
                     <a:lumMod val="50000"/>
@@ -8964,7 +8964,7 @@
               <a:t>상황</a:t>
             </a:r>
             <a:r>
-              <a:rPr lang="en-US" altLang="ko-KR" sz="800" dirty="0">
+              <a:rPr lang="en-US" altLang="ko-KR" sz="810" dirty="0">
                 <a:solidFill>
                   <a:schemeClr val="tx2">
                     <a:lumMod val="50000"/>
@@ -8976,7 +8976,7 @@
               <a:t>(C</a:t>
             </a:r>
             <a:r>
-              <a:rPr lang="ko-KR" altLang="en-US" sz="800" dirty="0">
+              <a:rPr lang="ko-KR" altLang="en-US" sz="810" dirty="0">
                 <a:solidFill>
                   <a:schemeClr val="tx2">
                     <a:lumMod val="50000"/>
@@ -8988,7 +8988,7 @@
               <a:t>코드</a:t>
             </a:r>
             <a:r>
-              <a:rPr lang="en-US" altLang="ko-KR" sz="800" dirty="0">
+              <a:rPr lang="en-US" altLang="ko-KR" sz="810" dirty="0">
                 <a:solidFill>
                   <a:schemeClr val="tx2">
                     <a:lumMod val="50000"/>
@@ -9000,7 +9000,7 @@
               <a:t>) / </a:t>
             </a:r>
             <a:r>
-              <a:rPr lang="ko-KR" altLang="en-US" sz="800" dirty="0">
+              <a:rPr lang="ko-KR" altLang="en-US" sz="810" dirty="0">
                 <a:solidFill>
                   <a:schemeClr val="tx2">
                     <a:lumMod val="50000"/>
@@ -9012,7 +9012,7 @@
               <a:t>다음 </a:t>
             </a:r>
             <a:r>
-              <a:rPr lang="en-US" altLang="ko-KR" sz="800" dirty="0">
+              <a:rPr lang="en-US" altLang="ko-KR" sz="810" dirty="0">
                 <a:solidFill>
                   <a:schemeClr val="tx2">
                     <a:lumMod val="50000"/>
@@ -9031,7 +9031,7 @@
               </a:lnSpc>
             </a:pPr>
             <a:r>
-              <a:rPr lang="en-US" altLang="ko-KR" sz="800" b="1" dirty="0">
+              <a:rPr lang="en-US" altLang="ko-KR" sz="810" b="1" dirty="0">
                 <a:solidFill>
                   <a:schemeClr val="tx2">
                     <a:lumMod val="50000"/>
@@ -9043,7 +9043,7 @@
               <a:t>[D] </a:t>
             </a:r>
             <a:r>
-              <a:rPr lang="ko-KR" altLang="en-US" sz="800" b="1" dirty="0">
+              <a:rPr lang="ko-KR" altLang="en-US" sz="810" b="1" dirty="0">
                 <a:solidFill>
                   <a:schemeClr val="tx2">
                     <a:lumMod val="50000"/>
@@ -9055,7 +9055,7 @@
               <a:t>완료 </a:t>
             </a:r>
             <a:r>
-              <a:rPr lang="en-US" altLang="ko-KR" sz="800" b="1" dirty="0">
+              <a:rPr lang="en-US" altLang="ko-KR" sz="810" b="1" dirty="0">
                 <a:solidFill>
                   <a:schemeClr val="tx2">
                     <a:lumMod val="50000"/>
@@ -9067,7 +9067,7 @@
               <a:t>(PA) : </a:t>
             </a:r>
             <a:r>
-              <a:rPr lang="en-US" altLang="ko-KR" sz="800" dirty="0">
+              <a:rPr lang="en-US" altLang="ko-KR" sz="810" dirty="0">
                 <a:solidFill>
                   <a:schemeClr val="tx2">
                     <a:lumMod val="50000"/>
@@ -9079,7 +9079,7 @@
               <a:t>ID / </a:t>
             </a:r>
             <a:r>
-              <a:rPr lang="ko-KR" altLang="en-US" sz="800" dirty="0">
+              <a:rPr lang="ko-KR" altLang="en-US" sz="810" dirty="0">
                 <a:solidFill>
                   <a:schemeClr val="tx2">
                     <a:lumMod val="50000"/>
@@ -9091,7 +9091,7 @@
               <a:t>조치결과 </a:t>
             </a:r>
             <a:r>
-              <a:rPr lang="en-US" altLang="ko-KR" sz="800" dirty="0">
+              <a:rPr lang="en-US" altLang="ko-KR" sz="810" dirty="0">
                 <a:solidFill>
                   <a:schemeClr val="tx2">
                     <a:lumMod val="50000"/>
@@ -9103,7 +9103,7 @@
               <a:t>/ F/U </a:t>
             </a:r>
             <a:r>
-              <a:rPr lang="ko-KR" altLang="en-US" sz="800" dirty="0">
+              <a:rPr lang="ko-KR" altLang="en-US" sz="810" dirty="0">
                 <a:solidFill>
                   <a:schemeClr val="tx2">
                     <a:lumMod val="50000"/>
@@ -9131,8 +9131,8 @@
         </p:nvSpPr>
         <p:spPr>
           <a:xfrm>
-            <a:off x="265477" y="1408813"/>
-            <a:ext cx="2709863" cy="200055"/>
+            <a:off x="248927" y="1415122"/>
+            <a:ext cx="2743467" cy="202536"/>
           </a:xfrm>
           <a:prstGeom prst="rect">
             <a:avLst/>
@@ -9147,97 +9147,97 @@
           <a:p>
             <a:pPr algn="ctr"/>
             <a:r>
-              <a:rPr lang="ko-KR" altLang="en-US" sz="700" b="1" dirty="0">
+              <a:rPr lang="ko-KR" altLang="en-US" sz="709" b="1" dirty="0">
                 <a:latin typeface="KoPub돋움체 Medium" panose="02020603020101020101" pitchFamily="18" charset="-127"/>
                 <a:ea typeface="KoPub돋움체 Medium" panose="02020603020101020101" pitchFamily="18" charset="-127"/>
               </a:rPr>
               <a:t> </a:t>
             </a:r>
             <a:r>
-              <a:rPr lang="en-US" altLang="ko-KR" sz="700" b="1" dirty="0">
+              <a:rPr lang="en-US" altLang="ko-KR" sz="709" b="1" dirty="0">
                 <a:latin typeface="KoPub돋움체 Medium" panose="02020603020101020101" pitchFamily="18" charset="-127"/>
                 <a:ea typeface="KoPub돋움체 Medium" panose="02020603020101020101" pitchFamily="18" charset="-127"/>
               </a:rPr>
               <a:t>10</a:t>
             </a:r>
             <a:r>
-              <a:rPr lang="ko-KR" altLang="en-US" sz="700" b="1" dirty="0">
+              <a:rPr lang="ko-KR" altLang="en-US" sz="709" b="1" dirty="0">
                 <a:latin typeface="KoPub돋움체 Medium" panose="02020603020101020101" pitchFamily="18" charset="-127"/>
                 <a:ea typeface="KoPub돋움체 Medium" panose="02020603020101020101" pitchFamily="18" charset="-127"/>
               </a:rPr>
               <a:t>분 </a:t>
             </a:r>
             <a:r>
-              <a:rPr lang="en-US" altLang="ko-KR" sz="700" b="1" dirty="0">
+              <a:rPr lang="en-US" altLang="ko-KR" sz="709" b="1" dirty="0">
                 <a:latin typeface="KoPub돋움체 Medium" panose="02020603020101020101" pitchFamily="18" charset="-127"/>
                 <a:ea typeface="KoPub돋움체 Medium" panose="02020603020101020101" pitchFamily="18" charset="-127"/>
               </a:rPr>
               <a:t>: </a:t>
             </a:r>
             <a:r>
-              <a:rPr lang="ko-KR" altLang="en-US" sz="700" b="1" dirty="0">
+              <a:rPr lang="ko-KR" altLang="en-US" sz="709" b="1" dirty="0">
                 <a:latin typeface="KoPub돋움체 Medium" panose="02020603020101020101" pitchFamily="18" charset="-127"/>
                 <a:ea typeface="KoPub돋움체 Medium" panose="02020603020101020101" pitchFamily="18" charset="-127"/>
               </a:rPr>
               <a:t>응급            </a:t>
             </a:r>
             <a:r>
-              <a:rPr lang="en-US" altLang="ko-KR" sz="700" b="1" dirty="0">
+              <a:rPr lang="en-US" altLang="ko-KR" sz="709" b="1" dirty="0">
                 <a:latin typeface="KoPub돋움체 Medium" panose="02020603020101020101" pitchFamily="18" charset="-127"/>
                 <a:ea typeface="KoPub돋움체 Medium" panose="02020603020101020101" pitchFamily="18" charset="-127"/>
               </a:rPr>
               <a:t>4</a:t>
             </a:r>
             <a:r>
-              <a:rPr lang="ko-KR" altLang="en-US" sz="700" b="1" dirty="0">
+              <a:rPr lang="ko-KR" altLang="en-US" sz="709" b="1" dirty="0">
                 <a:latin typeface="KoPub돋움체 Medium" panose="02020603020101020101" pitchFamily="18" charset="-127"/>
                 <a:ea typeface="KoPub돋움체 Medium" panose="02020603020101020101" pitchFamily="18" charset="-127"/>
               </a:rPr>
               <a:t>시간 </a:t>
             </a:r>
             <a:r>
-              <a:rPr lang="en-US" altLang="ko-KR" sz="700" b="1" dirty="0">
+              <a:rPr lang="en-US" altLang="ko-KR" sz="709" b="1" dirty="0">
                 <a:latin typeface="KoPub돋움체 Medium" panose="02020603020101020101" pitchFamily="18" charset="-127"/>
                 <a:ea typeface="KoPub돋움체 Medium" panose="02020603020101020101" pitchFamily="18" charset="-127"/>
               </a:rPr>
               <a:t>: </a:t>
             </a:r>
             <a:r>
-              <a:rPr lang="ko-KR" altLang="en-US" sz="700" b="1" dirty="0">
+              <a:rPr lang="ko-KR" altLang="en-US" sz="709" b="1" dirty="0">
                 <a:latin typeface="KoPub돋움체 Medium" panose="02020603020101020101" pitchFamily="18" charset="-127"/>
                 <a:ea typeface="KoPub돋움체 Medium" panose="02020603020101020101" pitchFamily="18" charset="-127"/>
               </a:rPr>
               <a:t>우선  </a:t>
             </a:r>
             <a:r>
-              <a:rPr lang="en-US" altLang="ko-KR" sz="700" b="1" dirty="0">
+              <a:rPr lang="en-US" altLang="ko-KR" sz="709" b="1" dirty="0">
                 <a:latin typeface="KoPub돋움체 Medium" panose="02020603020101020101" pitchFamily="18" charset="-127"/>
                 <a:ea typeface="KoPub돋움체 Medium" panose="02020603020101020101" pitchFamily="18" charset="-127"/>
               </a:rPr>
               <a:t>       12</a:t>
             </a:r>
             <a:r>
-              <a:rPr lang="ko-KR" altLang="en-US" sz="700" b="1" dirty="0">
+              <a:rPr lang="ko-KR" altLang="en-US" sz="709" b="1" dirty="0">
                 <a:latin typeface="KoPub돋움체 Medium" panose="02020603020101020101" pitchFamily="18" charset="-127"/>
                 <a:ea typeface="KoPub돋움체 Medium" panose="02020603020101020101" pitchFamily="18" charset="-127"/>
               </a:rPr>
               <a:t>시간 </a:t>
             </a:r>
             <a:r>
-              <a:rPr lang="en-US" altLang="ko-KR" sz="700" b="1" dirty="0">
+              <a:rPr lang="en-US" altLang="ko-KR" sz="709" b="1" dirty="0">
                 <a:latin typeface="KoPub돋움체 Medium" panose="02020603020101020101" pitchFamily="18" charset="-127"/>
                 <a:ea typeface="KoPub돋움체 Medium" panose="02020603020101020101" pitchFamily="18" charset="-127"/>
               </a:rPr>
               <a:t>: </a:t>
             </a:r>
             <a:r>
-              <a:rPr lang="ko-KR" altLang="en-US" sz="700" b="1" dirty="0">
+              <a:rPr lang="ko-KR" altLang="en-US" sz="709" b="1" dirty="0">
                 <a:latin typeface="KoPub돋움체 Medium" panose="02020603020101020101" pitchFamily="18" charset="-127"/>
                 <a:ea typeface="KoPub돋움체 Medium" panose="02020603020101020101" pitchFamily="18" charset="-127"/>
               </a:rPr>
               <a:t>루틴</a:t>
             </a:r>
-            <a:endParaRPr lang="en-US" altLang="ko-KR" sz="700" b="1" dirty="0">
+            <a:endParaRPr lang="en-US" altLang="ko-KR" sz="709" b="1" dirty="0">
               <a:latin typeface="KoPub돋움체 Medium" panose="02020603020101020101" pitchFamily="18" charset="-127"/>
               <a:ea typeface="KoPub돋움체 Medium" panose="02020603020101020101" pitchFamily="18" charset="-127"/>
             </a:endParaRPr>
@@ -9258,8 +9258,8 @@
         </p:nvSpPr>
         <p:spPr>
           <a:xfrm>
-            <a:off x="127333" y="366664"/>
-            <a:ext cx="636713" cy="338554"/>
+            <a:off x="109070" y="360049"/>
+            <a:ext cx="644609" cy="342752"/>
           </a:xfrm>
           <a:prstGeom prst="rect">
             <a:avLst/>
@@ -9274,7 +9274,7 @@
           <a:p>
             <a:pPr algn="ctr"/>
             <a:r>
-              <a:rPr lang="ko-KR" altLang="en-US" sz="800" b="1" dirty="0">
+              <a:rPr lang="ko-KR" altLang="en-US" sz="810" b="1" dirty="0">
                 <a:solidFill>
                   <a:srgbClr val="000000"/>
                 </a:solidFill>
@@ -9283,7 +9283,7 @@
               </a:rPr>
               <a:t>실전 소통</a:t>
             </a:r>
-            <a:endParaRPr lang="en-US" altLang="ko-KR" sz="800" b="1" dirty="0">
+            <a:endParaRPr lang="en-US" altLang="ko-KR" sz="810" b="1" dirty="0">
               <a:solidFill>
                 <a:srgbClr val="000000"/>
               </a:solidFill>
@@ -9294,7 +9294,7 @@
           <a:p>
             <a:pPr algn="ctr"/>
             <a:r>
-              <a:rPr lang="en-US" altLang="ko-KR" sz="800" b="1" dirty="0">
+              <a:rPr lang="en-US" altLang="ko-KR" sz="810" b="1" dirty="0">
                 <a:solidFill>
                   <a:srgbClr val="000000"/>
                 </a:solidFill>
@@ -9304,7 +9304,7 @@
               <a:t>&amp; </a:t>
             </a:r>
             <a:r>
-              <a:rPr lang="ko-KR" altLang="en-US" sz="800" b="1" dirty="0">
+              <a:rPr lang="ko-KR" altLang="en-US" sz="810" b="1" dirty="0">
                 <a:solidFill>
                   <a:srgbClr val="000000"/>
                 </a:solidFill>
@@ -9330,8 +9330,8 @@
         </p:nvSpPr>
         <p:spPr>
           <a:xfrm>
-            <a:off x="104891" y="932596"/>
-            <a:ext cx="681597" cy="215444"/>
+            <a:off x="86350" y="932999"/>
+            <a:ext cx="690049" cy="218116"/>
           </a:xfrm>
           <a:prstGeom prst="rect">
             <a:avLst/>
@@ -9346,7 +9346,7 @@
           <a:p>
             <a:pPr algn="ctr"/>
             <a:r>
-              <a:rPr lang="ko-KR" altLang="en-US" sz="800" b="1" dirty="0">
+              <a:rPr lang="ko-KR" altLang="en-US" sz="810" b="1" dirty="0">
                 <a:solidFill>
                   <a:srgbClr val="000000"/>
                 </a:solidFill>
@@ -9356,7 +9356,7 @@
               <a:t> </a:t>
             </a:r>
             <a:r>
-              <a:rPr lang="en-US" altLang="ko-KR" sz="800" b="1" dirty="0">
+              <a:rPr lang="en-US" altLang="ko-KR" sz="810" b="1" dirty="0">
                 <a:solidFill>
                   <a:srgbClr val="000000"/>
                 </a:solidFill>
@@ -9365,7 +9365,7 @@
               </a:rPr>
               <a:t>ACD Loop</a:t>
             </a:r>
-            <a:endParaRPr lang="ko-KR" altLang="en-US" sz="2000" b="1" dirty="0">
+            <a:endParaRPr lang="ko-KR" altLang="en-US" sz="2025" b="1" dirty="0">
               <a:solidFill>
                 <a:srgbClr val="000000"/>
               </a:solidFill>
@@ -9389,8 +9389,8 @@
         </p:nvCxnSpPr>
         <p:spPr>
           <a:xfrm flipH="1">
-            <a:off x="165891" y="1373677"/>
-            <a:ext cx="2909888" cy="0"/>
+            <a:off x="148105" y="1379550"/>
+            <a:ext cx="2945973" cy="0"/>
           </a:xfrm>
           <a:prstGeom prst="line">
             <a:avLst/>
@@ -9432,8 +9432,8 @@
         </p:nvSpPr>
         <p:spPr>
           <a:xfrm>
-            <a:off x="582615" y="1454947"/>
-            <a:ext cx="104775" cy="104775"/>
+            <a:off x="569997" y="1461828"/>
+            <a:ext cx="106074" cy="106074"/>
           </a:xfrm>
           <a:prstGeom prst="ellipse">
             <a:avLst/>
@@ -9462,7 +9462,7 @@
           </a:fontRef>
         </p:style>
         <p:txBody>
-          <a:bodyPr rot="0" spcFirstLastPara="0" vertOverflow="overflow" horzOverflow="overflow" vert="horz" wrap="square" lIns="91440" tIns="45720" rIns="91440" bIns="45720" numCol="1" spcCol="0" rtlCol="0" fromWordArt="0" anchor="ctr" anchorCtr="0" forceAA="0" compatLnSpc="1">
+          <a:bodyPr rot="0" spcFirstLastPara="0" vertOverflow="overflow" horzOverflow="overflow" vert="horz" wrap="square" lIns="92574" tIns="46287" rIns="92574" bIns="46287" numCol="1" spcCol="0" rtlCol="0" fromWordArt="0" anchor="ctr" anchorCtr="0" forceAA="0" compatLnSpc="1">
             <a:prstTxWarp prst="textNoShape">
               <a:avLst/>
             </a:prstTxWarp>
@@ -9471,7 +9471,7 @@
           <a:lstStyle/>
           <a:p>
             <a:pPr algn="ctr"/>
-            <a:endParaRPr lang="ko-KR" altLang="en-US"/>
+            <a:endParaRPr lang="ko-KR" altLang="en-US" sz="1822"/>
           </a:p>
         </p:txBody>
       </p:sp>
@@ -9489,8 +9489,8 @@
         </p:nvSpPr>
         <p:spPr>
           <a:xfrm>
-            <a:off x="1273177" y="1454947"/>
-            <a:ext cx="104775" cy="104775"/>
+            <a:off x="1269122" y="1461828"/>
+            <a:ext cx="106074" cy="106074"/>
           </a:xfrm>
           <a:prstGeom prst="ellipse">
             <a:avLst/>
@@ -9519,7 +9519,7 @@
           </a:fontRef>
         </p:style>
         <p:txBody>
-          <a:bodyPr rot="0" spcFirstLastPara="0" vertOverflow="overflow" horzOverflow="overflow" vert="horz" wrap="square" lIns="91440" tIns="45720" rIns="91440" bIns="45720" numCol="1" spcCol="0" rtlCol="0" fromWordArt="0" anchor="ctr" anchorCtr="0" forceAA="0" compatLnSpc="1">
+          <a:bodyPr rot="0" spcFirstLastPara="0" vertOverflow="overflow" horzOverflow="overflow" vert="horz" wrap="square" lIns="92574" tIns="46287" rIns="92574" bIns="46287" numCol="1" spcCol="0" rtlCol="0" fromWordArt="0" anchor="ctr" anchorCtr="0" forceAA="0" compatLnSpc="1">
             <a:prstTxWarp prst="textNoShape">
               <a:avLst/>
             </a:prstTxWarp>
@@ -9528,7 +9528,7 @@
           <a:lstStyle/>
           <a:p>
             <a:pPr algn="ctr"/>
-            <a:endParaRPr lang="ko-KR" altLang="en-US"/>
+            <a:endParaRPr lang="ko-KR" altLang="en-US" sz="1822"/>
           </a:p>
         </p:txBody>
       </p:sp>
@@ -9546,8 +9546,8 @@
         </p:nvSpPr>
         <p:spPr>
           <a:xfrm>
-            <a:off x="1963740" y="1454947"/>
-            <a:ext cx="104775" cy="104775"/>
+            <a:off x="1968249" y="1461828"/>
+            <a:ext cx="106074" cy="106074"/>
           </a:xfrm>
           <a:prstGeom prst="ellipse">
             <a:avLst/>
@@ -9576,7 +9576,7 @@
           </a:fontRef>
         </p:style>
         <p:txBody>
-          <a:bodyPr rot="0" spcFirstLastPara="0" vertOverflow="overflow" horzOverflow="overflow" vert="horz" wrap="square" lIns="91440" tIns="45720" rIns="91440" bIns="45720" numCol="1" spcCol="0" rtlCol="0" fromWordArt="0" anchor="ctr" anchorCtr="0" forceAA="0" compatLnSpc="1">
+          <a:bodyPr rot="0" spcFirstLastPara="0" vertOverflow="overflow" horzOverflow="overflow" vert="horz" wrap="square" lIns="92574" tIns="46287" rIns="92574" bIns="46287" numCol="1" spcCol="0" rtlCol="0" fromWordArt="0" anchor="ctr" anchorCtr="0" forceAA="0" compatLnSpc="1">
             <a:prstTxWarp prst="textNoShape">
               <a:avLst/>
             </a:prstTxWarp>
@@ -9585,7 +9585,7 @@
           <a:lstStyle/>
           <a:p>
             <a:pPr algn="ctr"/>
-            <a:endParaRPr lang="ko-KR" altLang="en-US"/>
+            <a:endParaRPr lang="ko-KR" altLang="en-US" sz="1822"/>
           </a:p>
         </p:txBody>
       </p:sp>
@@ -9639,8 +9639,8 @@
         </p:nvSpPr>
         <p:spPr>
           <a:xfrm>
-            <a:off x="818197" y="324615"/>
-            <a:ext cx="2291713" cy="382344"/>
+            <a:off x="808500" y="317480"/>
+            <a:ext cx="2320132" cy="387085"/>
           </a:xfrm>
           <a:prstGeom prst="roundRect">
             <a:avLst>
@@ -9677,7 +9677,7 @@
           <a:lstStyle/>
           <a:p>
             <a:pPr algn="ctr"/>
-            <a:endParaRPr lang="ko-KR" altLang="en-US">
+            <a:endParaRPr lang="ko-KR" altLang="en-US" sz="1822">
               <a:latin typeface="KoPub돋움체 Medium" panose="02020603020101020101" pitchFamily="18" charset="-127"/>
               <a:ea typeface="KoPub돋움체 Medium" panose="02020603020101020101" pitchFamily="18" charset="-127"/>
             </a:endParaRPr>
@@ -9698,8 +9698,8 @@
         </p:nvSpPr>
         <p:spPr>
           <a:xfrm>
-            <a:off x="818197" y="745559"/>
-            <a:ext cx="2291713" cy="592988"/>
+            <a:off x="808500" y="743642"/>
+            <a:ext cx="2320132" cy="600342"/>
           </a:xfrm>
           <a:prstGeom prst="roundRect">
             <a:avLst>
@@ -9736,7 +9736,7 @@
           <a:lstStyle/>
           <a:p>
             <a:pPr algn="ctr"/>
-            <a:endParaRPr lang="ko-KR" altLang="en-US">
+            <a:endParaRPr lang="ko-KR" altLang="en-US" sz="1822">
               <a:latin typeface="KoPub돋움체 Medium" panose="02020603020101020101" pitchFamily="18" charset="-127"/>
               <a:ea typeface="KoPub돋움체 Medium" panose="02020603020101020101" pitchFamily="18" charset="-127"/>
             </a:endParaRPr>
@@ -9757,8 +9757,8 @@
         </p:nvSpPr>
         <p:spPr>
           <a:xfrm>
-            <a:off x="84929" y="324615"/>
-            <a:ext cx="721520" cy="382344"/>
+            <a:off x="66140" y="317480"/>
+            <a:ext cx="730467" cy="387085"/>
           </a:xfrm>
           <a:prstGeom prst="roundRect">
             <a:avLst>
@@ -9793,7 +9793,7 @@
           <a:lstStyle/>
           <a:p>
             <a:pPr algn="ctr"/>
-            <a:endParaRPr lang="ko-KR" altLang="en-US">
+            <a:endParaRPr lang="ko-KR" altLang="en-US" sz="1822">
               <a:latin typeface="KoPub돋움체 Medium" panose="02020603020101020101" pitchFamily="18" charset="-127"/>
               <a:ea typeface="KoPub돋움체 Medium" panose="02020603020101020101" pitchFamily="18" charset="-127"/>
             </a:endParaRPr>
@@ -9814,8 +9814,8 @@
         </p:nvSpPr>
         <p:spPr>
           <a:xfrm>
-            <a:off x="41931" y="54250"/>
-            <a:ext cx="1180381" cy="169277"/>
+            <a:off x="22609" y="43762"/>
+            <a:ext cx="1195019" cy="170175"/>
           </a:xfrm>
           <a:prstGeom prst="rect">
             <a:avLst/>
@@ -9830,21 +9830,21 @@
           <a:p>
             <a:pPr algn="ctr"/>
             <a:r>
-              <a:rPr lang="ko-KR" altLang="en-US" sz="500" spc="-11" dirty="0">
+              <a:rPr lang="ko-KR" altLang="en-US" sz="506" spc="-11" dirty="0">
                 <a:latin typeface="KoPub돋움체 Light" panose="02020603020101020101" pitchFamily="18" charset="-127"/>
                 <a:ea typeface="KoPub돋움체 Light" panose="02020603020101020101" pitchFamily="18" charset="-127"/>
               </a:rPr>
               <a:t>순천향대학교 천안병원 </a:t>
             </a:r>
             <a:r>
-              <a:rPr lang="en-US" altLang="ko-KR" sz="500" spc="-11" dirty="0">
+              <a:rPr lang="en-US" altLang="ko-KR" sz="506" spc="-11" dirty="0">
                 <a:latin typeface="KoPub돋움체 Light" panose="02020603020101020101" pitchFamily="18" charset="-127"/>
                 <a:ea typeface="KoPub돋움체 Light" panose="02020603020101020101" pitchFamily="18" charset="-127"/>
               </a:rPr>
               <a:t>| </a:t>
             </a:r>
             <a:r>
-              <a:rPr lang="ko-KR" altLang="en-US" sz="500" spc="-11" dirty="0">
+              <a:rPr lang="ko-KR" altLang="en-US" sz="506" spc="-11" dirty="0">
                 <a:latin typeface="KoPub돋움체 Light" panose="02020603020101020101" pitchFamily="18" charset="-127"/>
                 <a:ea typeface="KoPub돋움체 Light" panose="02020603020101020101" pitchFamily="18" charset="-127"/>
               </a:rPr>
@@ -9867,8 +9867,8 @@
         </p:nvSpPr>
         <p:spPr>
           <a:xfrm>
-            <a:off x="735575" y="415757"/>
-            <a:ext cx="2627431" cy="215444"/>
+            <a:off x="724855" y="409750"/>
+            <a:ext cx="2660013" cy="218116"/>
           </a:xfrm>
           <a:prstGeom prst="rect">
             <a:avLst/>
@@ -9882,7 +9882,7 @@
           <a:lstStyle/>
           <a:p>
             <a:r>
-              <a:rPr lang="en-US" altLang="ko-KR" sz="800" b="1" dirty="0">
+              <a:rPr lang="en-US" altLang="ko-KR" sz="810" b="1" dirty="0">
                 <a:solidFill>
                   <a:schemeClr val="tx2">
                     <a:lumMod val="50000"/>
@@ -9894,7 +9894,7 @@
               <a:t>Case ID : </a:t>
             </a:r>
             <a:r>
-              <a:rPr lang="ko-KR" altLang="en-US" sz="800" b="1" dirty="0">
+              <a:rPr lang="ko-KR" altLang="en-US" sz="810" b="1" dirty="0">
                 <a:solidFill>
                   <a:schemeClr val="tx2">
                     <a:lumMod val="50000"/>
@@ -9906,7 +9906,7 @@
               <a:t>병실</a:t>
             </a:r>
             <a:r>
-              <a:rPr lang="en-US" altLang="ko-KR" sz="800" b="1" dirty="0">
+              <a:rPr lang="en-US" altLang="ko-KR" sz="810" b="1" dirty="0">
                 <a:solidFill>
                   <a:schemeClr val="tx2">
                     <a:lumMod val="50000"/>
@@ -9918,7 +9918,7 @@
               <a:t>-</a:t>
             </a:r>
             <a:r>
-              <a:rPr lang="ko-KR" altLang="en-US" sz="800" b="1" dirty="0">
+              <a:rPr lang="ko-KR" altLang="en-US" sz="810" b="1" dirty="0">
                 <a:solidFill>
                   <a:schemeClr val="tx2">
                     <a:lumMod val="50000"/>
@@ -9930,7 +9930,7 @@
               <a:t>등록</a:t>
             </a:r>
             <a:r>
-              <a:rPr lang="en-US" altLang="ko-KR" sz="800" b="1" dirty="0">
+              <a:rPr lang="en-US" altLang="ko-KR" sz="810" b="1" dirty="0">
                 <a:solidFill>
                   <a:schemeClr val="tx2">
                     <a:lumMod val="50000"/>
@@ -9942,7 +9942,7 @@
               <a:t>-</a:t>
             </a:r>
             <a:r>
-              <a:rPr lang="ko-KR" altLang="en-US" sz="800" b="1" dirty="0">
+              <a:rPr lang="ko-KR" altLang="en-US" sz="810" b="1" dirty="0">
                 <a:solidFill>
                   <a:schemeClr val="tx2">
                     <a:lumMod val="50000"/>
@@ -9954,7 +9954,7 @@
               <a:t>성함</a:t>
             </a:r>
             <a:r>
-              <a:rPr lang="en-US" altLang="ko-KR" sz="800" b="1" dirty="0">
+              <a:rPr lang="en-US" altLang="ko-KR" sz="810" b="1" dirty="0">
                 <a:solidFill>
                   <a:schemeClr val="tx2">
                     <a:lumMod val="50000"/>
@@ -9966,7 +9966,7 @@
               <a:t>-</a:t>
             </a:r>
             <a:r>
-              <a:rPr lang="ko-KR" altLang="en-US" sz="800" b="1" dirty="0">
+              <a:rPr lang="ko-KR" altLang="en-US" sz="810" b="1" dirty="0">
                 <a:solidFill>
                   <a:schemeClr val="tx2">
                     <a:lumMod val="50000"/>
@@ -9978,7 +9978,7 @@
               <a:t>교수</a:t>
             </a:r>
             <a:r>
-              <a:rPr lang="en-US" altLang="ko-KR" sz="800" b="1" dirty="0">
+              <a:rPr lang="en-US" altLang="ko-KR" sz="810" b="1" dirty="0">
                 <a:solidFill>
                   <a:schemeClr val="tx2">
                     <a:lumMod val="50000"/>
@@ -9990,7 +9990,7 @@
               <a:t>-</a:t>
             </a:r>
             <a:r>
-              <a:rPr lang="ko-KR" altLang="en-US" sz="800" b="1" dirty="0">
+              <a:rPr lang="ko-KR" altLang="en-US" sz="810" b="1" dirty="0">
                 <a:solidFill>
                   <a:schemeClr val="tx2">
                     <a:lumMod val="50000"/>
@@ -10002,7 +10002,7 @@
               <a:t>월일</a:t>
             </a:r>
             <a:r>
-              <a:rPr lang="en-US" altLang="ko-KR" sz="800" b="1" dirty="0">
+              <a:rPr lang="en-US" altLang="ko-KR" sz="810" b="1" dirty="0">
                 <a:solidFill>
                   <a:schemeClr val="tx2">
                     <a:lumMod val="50000"/>
@@ -10014,7 +10014,7 @@
               <a:t>-</a:t>
             </a:r>
             <a:r>
-              <a:rPr lang="ko-KR" altLang="en-US" sz="800" b="1" dirty="0">
+              <a:rPr lang="ko-KR" altLang="en-US" sz="810" b="1" dirty="0">
                 <a:solidFill>
                   <a:schemeClr val="tx2">
                     <a:lumMod val="50000"/>
@@ -10025,7 +10025,7 @@
               </a:rPr>
               <a:t>시간</a:t>
             </a:r>
-            <a:endParaRPr lang="en-US" altLang="ko-KR" sz="800" dirty="0">
+            <a:endParaRPr lang="en-US" altLang="ko-KR" sz="810" dirty="0">
               <a:solidFill>
                 <a:schemeClr val="tx2">
                   <a:lumMod val="50000"/>
@@ -10051,8 +10051,8 @@
         </p:nvSpPr>
         <p:spPr>
           <a:xfrm>
-            <a:off x="84929" y="745557"/>
-            <a:ext cx="721520" cy="592987"/>
+            <a:off x="66140" y="743642"/>
+            <a:ext cx="730467" cy="600341"/>
           </a:xfrm>
           <a:prstGeom prst="roundRect">
             <a:avLst>
@@ -10087,7 +10087,7 @@
           <a:lstStyle/>
           <a:p>
             <a:pPr algn="ctr"/>
-            <a:endParaRPr lang="ko-KR" altLang="en-US">
+            <a:endParaRPr lang="ko-KR" altLang="en-US" sz="1822">
               <a:latin typeface="KoPub돋움체 Medium" panose="02020603020101020101" pitchFamily="18" charset="-127"/>
               <a:ea typeface="KoPub돋움체 Medium" panose="02020603020101020101" pitchFamily="18" charset="-127"/>
             </a:endParaRPr>
@@ -10108,8 +10108,8 @@
         </p:nvSpPr>
         <p:spPr>
           <a:xfrm>
-            <a:off x="807175" y="718078"/>
-            <a:ext cx="2321879" cy="628121"/>
+            <a:off x="797341" y="715821"/>
+            <a:ext cx="2350672" cy="642727"/>
           </a:xfrm>
           <a:prstGeom prst="rect">
             <a:avLst/>
@@ -10128,7 +10128,7 @@
               </a:lnSpc>
             </a:pPr>
             <a:r>
-              <a:rPr lang="en-US" altLang="ko-KR" sz="800" b="1" dirty="0">
+              <a:rPr lang="en-US" altLang="ko-KR" sz="810" b="1" dirty="0">
                 <a:solidFill>
                   <a:schemeClr val="tx2">
                     <a:lumMod val="50000"/>
@@ -10140,7 +10140,7 @@
               <a:t>[A] </a:t>
             </a:r>
             <a:r>
-              <a:rPr lang="ko-KR" altLang="en-US" sz="800" b="1" dirty="0">
+              <a:rPr lang="ko-KR" altLang="en-US" sz="810" b="1" dirty="0">
                 <a:solidFill>
                   <a:schemeClr val="tx2">
                     <a:lumMod val="50000"/>
@@ -10152,7 +10152,7 @@
               <a:t>보고 </a:t>
             </a:r>
             <a:r>
-              <a:rPr lang="en-US" altLang="ko-KR" sz="800" b="1" dirty="0">
+              <a:rPr lang="en-US" altLang="ko-KR" sz="810" b="1" dirty="0">
                 <a:solidFill>
                   <a:schemeClr val="tx2">
                     <a:lumMod val="50000"/>
@@ -10164,7 +10164,7 @@
               <a:t>(</a:t>
             </a:r>
             <a:r>
-              <a:rPr lang="ko-KR" altLang="en-US" sz="800" b="1" dirty="0">
+              <a:rPr lang="ko-KR" altLang="en-US" sz="810" b="1" dirty="0">
                 <a:solidFill>
                   <a:schemeClr val="tx2">
                     <a:lumMod val="50000"/>
@@ -10176,7 +10176,7 @@
               <a:t>병동</a:t>
             </a:r>
             <a:r>
-              <a:rPr lang="en-US" altLang="ko-KR" sz="800" b="1" dirty="0">
+              <a:rPr lang="en-US" altLang="ko-KR" sz="810" b="1" dirty="0">
                 <a:solidFill>
                   <a:schemeClr val="tx2">
                     <a:lumMod val="50000"/>
@@ -10188,7 +10188,7 @@
               <a:t>) : </a:t>
             </a:r>
             <a:r>
-              <a:rPr lang="en-US" altLang="ko-KR" sz="800" dirty="0">
+              <a:rPr lang="en-US" altLang="ko-KR" sz="810" dirty="0">
                 <a:solidFill>
                   <a:schemeClr val="tx2">
                     <a:lumMod val="50000"/>
@@ -10200,7 +10200,7 @@
               <a:t>ID / </a:t>
             </a:r>
             <a:r>
-              <a:rPr lang="ko-KR" altLang="en-US" sz="800" dirty="0">
+              <a:rPr lang="ko-KR" altLang="en-US" sz="810" dirty="0">
                 <a:solidFill>
                   <a:schemeClr val="tx2">
                     <a:lumMod val="50000"/>
@@ -10212,7 +10212,7 @@
               <a:t>지금 </a:t>
             </a:r>
             <a:r>
-              <a:rPr lang="en-US" altLang="ko-KR" sz="800" dirty="0">
+              <a:rPr lang="en-US" altLang="ko-KR" sz="810" dirty="0">
                 <a:solidFill>
                   <a:schemeClr val="tx2">
                     <a:lumMod val="50000"/>
@@ -10224,7 +10224,7 @@
               <a:t>/ </a:t>
             </a:r>
             <a:r>
-              <a:rPr lang="ko-KR" altLang="en-US" sz="800" dirty="0">
+              <a:rPr lang="ko-KR" altLang="en-US" sz="810" dirty="0">
                 <a:solidFill>
                   <a:schemeClr val="tx2">
                     <a:lumMod val="50000"/>
@@ -10236,7 +10236,7 @@
               <a:t>근거 </a:t>
             </a:r>
             <a:r>
-              <a:rPr lang="en-US" altLang="ko-KR" sz="800" dirty="0">
+              <a:rPr lang="en-US" altLang="ko-KR" sz="810" dirty="0">
                 <a:solidFill>
                   <a:schemeClr val="tx2">
                     <a:lumMod val="50000"/>
@@ -10248,7 +10248,7 @@
               <a:t>/ </a:t>
             </a:r>
             <a:r>
-              <a:rPr lang="ko-KR" altLang="en-US" sz="800" dirty="0">
+              <a:rPr lang="ko-KR" altLang="en-US" sz="810" dirty="0">
                 <a:solidFill>
                   <a:schemeClr val="tx2">
                     <a:lumMod val="50000"/>
@@ -10260,7 +10260,7 @@
               <a:t>요청 </a:t>
             </a:r>
             <a:r>
-              <a:rPr lang="en-US" altLang="ko-KR" sz="800" dirty="0">
+              <a:rPr lang="en-US" altLang="ko-KR" sz="810" dirty="0">
                 <a:solidFill>
                   <a:schemeClr val="tx2">
                     <a:lumMod val="50000"/>
@@ -10279,7 +10279,7 @@
               </a:lnSpc>
             </a:pPr>
             <a:r>
-              <a:rPr lang="en-US" altLang="ko-KR" sz="800" b="1" dirty="0">
+              <a:rPr lang="en-US" altLang="ko-KR" sz="810" b="1" dirty="0">
                 <a:solidFill>
                   <a:schemeClr val="tx2">
                     <a:lumMod val="50000"/>
@@ -10291,7 +10291,7 @@
               <a:t>[C] </a:t>
             </a:r>
             <a:r>
-              <a:rPr lang="ko-KR" altLang="en-US" sz="800" b="1" dirty="0">
+              <a:rPr lang="ko-KR" altLang="en-US" sz="810" b="1" dirty="0">
                 <a:solidFill>
                   <a:schemeClr val="tx2">
                     <a:lumMod val="50000"/>
@@ -10303,7 +10303,7 @@
               <a:t>상황 </a:t>
             </a:r>
             <a:r>
-              <a:rPr lang="en-US" altLang="ko-KR" sz="800" b="1" dirty="0">
+              <a:rPr lang="en-US" altLang="ko-KR" sz="810" b="1" dirty="0">
                 <a:solidFill>
                   <a:schemeClr val="tx2">
                     <a:lumMod val="50000"/>
@@ -10315,7 +10315,7 @@
               <a:t>(PA) : </a:t>
             </a:r>
             <a:r>
-              <a:rPr lang="en-US" altLang="ko-KR" sz="800" dirty="0">
+              <a:rPr lang="en-US" altLang="ko-KR" sz="810" dirty="0">
                 <a:solidFill>
                   <a:schemeClr val="tx2">
                     <a:lumMod val="50000"/>
@@ -10327,7 +10327,7 @@
               <a:t>ID / </a:t>
             </a:r>
             <a:r>
-              <a:rPr lang="ko-KR" altLang="en-US" sz="800" dirty="0">
+              <a:rPr lang="ko-KR" altLang="en-US" sz="810" dirty="0">
                 <a:solidFill>
                   <a:schemeClr val="tx2">
                     <a:lumMod val="50000"/>
@@ -10339,7 +10339,7 @@
               <a:t>상황</a:t>
             </a:r>
             <a:r>
-              <a:rPr lang="en-US" altLang="ko-KR" sz="800" dirty="0">
+              <a:rPr lang="en-US" altLang="ko-KR" sz="810" dirty="0">
                 <a:solidFill>
                   <a:schemeClr val="tx2">
                     <a:lumMod val="50000"/>
@@ -10351,7 +10351,7 @@
               <a:t>(C</a:t>
             </a:r>
             <a:r>
-              <a:rPr lang="ko-KR" altLang="en-US" sz="800" dirty="0">
+              <a:rPr lang="ko-KR" altLang="en-US" sz="810" dirty="0">
                 <a:solidFill>
                   <a:schemeClr val="tx2">
                     <a:lumMod val="50000"/>
@@ -10363,7 +10363,7 @@
               <a:t>코드</a:t>
             </a:r>
             <a:r>
-              <a:rPr lang="en-US" altLang="ko-KR" sz="800" dirty="0">
+              <a:rPr lang="en-US" altLang="ko-KR" sz="810" dirty="0">
                 <a:solidFill>
                   <a:schemeClr val="tx2">
                     <a:lumMod val="50000"/>
@@ -10375,7 +10375,7 @@
               <a:t>) / </a:t>
             </a:r>
             <a:r>
-              <a:rPr lang="ko-KR" altLang="en-US" sz="800" dirty="0">
+              <a:rPr lang="ko-KR" altLang="en-US" sz="810" dirty="0">
                 <a:solidFill>
                   <a:schemeClr val="tx2">
                     <a:lumMod val="50000"/>
@@ -10387,7 +10387,7 @@
               <a:t>다음 </a:t>
             </a:r>
             <a:r>
-              <a:rPr lang="en-US" altLang="ko-KR" sz="800" dirty="0">
+              <a:rPr lang="en-US" altLang="ko-KR" sz="810" dirty="0">
                 <a:solidFill>
                   <a:schemeClr val="tx2">
                     <a:lumMod val="50000"/>
@@ -10406,7 +10406,7 @@
               </a:lnSpc>
             </a:pPr>
             <a:r>
-              <a:rPr lang="en-US" altLang="ko-KR" sz="800" b="1" dirty="0">
+              <a:rPr lang="en-US" altLang="ko-KR" sz="810" b="1" dirty="0">
                 <a:solidFill>
                   <a:schemeClr val="tx2">
                     <a:lumMod val="50000"/>
@@ -10418,7 +10418,7 @@
               <a:t>[D] </a:t>
             </a:r>
             <a:r>
-              <a:rPr lang="ko-KR" altLang="en-US" sz="800" b="1" dirty="0">
+              <a:rPr lang="ko-KR" altLang="en-US" sz="810" b="1" dirty="0">
                 <a:solidFill>
                   <a:schemeClr val="tx2">
                     <a:lumMod val="50000"/>
@@ -10430,7 +10430,7 @@
               <a:t>완료 </a:t>
             </a:r>
             <a:r>
-              <a:rPr lang="en-US" altLang="ko-KR" sz="800" b="1" dirty="0">
+              <a:rPr lang="en-US" altLang="ko-KR" sz="810" b="1" dirty="0">
                 <a:solidFill>
                   <a:schemeClr val="tx2">
                     <a:lumMod val="50000"/>
@@ -10442,7 +10442,7 @@
               <a:t>(PA) : </a:t>
             </a:r>
             <a:r>
-              <a:rPr lang="en-US" altLang="ko-KR" sz="800" dirty="0">
+              <a:rPr lang="en-US" altLang="ko-KR" sz="810" dirty="0">
                 <a:solidFill>
                   <a:schemeClr val="tx2">
                     <a:lumMod val="50000"/>
@@ -10454,7 +10454,7 @@
               <a:t>ID / </a:t>
             </a:r>
             <a:r>
-              <a:rPr lang="ko-KR" altLang="en-US" sz="800" dirty="0">
+              <a:rPr lang="ko-KR" altLang="en-US" sz="810" dirty="0">
                 <a:solidFill>
                   <a:schemeClr val="tx2">
                     <a:lumMod val="50000"/>
@@ -10466,7 +10466,7 @@
               <a:t>조치결과 </a:t>
             </a:r>
             <a:r>
-              <a:rPr lang="en-US" altLang="ko-KR" sz="800" dirty="0">
+              <a:rPr lang="en-US" altLang="ko-KR" sz="810" dirty="0">
                 <a:solidFill>
                   <a:schemeClr val="tx2">
                     <a:lumMod val="50000"/>
@@ -10478,7 +10478,7 @@
               <a:t>/ F/U </a:t>
             </a:r>
             <a:r>
-              <a:rPr lang="ko-KR" altLang="en-US" sz="800" dirty="0">
+              <a:rPr lang="ko-KR" altLang="en-US" sz="810" dirty="0">
                 <a:solidFill>
                   <a:schemeClr val="tx2">
                     <a:lumMod val="50000"/>
@@ -10506,8 +10506,8 @@
         </p:nvSpPr>
         <p:spPr>
           <a:xfrm>
-            <a:off x="265477" y="1408813"/>
-            <a:ext cx="2709863" cy="200055"/>
+            <a:off x="248927" y="1415122"/>
+            <a:ext cx="2743467" cy="202536"/>
           </a:xfrm>
           <a:prstGeom prst="rect">
             <a:avLst/>
@@ -10522,97 +10522,97 @@
           <a:p>
             <a:pPr algn="ctr"/>
             <a:r>
-              <a:rPr lang="ko-KR" altLang="en-US" sz="700" b="1" dirty="0">
+              <a:rPr lang="ko-KR" altLang="en-US" sz="709" b="1" dirty="0">
                 <a:latin typeface="KoPub돋움체 Medium" panose="02020603020101020101" pitchFamily="18" charset="-127"/>
                 <a:ea typeface="KoPub돋움체 Medium" panose="02020603020101020101" pitchFamily="18" charset="-127"/>
               </a:rPr>
               <a:t> </a:t>
             </a:r>
             <a:r>
-              <a:rPr lang="en-US" altLang="ko-KR" sz="700" b="1" dirty="0">
+              <a:rPr lang="en-US" altLang="ko-KR" sz="709" b="1" dirty="0">
                 <a:latin typeface="KoPub돋움체 Medium" panose="02020603020101020101" pitchFamily="18" charset="-127"/>
                 <a:ea typeface="KoPub돋움체 Medium" panose="02020603020101020101" pitchFamily="18" charset="-127"/>
               </a:rPr>
               <a:t>10</a:t>
             </a:r>
             <a:r>
-              <a:rPr lang="ko-KR" altLang="en-US" sz="700" b="1" dirty="0">
+              <a:rPr lang="ko-KR" altLang="en-US" sz="709" b="1" dirty="0">
                 <a:latin typeface="KoPub돋움체 Medium" panose="02020603020101020101" pitchFamily="18" charset="-127"/>
                 <a:ea typeface="KoPub돋움체 Medium" panose="02020603020101020101" pitchFamily="18" charset="-127"/>
               </a:rPr>
               <a:t>분 </a:t>
             </a:r>
             <a:r>
-              <a:rPr lang="en-US" altLang="ko-KR" sz="700" b="1" dirty="0">
+              <a:rPr lang="en-US" altLang="ko-KR" sz="709" b="1" dirty="0">
                 <a:latin typeface="KoPub돋움체 Medium" panose="02020603020101020101" pitchFamily="18" charset="-127"/>
                 <a:ea typeface="KoPub돋움체 Medium" panose="02020603020101020101" pitchFamily="18" charset="-127"/>
               </a:rPr>
               <a:t>: </a:t>
             </a:r>
             <a:r>
-              <a:rPr lang="ko-KR" altLang="en-US" sz="700" b="1" dirty="0">
+              <a:rPr lang="ko-KR" altLang="en-US" sz="709" b="1" dirty="0">
                 <a:latin typeface="KoPub돋움체 Medium" panose="02020603020101020101" pitchFamily="18" charset="-127"/>
                 <a:ea typeface="KoPub돋움체 Medium" panose="02020603020101020101" pitchFamily="18" charset="-127"/>
               </a:rPr>
               <a:t>응급            </a:t>
             </a:r>
             <a:r>
-              <a:rPr lang="en-US" altLang="ko-KR" sz="700" b="1" dirty="0">
+              <a:rPr lang="en-US" altLang="ko-KR" sz="709" b="1" dirty="0">
                 <a:latin typeface="KoPub돋움체 Medium" panose="02020603020101020101" pitchFamily="18" charset="-127"/>
                 <a:ea typeface="KoPub돋움체 Medium" panose="02020603020101020101" pitchFamily="18" charset="-127"/>
               </a:rPr>
               <a:t>4</a:t>
             </a:r>
             <a:r>
-              <a:rPr lang="ko-KR" altLang="en-US" sz="700" b="1" dirty="0">
+              <a:rPr lang="ko-KR" altLang="en-US" sz="709" b="1" dirty="0">
                 <a:latin typeface="KoPub돋움체 Medium" panose="02020603020101020101" pitchFamily="18" charset="-127"/>
                 <a:ea typeface="KoPub돋움체 Medium" panose="02020603020101020101" pitchFamily="18" charset="-127"/>
               </a:rPr>
               <a:t>시간 </a:t>
             </a:r>
             <a:r>
-              <a:rPr lang="en-US" altLang="ko-KR" sz="700" b="1" dirty="0">
+              <a:rPr lang="en-US" altLang="ko-KR" sz="709" b="1" dirty="0">
                 <a:latin typeface="KoPub돋움체 Medium" panose="02020603020101020101" pitchFamily="18" charset="-127"/>
                 <a:ea typeface="KoPub돋움체 Medium" panose="02020603020101020101" pitchFamily="18" charset="-127"/>
               </a:rPr>
               <a:t>: </a:t>
             </a:r>
             <a:r>
-              <a:rPr lang="ko-KR" altLang="en-US" sz="700" b="1" dirty="0">
+              <a:rPr lang="ko-KR" altLang="en-US" sz="709" b="1" dirty="0">
                 <a:latin typeface="KoPub돋움체 Medium" panose="02020603020101020101" pitchFamily="18" charset="-127"/>
                 <a:ea typeface="KoPub돋움체 Medium" panose="02020603020101020101" pitchFamily="18" charset="-127"/>
               </a:rPr>
               <a:t>우선  </a:t>
             </a:r>
             <a:r>
-              <a:rPr lang="en-US" altLang="ko-KR" sz="700" b="1" dirty="0">
+              <a:rPr lang="en-US" altLang="ko-KR" sz="709" b="1" dirty="0">
                 <a:latin typeface="KoPub돋움체 Medium" panose="02020603020101020101" pitchFamily="18" charset="-127"/>
                 <a:ea typeface="KoPub돋움체 Medium" panose="02020603020101020101" pitchFamily="18" charset="-127"/>
               </a:rPr>
               <a:t>       12</a:t>
             </a:r>
             <a:r>
-              <a:rPr lang="ko-KR" altLang="en-US" sz="700" b="1" dirty="0">
+              <a:rPr lang="ko-KR" altLang="en-US" sz="709" b="1" dirty="0">
                 <a:latin typeface="KoPub돋움체 Medium" panose="02020603020101020101" pitchFamily="18" charset="-127"/>
                 <a:ea typeface="KoPub돋움체 Medium" panose="02020603020101020101" pitchFamily="18" charset="-127"/>
               </a:rPr>
               <a:t>시간 </a:t>
             </a:r>
             <a:r>
-              <a:rPr lang="en-US" altLang="ko-KR" sz="700" b="1" dirty="0">
+              <a:rPr lang="en-US" altLang="ko-KR" sz="709" b="1" dirty="0">
                 <a:latin typeface="KoPub돋움체 Medium" panose="02020603020101020101" pitchFamily="18" charset="-127"/>
                 <a:ea typeface="KoPub돋움체 Medium" panose="02020603020101020101" pitchFamily="18" charset="-127"/>
               </a:rPr>
               <a:t>: </a:t>
             </a:r>
             <a:r>
-              <a:rPr lang="ko-KR" altLang="en-US" sz="700" b="1" dirty="0">
+              <a:rPr lang="ko-KR" altLang="en-US" sz="709" b="1" dirty="0">
                 <a:latin typeface="KoPub돋움체 Medium" panose="02020603020101020101" pitchFamily="18" charset="-127"/>
                 <a:ea typeface="KoPub돋움체 Medium" panose="02020603020101020101" pitchFamily="18" charset="-127"/>
               </a:rPr>
               <a:t>루틴</a:t>
             </a:r>
-            <a:endParaRPr lang="en-US" altLang="ko-KR" sz="700" b="1" dirty="0">
+            <a:endParaRPr lang="en-US" altLang="ko-KR" sz="709" b="1" dirty="0">
               <a:latin typeface="KoPub돋움체 Medium" panose="02020603020101020101" pitchFamily="18" charset="-127"/>
               <a:ea typeface="KoPub돋움체 Medium" panose="02020603020101020101" pitchFamily="18" charset="-127"/>
             </a:endParaRPr>
@@ -10633,8 +10633,8 @@
         </p:nvSpPr>
         <p:spPr>
           <a:xfrm>
-            <a:off x="127333" y="366664"/>
-            <a:ext cx="636713" cy="338554"/>
+            <a:off x="109070" y="360049"/>
+            <a:ext cx="644609" cy="342752"/>
           </a:xfrm>
           <a:prstGeom prst="rect">
             <a:avLst/>
@@ -10649,7 +10649,7 @@
           <a:p>
             <a:pPr algn="ctr"/>
             <a:r>
-              <a:rPr lang="ko-KR" altLang="en-US" sz="800" b="1" dirty="0">
+              <a:rPr lang="ko-KR" altLang="en-US" sz="810" b="1" dirty="0">
                 <a:solidFill>
                   <a:srgbClr val="000000"/>
                 </a:solidFill>
@@ -10658,7 +10658,7 @@
               </a:rPr>
               <a:t>실전 소통</a:t>
             </a:r>
-            <a:endParaRPr lang="en-US" altLang="ko-KR" sz="800" b="1" dirty="0">
+            <a:endParaRPr lang="en-US" altLang="ko-KR" sz="810" b="1" dirty="0">
               <a:solidFill>
                 <a:srgbClr val="000000"/>
               </a:solidFill>
@@ -10669,7 +10669,7 @@
           <a:p>
             <a:pPr algn="ctr"/>
             <a:r>
-              <a:rPr lang="en-US" altLang="ko-KR" sz="800" b="1" dirty="0">
+              <a:rPr lang="en-US" altLang="ko-KR" sz="810" b="1" dirty="0">
                 <a:solidFill>
                   <a:srgbClr val="000000"/>
                 </a:solidFill>
@@ -10679,7 +10679,7 @@
               <a:t>&amp; </a:t>
             </a:r>
             <a:r>
-              <a:rPr lang="ko-KR" altLang="en-US" sz="800" b="1" dirty="0">
+              <a:rPr lang="ko-KR" altLang="en-US" sz="810" b="1" dirty="0">
                 <a:solidFill>
                   <a:srgbClr val="000000"/>
                 </a:solidFill>
@@ -10705,8 +10705,8 @@
         </p:nvSpPr>
         <p:spPr>
           <a:xfrm>
-            <a:off x="104891" y="932596"/>
-            <a:ext cx="681597" cy="215444"/>
+            <a:off x="86350" y="932999"/>
+            <a:ext cx="690049" cy="218116"/>
           </a:xfrm>
           <a:prstGeom prst="rect">
             <a:avLst/>
@@ -10721,7 +10721,7 @@
           <a:p>
             <a:pPr algn="ctr"/>
             <a:r>
-              <a:rPr lang="ko-KR" altLang="en-US" sz="800" b="1" dirty="0">
+              <a:rPr lang="ko-KR" altLang="en-US" sz="810" b="1" dirty="0">
                 <a:solidFill>
                   <a:srgbClr val="000000"/>
                 </a:solidFill>
@@ -10731,7 +10731,7 @@
               <a:t> </a:t>
             </a:r>
             <a:r>
-              <a:rPr lang="en-US" altLang="ko-KR" sz="800" b="1" dirty="0">
+              <a:rPr lang="en-US" altLang="ko-KR" sz="810" b="1" dirty="0">
                 <a:solidFill>
                   <a:srgbClr val="000000"/>
                 </a:solidFill>
@@ -10740,7 +10740,7 @@
               </a:rPr>
               <a:t>ACD Loop</a:t>
             </a:r>
-            <a:endParaRPr lang="ko-KR" altLang="en-US" sz="2000" b="1" dirty="0">
+            <a:endParaRPr lang="ko-KR" altLang="en-US" sz="2025" b="1" dirty="0">
               <a:solidFill>
                 <a:srgbClr val="000000"/>
               </a:solidFill>
@@ -10764,8 +10764,8 @@
         </p:nvCxnSpPr>
         <p:spPr>
           <a:xfrm flipH="1">
-            <a:off x="165891" y="1373677"/>
-            <a:ext cx="2909888" cy="0"/>
+            <a:off x="148105" y="1379550"/>
+            <a:ext cx="2945973" cy="0"/>
           </a:xfrm>
           <a:prstGeom prst="line">
             <a:avLst/>
@@ -10807,8 +10807,8 @@
         </p:nvSpPr>
         <p:spPr>
           <a:xfrm>
-            <a:off x="582615" y="1454947"/>
-            <a:ext cx="104775" cy="104775"/>
+            <a:off x="569997" y="1461828"/>
+            <a:ext cx="106074" cy="106074"/>
           </a:xfrm>
           <a:prstGeom prst="ellipse">
             <a:avLst/>
@@ -10837,7 +10837,7 @@
           </a:fontRef>
         </p:style>
         <p:txBody>
-          <a:bodyPr rot="0" spcFirstLastPara="0" vertOverflow="overflow" horzOverflow="overflow" vert="horz" wrap="square" lIns="91440" tIns="45720" rIns="91440" bIns="45720" numCol="1" spcCol="0" rtlCol="0" fromWordArt="0" anchor="ctr" anchorCtr="0" forceAA="0" compatLnSpc="1">
+          <a:bodyPr rot="0" spcFirstLastPara="0" vertOverflow="overflow" horzOverflow="overflow" vert="horz" wrap="square" lIns="92574" tIns="46287" rIns="92574" bIns="46287" numCol="1" spcCol="0" rtlCol="0" fromWordArt="0" anchor="ctr" anchorCtr="0" forceAA="0" compatLnSpc="1">
             <a:prstTxWarp prst="textNoShape">
               <a:avLst/>
             </a:prstTxWarp>
@@ -10846,7 +10846,7 @@
           <a:lstStyle/>
           <a:p>
             <a:pPr algn="ctr"/>
-            <a:endParaRPr lang="ko-KR" altLang="en-US"/>
+            <a:endParaRPr lang="ko-KR" altLang="en-US" sz="1822"/>
           </a:p>
         </p:txBody>
       </p:sp>
@@ -10864,8 +10864,8 @@
         </p:nvSpPr>
         <p:spPr>
           <a:xfrm>
-            <a:off x="1273177" y="1454947"/>
-            <a:ext cx="104775" cy="104775"/>
+            <a:off x="1269122" y="1461828"/>
+            <a:ext cx="106074" cy="106074"/>
           </a:xfrm>
           <a:prstGeom prst="ellipse">
             <a:avLst/>
@@ -10894,7 +10894,7 @@
           </a:fontRef>
         </p:style>
         <p:txBody>
-          <a:bodyPr rot="0" spcFirstLastPara="0" vertOverflow="overflow" horzOverflow="overflow" vert="horz" wrap="square" lIns="91440" tIns="45720" rIns="91440" bIns="45720" numCol="1" spcCol="0" rtlCol="0" fromWordArt="0" anchor="ctr" anchorCtr="0" forceAA="0" compatLnSpc="1">
+          <a:bodyPr rot="0" spcFirstLastPara="0" vertOverflow="overflow" horzOverflow="overflow" vert="horz" wrap="square" lIns="92574" tIns="46287" rIns="92574" bIns="46287" numCol="1" spcCol="0" rtlCol="0" fromWordArt="0" anchor="ctr" anchorCtr="0" forceAA="0" compatLnSpc="1">
             <a:prstTxWarp prst="textNoShape">
               <a:avLst/>
             </a:prstTxWarp>
@@ -10903,7 +10903,7 @@
           <a:lstStyle/>
           <a:p>
             <a:pPr algn="ctr"/>
-            <a:endParaRPr lang="ko-KR" altLang="en-US"/>
+            <a:endParaRPr lang="ko-KR" altLang="en-US" sz="1822"/>
           </a:p>
         </p:txBody>
       </p:sp>
@@ -10921,8 +10921,8 @@
         </p:nvSpPr>
         <p:spPr>
           <a:xfrm>
-            <a:off x="1963740" y="1454947"/>
-            <a:ext cx="104775" cy="104775"/>
+            <a:off x="1968249" y="1461828"/>
+            <a:ext cx="106074" cy="106074"/>
           </a:xfrm>
           <a:prstGeom prst="ellipse">
             <a:avLst/>
@@ -10951,7 +10951,7 @@
           </a:fontRef>
         </p:style>
         <p:txBody>
-          <a:bodyPr rot="0" spcFirstLastPara="0" vertOverflow="overflow" horzOverflow="overflow" vert="horz" wrap="square" lIns="91440" tIns="45720" rIns="91440" bIns="45720" numCol="1" spcCol="0" rtlCol="0" fromWordArt="0" anchor="ctr" anchorCtr="0" forceAA="0" compatLnSpc="1">
+          <a:bodyPr rot="0" spcFirstLastPara="0" vertOverflow="overflow" horzOverflow="overflow" vert="horz" wrap="square" lIns="92574" tIns="46287" rIns="92574" bIns="46287" numCol="1" spcCol="0" rtlCol="0" fromWordArt="0" anchor="ctr" anchorCtr="0" forceAA="0" compatLnSpc="1">
             <a:prstTxWarp prst="textNoShape">
               <a:avLst/>
             </a:prstTxWarp>
@@ -10960,7 +10960,7 @@
           <a:lstStyle/>
           <a:p>
             <a:pPr algn="ctr"/>
-            <a:endParaRPr lang="ko-KR" altLang="en-US"/>
+            <a:endParaRPr lang="ko-KR" altLang="en-US" sz="1822"/>
           </a:p>
         </p:txBody>
       </p:sp>
@@ -11014,8 +11014,8 @@
         </p:nvSpPr>
         <p:spPr>
           <a:xfrm>
-            <a:off x="818197" y="324615"/>
-            <a:ext cx="2291713" cy="382344"/>
+            <a:off x="808500" y="317480"/>
+            <a:ext cx="2320132" cy="387085"/>
           </a:xfrm>
           <a:prstGeom prst="roundRect">
             <a:avLst>
@@ -11052,7 +11052,7 @@
           <a:lstStyle/>
           <a:p>
             <a:pPr algn="ctr"/>
-            <a:endParaRPr lang="ko-KR" altLang="en-US">
+            <a:endParaRPr lang="ko-KR" altLang="en-US" sz="1822">
               <a:latin typeface="KoPub돋움체 Medium" panose="02020603020101020101" pitchFamily="18" charset="-127"/>
               <a:ea typeface="KoPub돋움체 Medium" panose="02020603020101020101" pitchFamily="18" charset="-127"/>
             </a:endParaRPr>
@@ -11073,8 +11073,8 @@
         </p:nvSpPr>
         <p:spPr>
           <a:xfrm>
-            <a:off x="818197" y="745559"/>
-            <a:ext cx="2291713" cy="592988"/>
+            <a:off x="808500" y="743642"/>
+            <a:ext cx="2320132" cy="600342"/>
           </a:xfrm>
           <a:prstGeom prst="roundRect">
             <a:avLst>
@@ -11111,7 +11111,7 @@
           <a:lstStyle/>
           <a:p>
             <a:pPr algn="ctr"/>
-            <a:endParaRPr lang="ko-KR" altLang="en-US">
+            <a:endParaRPr lang="ko-KR" altLang="en-US" sz="1822">
               <a:latin typeface="KoPub돋움체 Medium" panose="02020603020101020101" pitchFamily="18" charset="-127"/>
               <a:ea typeface="KoPub돋움체 Medium" panose="02020603020101020101" pitchFamily="18" charset="-127"/>
             </a:endParaRPr>
@@ -11132,8 +11132,8 @@
         </p:nvSpPr>
         <p:spPr>
           <a:xfrm>
-            <a:off x="84929" y="324615"/>
-            <a:ext cx="721520" cy="382344"/>
+            <a:off x="66140" y="317480"/>
+            <a:ext cx="730467" cy="387085"/>
           </a:xfrm>
           <a:prstGeom prst="roundRect">
             <a:avLst>
@@ -11168,7 +11168,7 @@
           <a:lstStyle/>
           <a:p>
             <a:pPr algn="ctr"/>
-            <a:endParaRPr lang="ko-KR" altLang="en-US">
+            <a:endParaRPr lang="ko-KR" altLang="en-US" sz="1822">
               <a:latin typeface="KoPub돋움체 Medium" panose="02020603020101020101" pitchFamily="18" charset="-127"/>
               <a:ea typeface="KoPub돋움체 Medium" panose="02020603020101020101" pitchFamily="18" charset="-127"/>
             </a:endParaRPr>
@@ -11189,8 +11189,8 @@
         </p:nvSpPr>
         <p:spPr>
           <a:xfrm>
-            <a:off x="41931" y="54250"/>
-            <a:ext cx="1180381" cy="169277"/>
+            <a:off x="22609" y="43762"/>
+            <a:ext cx="1195019" cy="170175"/>
           </a:xfrm>
           <a:prstGeom prst="rect">
             <a:avLst/>
@@ -11205,21 +11205,21 @@
           <a:p>
             <a:pPr algn="ctr"/>
             <a:r>
-              <a:rPr lang="ko-KR" altLang="en-US" sz="500" spc="-11" dirty="0">
+              <a:rPr lang="ko-KR" altLang="en-US" sz="506" spc="-11" dirty="0">
                 <a:latin typeface="KoPub돋움체 Light" panose="02020603020101020101" pitchFamily="18" charset="-127"/>
                 <a:ea typeface="KoPub돋움체 Light" panose="02020603020101020101" pitchFamily="18" charset="-127"/>
               </a:rPr>
               <a:t>순천향대학교 천안병원 </a:t>
             </a:r>
             <a:r>
-              <a:rPr lang="en-US" altLang="ko-KR" sz="500" spc="-11" dirty="0">
+              <a:rPr lang="en-US" altLang="ko-KR" sz="506" spc="-11" dirty="0">
                 <a:latin typeface="KoPub돋움체 Light" panose="02020603020101020101" pitchFamily="18" charset="-127"/>
                 <a:ea typeface="KoPub돋움체 Light" panose="02020603020101020101" pitchFamily="18" charset="-127"/>
               </a:rPr>
               <a:t>| </a:t>
             </a:r>
             <a:r>
-              <a:rPr lang="ko-KR" altLang="en-US" sz="500" spc="-11" dirty="0">
+              <a:rPr lang="ko-KR" altLang="en-US" sz="506" spc="-11" dirty="0">
                 <a:latin typeface="KoPub돋움체 Light" panose="02020603020101020101" pitchFamily="18" charset="-127"/>
                 <a:ea typeface="KoPub돋움체 Light" panose="02020603020101020101" pitchFamily="18" charset="-127"/>
               </a:rPr>
@@ -11242,8 +11242,8 @@
         </p:nvSpPr>
         <p:spPr>
           <a:xfrm>
-            <a:off x="735575" y="415757"/>
-            <a:ext cx="2627431" cy="215444"/>
+            <a:off x="724855" y="409750"/>
+            <a:ext cx="2660013" cy="218116"/>
           </a:xfrm>
           <a:prstGeom prst="rect">
             <a:avLst/>
@@ -11257,7 +11257,7 @@
           <a:lstStyle/>
           <a:p>
             <a:r>
-              <a:rPr lang="en-US" altLang="ko-KR" sz="800" b="1" dirty="0">
+              <a:rPr lang="en-US" altLang="ko-KR" sz="810" b="1" dirty="0">
                 <a:solidFill>
                   <a:schemeClr val="tx2">
                     <a:lumMod val="50000"/>
@@ -11269,7 +11269,7 @@
               <a:t>Case ID : </a:t>
             </a:r>
             <a:r>
-              <a:rPr lang="ko-KR" altLang="en-US" sz="800" b="1" dirty="0">
+              <a:rPr lang="ko-KR" altLang="en-US" sz="810" b="1" dirty="0">
                 <a:solidFill>
                   <a:schemeClr val="tx2">
                     <a:lumMod val="50000"/>
@@ -11281,7 +11281,7 @@
               <a:t>병실</a:t>
             </a:r>
             <a:r>
-              <a:rPr lang="en-US" altLang="ko-KR" sz="800" b="1" dirty="0">
+              <a:rPr lang="en-US" altLang="ko-KR" sz="810" b="1" dirty="0">
                 <a:solidFill>
                   <a:schemeClr val="tx2">
                     <a:lumMod val="50000"/>
@@ -11293,7 +11293,7 @@
               <a:t>-</a:t>
             </a:r>
             <a:r>
-              <a:rPr lang="ko-KR" altLang="en-US" sz="800" b="1" dirty="0">
+              <a:rPr lang="ko-KR" altLang="en-US" sz="810" b="1" dirty="0">
                 <a:solidFill>
                   <a:schemeClr val="tx2">
                     <a:lumMod val="50000"/>
@@ -11305,7 +11305,7 @@
               <a:t>등록</a:t>
             </a:r>
             <a:r>
-              <a:rPr lang="en-US" altLang="ko-KR" sz="800" b="1" dirty="0">
+              <a:rPr lang="en-US" altLang="ko-KR" sz="810" b="1" dirty="0">
                 <a:solidFill>
                   <a:schemeClr val="tx2">
                     <a:lumMod val="50000"/>
@@ -11317,7 +11317,7 @@
               <a:t>-</a:t>
             </a:r>
             <a:r>
-              <a:rPr lang="ko-KR" altLang="en-US" sz="800" b="1" dirty="0">
+              <a:rPr lang="ko-KR" altLang="en-US" sz="810" b="1" dirty="0">
                 <a:solidFill>
                   <a:schemeClr val="tx2">
                     <a:lumMod val="50000"/>
@@ -11329,7 +11329,7 @@
               <a:t>성함</a:t>
             </a:r>
             <a:r>
-              <a:rPr lang="en-US" altLang="ko-KR" sz="800" b="1" dirty="0">
+              <a:rPr lang="en-US" altLang="ko-KR" sz="810" b="1" dirty="0">
                 <a:solidFill>
                   <a:schemeClr val="tx2">
                     <a:lumMod val="50000"/>
@@ -11341,7 +11341,7 @@
               <a:t>-</a:t>
             </a:r>
             <a:r>
-              <a:rPr lang="ko-KR" altLang="en-US" sz="800" b="1" dirty="0">
+              <a:rPr lang="ko-KR" altLang="en-US" sz="810" b="1" dirty="0">
                 <a:solidFill>
                   <a:schemeClr val="tx2">
                     <a:lumMod val="50000"/>
@@ -11353,7 +11353,7 @@
               <a:t>교수</a:t>
             </a:r>
             <a:r>
-              <a:rPr lang="en-US" altLang="ko-KR" sz="800" b="1" dirty="0">
+              <a:rPr lang="en-US" altLang="ko-KR" sz="810" b="1" dirty="0">
                 <a:solidFill>
                   <a:schemeClr val="tx2">
                     <a:lumMod val="50000"/>
@@ -11365,7 +11365,7 @@
               <a:t>-</a:t>
             </a:r>
             <a:r>
-              <a:rPr lang="ko-KR" altLang="en-US" sz="800" b="1" dirty="0">
+              <a:rPr lang="ko-KR" altLang="en-US" sz="810" b="1" dirty="0">
                 <a:solidFill>
                   <a:schemeClr val="tx2">
                     <a:lumMod val="50000"/>
@@ -11377,7 +11377,7 @@
               <a:t>월일</a:t>
             </a:r>
             <a:r>
-              <a:rPr lang="en-US" altLang="ko-KR" sz="800" b="1" dirty="0">
+              <a:rPr lang="en-US" altLang="ko-KR" sz="810" b="1" dirty="0">
                 <a:solidFill>
                   <a:schemeClr val="tx2">
                     <a:lumMod val="50000"/>
@@ -11389,7 +11389,7 @@
               <a:t>-</a:t>
             </a:r>
             <a:r>
-              <a:rPr lang="ko-KR" altLang="en-US" sz="800" b="1" dirty="0">
+              <a:rPr lang="ko-KR" altLang="en-US" sz="810" b="1" dirty="0">
                 <a:solidFill>
                   <a:schemeClr val="tx2">
                     <a:lumMod val="50000"/>
@@ -11400,7 +11400,7 @@
               </a:rPr>
               <a:t>시간</a:t>
             </a:r>
-            <a:endParaRPr lang="en-US" altLang="ko-KR" sz="800" dirty="0">
+            <a:endParaRPr lang="en-US" altLang="ko-KR" sz="810" dirty="0">
               <a:solidFill>
                 <a:schemeClr val="tx2">
                   <a:lumMod val="50000"/>
@@ -11426,8 +11426,8 @@
         </p:nvSpPr>
         <p:spPr>
           <a:xfrm>
-            <a:off x="84929" y="745557"/>
-            <a:ext cx="721520" cy="592987"/>
+            <a:off x="66140" y="743642"/>
+            <a:ext cx="730467" cy="600341"/>
           </a:xfrm>
           <a:prstGeom prst="roundRect">
             <a:avLst>
@@ -11462,7 +11462,7 @@
           <a:lstStyle/>
           <a:p>
             <a:pPr algn="ctr"/>
-            <a:endParaRPr lang="ko-KR" altLang="en-US">
+            <a:endParaRPr lang="ko-KR" altLang="en-US" sz="1822">
               <a:latin typeface="KoPub돋움체 Medium" panose="02020603020101020101" pitchFamily="18" charset="-127"/>
               <a:ea typeface="KoPub돋움체 Medium" panose="02020603020101020101" pitchFamily="18" charset="-127"/>
             </a:endParaRPr>
@@ -11483,8 +11483,8 @@
         </p:nvSpPr>
         <p:spPr>
           <a:xfrm>
-            <a:off x="807175" y="718078"/>
-            <a:ext cx="2321879" cy="628121"/>
+            <a:off x="797341" y="715821"/>
+            <a:ext cx="2350672" cy="642727"/>
           </a:xfrm>
           <a:prstGeom prst="rect">
             <a:avLst/>
@@ -11503,7 +11503,7 @@
               </a:lnSpc>
             </a:pPr>
             <a:r>
-              <a:rPr lang="en-US" altLang="ko-KR" sz="800" b="1" dirty="0">
+              <a:rPr lang="en-US" altLang="ko-KR" sz="810" b="1" dirty="0">
                 <a:solidFill>
                   <a:schemeClr val="tx2">
                     <a:lumMod val="50000"/>
@@ -11515,7 +11515,7 @@
               <a:t>[A] </a:t>
             </a:r>
             <a:r>
-              <a:rPr lang="ko-KR" altLang="en-US" sz="800" b="1" dirty="0">
+              <a:rPr lang="ko-KR" altLang="en-US" sz="810" b="1" dirty="0">
                 <a:solidFill>
                   <a:schemeClr val="tx2">
                     <a:lumMod val="50000"/>
@@ -11527,7 +11527,7 @@
               <a:t>보고 </a:t>
             </a:r>
             <a:r>
-              <a:rPr lang="en-US" altLang="ko-KR" sz="800" b="1" dirty="0">
+              <a:rPr lang="en-US" altLang="ko-KR" sz="810" b="1" dirty="0">
                 <a:solidFill>
                   <a:schemeClr val="tx2">
                     <a:lumMod val="50000"/>
@@ -11539,7 +11539,7 @@
               <a:t>(</a:t>
             </a:r>
             <a:r>
-              <a:rPr lang="ko-KR" altLang="en-US" sz="800" b="1" dirty="0">
+              <a:rPr lang="ko-KR" altLang="en-US" sz="810" b="1" dirty="0">
                 <a:solidFill>
                   <a:schemeClr val="tx2">
                     <a:lumMod val="50000"/>
@@ -11551,7 +11551,7 @@
               <a:t>병동</a:t>
             </a:r>
             <a:r>
-              <a:rPr lang="en-US" altLang="ko-KR" sz="800" b="1" dirty="0">
+              <a:rPr lang="en-US" altLang="ko-KR" sz="810" b="1" dirty="0">
                 <a:solidFill>
                   <a:schemeClr val="tx2">
                     <a:lumMod val="50000"/>
@@ -11563,7 +11563,7 @@
               <a:t>) : </a:t>
             </a:r>
             <a:r>
-              <a:rPr lang="en-US" altLang="ko-KR" sz="800" dirty="0">
+              <a:rPr lang="en-US" altLang="ko-KR" sz="810" dirty="0">
                 <a:solidFill>
                   <a:schemeClr val="tx2">
                     <a:lumMod val="50000"/>
@@ -11575,7 +11575,7 @@
               <a:t>ID / </a:t>
             </a:r>
             <a:r>
-              <a:rPr lang="ko-KR" altLang="en-US" sz="800" dirty="0">
+              <a:rPr lang="ko-KR" altLang="en-US" sz="810" dirty="0">
                 <a:solidFill>
                   <a:schemeClr val="tx2">
                     <a:lumMod val="50000"/>
@@ -11587,7 +11587,7 @@
               <a:t>지금 </a:t>
             </a:r>
             <a:r>
-              <a:rPr lang="en-US" altLang="ko-KR" sz="800" dirty="0">
+              <a:rPr lang="en-US" altLang="ko-KR" sz="810" dirty="0">
                 <a:solidFill>
                   <a:schemeClr val="tx2">
                     <a:lumMod val="50000"/>
@@ -11599,7 +11599,7 @@
               <a:t>/ </a:t>
             </a:r>
             <a:r>
-              <a:rPr lang="ko-KR" altLang="en-US" sz="800" dirty="0">
+              <a:rPr lang="ko-KR" altLang="en-US" sz="810" dirty="0">
                 <a:solidFill>
                   <a:schemeClr val="tx2">
                     <a:lumMod val="50000"/>
@@ -11611,7 +11611,7 @@
               <a:t>근거 </a:t>
             </a:r>
             <a:r>
-              <a:rPr lang="en-US" altLang="ko-KR" sz="800" dirty="0">
+              <a:rPr lang="en-US" altLang="ko-KR" sz="810" dirty="0">
                 <a:solidFill>
                   <a:schemeClr val="tx2">
                     <a:lumMod val="50000"/>
@@ -11623,7 +11623,7 @@
               <a:t>/ </a:t>
             </a:r>
             <a:r>
-              <a:rPr lang="ko-KR" altLang="en-US" sz="800" dirty="0">
+              <a:rPr lang="ko-KR" altLang="en-US" sz="810" dirty="0">
                 <a:solidFill>
                   <a:schemeClr val="tx2">
                     <a:lumMod val="50000"/>
@@ -11635,7 +11635,7 @@
               <a:t>요청 </a:t>
             </a:r>
             <a:r>
-              <a:rPr lang="en-US" altLang="ko-KR" sz="800" dirty="0">
+              <a:rPr lang="en-US" altLang="ko-KR" sz="810" dirty="0">
                 <a:solidFill>
                   <a:schemeClr val="tx2">
                     <a:lumMod val="50000"/>
@@ -11654,7 +11654,7 @@
               </a:lnSpc>
             </a:pPr>
             <a:r>
-              <a:rPr lang="en-US" altLang="ko-KR" sz="800" b="1" dirty="0">
+              <a:rPr lang="en-US" altLang="ko-KR" sz="810" b="1" dirty="0">
                 <a:solidFill>
                   <a:schemeClr val="tx2">
                     <a:lumMod val="50000"/>
@@ -11666,7 +11666,7 @@
               <a:t>[C] </a:t>
             </a:r>
             <a:r>
-              <a:rPr lang="ko-KR" altLang="en-US" sz="800" b="1" dirty="0">
+              <a:rPr lang="ko-KR" altLang="en-US" sz="810" b="1" dirty="0">
                 <a:solidFill>
                   <a:schemeClr val="tx2">
                     <a:lumMod val="50000"/>
@@ -11678,7 +11678,7 @@
               <a:t>상황 </a:t>
             </a:r>
             <a:r>
-              <a:rPr lang="en-US" altLang="ko-KR" sz="800" b="1" dirty="0">
+              <a:rPr lang="en-US" altLang="ko-KR" sz="810" b="1" dirty="0">
                 <a:solidFill>
                   <a:schemeClr val="tx2">
                     <a:lumMod val="50000"/>
@@ -11690,7 +11690,7 @@
               <a:t>(PA) : </a:t>
             </a:r>
             <a:r>
-              <a:rPr lang="en-US" altLang="ko-KR" sz="800" dirty="0">
+              <a:rPr lang="en-US" altLang="ko-KR" sz="810" dirty="0">
                 <a:solidFill>
                   <a:schemeClr val="tx2">
                     <a:lumMod val="50000"/>
@@ -11702,7 +11702,7 @@
               <a:t>ID / </a:t>
             </a:r>
             <a:r>
-              <a:rPr lang="ko-KR" altLang="en-US" sz="800" dirty="0">
+              <a:rPr lang="ko-KR" altLang="en-US" sz="810" dirty="0">
                 <a:solidFill>
                   <a:schemeClr val="tx2">
                     <a:lumMod val="50000"/>
@@ -11714,7 +11714,7 @@
               <a:t>상황</a:t>
             </a:r>
             <a:r>
-              <a:rPr lang="en-US" altLang="ko-KR" sz="800" dirty="0">
+              <a:rPr lang="en-US" altLang="ko-KR" sz="810" dirty="0">
                 <a:solidFill>
                   <a:schemeClr val="tx2">
                     <a:lumMod val="50000"/>
@@ -11726,7 +11726,7 @@
               <a:t>(C</a:t>
             </a:r>
             <a:r>
-              <a:rPr lang="ko-KR" altLang="en-US" sz="800" dirty="0">
+              <a:rPr lang="ko-KR" altLang="en-US" sz="810" dirty="0">
                 <a:solidFill>
                   <a:schemeClr val="tx2">
                     <a:lumMod val="50000"/>
@@ -11738,7 +11738,7 @@
               <a:t>코드</a:t>
             </a:r>
             <a:r>
-              <a:rPr lang="en-US" altLang="ko-KR" sz="800" dirty="0">
+              <a:rPr lang="en-US" altLang="ko-KR" sz="810" dirty="0">
                 <a:solidFill>
                   <a:schemeClr val="tx2">
                     <a:lumMod val="50000"/>
@@ -11750,7 +11750,7 @@
               <a:t>) / </a:t>
             </a:r>
             <a:r>
-              <a:rPr lang="ko-KR" altLang="en-US" sz="800" dirty="0">
+              <a:rPr lang="ko-KR" altLang="en-US" sz="810" dirty="0">
                 <a:solidFill>
                   <a:schemeClr val="tx2">
                     <a:lumMod val="50000"/>
@@ -11762,7 +11762,7 @@
               <a:t>다음 </a:t>
             </a:r>
             <a:r>
-              <a:rPr lang="en-US" altLang="ko-KR" sz="800" dirty="0">
+              <a:rPr lang="en-US" altLang="ko-KR" sz="810" dirty="0">
                 <a:solidFill>
                   <a:schemeClr val="tx2">
                     <a:lumMod val="50000"/>
@@ -11781,7 +11781,7 @@
               </a:lnSpc>
             </a:pPr>
             <a:r>
-              <a:rPr lang="en-US" altLang="ko-KR" sz="800" b="1" dirty="0">
+              <a:rPr lang="en-US" altLang="ko-KR" sz="810" b="1" dirty="0">
                 <a:solidFill>
                   <a:schemeClr val="tx2">
                     <a:lumMod val="50000"/>
@@ -11793,7 +11793,7 @@
               <a:t>[D] </a:t>
             </a:r>
             <a:r>
-              <a:rPr lang="ko-KR" altLang="en-US" sz="800" b="1" dirty="0">
+              <a:rPr lang="ko-KR" altLang="en-US" sz="810" b="1" dirty="0">
                 <a:solidFill>
                   <a:schemeClr val="tx2">
                     <a:lumMod val="50000"/>
@@ -11805,7 +11805,7 @@
               <a:t>완료 </a:t>
             </a:r>
             <a:r>
-              <a:rPr lang="en-US" altLang="ko-KR" sz="800" b="1" dirty="0">
+              <a:rPr lang="en-US" altLang="ko-KR" sz="810" b="1" dirty="0">
                 <a:solidFill>
                   <a:schemeClr val="tx2">
                     <a:lumMod val="50000"/>
@@ -11817,7 +11817,7 @@
               <a:t>(PA) : </a:t>
             </a:r>
             <a:r>
-              <a:rPr lang="en-US" altLang="ko-KR" sz="800" dirty="0">
+              <a:rPr lang="en-US" altLang="ko-KR" sz="810" dirty="0">
                 <a:solidFill>
                   <a:schemeClr val="tx2">
                     <a:lumMod val="50000"/>
@@ -11829,7 +11829,7 @@
               <a:t>ID / </a:t>
             </a:r>
             <a:r>
-              <a:rPr lang="ko-KR" altLang="en-US" sz="800" dirty="0">
+              <a:rPr lang="ko-KR" altLang="en-US" sz="810" dirty="0">
                 <a:solidFill>
                   <a:schemeClr val="tx2">
                     <a:lumMod val="50000"/>
@@ -11841,7 +11841,7 @@
               <a:t>조치결과 </a:t>
             </a:r>
             <a:r>
-              <a:rPr lang="en-US" altLang="ko-KR" sz="800" dirty="0">
+              <a:rPr lang="en-US" altLang="ko-KR" sz="810" dirty="0">
                 <a:solidFill>
                   <a:schemeClr val="tx2">
                     <a:lumMod val="50000"/>
@@ -11853,7 +11853,7 @@
               <a:t>/ F/U </a:t>
             </a:r>
             <a:r>
-              <a:rPr lang="ko-KR" altLang="en-US" sz="800" dirty="0">
+              <a:rPr lang="ko-KR" altLang="en-US" sz="810" dirty="0">
                 <a:solidFill>
                   <a:schemeClr val="tx2">
                     <a:lumMod val="50000"/>
@@ -11881,8 +11881,8 @@
         </p:nvSpPr>
         <p:spPr>
           <a:xfrm>
-            <a:off x="265477" y="1408813"/>
-            <a:ext cx="2709863" cy="200055"/>
+            <a:off x="248927" y="1415122"/>
+            <a:ext cx="2743467" cy="202536"/>
           </a:xfrm>
           <a:prstGeom prst="rect">
             <a:avLst/>
@@ -11897,97 +11897,97 @@
           <a:p>
             <a:pPr algn="ctr"/>
             <a:r>
-              <a:rPr lang="ko-KR" altLang="en-US" sz="700" b="1" dirty="0">
+              <a:rPr lang="ko-KR" altLang="en-US" sz="709" b="1" dirty="0">
                 <a:latin typeface="KoPub돋움체 Medium" panose="02020603020101020101" pitchFamily="18" charset="-127"/>
                 <a:ea typeface="KoPub돋움체 Medium" panose="02020603020101020101" pitchFamily="18" charset="-127"/>
               </a:rPr>
               <a:t> </a:t>
             </a:r>
             <a:r>
-              <a:rPr lang="en-US" altLang="ko-KR" sz="700" b="1" dirty="0">
+              <a:rPr lang="en-US" altLang="ko-KR" sz="709" b="1" dirty="0">
                 <a:latin typeface="KoPub돋움체 Medium" panose="02020603020101020101" pitchFamily="18" charset="-127"/>
                 <a:ea typeface="KoPub돋움체 Medium" panose="02020603020101020101" pitchFamily="18" charset="-127"/>
               </a:rPr>
               <a:t>10</a:t>
             </a:r>
             <a:r>
-              <a:rPr lang="ko-KR" altLang="en-US" sz="700" b="1" dirty="0">
+              <a:rPr lang="ko-KR" altLang="en-US" sz="709" b="1" dirty="0">
                 <a:latin typeface="KoPub돋움체 Medium" panose="02020603020101020101" pitchFamily="18" charset="-127"/>
                 <a:ea typeface="KoPub돋움체 Medium" panose="02020603020101020101" pitchFamily="18" charset="-127"/>
               </a:rPr>
               <a:t>분 </a:t>
             </a:r>
             <a:r>
-              <a:rPr lang="en-US" altLang="ko-KR" sz="700" b="1" dirty="0">
+              <a:rPr lang="en-US" altLang="ko-KR" sz="709" b="1" dirty="0">
                 <a:latin typeface="KoPub돋움체 Medium" panose="02020603020101020101" pitchFamily="18" charset="-127"/>
                 <a:ea typeface="KoPub돋움체 Medium" panose="02020603020101020101" pitchFamily="18" charset="-127"/>
               </a:rPr>
               <a:t>: </a:t>
             </a:r>
             <a:r>
-              <a:rPr lang="ko-KR" altLang="en-US" sz="700" b="1" dirty="0">
+              <a:rPr lang="ko-KR" altLang="en-US" sz="709" b="1" dirty="0">
                 <a:latin typeface="KoPub돋움체 Medium" panose="02020603020101020101" pitchFamily="18" charset="-127"/>
                 <a:ea typeface="KoPub돋움체 Medium" panose="02020603020101020101" pitchFamily="18" charset="-127"/>
               </a:rPr>
               <a:t>응급            </a:t>
             </a:r>
             <a:r>
-              <a:rPr lang="en-US" altLang="ko-KR" sz="700" b="1" dirty="0">
+              <a:rPr lang="en-US" altLang="ko-KR" sz="709" b="1" dirty="0">
                 <a:latin typeface="KoPub돋움체 Medium" panose="02020603020101020101" pitchFamily="18" charset="-127"/>
                 <a:ea typeface="KoPub돋움체 Medium" panose="02020603020101020101" pitchFamily="18" charset="-127"/>
               </a:rPr>
               <a:t>4</a:t>
             </a:r>
             <a:r>
-              <a:rPr lang="ko-KR" altLang="en-US" sz="700" b="1" dirty="0">
+              <a:rPr lang="ko-KR" altLang="en-US" sz="709" b="1" dirty="0">
                 <a:latin typeface="KoPub돋움체 Medium" panose="02020603020101020101" pitchFamily="18" charset="-127"/>
                 <a:ea typeface="KoPub돋움체 Medium" panose="02020603020101020101" pitchFamily="18" charset="-127"/>
               </a:rPr>
               <a:t>시간 </a:t>
             </a:r>
             <a:r>
-              <a:rPr lang="en-US" altLang="ko-KR" sz="700" b="1" dirty="0">
+              <a:rPr lang="en-US" altLang="ko-KR" sz="709" b="1" dirty="0">
                 <a:latin typeface="KoPub돋움체 Medium" panose="02020603020101020101" pitchFamily="18" charset="-127"/>
                 <a:ea typeface="KoPub돋움체 Medium" panose="02020603020101020101" pitchFamily="18" charset="-127"/>
               </a:rPr>
               <a:t>: </a:t>
             </a:r>
             <a:r>
-              <a:rPr lang="ko-KR" altLang="en-US" sz="700" b="1" dirty="0">
+              <a:rPr lang="ko-KR" altLang="en-US" sz="709" b="1" dirty="0">
                 <a:latin typeface="KoPub돋움체 Medium" panose="02020603020101020101" pitchFamily="18" charset="-127"/>
                 <a:ea typeface="KoPub돋움체 Medium" panose="02020603020101020101" pitchFamily="18" charset="-127"/>
               </a:rPr>
               <a:t>우선  </a:t>
             </a:r>
             <a:r>
-              <a:rPr lang="en-US" altLang="ko-KR" sz="700" b="1" dirty="0">
+              <a:rPr lang="en-US" altLang="ko-KR" sz="709" b="1" dirty="0">
                 <a:latin typeface="KoPub돋움체 Medium" panose="02020603020101020101" pitchFamily="18" charset="-127"/>
                 <a:ea typeface="KoPub돋움체 Medium" panose="02020603020101020101" pitchFamily="18" charset="-127"/>
               </a:rPr>
               <a:t>       12</a:t>
             </a:r>
             <a:r>
-              <a:rPr lang="ko-KR" altLang="en-US" sz="700" b="1" dirty="0">
+              <a:rPr lang="ko-KR" altLang="en-US" sz="709" b="1" dirty="0">
                 <a:latin typeface="KoPub돋움체 Medium" panose="02020603020101020101" pitchFamily="18" charset="-127"/>
                 <a:ea typeface="KoPub돋움체 Medium" panose="02020603020101020101" pitchFamily="18" charset="-127"/>
               </a:rPr>
               <a:t>시간 </a:t>
             </a:r>
             <a:r>
-              <a:rPr lang="en-US" altLang="ko-KR" sz="700" b="1" dirty="0">
+              <a:rPr lang="en-US" altLang="ko-KR" sz="709" b="1" dirty="0">
                 <a:latin typeface="KoPub돋움체 Medium" panose="02020603020101020101" pitchFamily="18" charset="-127"/>
                 <a:ea typeface="KoPub돋움체 Medium" panose="02020603020101020101" pitchFamily="18" charset="-127"/>
               </a:rPr>
               <a:t>: </a:t>
             </a:r>
             <a:r>
-              <a:rPr lang="ko-KR" altLang="en-US" sz="700" b="1" dirty="0">
+              <a:rPr lang="ko-KR" altLang="en-US" sz="709" b="1" dirty="0">
                 <a:latin typeface="KoPub돋움체 Medium" panose="02020603020101020101" pitchFamily="18" charset="-127"/>
                 <a:ea typeface="KoPub돋움체 Medium" panose="02020603020101020101" pitchFamily="18" charset="-127"/>
               </a:rPr>
               <a:t>루틴</a:t>
             </a:r>
-            <a:endParaRPr lang="en-US" altLang="ko-KR" sz="700" b="1" dirty="0">
+            <a:endParaRPr lang="en-US" altLang="ko-KR" sz="709" b="1" dirty="0">
               <a:latin typeface="KoPub돋움체 Medium" panose="02020603020101020101" pitchFamily="18" charset="-127"/>
               <a:ea typeface="KoPub돋움체 Medium" panose="02020603020101020101" pitchFamily="18" charset="-127"/>
             </a:endParaRPr>
@@ -12008,8 +12008,8 @@
         </p:nvSpPr>
         <p:spPr>
           <a:xfrm>
-            <a:off x="127333" y="366664"/>
-            <a:ext cx="636713" cy="338554"/>
+            <a:off x="109070" y="360049"/>
+            <a:ext cx="644609" cy="342752"/>
           </a:xfrm>
           <a:prstGeom prst="rect">
             <a:avLst/>
@@ -12024,7 +12024,7 @@
           <a:p>
             <a:pPr algn="ctr"/>
             <a:r>
-              <a:rPr lang="ko-KR" altLang="en-US" sz="800" b="1" dirty="0">
+              <a:rPr lang="ko-KR" altLang="en-US" sz="810" b="1" dirty="0">
                 <a:solidFill>
                   <a:srgbClr val="000000"/>
                 </a:solidFill>
@@ -12033,7 +12033,7 @@
               </a:rPr>
               <a:t>실전 소통</a:t>
             </a:r>
-            <a:endParaRPr lang="en-US" altLang="ko-KR" sz="800" b="1" dirty="0">
+            <a:endParaRPr lang="en-US" altLang="ko-KR" sz="810" b="1" dirty="0">
               <a:solidFill>
                 <a:srgbClr val="000000"/>
               </a:solidFill>
@@ -12044,7 +12044,7 @@
           <a:p>
             <a:pPr algn="ctr"/>
             <a:r>
-              <a:rPr lang="en-US" altLang="ko-KR" sz="800" b="1" dirty="0">
+              <a:rPr lang="en-US" altLang="ko-KR" sz="810" b="1" dirty="0">
                 <a:solidFill>
                   <a:srgbClr val="000000"/>
                 </a:solidFill>
@@ -12054,7 +12054,7 @@
               <a:t>&amp; </a:t>
             </a:r>
             <a:r>
-              <a:rPr lang="ko-KR" altLang="en-US" sz="800" b="1" dirty="0">
+              <a:rPr lang="ko-KR" altLang="en-US" sz="810" b="1" dirty="0">
                 <a:solidFill>
                   <a:srgbClr val="000000"/>
                 </a:solidFill>
@@ -12080,8 +12080,8 @@
         </p:nvSpPr>
         <p:spPr>
           <a:xfrm>
-            <a:off x="104891" y="932596"/>
-            <a:ext cx="681597" cy="215444"/>
+            <a:off x="86350" y="932999"/>
+            <a:ext cx="690049" cy="218116"/>
           </a:xfrm>
           <a:prstGeom prst="rect">
             <a:avLst/>
@@ -12096,7 +12096,7 @@
           <a:p>
             <a:pPr algn="ctr"/>
             <a:r>
-              <a:rPr lang="ko-KR" altLang="en-US" sz="800" b="1" dirty="0">
+              <a:rPr lang="ko-KR" altLang="en-US" sz="810" b="1" dirty="0">
                 <a:solidFill>
                   <a:srgbClr val="000000"/>
                 </a:solidFill>
@@ -12106,7 +12106,7 @@
               <a:t> </a:t>
             </a:r>
             <a:r>
-              <a:rPr lang="en-US" altLang="ko-KR" sz="800" b="1" dirty="0">
+              <a:rPr lang="en-US" altLang="ko-KR" sz="810" b="1" dirty="0">
                 <a:solidFill>
                   <a:srgbClr val="000000"/>
                 </a:solidFill>
@@ -12115,7 +12115,7 @@
               </a:rPr>
               <a:t>ACD Loop</a:t>
             </a:r>
-            <a:endParaRPr lang="ko-KR" altLang="en-US" sz="2000" b="1" dirty="0">
+            <a:endParaRPr lang="ko-KR" altLang="en-US" sz="2025" b="1" dirty="0">
               <a:solidFill>
                 <a:srgbClr val="000000"/>
               </a:solidFill>
@@ -12139,8 +12139,8 @@
         </p:nvCxnSpPr>
         <p:spPr>
           <a:xfrm flipH="1">
-            <a:off x="165891" y="1373677"/>
-            <a:ext cx="2909888" cy="0"/>
+            <a:off x="148105" y="1379550"/>
+            <a:ext cx="2945973" cy="0"/>
           </a:xfrm>
           <a:prstGeom prst="line">
             <a:avLst/>
@@ -12182,8 +12182,8 @@
         </p:nvSpPr>
         <p:spPr>
           <a:xfrm>
-            <a:off x="582615" y="1454947"/>
-            <a:ext cx="104775" cy="104775"/>
+            <a:off x="569997" y="1461828"/>
+            <a:ext cx="106074" cy="106074"/>
           </a:xfrm>
           <a:prstGeom prst="ellipse">
             <a:avLst/>
@@ -12212,7 +12212,7 @@
           </a:fontRef>
         </p:style>
         <p:txBody>
-          <a:bodyPr rot="0" spcFirstLastPara="0" vertOverflow="overflow" horzOverflow="overflow" vert="horz" wrap="square" lIns="91440" tIns="45720" rIns="91440" bIns="45720" numCol="1" spcCol="0" rtlCol="0" fromWordArt="0" anchor="ctr" anchorCtr="0" forceAA="0" compatLnSpc="1">
+          <a:bodyPr rot="0" spcFirstLastPara="0" vertOverflow="overflow" horzOverflow="overflow" vert="horz" wrap="square" lIns="92574" tIns="46287" rIns="92574" bIns="46287" numCol="1" spcCol="0" rtlCol="0" fromWordArt="0" anchor="ctr" anchorCtr="0" forceAA="0" compatLnSpc="1">
             <a:prstTxWarp prst="textNoShape">
               <a:avLst/>
             </a:prstTxWarp>
@@ -12221,7 +12221,7 @@
           <a:lstStyle/>
           <a:p>
             <a:pPr algn="ctr"/>
-            <a:endParaRPr lang="ko-KR" altLang="en-US"/>
+            <a:endParaRPr lang="ko-KR" altLang="en-US" sz="1822"/>
           </a:p>
         </p:txBody>
       </p:sp>
@@ -12239,8 +12239,8 @@
         </p:nvSpPr>
         <p:spPr>
           <a:xfrm>
-            <a:off x="1273177" y="1454947"/>
-            <a:ext cx="104775" cy="104775"/>
+            <a:off x="1269122" y="1461828"/>
+            <a:ext cx="106074" cy="106074"/>
           </a:xfrm>
           <a:prstGeom prst="ellipse">
             <a:avLst/>
@@ -12269,7 +12269,7 @@
           </a:fontRef>
         </p:style>
         <p:txBody>
-          <a:bodyPr rot="0" spcFirstLastPara="0" vertOverflow="overflow" horzOverflow="overflow" vert="horz" wrap="square" lIns="91440" tIns="45720" rIns="91440" bIns="45720" numCol="1" spcCol="0" rtlCol="0" fromWordArt="0" anchor="ctr" anchorCtr="0" forceAA="0" compatLnSpc="1">
+          <a:bodyPr rot="0" spcFirstLastPara="0" vertOverflow="overflow" horzOverflow="overflow" vert="horz" wrap="square" lIns="92574" tIns="46287" rIns="92574" bIns="46287" numCol="1" spcCol="0" rtlCol="0" fromWordArt="0" anchor="ctr" anchorCtr="0" forceAA="0" compatLnSpc="1">
             <a:prstTxWarp prst="textNoShape">
               <a:avLst/>
             </a:prstTxWarp>
@@ -12278,7 +12278,7 @@
           <a:lstStyle/>
           <a:p>
             <a:pPr algn="ctr"/>
-            <a:endParaRPr lang="ko-KR" altLang="en-US"/>
+            <a:endParaRPr lang="ko-KR" altLang="en-US" sz="1822"/>
           </a:p>
         </p:txBody>
       </p:sp>
@@ -12296,8 +12296,8 @@
         </p:nvSpPr>
         <p:spPr>
           <a:xfrm>
-            <a:off x="1963740" y="1454947"/>
-            <a:ext cx="104775" cy="104775"/>
+            <a:off x="1968249" y="1461828"/>
+            <a:ext cx="106074" cy="106074"/>
           </a:xfrm>
           <a:prstGeom prst="ellipse">
             <a:avLst/>
@@ -12326,7 +12326,7 @@
           </a:fontRef>
         </p:style>
         <p:txBody>
-          <a:bodyPr rot="0" spcFirstLastPara="0" vertOverflow="overflow" horzOverflow="overflow" vert="horz" wrap="square" lIns="91440" tIns="45720" rIns="91440" bIns="45720" numCol="1" spcCol="0" rtlCol="0" fromWordArt="0" anchor="ctr" anchorCtr="0" forceAA="0" compatLnSpc="1">
+          <a:bodyPr rot="0" spcFirstLastPara="0" vertOverflow="overflow" horzOverflow="overflow" vert="horz" wrap="square" lIns="92574" tIns="46287" rIns="92574" bIns="46287" numCol="1" spcCol="0" rtlCol="0" fromWordArt="0" anchor="ctr" anchorCtr="0" forceAA="0" compatLnSpc="1">
             <a:prstTxWarp prst="textNoShape">
               <a:avLst/>
             </a:prstTxWarp>
@@ -12335,7 +12335,7 @@
           <a:lstStyle/>
           <a:p>
             <a:pPr algn="ctr"/>
-            <a:endParaRPr lang="ko-KR" altLang="en-US"/>
+            <a:endParaRPr lang="ko-KR" altLang="en-US" sz="1822"/>
           </a:p>
         </p:txBody>
       </p:sp>
@@ -12607,7 +12607,7 @@
   <a:extraClrSchemeLst/>
   <a:extLst>
     <a:ext uri="{05A4C25C-085E-4340-85A3-A5531E510DB2}">
-      <thm15:themeFamily xmlns:thm15="http://schemas.microsoft.com/office/thememl/2012/main" name="Office Theme" id="{62F939B6-93AF-4DB8-9C6B-D6C7DFDC589F}" vid="{4A3C46E8-61CC-4603-A589-7422A47A8E4A}"/>
+      <thm15:themeFamily xmlns:thm15="http://schemas.microsoft.com/office/thememl/2012/main" name="Office 2013 - 2022 Theme" id="{62F939B6-93AF-4DB8-9C6B-D6C7DFDC589F}" vid="{4A3C46E8-61CC-4603-A589-7422A47A8E4A}"/>
     </a:ext>
   </a:extLst>
 </a:theme>
